--- a/content/W04/D5/slides/C2_W04_D05_half2_STUDENT.pptx
+++ b/content/W04/D5/slides/C2_W04_D05_half2_STUDENT.pptx
@@ -7486,17 +7486,41 @@
           </a:p>
         </p:txBody>
       </p:sp>
+      <p:pic>
+        <p:nvPicPr>
+          <p:cNvPr id="9" name="mermaid diagram" descr="de21f224a222d476.png"/>
+          <p:cNvPicPr>
+            <a:picLocks noChangeAspect="1"/>
+          </p:cNvPicPr>
+          <p:nvPr/>
+        </p:nvPicPr>
+        <p:blipFill>
+          <a:blip r:embed="rId5"/>
+          <a:stretch>
+            <a:fillRect/>
+          </a:stretch>
+        </p:blipFill>
+        <p:spPr>
+          <a:xfrm>
+            <a:off x="780897" y="1811369"/>
+            <a:ext cx="10629900" cy="2357437"/>
+          </a:xfrm>
+          <a:prstGeom prst="rect">
+            <a:avLst/>
+          </a:prstGeom>
+        </p:spPr>
+      </p:pic>
       <p:graphicFrame>
         <p:nvGraphicFramePr>
-          <p:cNvPr id="9" name="Table 8"/>
+          <p:cNvPr id="10" name="Table 9"/>
           <p:cNvGraphicFramePr>
             <a:graphicFrameLocks noGrp="1"/>
           </p:cNvGraphicFramePr>
           <p:nvPr/>
         </p:nvGraphicFramePr>
         <p:xfrm>
-          <a:off x="530352" y="1956816"/>
-          <a:ext cx="11130990" cy="2204720"/>
+          <a:off x="530352" y="4315110"/>
+          <a:ext cx="11130991" cy="1755648"/>
         </p:xfrm>
         <a:graphic>
           <a:graphicData uri="http://schemas.openxmlformats.org/drawingml/2006/table">
@@ -7505,17 +7529,17 @@
                 <a:tableStyleId>{2D5ABB26-0587-4C30-8999-92F81FD0307C}</a:tableStyleId>
               </a:tblPr>
               <a:tblGrid>
-                <a:gridCol w="2907430"/>
-                <a:gridCol w="8223560"/>
+                <a:gridCol w="2625448"/>
+                <a:gridCol w="8505543"/>
               </a:tblGrid>
-              <a:tr h="611632">
+              <a:tr h="335280">
                 <a:tc>
                   <a:txBody>
                     <a:bodyPr/>
                     <a:lstStyle/>
                     <a:p>
                       <a:r>
-                        <a:rPr sz="1450" b="1" i="0">
+                        <a:rPr sz="1250" b="1" i="0">
                           <a:solidFill>
                             <a:srgbClr val="FFFFFF"/>
                           </a:solidFill>
@@ -7537,7 +7561,7 @@
                     <a:lstStyle/>
                     <a:p>
                       <a:r>
-                        <a:rPr sz="1450" b="1" i="0">
+                        <a:rPr sz="1250" b="1" i="0">
                           <a:solidFill>
                             <a:srgbClr val="FFFFFF"/>
                           </a:solidFill>
@@ -7554,14 +7578,14 @@
                   </a:tcPr>
                 </a:tc>
               </a:tr>
-              <a:tr h="369824">
+              <a:tr h="335280">
                 <a:tc>
                   <a:txBody>
                     <a:bodyPr/>
                     <a:lstStyle/>
                     <a:p>
                       <a:r>
-                        <a:rPr sz="1400" b="0" i="0">
+                        <a:rPr sz="1200" b="0" i="0">
                           <a:solidFill>
                             <a:srgbClr val="1A1440"/>
                           </a:solidFill>
@@ -7583,7 +7607,7 @@
                     <a:lstStyle/>
                     <a:p>
                       <a:r>
-                        <a:rPr sz="1400" b="0" i="0">
+                        <a:rPr sz="1200" b="0" i="0">
                           <a:solidFill>
                             <a:srgbClr val="1A1440"/>
                           </a:solidFill>
@@ -7600,14 +7624,14 @@
                   </a:tcPr>
                 </a:tc>
               </a:tr>
-              <a:tr h="611632">
+              <a:tr h="542544">
                 <a:tc>
                   <a:txBody>
                     <a:bodyPr/>
                     <a:lstStyle/>
                     <a:p>
                       <a:r>
-                        <a:rPr sz="1400" b="0" i="0">
+                        <a:rPr sz="1200" b="0" i="0">
                           <a:solidFill>
                             <a:srgbClr val="1A1440"/>
                           </a:solidFill>
@@ -7629,7 +7653,7 @@
                     <a:lstStyle/>
                     <a:p>
                       <a:r>
-                        <a:rPr sz="1400" b="0" i="0">
+                        <a:rPr sz="1200" b="0" i="0">
                           <a:solidFill>
                             <a:srgbClr val="1A1440"/>
                           </a:solidFill>
@@ -7646,14 +7670,14 @@
                   </a:tcPr>
                 </a:tc>
               </a:tr>
-              <a:tr h="611632">
+              <a:tr h="542544">
                 <a:tc>
                   <a:txBody>
                     <a:bodyPr/>
                     <a:lstStyle/>
                     <a:p>
                       <a:r>
-                        <a:rPr sz="1400" b="0" i="0">
+                        <a:rPr sz="1200" b="0" i="0">
                           <a:solidFill>
                             <a:srgbClr val="1A1440"/>
                           </a:solidFill>
@@ -7675,7 +7699,7 @@
                     <a:lstStyle/>
                     <a:p>
                       <a:r>
-                        <a:rPr sz="1400" b="0" i="0">
+                        <a:rPr sz="1200" b="0" i="0">
                           <a:solidFill>
                             <a:srgbClr val="1A1440"/>
                           </a:solidFill>
@@ -7698,7 +7722,7 @@
       </p:graphicFrame>
       <p:sp>
         <p:nvSpPr>
-          <p:cNvPr id="10" name="TextBox 9"/>
+          <p:cNvPr id="11" name="TextBox 10"/>
           <p:cNvSpPr txBox="1"/>
           <p:nvPr/>
         </p:nvSpPr>
@@ -7733,7 +7757,7 @@
       </p:sp>
       <p:sp>
         <p:nvSpPr>
-          <p:cNvPr id="11" name="TextBox 10"/>
+          <p:cNvPr id="12" name="TextBox 11"/>
           <p:cNvSpPr txBox="1"/>
           <p:nvPr/>
         </p:nvSpPr>

--- a/content/W04/D5/slides/C2_W04_D05_half2_STUDENT.pptx
+++ b/content/W04/D5/slides/C2_W04_D05_half2_STUDENT.pptx
@@ -17,7 +17,6 @@
     <p:sldId id="265" r:id="rId17"/>
     <p:sldId id="266" r:id="rId18"/>
     <p:sldId id="267" r:id="rId19"/>
-    <p:sldId id="268" r:id="rId20"/>
   </p:sldIdLst>
   <p:sldSz cx="12191695" cy="6858000" type="screen4x3"/>
   <p:notesSz cx="6858000" cy="9144000"/>
@@ -514,22 +513,27 @@
           <a:lstStyle/>
           <a:p>
             <a:r>
-              <a:t>On screen as the room comes back. The first hour is the trainer's: the staffing note in groups,</a:t>
-            </a:r>
-          </a:p>
-          <a:p>
-            <a:r>
-              <a:t>the interview transcript in pairs, the Kahoot and Saturday's preview.</a:t>
-            </a:r>
-          </a:p>
-          <a:p>
-            <a:r>
-              <a:t>Then the IITGN faculty session W4-4 (tentative), or the fallback hour.</a:t>
-            </a:r>
-          </a:p>
-          <a:p>
-            <a:r>
-              <a:t>Transition: where the morning left the plan.</a:t>
+              <a:t>LIVE, 2 minutes, on screen as the room comes back. The first hour is the trainer's: the staffing</a:t>
+            </a:r>
+          </a:p>
+          <a:p>
+            <a:r>
+              <a:t>note, the interview room, the Kahoot and Saturday's preview.</a:t>
+            </a:r>
+          </a:p>
+          <a:p>
+            <a:r>
+              <a:t>Then the IITGN faculty session W4-4 (tentative) runs, or the fallback hour.</a:t>
+            </a:r>
+          </a:p>
+          <a:p>
+            <a:r>
+              <a:t>Read the three numbers; every group's note starts from them. Transition: what the</a:t>
+            </a:r>
+          </a:p>
+          <a:p>
+            <a:r>
+              <a:t>note must carry.</a:t>
             </a:r>
           </a:p>
         </p:txBody>
@@ -599,12 +603,17 @@
           <a:lstStyle/>
           <a:p>
             <a:r>
-              <a:t>LIVE, 5 minutes if time allows, in pairs against a five-minute clock. The scorer checks the</a:t>
-            </a:r>
-          </a:p>
-          <a:p>
-            <a:r>
-              <a:t>structure and the sanity check, never the final number. Transition: the handoff.</a:t>
+              <a:t>LIVE, 2 minutes. Read the handoff line as written.</a:t>
+            </a:r>
+          </a:p>
+          <a:p>
+            <a:r>
+              <a:t>Park any "is the vendor's model an ARIMA" question for the faculty session (tentative).</a:t>
+            </a:r>
+          </a:p>
+          <a:p>
+            <a:r>
+              <a:t>Transition: the Kahoot.</a:t>
             </a:r>
           </a:p>
         </p:txBody>
@@ -674,17 +683,17 @@
           <a:lstStyle/>
           <a:p>
             <a:r>
-              <a:t>LIVE, 2 minutes. Read the handoff line as written.</a:t>
-            </a:r>
-          </a:p>
-          <a:p>
-            <a:r>
-              <a:t>Park any "is the vendor's model an ARIMA" question for the faculty session (tentative).</a:t>
-            </a:r>
-          </a:p>
-          <a:p>
-            <a:r>
-              <a:t>Transition: the Kahoot.</a:t>
+              <a:t>LIVE, 12 minutes. Kahoot is ungraded. The pack is `kahoot/C2_W04_D05_quiz_STUDENT.md`. Spend two</a:t>
+            </a:r>
+          </a:p>
+          <a:p>
+            <a:r>
+              <a:t>minutes on item 6 if the room splits: the blend is a size-weighted average of cohort rates.</a:t>
+            </a:r>
+          </a:p>
+          <a:p>
+            <a:r>
+              <a:t>Transition: Saturday.</a:t>
             </a:r>
           </a:p>
         </p:txBody>
@@ -754,86 +763,6 @@
           <a:lstStyle/>
           <a:p>
             <a:r>
-              <a:t>LIVE, 9 minutes. Kahoot is ungraded. The pack is `kahoot/C2_W04_D05_quiz_STUDENT.md`. Spend two</a:t>
-            </a:r>
-          </a:p>
-          <a:p>
-            <a:r>
-              <a:t>minutes on item 6 if the room splits: the blend is a size-weighted average of cohort rates.</a:t>
-            </a:r>
-          </a:p>
-          <a:p>
-            <a:r>
-              <a:t>Transition: Saturday.</a:t>
-            </a:r>
-          </a:p>
-        </p:txBody>
-      </p:sp>
-      <p:sp>
-        <p:nvSpPr>
-          <p:cNvPr id="4" name="Slide Number Placeholder 3"/>
-          <p:cNvSpPr>
-            <a:spLocks noGrp="1"/>
-          </p:cNvSpPr>
-          <p:nvPr>
-            <p:ph type="sldNum" idx="5" sz="quarter"/>
-          </p:nvPr>
-        </p:nvSpPr>
-        <p:spPr/>
-      </p:sp>
-    </p:spTree>
-  </p:cSld>
-  <p:clrMapOvr>
-    <a:masterClrMapping/>
-  </p:clrMapOvr>
-</p:notes>
-</file>
-
-<file path=ppt/notesSlides/notesSlide13.xml><?xml version="1.0" encoding="utf-8"?>
-<p:notes xmlns:a="http://schemas.openxmlformats.org/drawingml/2006/main" xmlns:p="http://schemas.openxmlformats.org/presentationml/2006/main" xmlns:r="http://schemas.openxmlformats.org/officeDocument/2006/relationships">
-  <p:cSld>
-    <p:spTree>
-      <p:nvGrpSpPr>
-        <p:cNvPr id="1" name=""/>
-        <p:cNvGrpSpPr/>
-        <p:nvPr/>
-      </p:nvGrpSpPr>
-      <p:grpSpPr>
-        <a:xfrm>
-          <a:off x="0" y="0"/>
-          <a:ext cx="0" cy="0"/>
-          <a:chOff x="0" y="0"/>
-          <a:chExt cx="0" cy="0"/>
-        </a:xfrm>
-      </p:grpSpPr>
-      <p:sp>
-        <p:nvSpPr>
-          <p:cNvPr id="2" name="Slide Image Placeholder 1"/>
-          <p:cNvSpPr>
-            <a:spLocks noGrp="1"/>
-          </p:cNvSpPr>
-          <p:nvPr>
-            <p:ph type="sldImg" idx="2"/>
-          </p:nvPr>
-        </p:nvSpPr>
-        <p:spPr/>
-      </p:sp>
-      <p:sp>
-        <p:nvSpPr>
-          <p:cNvPr id="3" name="Notes Placeholder 2"/>
-          <p:cNvSpPr>
-            <a:spLocks noGrp="1"/>
-          </p:cNvSpPr>
-          <p:nvPr>
-            <p:ph type="body" idx="3" sz="quarter"/>
-          </p:nvPr>
-        </p:nvSpPr>
-        <p:spPr/>
-        <p:txBody>
-          <a:bodyPr/>
-          <a:lstStyle/>
-          <a:p>
-            <a:r>
               <a:t>LIVE, 3 minutes. The three cards are the cheat sheet's crux lines, word for word. Transition: the</a:t>
             </a:r>
           </a:p>
@@ -909,12 +838,22 @@
           <a:lstStyle/>
           <a:p>
             <a:r>
-              <a:t>LIVE, 2 minutes. Read the three numbers; every group's note starts from them. Transition: what the</a:t>
-            </a:r>
-          </a:p>
-          <a:p>
-            <a:r>
-              <a:t>note must carry.</a:t>
+              <a:t>LIVE, 20 minutes, unguided, in groups of about four. TAs circulate with the scorer's card from Tuesday:</a:t>
+            </a:r>
+          </a:p>
+          <a:p>
+            <a:r>
+              <a:t>claim as title, one piece of evidence with its denominator, the caveat in sight, the action with its</a:t>
+            </a:r>
+          </a:p>
+          <a:p>
+            <a:r>
+              <a:t>cost. A group that splits the difference between 4 and 22 is asked which rule either one beat on</a:t>
+            </a:r>
+          </a:p>
+          <a:p>
+            <a:r>
+              <a:t>the hidden weeks. Transition: what a strong first line looks like.</a:t>
             </a:r>
           </a:p>
         </p:txBody>
@@ -984,22 +923,12 @@
           <a:lstStyle/>
           <a:p>
             <a:r>
-              <a:t>LIVE, 30 minutes, unguided, in the nine groups. TAs circulate with the scorer's card from Tuesday:</a:t>
-            </a:r>
-          </a:p>
-          <a:p>
-            <a:r>
-              <a:t>claim as title, one piece of evidence with its denominator, the caveat in sight, the action with its</a:t>
-            </a:r>
-          </a:p>
-          <a:p>
-            <a:r>
-              <a:t>cost. A group that splits the difference between 4 and 22 is asked which rule either one beat on</a:t>
-            </a:r>
-          </a:p>
-          <a:p>
-            <a:r>
-              <a:t>the hidden weeks. Transition: what a strong first line looks like.</a:t>
+              <a:t>LIVE, 3 minutes. Tuesday's rule: the title is the claim. Read each pair aloud and ask which line a</a:t>
+            </a:r>
+          </a:p>
+          <a:p>
+            <a:r>
+              <a:t>regional head could forward unchanged. Transition: the two people who will object.</a:t>
             </a:r>
           </a:p>
         </p:txBody>
@@ -1069,12 +998,17 @@
           <a:lstStyle/>
           <a:p>
             <a:r>
-              <a:t>LIVE, 3 minutes. Tuesday's rule: the title is the claim. Read each pair aloud and ask which line a</a:t>
-            </a:r>
-          </a:p>
-          <a:p>
-            <a:r>
-              <a:t>regional head could forward unchanged. Transition: the two people who will object.</a:t>
+              <a:t>LIVE, 3 minutes. Concede the true half first, then answer from the evidence, then say what would</a:t>
+            </a:r>
+          </a:p>
+          <a:p>
+            <a:r>
+              <a:t>change your mind: a vendor forecast scored on 2025's festival from data to September 2025.</a:t>
+            </a:r>
+          </a:p>
+          <a:p>
+            <a:r>
+              <a:t>Transition: the interview question.</a:t>
             </a:r>
           </a:p>
         </p:txBody>
@@ -1144,17 +1078,12 @@
           <a:lstStyle/>
           <a:p>
             <a:r>
-              <a:t>LIVE, 3 minutes. Concede the true half first, then answer from the evidence, then say what would</a:t>
-            </a:r>
-          </a:p>
-          <a:p>
-            <a:r>
-              <a:t>change your mind: a vendor forecast scored on 2025's festival from data to September 2025.</a:t>
-            </a:r>
-          </a:p>
-          <a:p>
-            <a:r>
-              <a:t>Transition: the interview question.</a:t>
+              <a:t>LIVE, 2 minutes. The picture every note should be able to describe in one sentence. Transition:</a:t>
+            </a:r>
+          </a:p>
+          <a:p>
+            <a:r>
+              <a:t>the interview question.</a:t>
             </a:r>
           </a:p>
         </p:txBody>
@@ -1224,12 +1153,17 @@
           <a:lstStyle/>
           <a:p>
             <a:r>
-              <a:t>LIVE, 2 minutes. The picture every note should be able to describe in one sentence. Transition:</a:t>
-            </a:r>
-          </a:p>
-          <a:p>
-            <a:r>
-              <a:t>the interview question.</a:t>
+              <a:t>LIVE, 4 minutes. The full transcript, with the clarifying questions and the scorecard, is in</a:t>
+            </a:r>
+          </a:p>
+          <a:p>
+            <a:r>
+              <a:t>`extras/C2_W04_D05_interview_transcripts_STUDENT.md`; pairs read it and score the hire-grade answer</a:t>
+            </a:r>
+          </a:p>
+          <a:p>
+            <a:r>
+              <a:t>on the card. Transition: the follow-ups.</a:t>
             </a:r>
           </a:p>
         </p:txBody>
@@ -1299,17 +1233,17 @@
           <a:lstStyle/>
           <a:p>
             <a:r>
-              <a:t>LIVE, 5 minutes. The full transcript, with the clarifying questions and the scorecard, is in</a:t>
-            </a:r>
-          </a:p>
-          <a:p>
-            <a:r>
-              <a:t>`extras/C2_W04_D05_interview_transcripts_STUDENT.md`; pairs read it and score the hire-grade answer</a:t>
-            </a:r>
-          </a:p>
-          <a:p>
-            <a:r>
-              <a:t>on the card. Transition: the follow-ups.</a:t>
+              <a:t>LIVE, 3 minutes. Each follow-up changes the question so only the reasoning transfers. Zillow's</a:t>
+            </a:r>
+          </a:p>
+          <a:p>
+            <a:r>
+              <a:t>figures are from its Q3 2021 shareholder letter, checked 12 October 2026. Transition: the same idea</a:t>
+            </a:r>
+          </a:p>
+          <a:p>
+            <a:r>
+              <a:t>at an AI company.</a:t>
             </a:r>
           </a:p>
         </p:txBody>
@@ -1379,17 +1313,12 @@
           <a:lstStyle/>
           <a:p>
             <a:r>
-              <a:t>LIVE, 4 minutes. Each follow-up changes the question so only the reasoning transfers. Zillow's</a:t>
-            </a:r>
-          </a:p>
-          <a:p>
-            <a:r>
-              <a:t>figures are from its Q3 2021 shareholder letter, checked 12 October 2026. Transition: the same idea</a:t>
-            </a:r>
-          </a:p>
-          <a:p>
-            <a:r>
-              <a:t>at an AI company.</a:t>
+              <a:t>LIVE, 3 minutes. Ask the room which cost is the Rs 25 and which the Rs 5.42 here. Transition: the</a:t>
+            </a:r>
+          </a:p>
+          <a:p>
+            <a:r>
+              <a:t>guesstimate.</a:t>
             </a:r>
           </a:p>
         </p:txBody>
@@ -1459,12 +1388,12 @@
           <a:lstStyle/>
           <a:p>
             <a:r>
-              <a:t>LIVE, 3 minutes. Ask the room which cost is the Rs 25 and which the Rs 5.42 here. Transition: the</a:t>
-            </a:r>
-          </a:p>
-          <a:p>
-            <a:r>
-              <a:t>guesstimate.</a:t>
+              <a:t>LIVE, 3 minutes if time allows, in pairs against a three-minute clock. The scorer checks the</a:t>
+            </a:r>
+          </a:p>
+          <a:p>
+            <a:r>
+              <a:t>structure and the sanity check, never the final number. Transition: the handoff.</a:t>
             </a:r>
           </a:p>
         </p:txBody>
@@ -4472,7 +4401,7 @@
       <p:grpSpPr/>
       <p:pic>
         <p:nvPicPr>
-          <p:cNvPr id="2" name="Picture 1" descr="bg_dark.jpg"/>
+          <p:cNvPr id="2" name="Picture 1" descr="bg_light.jpg"/>
           <p:cNvPicPr>
             <a:picLocks noChangeAspect="1"/>
           </p:cNvPicPr>
@@ -4510,8 +4439,8 @@
         </p:blipFill>
         <p:spPr>
           <a:xfrm>
-            <a:off x="621792" y="566928"/>
-            <a:ext cx="1051560" cy="1051560"/>
+            <a:off x="530352" y="201168"/>
+            <a:ext cx="420624" cy="420624"/>
           </a:xfrm>
           <a:prstGeom prst="rect">
             <a:avLst/>
@@ -4526,8 +4455,8 @@
         </p:nvSpPr>
         <p:spPr>
           <a:xfrm>
-            <a:off x="1901952" y="804672"/>
-            <a:ext cx="6858000" cy="300735"/>
+            <a:off x="1042416" y="228600"/>
+            <a:ext cx="5120640" cy="185166"/>
           </a:xfrm>
           <a:prstGeom prst="rect">
             <a:avLst/>
@@ -4542,9 +4471,9 @@
           <a:p>
             <a:pPr algn="l"/>
             <a:r>
-              <a:rPr sz="1600" b="1" i="0">
-                <a:solidFill>
-                  <a:srgbClr val="FFFFFF"/>
+              <a:rPr sz="900" b="1" i="0">
+                <a:solidFill>
+                  <a:srgbClr val="1A0F5C"/>
                 </a:solidFill>
                 <a:latin typeface="Calibri"/>
               </a:rPr>
@@ -4561,8 +4490,8 @@
         </p:nvSpPr>
         <p:spPr>
           <a:xfrm>
-            <a:off x="1901952" y="1133856"/>
-            <a:ext cx="7772400" cy="152146"/>
+            <a:off x="1042416" y="420623"/>
+            <a:ext cx="5852160" cy="127381"/>
           </a:xfrm>
           <a:prstGeom prst="rect">
             <a:avLst/>
@@ -4577,9 +4506,9 @@
           <a:p>
             <a:pPr algn="l"/>
             <a:r>
-              <a:rPr sz="700" b="1" i="0" spc="300">
-                <a:solidFill>
-                  <a:srgbClr val="D9A7FF"/>
+              <a:rPr sz="550" b="1" i="0" spc="300">
+                <a:solidFill>
+                  <a:srgbClr val="6B6690"/>
                 </a:solidFill>
                 <a:latin typeface="Calibri"/>
               </a:rPr>
@@ -4590,20 +4519,230 @@
       </p:sp>
       <p:sp>
         <p:nvSpPr>
-          <p:cNvPr id="6" name="Rectangle 5"/>
+          <p:cNvPr id="6" name="TextBox 5"/>
+          <p:cNvSpPr txBox="1"/>
+          <p:nvPr/>
+        </p:nvSpPr>
+        <p:spPr>
+          <a:xfrm>
+            <a:off x="5992063" y="310896"/>
+            <a:ext cx="5669280" cy="127381"/>
+          </a:xfrm>
+          <a:prstGeom prst="rect">
+            <a:avLst/>
+          </a:prstGeom>
+          <a:noFill/>
+        </p:spPr>
+        <p:txBody>
+          <a:bodyPr wrap="square" anchor="t" lIns="0" rIns="0" tIns="0" bIns="0">
+            <a:spAutoFit/>
+          </a:bodyPr>
+          <a:lstStyle/>
+          <a:p>
+            <a:pPr algn="r"/>
+            <a:r>
+              <a:rPr sz="550" b="1" i="0" spc="300">
+                <a:solidFill>
+                  <a:srgbClr val="6B6690"/>
+                </a:solidFill>
+                <a:latin typeface="Calibri"/>
+              </a:rPr>
+              <a:t>WEEK 4  ·  FRIDAY  ·  FLIPKART, LUCKNOW  ·  ILLUSTRATIVE CASE</a:t>
+            </a:r>
+          </a:p>
+        </p:txBody>
+      </p:sp>
+      <p:sp>
+        <p:nvSpPr>
+          <p:cNvPr id="7" name="TextBox 6"/>
+          <p:cNvSpPr txBox="1"/>
+          <p:nvPr/>
+        </p:nvSpPr>
+        <p:spPr>
+          <a:xfrm>
+            <a:off x="530352" y="676656"/>
+            <a:ext cx="11130991" cy="512064"/>
+          </a:xfrm>
+          <a:prstGeom prst="rect">
+            <a:avLst/>
+          </a:prstGeom>
+          <a:noFill/>
+        </p:spPr>
+        <p:txBody>
+          <a:bodyPr wrap="square" anchor="b" lIns="0" rIns="0" tIns="0" bIns="0">
+            <a:spAutoFit/>
+          </a:bodyPr>
+          <a:lstStyle/>
+          <a:p>
+            <a:pPr algn="l"/>
+            <a:r>
+              <a:rPr sz="2600" b="0" i="0">
+                <a:solidFill>
+                  <a:srgbClr val="1A0F5C"/>
+                </a:solidFill>
+                <a:latin typeface="Georgia"/>
+              </a:rPr>
+              <a:t>The morning left a plan, a bar and a share</a:t>
+            </a:r>
+          </a:p>
+        </p:txBody>
+      </p:sp>
+      <p:sp>
+        <p:nvSpPr>
+          <p:cNvPr id="8" name="TextBox 7"/>
+          <p:cNvSpPr txBox="1"/>
+          <p:nvPr/>
+        </p:nvSpPr>
+        <p:spPr>
+          <a:xfrm>
+            <a:off x="530352" y="1243584"/>
+            <a:ext cx="11130991" cy="234696"/>
+          </a:xfrm>
+          <a:prstGeom prst="rect">
+            <a:avLst/>
+          </a:prstGeom>
+          <a:noFill/>
+        </p:spPr>
+        <p:txBody>
+          <a:bodyPr wrap="square" anchor="t" lIns="0" rIns="0" tIns="0" bIns="0">
+            <a:spAutoFit/>
+          </a:bodyPr>
+          <a:lstStyle/>
+          <a:p>
+            <a:pPr algn="l"/>
+            <a:r>
+              <a:rPr sz="1200" b="0" i="0">
+                <a:solidFill>
+                  <a:srgbClr val="6B6690"/>
+                </a:solidFill>
+                <a:latin typeface="Calibri"/>
+              </a:rPr>
+              <a:t>What did the three chapters settle before lunch?</a:t>
+            </a:r>
+          </a:p>
+        </p:txBody>
+      </p:sp>
+      <p:sp>
+        <p:nvSpPr>
+          <p:cNvPr id="9" name="TextBox 8"/>
+          <p:cNvSpPr txBox="1"/>
+          <p:nvPr/>
+        </p:nvSpPr>
+        <p:spPr>
+          <a:xfrm>
+            <a:off x="530352" y="1956816"/>
+            <a:ext cx="3527450" cy="698500"/>
+          </a:xfrm>
+          <a:prstGeom prst="rect">
+            <a:avLst/>
+          </a:prstGeom>
+          <a:noFill/>
+        </p:spPr>
+        <p:txBody>
+          <a:bodyPr wrap="square" anchor="t" lIns="0" rIns="0" tIns="0" bIns="0">
+            <a:spAutoFit/>
+          </a:bodyPr>
+          <a:lstStyle/>
+          <a:p>
+            <a:pPr algn="l"/>
+            <a:r>
+              <a:rPr sz="4400" b="0" i="0">
+                <a:solidFill>
+                  <a:srgbClr val="5B3FD6"/>
+                </a:solidFill>
+                <a:latin typeface="Georgia"/>
+              </a:rPr>
+              <a:t>20,275</a:t>
+            </a:r>
+          </a:p>
+        </p:txBody>
+      </p:sp>
+      <p:sp>
+        <p:nvSpPr>
+          <p:cNvPr id="10" name="TextBox 9"/>
+          <p:cNvSpPr txBox="1"/>
+          <p:nvPr/>
+        </p:nvSpPr>
+        <p:spPr>
+          <a:xfrm>
+            <a:off x="530352" y="2691892"/>
+            <a:ext cx="3527450" cy="168656"/>
+          </a:xfrm>
+          <a:prstGeom prst="rect">
+            <a:avLst/>
+          </a:prstGeom>
+          <a:noFill/>
+        </p:spPr>
+        <p:txBody>
+          <a:bodyPr wrap="square" anchor="t" lIns="0" rIns="0" tIns="0" bIns="0">
+            <a:spAutoFit/>
+          </a:bodyPr>
+          <a:lstStyle/>
+          <a:p>
+            <a:pPr algn="l"/>
+            <a:r>
+              <a:rPr sz="800" b="1" i="0" spc="250">
+                <a:solidFill>
+                  <a:srgbClr val="1A0F5C"/>
+                </a:solidFill>
+                <a:latin typeface="Calibri"/>
+              </a:rPr>
+              <a:t>PACKER SHIFTS OVER EIGHT WEEKS</a:t>
+            </a:r>
+          </a:p>
+        </p:txBody>
+      </p:sp>
+      <p:sp>
+        <p:nvSpPr>
+          <p:cNvPr id="11" name="TextBox 10"/>
+          <p:cNvSpPr txBox="1"/>
+          <p:nvPr/>
+        </p:nvSpPr>
+        <p:spPr>
+          <a:xfrm>
+            <a:off x="530352" y="2893060"/>
+            <a:ext cx="3527450" cy="350266"/>
+          </a:xfrm>
+          <a:prstGeom prst="rect">
+            <a:avLst/>
+          </a:prstGeom>
+          <a:noFill/>
+        </p:spPr>
+        <p:txBody>
+          <a:bodyPr wrap="square" anchor="t" lIns="0" rIns="0" tIns="0" bIns="0">
+            <a:spAutoFit/>
+          </a:bodyPr>
+          <a:lstStyle/>
+          <a:p>
+            <a:pPr algn="l"/>
+            <a:r>
+              <a:rPr sz="950" b="0" i="0">
+                <a:solidFill>
+                  <a:srgbClr val="6B6690"/>
+                </a:solidFill>
+                <a:latin typeface="Calibri"/>
+              </a:rPr>
+              <a:t>festival-aligned, raised 2.6 percent, 3,719 in the week of 19 October</a:t>
+            </a:r>
+          </a:p>
+        </p:txBody>
+      </p:sp>
+      <p:sp>
+        <p:nvSpPr>
+          <p:cNvPr id="12" name="Rectangle 11"/>
           <p:cNvSpPr/>
           <p:nvPr/>
         </p:nvSpPr>
         <p:spPr>
           <a:xfrm>
-            <a:off x="621792" y="1938528"/>
-            <a:ext cx="10948111" cy="10972"/>
+            <a:off x="530352" y="3145536"/>
+            <a:ext cx="3527450" cy="10972"/>
           </a:xfrm>
           <a:prstGeom prst="rect">
             <a:avLst/>
           </a:prstGeom>
           <a:solidFill>
-            <a:srgbClr val="A9A3D2"/>
+            <a:srgbClr val="E4E1F1"/>
           </a:solidFill>
           <a:ln>
             <a:noFill/>
@@ -4634,25 +4773,128 @@
       </p:sp>
       <p:sp>
         <p:nvSpPr>
-          <p:cNvPr id="7" name="Rounded Rectangle 6"/>
+          <p:cNvPr id="13" name="TextBox 12"/>
+          <p:cNvSpPr txBox="1"/>
+          <p:nvPr/>
+        </p:nvSpPr>
+        <p:spPr>
+          <a:xfrm>
+            <a:off x="4332122" y="1956816"/>
+            <a:ext cx="3527450" cy="698500"/>
+          </a:xfrm>
+          <a:prstGeom prst="rect">
+            <a:avLst/>
+          </a:prstGeom>
+          <a:noFill/>
+        </p:spPr>
+        <p:txBody>
+          <a:bodyPr wrap="square" anchor="t" lIns="0" rIns="0" tIns="0" bIns="0">
+            <a:spAutoFit/>
+          </a:bodyPr>
+          <a:lstStyle/>
+          <a:p>
+            <a:pPr algn="l"/>
+            <a:r>
+              <a:rPr sz="4400" b="0" i="0">
+                <a:solidFill>
+                  <a:srgbClr val="5B3FD6"/>
+                </a:solidFill>
+                <a:latin typeface="Georgia"/>
+              </a:rPr>
+              <a:t>6,615</a:t>
+            </a:r>
+          </a:p>
+        </p:txBody>
+      </p:sp>
+      <p:sp>
+        <p:nvSpPr>
+          <p:cNvPr id="14" name="TextBox 13"/>
+          <p:cNvSpPr txBox="1"/>
+          <p:nvPr/>
+        </p:nvSpPr>
+        <p:spPr>
+          <a:xfrm>
+            <a:off x="4332122" y="2691892"/>
+            <a:ext cx="3527450" cy="168656"/>
+          </a:xfrm>
+          <a:prstGeom prst="rect">
+            <a:avLst/>
+          </a:prstGeom>
+          <a:noFill/>
+        </p:spPr>
+        <p:txBody>
+          <a:bodyPr wrap="square" anchor="t" lIns="0" rIns="0" tIns="0" bIns="0">
+            <a:spAutoFit/>
+          </a:bodyPr>
+          <a:lstStyle/>
+          <a:p>
+            <a:pPr algn="l"/>
+            <a:r>
+              <a:rPr sz="800" b="1" i="0" spc="250">
+                <a:solidFill>
+                  <a:srgbClr val="1A0F5C"/>
+                </a:solidFill>
+                <a:latin typeface="Calibri"/>
+              </a:rPr>
+              <a:t>SHIPMENTS A WEEK, THE ERROR BAR</a:t>
+            </a:r>
+          </a:p>
+        </p:txBody>
+      </p:sp>
+      <p:sp>
+        <p:nvSpPr>
+          <p:cNvPr id="15" name="TextBox 14"/>
+          <p:cNvSpPr txBox="1"/>
+          <p:nvPr/>
+        </p:nvSpPr>
+        <p:spPr>
+          <a:xfrm>
+            <a:off x="4332122" y="2893060"/>
+            <a:ext cx="3527450" cy="350266"/>
+          </a:xfrm>
+          <a:prstGeom prst="rect">
+            <a:avLst/>
+          </a:prstGeom>
+          <a:noFill/>
+        </p:spPr>
+        <p:txBody>
+          <a:bodyPr wrap="square" anchor="t" lIns="0" rIns="0" tIns="0" bIns="0">
+            <a:spAutoFit/>
+          </a:bodyPr>
+          <a:lstStyle/>
+          <a:p>
+            <a:pPr algn="l"/>
+            <a:r>
+              <a:rPr sz="950" b="0" i="0">
+                <a:solidFill>
+                  <a:srgbClr val="6B6690"/>
+                </a:solidFill>
+                <a:latin typeface="Calibri"/>
+              </a:rPr>
+              <a:t>on thirteen hidden weeks: Rs 35,832 if high, Rs 1.7 lakh if low</a:t>
+            </a:r>
+          </a:p>
+        </p:txBody>
+      </p:sp>
+      <p:sp>
+        <p:nvSpPr>
+          <p:cNvPr id="16" name="Rectangle 15"/>
           <p:cNvSpPr/>
           <p:nvPr/>
         </p:nvSpPr>
         <p:spPr>
           <a:xfrm>
-            <a:off x="621792" y="2240280"/>
-            <a:ext cx="4140721" cy="329184"/>
-          </a:xfrm>
-          <a:prstGeom prst="roundRect">
-            <a:avLst>
-              <a:gd name="adj" fmla="val 50000"/>
-            </a:avLst>
-          </a:prstGeom>
-          <a:noFill/>
-          <a:ln w="9525">
-            <a:solidFill>
-              <a:srgbClr val="CFC9EE"/>
-            </a:solidFill>
+            <a:off x="4332122" y="3145536"/>
+            <a:ext cx="3527450" cy="10972"/>
+          </a:xfrm>
+          <a:prstGeom prst="rect">
+            <a:avLst/>
+          </a:prstGeom>
+          <a:solidFill>
+            <a:srgbClr val="E4E1F1"/>
+          </a:solidFill>
+          <a:ln>
+            <a:noFill/>
           </a:ln>
           <a:effectLst/>
         </p:spPr>
@@ -4671,32 +4913,93 @@
           </a:fontRef>
         </p:style>
         <p:txBody>
-          <a:bodyPr rtlCol="0" anchor="ctr" wrap="none" lIns="25400" rIns="25400" tIns="0" bIns="0"/>
+          <a:bodyPr rtlCol="0" anchor="ctr" wrap="square"/>
           <a:lstStyle/>
           <a:p>
             <a:pPr algn="ctr"/>
-            <a:r>
-              <a:rPr sz="900" b="1" spc="250">
-                <a:solidFill>
-                  <a:srgbClr val="FFFFFF"/>
+          </a:p>
+        </p:txBody>
+      </p:sp>
+      <p:sp>
+        <p:nvSpPr>
+          <p:cNvPr id="17" name="TextBox 16"/>
+          <p:cNvSpPr txBox="1"/>
+          <p:nvPr/>
+        </p:nvSpPr>
+        <p:spPr>
+          <a:xfrm>
+            <a:off x="8133892" y="1956816"/>
+            <a:ext cx="3527450" cy="698500"/>
+          </a:xfrm>
+          <a:prstGeom prst="rect">
+            <a:avLst/>
+          </a:prstGeom>
+          <a:noFill/>
+        </p:spPr>
+        <p:txBody>
+          <a:bodyPr wrap="square" anchor="t" lIns="0" rIns="0" tIns="0" bIns="0">
+            <a:spAutoFit/>
+          </a:bodyPr>
+          <a:lstStyle/>
+          <a:p>
+            <a:pPr algn="l"/>
+            <a:r>
+              <a:rPr sz="4400" b="0" i="0">
+                <a:solidFill>
+                  <a:srgbClr val="5B3FD6"/>
+                </a:solidFill>
+                <a:latin typeface="Georgia"/>
+              </a:rPr>
+              <a:t>0.82</a:t>
+            </a:r>
+          </a:p>
+        </p:txBody>
+      </p:sp>
+      <p:sp>
+        <p:nvSpPr>
+          <p:cNvPr id="18" name="TextBox 17"/>
+          <p:cNvSpPr txBox="1"/>
+          <p:nvPr/>
+        </p:nvSpPr>
+        <p:spPr>
+          <a:xfrm>
+            <a:off x="8133892" y="2691892"/>
+            <a:ext cx="3527450" cy="168656"/>
+          </a:xfrm>
+          <a:prstGeom prst="rect">
+            <a:avLst/>
+          </a:prstGeom>
+          <a:noFill/>
+        </p:spPr>
+        <p:txBody>
+          <a:bodyPr wrap="square" anchor="t" lIns="0" rIns="0" tIns="0" bIns="0">
+            <a:spAutoFit/>
+          </a:bodyPr>
+          <a:lstStyle/>
+          <a:p>
+            <a:pPr algn="l"/>
+            <a:r>
+              <a:rPr sz="800" b="1" i="0" spc="250">
+                <a:solidFill>
+                  <a:srgbClr val="1A0F5C"/>
                 </a:solidFill>
                 <a:latin typeface="Calibri"/>
               </a:rPr>
-              <a:t>WEEK 4  ·  FRIDAY  ·  ILLUSTRATIVE CASE</a:t>
-            </a:r>
-          </a:p>
-        </p:txBody>
-      </p:sp>
-      <p:sp>
-        <p:nvSpPr>
-          <p:cNvPr id="8" name="TextBox 7"/>
-          <p:cNvSpPr txBox="1"/>
-          <p:nvPr/>
-        </p:nvSpPr>
-        <p:spPr>
-          <a:xfrm>
-            <a:off x="621792" y="2807208"/>
-            <a:ext cx="10582351" cy="1291336"/>
+              <a:t>THE SHARE OF WEEKS TO COVER</a:t>
+            </a:r>
+          </a:p>
+        </p:txBody>
+      </p:sp>
+      <p:sp>
+        <p:nvSpPr>
+          <p:cNvPr id="19" name="TextBox 18"/>
+          <p:cNvSpPr txBox="1"/>
+          <p:nvPr/>
+        </p:nvSpPr>
+        <p:spPr>
+          <a:xfrm>
+            <a:off x="8133892" y="2893060"/>
+            <a:ext cx="3527450" cy="193421"/>
           </a:xfrm>
           <a:prstGeom prst="rect">
             <a:avLst/>
@@ -4711,27 +5014,71 @@
           <a:p>
             <a:pPr algn="l"/>
             <a:r>
-              <a:rPr sz="3800" b="0" i="0">
-                <a:solidFill>
-                  <a:srgbClr val="FFFFFF"/>
-                </a:solidFill>
-                <a:latin typeface="Georgia"/>
-              </a:rPr>
-              <a:t>Flipkart Lucknow: the staffing note and its error bar</a:t>
-            </a:r>
-          </a:p>
-        </p:txBody>
-      </p:sp>
-      <p:sp>
-        <p:nvSpPr>
-          <p:cNvPr id="9" name="TextBox 8"/>
-          <p:cNvSpPr txBox="1"/>
-          <p:nvPr/>
-        </p:nvSpPr>
-        <p:spPr>
-          <a:xfrm>
-            <a:off x="621792" y="4263136"/>
-            <a:ext cx="10033711" cy="663956"/>
+              <a:rPr sz="950" b="0" i="0">
+                <a:solidFill>
+                  <a:srgbClr val="6B6690"/>
+                </a:solidFill>
+                <a:latin typeface="Calibri"/>
+              </a:rPr>
+              <a:t>25 / (25 + 5.42): being short costs 4.6 times being long</a:t>
+            </a:r>
+          </a:p>
+        </p:txBody>
+      </p:sp>
+      <p:sp>
+        <p:nvSpPr>
+          <p:cNvPr id="20" name="Rectangle 19"/>
+          <p:cNvSpPr/>
+          <p:nvPr/>
+        </p:nvSpPr>
+        <p:spPr>
+          <a:xfrm>
+            <a:off x="8133892" y="3145536"/>
+            <a:ext cx="3527450" cy="10972"/>
+          </a:xfrm>
+          <a:prstGeom prst="rect">
+            <a:avLst/>
+          </a:prstGeom>
+          <a:solidFill>
+            <a:srgbClr val="E4E1F1"/>
+          </a:solidFill>
+          <a:ln>
+            <a:noFill/>
+          </a:ln>
+          <a:effectLst/>
+        </p:spPr>
+        <p:style>
+          <a:lnRef idx="1">
+            <a:schemeClr val="accent1"/>
+          </a:lnRef>
+          <a:fillRef idx="3">
+            <a:schemeClr val="accent1"/>
+          </a:fillRef>
+          <a:effectRef idx="2">
+            <a:schemeClr val="accent1"/>
+          </a:effectRef>
+          <a:fontRef idx="minor">
+            <a:schemeClr val="lt1"/>
+          </a:fontRef>
+        </p:style>
+        <p:txBody>
+          <a:bodyPr rtlCol="0" anchor="ctr" wrap="square"/>
+          <a:lstStyle/>
+          <a:p>
+            <a:pPr algn="ctr"/>
+          </a:p>
+        </p:txBody>
+      </p:sp>
+      <p:sp>
+        <p:nvSpPr>
+          <p:cNvPr id="21" name="TextBox 20"/>
+          <p:cNvSpPr txBox="1"/>
+          <p:nvPr/>
+        </p:nvSpPr>
+        <p:spPr>
+          <a:xfrm>
+            <a:off x="530352" y="3419856"/>
+            <a:ext cx="11130991" cy="495807"/>
           </a:xfrm>
           <a:prstGeom prst="rect">
             <a:avLst/>
@@ -4744,57 +5091,26 @@
           </a:bodyPr>
           <a:lstStyle/>
           <a:p>
-            <a:pPr algn="l"/>
-            <a:r>
-              <a:rPr sz="1900" b="0" i="1">
-                <a:solidFill>
-                  <a:srgbClr val="D9A7FF"/>
-                </a:solidFill>
-                <a:latin typeface="Georgia"/>
-              </a:rPr>
-              <a:t>“Send the staffing note: the method, packer shifts a week, the error bar in rupees in each direction, and what would make it wrong.”</a:t>
-            </a:r>
-          </a:p>
-        </p:txBody>
-      </p:sp>
-      <p:sp>
-        <p:nvSpPr>
-          <p:cNvPr id="10" name="TextBox 9"/>
-          <p:cNvSpPr txBox="1"/>
-          <p:nvPr/>
-        </p:nvSpPr>
-        <p:spPr>
-          <a:xfrm>
-            <a:off x="621792" y="4981956"/>
-            <a:ext cx="10033711" cy="399796"/>
-          </a:xfrm>
-          <a:prstGeom prst="rect">
-            <a:avLst/>
-          </a:prstGeom>
-          <a:noFill/>
-        </p:spPr>
-        <p:txBody>
-          <a:bodyPr wrap="square" anchor="t" lIns="0" rIns="0" tIns="0" bIns="0">
-            <a:spAutoFit/>
-          </a:bodyPr>
-          <a:lstStyle/>
-          <a:p>
-            <a:pPr algn="l"/>
-            <a:r>
-              <a:rPr sz="1100" b="0" i="0">
-                <a:solidFill>
-                  <a:srgbClr val="CFC9EE"/>
+            <a:pPr>
+              <a:spcAft>
+                <a:spcPts val="800"/>
+              </a:spcAft>
+            </a:pPr>
+            <a:r>
+              <a:rPr sz="1600" b="0" i="0">
+                <a:solidFill>
+                  <a:srgbClr val="1A1440"/>
                 </a:solidFill>
                 <a:latin typeface="Calibri"/>
               </a:rPr>
-              <a:t>The ask on the ticket, to the FC planner and the regional operations head, due Friday. Illustrative case: the company is real, the situation and the data are synthetic, built for this class.</a:t>
-            </a:r>
-          </a:p>
-        </p:txBody>
-      </p:sp>
-      <p:sp>
-        <p:nvSpPr>
-          <p:cNvPr id="11" name="TextBox 10"/>
+              <a:t>Illustrative case: the company is real, the situation and the data are synthetic, built for this class.</a:t>
+            </a:r>
+          </a:p>
+        </p:txBody>
+      </p:sp>
+      <p:sp>
+        <p:nvSpPr>
+          <p:cNvPr id="22" name="TextBox 21"/>
           <p:cNvSpPr txBox="1"/>
           <p:nvPr/>
         </p:nvSpPr>
@@ -4818,18 +5134,18 @@
             <a:r>
               <a:rPr sz="750" b="0" i="0">
                 <a:solidFill>
-                  <a:srgbClr val="CFC9EE"/>
+                  <a:srgbClr val="6B6690"/>
                 </a:solidFill>
                 <a:latin typeface="Calibri"/>
               </a:rPr>
-              <a:t>Week 4, Day 5. Flipkart Lucknow: the staffing note and its error bar</a:t>
-            </a:r>
-          </a:p>
-        </p:txBody>
-      </p:sp>
-      <p:sp>
-        <p:nvSpPr>
-          <p:cNvPr id="12" name="TextBox 11"/>
+              <a:t>Week 4 Day 5: how much is coming, and how wrong could we be</a:t>
+            </a:r>
+          </a:p>
+        </p:txBody>
+      </p:sp>
+      <p:sp>
+        <p:nvSpPr>
+          <p:cNvPr id="23" name="TextBox 22"/>
           <p:cNvSpPr txBox="1"/>
           <p:nvPr/>
         </p:nvSpPr>
@@ -4853,11 +5169,11 @@
             <a:r>
               <a:rPr sz="750" b="0" i="0">
                 <a:solidFill>
-                  <a:srgbClr val="CFC9EE"/>
+                  <a:srgbClr val="6B6690"/>
                 </a:solidFill>
                 <a:latin typeface="Calibri"/>
               </a:rPr>
-              <a:t>1 / 13</a:t>
+              <a:t>S1  ·  1 / 12</a:t>
             </a:r>
           </a:p>
         </p:txBody>
@@ -5028,7 +5344,7 @@
                 </a:solidFill>
                 <a:latin typeface="Calibri"/>
               </a:rPr>
-              <a:t>WEEK 4  ·  DAY 5  ·  KALPA GLOBAL CAPABILITY CENTRE</a:t>
+              <a:t>WEEK 4  ·  FRIDAY  ·  FLIPKART, LUCKNOW  ·  ILLUSTRATIVE CASE</a:t>
             </a:r>
           </a:p>
         </p:txBody>
@@ -5063,7 +5379,7 @@
                 </a:solidFill>
                 <a:latin typeface="Georgia"/>
               </a:rPr>
-              <a:t>Two-wheelers a year: about 2.16 crore, checked</a:t>
+              <a:t>Handoff: the baseline is the bar to beat</a:t>
             </a:r>
           </a:p>
         </p:txBody>
@@ -5098,45 +5414,21 @@
                 </a:solidFill>
                 <a:latin typeface="Calibri"/>
               </a:rPr>
-              <a:t>How do you size a number from nothing, and check it against something known?</a:t>
-            </a:r>
-          </a:p>
-        </p:txBody>
-      </p:sp>
-      <p:pic>
-        <p:nvPicPr>
-          <p:cNvPr id="9" name="mermaid diagram" descr="dc4977127c51dc04.png"/>
-          <p:cNvPicPr>
-            <a:picLocks noChangeAspect="1"/>
-          </p:cNvPicPr>
-          <p:nvPr/>
-        </p:nvPicPr>
-        <p:blipFill>
-          <a:blip r:embed="rId5"/>
-          <a:stretch>
-            <a:fillRect/>
-          </a:stretch>
-        </p:blipFill>
+              <a:t>What does the IITGN faculty session W4-4 (tentative) pick up from here?</a:t>
+            </a:r>
+          </a:p>
+        </p:txBody>
+      </p:sp>
+      <p:sp>
+        <p:nvSpPr>
+          <p:cNvPr id="9" name="Rounded Rectangle 8"/>
+          <p:cNvSpPr/>
+          <p:nvPr/>
+        </p:nvSpPr>
         <p:spPr>
           <a:xfrm>
             <a:off x="530352" y="1956816"/>
-            <a:ext cx="11130991" cy="1962193"/>
-          </a:xfrm>
-          <a:prstGeom prst="rect">
-            <a:avLst/>
-          </a:prstGeom>
-        </p:spPr>
-      </p:pic>
-      <p:sp>
-        <p:nvSpPr>
-          <p:cNvPr id="10" name="Rounded Rectangle 9"/>
-          <p:cNvSpPr/>
-          <p:nvPr/>
-        </p:nvSpPr>
-        <p:spPr>
-          <a:xfrm>
-            <a:off x="530352" y="4065313"/>
-            <a:ext cx="11130991" cy="1074420"/>
+            <a:ext cx="11130991" cy="1341120"/>
           </a:xfrm>
           <a:prstGeom prst="roundRect">
             <a:avLst>
@@ -5177,14 +5469,14 @@
       </p:sp>
       <p:sp>
         <p:nvSpPr>
-          <p:cNvPr id="11" name="Rounded Rectangle 10"/>
+          <p:cNvPr id="10" name="Rounded Rectangle 9"/>
           <p:cNvSpPr/>
           <p:nvPr/>
         </p:nvSpPr>
         <p:spPr>
           <a:xfrm>
-            <a:off x="676656" y="4193329"/>
-            <a:ext cx="45720" cy="818388"/>
+            <a:off x="676656" y="2084832"/>
+            <a:ext cx="45720" cy="1085088"/>
           </a:xfrm>
           <a:prstGeom prst="roundRect">
             <a:avLst>
@@ -5223,43 +5515,82 @@
       </p:sp>
       <p:sp>
         <p:nvSpPr>
+          <p:cNvPr id="11" name="TextBox 10"/>
+          <p:cNvSpPr txBox="1"/>
+          <p:nvPr/>
+        </p:nvSpPr>
+        <p:spPr>
+          <a:xfrm>
+            <a:off x="877824" y="2075688"/>
+            <a:ext cx="10564063" cy="1158240"/>
+          </a:xfrm>
+          <a:prstGeom prst="rect">
+            <a:avLst/>
+          </a:prstGeom>
+          <a:noFill/>
+        </p:spPr>
+        <p:txBody>
+          <a:bodyPr wrap="square" anchor="ctr" lIns="0" rIns="0" tIns="0" bIns="0">
+            <a:spAutoFit/>
+          </a:bodyPr>
+          <a:lstStyle/>
+          <a:p>
+            <a:r>
+              <a:rPr sz="1500" b="1">
+                <a:solidFill>
+                  <a:srgbClr val="5B3FD6"/>
+                </a:solidFill>
+                <a:latin typeface="Calibri"/>
+              </a:rPr>
+              <a:t>The handoff line. </a:t>
+            </a:r>
+            <a:r>
+              <a:rPr sz="1500" b="0" i="0">
+                <a:solidFill>
+                  <a:srgbClr val="1A1440"/>
+                </a:solidFill>
+                <a:latin typeface="Calibri"/>
+              </a:rPr>
+              <a:t>Your baseline is hard to beat, and you now know what any model must beat and on which weeks. The next 120 minutes show how a series remembers itself, autocorrelation, and what a smoothing or ARIMA model would have to do to earn its place above the festival-aligned baseline on the thirteen held-out weeks.</a:t>
+            </a:r>
+          </a:p>
+        </p:txBody>
+      </p:sp>
+      <p:sp>
+        <p:nvSpPr>
           <p:cNvPr id="12" name="TextBox 11"/>
           <p:cNvSpPr txBox="1"/>
           <p:nvPr/>
         </p:nvSpPr>
         <p:spPr>
           <a:xfrm>
-            <a:off x="877824" y="4184185"/>
-            <a:ext cx="10564063" cy="891540"/>
-          </a:xfrm>
-          <a:prstGeom prst="rect">
-            <a:avLst/>
-          </a:prstGeom>
-          <a:noFill/>
-        </p:spPr>
-        <p:txBody>
-          <a:bodyPr wrap="square" anchor="ctr" lIns="0" rIns="0" tIns="0" bIns="0">
-            <a:spAutoFit/>
-          </a:bodyPr>
-          <a:lstStyle/>
-          <a:p>
-            <a:r>
-              <a:rPr sz="1500" b="1">
-                <a:solidFill>
-                  <a:srgbClr val="5B3FD6"/>
+            <a:off x="530352" y="3462528"/>
+            <a:ext cx="11130991" cy="772160"/>
+          </a:xfrm>
+          <a:prstGeom prst="rect">
+            <a:avLst/>
+          </a:prstGeom>
+          <a:noFill/>
+        </p:spPr>
+        <p:txBody>
+          <a:bodyPr wrap="square" anchor="t" lIns="0" rIns="0" tIns="0" bIns="0">
+            <a:spAutoFit/>
+          </a:bodyPr>
+          <a:lstStyle/>
+          <a:p>
+            <a:pPr>
+              <a:spcAft>
+                <a:spcPts val="800"/>
+              </a:spcAft>
+            </a:pPr>
+            <a:r>
+              <a:rPr sz="1600" b="0" i="0">
+                <a:solidFill>
+                  <a:srgbClr val="1A1440"/>
                 </a:solidFill>
                 <a:latin typeface="Calibri"/>
               </a:rPr>
-              <a:t>The catch. </a:t>
-            </a:r>
-            <a:r>
-              <a:rPr sz="1500" b="0" i="0">
-                <a:solidFill>
-                  <a:srgbClr val="1A1440"/>
-                </a:solidFill>
-                <a:latin typeface="Calibri"/>
-              </a:rPr>
-              <a:t>October 2025's retail alone was 31,49,846 two-wheelers (FADA, F5); times twelve that is about 3.78 crore, 74 percent too high: never annualise a festive month. SIAM's figure is from its FY 2025-26 release (T3, checked 12 October 2026).</a:t>
+              <a:t>The faculty session is tentative until IIT Gandhinagar confirms it; if it does not run today, the fallback hour runs in its place.</a:t>
             </a:r>
           </a:p>
         </p:txBody>
@@ -5329,7 +5660,7 @@
                 </a:solidFill>
                 <a:latin typeface="Calibri"/>
               </a:rPr>
-              <a:t>S9  ·  10 / 13</a:t>
+              <a:t>S10  ·  10 / 12</a:t>
             </a:r>
           </a:p>
         </p:txBody>
@@ -5500,494 +5831,7 @@
                 </a:solidFill>
                 <a:latin typeface="Calibri"/>
               </a:rPr>
-              <a:t>WEEK 4  ·  DAY 5  ·  KALPA GLOBAL CAPABILITY CENTRE</a:t>
-            </a:r>
-          </a:p>
-        </p:txBody>
-      </p:sp>
-      <p:sp>
-        <p:nvSpPr>
-          <p:cNvPr id="7" name="TextBox 6"/>
-          <p:cNvSpPr txBox="1"/>
-          <p:nvPr/>
-        </p:nvSpPr>
-        <p:spPr>
-          <a:xfrm>
-            <a:off x="530352" y="676656"/>
-            <a:ext cx="11130991" cy="512064"/>
-          </a:xfrm>
-          <a:prstGeom prst="rect">
-            <a:avLst/>
-          </a:prstGeom>
-          <a:noFill/>
-        </p:spPr>
-        <p:txBody>
-          <a:bodyPr wrap="square" anchor="b" lIns="0" rIns="0" tIns="0" bIns="0">
-            <a:spAutoFit/>
-          </a:bodyPr>
-          <a:lstStyle/>
-          <a:p>
-            <a:pPr algn="l"/>
-            <a:r>
-              <a:rPr sz="2600" b="0" i="0">
-                <a:solidFill>
-                  <a:srgbClr val="1A0F5C"/>
-                </a:solidFill>
-                <a:latin typeface="Georgia"/>
-              </a:rPr>
-              <a:t>Handoff: the baseline is the bar to beat</a:t>
-            </a:r>
-          </a:p>
-        </p:txBody>
-      </p:sp>
-      <p:sp>
-        <p:nvSpPr>
-          <p:cNvPr id="8" name="TextBox 7"/>
-          <p:cNvSpPr txBox="1"/>
-          <p:nvPr/>
-        </p:nvSpPr>
-        <p:spPr>
-          <a:xfrm>
-            <a:off x="530352" y="1243584"/>
-            <a:ext cx="11130991" cy="234696"/>
-          </a:xfrm>
-          <a:prstGeom prst="rect">
-            <a:avLst/>
-          </a:prstGeom>
-          <a:noFill/>
-        </p:spPr>
-        <p:txBody>
-          <a:bodyPr wrap="square" anchor="t" lIns="0" rIns="0" tIns="0" bIns="0">
-            <a:spAutoFit/>
-          </a:bodyPr>
-          <a:lstStyle/>
-          <a:p>
-            <a:pPr algn="l"/>
-            <a:r>
-              <a:rPr sz="1200" b="0" i="0">
-                <a:solidFill>
-                  <a:srgbClr val="6B6690"/>
-                </a:solidFill>
-                <a:latin typeface="Calibri"/>
-              </a:rPr>
-              <a:t>What does the IITGN faculty session W4-4 (tentative) pick up from here?</a:t>
-            </a:r>
-          </a:p>
-        </p:txBody>
-      </p:sp>
-      <p:sp>
-        <p:nvSpPr>
-          <p:cNvPr id="9" name="Rounded Rectangle 8"/>
-          <p:cNvSpPr/>
-          <p:nvPr/>
-        </p:nvSpPr>
-        <p:spPr>
-          <a:xfrm>
-            <a:off x="530352" y="1956816"/>
-            <a:ext cx="11130991" cy="1341120"/>
-          </a:xfrm>
-          <a:prstGeom prst="roundRect">
-            <a:avLst>
-              <a:gd name="adj" fmla="val 8000"/>
-            </a:avLst>
-          </a:prstGeom>
-          <a:solidFill>
-            <a:srgbClr val="F7F5FD"/>
-          </a:solidFill>
-          <a:ln w="9525">
-            <a:solidFill>
-              <a:srgbClr val="E4E1F1"/>
-            </a:solidFill>
-          </a:ln>
-          <a:effectLst/>
-        </p:spPr>
-        <p:style>
-          <a:lnRef idx="1">
-            <a:schemeClr val="accent1"/>
-          </a:lnRef>
-          <a:fillRef idx="3">
-            <a:schemeClr val="accent1"/>
-          </a:fillRef>
-          <a:effectRef idx="2">
-            <a:schemeClr val="accent1"/>
-          </a:effectRef>
-          <a:fontRef idx="minor">
-            <a:schemeClr val="lt1"/>
-          </a:fontRef>
-        </p:style>
-        <p:txBody>
-          <a:bodyPr rtlCol="0" anchor="ctr" wrap="square"/>
-          <a:lstStyle/>
-          <a:p>
-            <a:pPr algn="ctr"/>
-          </a:p>
-        </p:txBody>
-      </p:sp>
-      <p:sp>
-        <p:nvSpPr>
-          <p:cNvPr id="10" name="Rounded Rectangle 9"/>
-          <p:cNvSpPr/>
-          <p:nvPr/>
-        </p:nvSpPr>
-        <p:spPr>
-          <a:xfrm>
-            <a:off x="676656" y="2084832"/>
-            <a:ext cx="45720" cy="1085088"/>
-          </a:xfrm>
-          <a:prstGeom prst="roundRect">
-            <a:avLst>
-              <a:gd name="adj" fmla="val 50000"/>
-            </a:avLst>
-          </a:prstGeom>
-          <a:solidFill>
-            <a:srgbClr val="5B3FD6"/>
-          </a:solidFill>
-          <a:ln>
-            <a:noFill/>
-          </a:ln>
-          <a:effectLst/>
-        </p:spPr>
-        <p:style>
-          <a:lnRef idx="1">
-            <a:schemeClr val="accent1"/>
-          </a:lnRef>
-          <a:fillRef idx="3">
-            <a:schemeClr val="accent1"/>
-          </a:fillRef>
-          <a:effectRef idx="2">
-            <a:schemeClr val="accent1"/>
-          </a:effectRef>
-          <a:fontRef idx="minor">
-            <a:schemeClr val="lt1"/>
-          </a:fontRef>
-        </p:style>
-        <p:txBody>
-          <a:bodyPr rtlCol="0" anchor="ctr" wrap="square"/>
-          <a:lstStyle/>
-          <a:p>
-            <a:pPr algn="ctr"/>
-          </a:p>
-        </p:txBody>
-      </p:sp>
-      <p:sp>
-        <p:nvSpPr>
-          <p:cNvPr id="11" name="TextBox 10"/>
-          <p:cNvSpPr txBox="1"/>
-          <p:nvPr/>
-        </p:nvSpPr>
-        <p:spPr>
-          <a:xfrm>
-            <a:off x="877824" y="2075688"/>
-            <a:ext cx="10564063" cy="1158240"/>
-          </a:xfrm>
-          <a:prstGeom prst="rect">
-            <a:avLst/>
-          </a:prstGeom>
-          <a:noFill/>
-        </p:spPr>
-        <p:txBody>
-          <a:bodyPr wrap="square" anchor="ctr" lIns="0" rIns="0" tIns="0" bIns="0">
-            <a:spAutoFit/>
-          </a:bodyPr>
-          <a:lstStyle/>
-          <a:p>
-            <a:r>
-              <a:rPr sz="1500" b="1">
-                <a:solidFill>
-                  <a:srgbClr val="5B3FD6"/>
-                </a:solidFill>
-                <a:latin typeface="Calibri"/>
-              </a:rPr>
-              <a:t>The handoff line. </a:t>
-            </a:r>
-            <a:r>
-              <a:rPr sz="1500" b="0" i="0">
-                <a:solidFill>
-                  <a:srgbClr val="1A1440"/>
-                </a:solidFill>
-                <a:latin typeface="Calibri"/>
-              </a:rPr>
-              <a:t>Your baseline is hard to beat, and you now know what any model must beat and on which weeks. The next 120 minutes show how a series remembers itself, autocorrelation, and what a smoothing or ARIMA model would have to do to earn its place above the festival-aligned baseline on the thirteen held-out weeks.</a:t>
-            </a:r>
-          </a:p>
-        </p:txBody>
-      </p:sp>
-      <p:sp>
-        <p:nvSpPr>
-          <p:cNvPr id="12" name="TextBox 11"/>
-          <p:cNvSpPr txBox="1"/>
-          <p:nvPr/>
-        </p:nvSpPr>
-        <p:spPr>
-          <a:xfrm>
-            <a:off x="530352" y="3462528"/>
-            <a:ext cx="11130991" cy="772160"/>
-          </a:xfrm>
-          <a:prstGeom prst="rect">
-            <a:avLst/>
-          </a:prstGeom>
-          <a:noFill/>
-        </p:spPr>
-        <p:txBody>
-          <a:bodyPr wrap="square" anchor="t" lIns="0" rIns="0" tIns="0" bIns="0">
-            <a:spAutoFit/>
-          </a:bodyPr>
-          <a:lstStyle/>
-          <a:p>
-            <a:pPr>
-              <a:spcAft>
-                <a:spcPts val="800"/>
-              </a:spcAft>
-            </a:pPr>
-            <a:r>
-              <a:rPr sz="1600" b="0" i="0">
-                <a:solidFill>
-                  <a:srgbClr val="1A1440"/>
-                </a:solidFill>
-                <a:latin typeface="Calibri"/>
-              </a:rPr>
-              <a:t>The faculty session is tentative until IIT Gandhinagar confirms it; if it does not run today, the fallback hour runs in its place.</a:t>
-            </a:r>
-          </a:p>
-        </p:txBody>
-      </p:sp>
-      <p:sp>
-        <p:nvSpPr>
-          <p:cNvPr id="13" name="TextBox 12"/>
-          <p:cNvSpPr txBox="1"/>
-          <p:nvPr/>
-        </p:nvSpPr>
-        <p:spPr>
-          <a:xfrm>
-            <a:off x="530352" y="6437376"/>
-            <a:ext cx="9667951" cy="160401"/>
-          </a:xfrm>
-          <a:prstGeom prst="rect">
-            <a:avLst/>
-          </a:prstGeom>
-          <a:noFill/>
-        </p:spPr>
-        <p:txBody>
-          <a:bodyPr wrap="square" anchor="t" lIns="0" rIns="0" tIns="0" bIns="0">
-            <a:spAutoFit/>
-          </a:bodyPr>
-          <a:lstStyle/>
-          <a:p>
-            <a:pPr algn="l"/>
-            <a:r>
-              <a:rPr sz="750" b="0" i="0">
-                <a:solidFill>
-                  <a:srgbClr val="6B6690"/>
-                </a:solidFill>
-                <a:latin typeface="Calibri"/>
-              </a:rPr>
-              <a:t>Week 4 Day 5: how much is coming, and how wrong could we be</a:t>
-            </a:r>
-          </a:p>
-        </p:txBody>
-      </p:sp>
-      <p:sp>
-        <p:nvSpPr>
-          <p:cNvPr id="14" name="TextBox 13"/>
-          <p:cNvSpPr txBox="1"/>
-          <p:nvPr/>
-        </p:nvSpPr>
-        <p:spPr>
-          <a:xfrm>
-            <a:off x="10198303" y="6437376"/>
-            <a:ext cx="1463040" cy="160401"/>
-          </a:xfrm>
-          <a:prstGeom prst="rect">
-            <a:avLst/>
-          </a:prstGeom>
-          <a:noFill/>
-        </p:spPr>
-        <p:txBody>
-          <a:bodyPr wrap="square" anchor="t" lIns="0" rIns="0" tIns="0" bIns="0">
-            <a:spAutoFit/>
-          </a:bodyPr>
-          <a:lstStyle/>
-          <a:p>
-            <a:pPr algn="r"/>
-            <a:r>
-              <a:rPr sz="750" b="0" i="0">
-                <a:solidFill>
-                  <a:srgbClr val="6B6690"/>
-                </a:solidFill>
-                <a:latin typeface="Calibri"/>
-              </a:rPr>
-              <a:t>S10  ·  11 / 13</a:t>
-            </a:r>
-          </a:p>
-        </p:txBody>
-      </p:sp>
-    </p:spTree>
-  </p:cSld>
-  <p:clrMapOvr>
-    <a:masterClrMapping/>
-  </p:clrMapOvr>
-</p:sld>
-</file>
-
-<file path=ppt/slides/slide12.xml><?xml version="1.0" encoding="utf-8"?>
-<p:sld xmlns:a="http://schemas.openxmlformats.org/drawingml/2006/main" xmlns:p="http://schemas.openxmlformats.org/presentationml/2006/main" xmlns:r="http://schemas.openxmlformats.org/officeDocument/2006/relationships">
-  <p:cSld>
-    <p:spTree>
-      <p:nvGrpSpPr>
-        <p:cNvPr id="1" name=""/>
-        <p:cNvGrpSpPr/>
-        <p:nvPr/>
-      </p:nvGrpSpPr>
-      <p:grpSpPr/>
-      <p:pic>
-        <p:nvPicPr>
-          <p:cNvPr id="2" name="Picture 1" descr="bg_light.jpg"/>
-          <p:cNvPicPr>
-            <a:picLocks noChangeAspect="1"/>
-          </p:cNvPicPr>
-          <p:nvPr/>
-        </p:nvPicPr>
-        <p:blipFill>
-          <a:blip r:embed="rId2"/>
-          <a:stretch>
-            <a:fillRect/>
-          </a:stretch>
-        </p:blipFill>
-        <p:spPr>
-          <a:xfrm>
-            <a:off x="0" y="0"/>
-            <a:ext cx="12191695" cy="6858000"/>
-          </a:xfrm>
-          <a:prstGeom prst="rect">
-            <a:avLst/>
-          </a:prstGeom>
-        </p:spPr>
-      </p:pic>
-      <p:pic>
-        <p:nvPicPr>
-          <p:cNvPr id="3" name="Picture 2" descr="iitgn_logo.png"/>
-          <p:cNvPicPr>
-            <a:picLocks noChangeAspect="1"/>
-          </p:cNvPicPr>
-          <p:nvPr/>
-        </p:nvPicPr>
-        <p:blipFill>
-          <a:blip r:embed="rId3"/>
-          <a:stretch>
-            <a:fillRect/>
-          </a:stretch>
-        </p:blipFill>
-        <p:spPr>
-          <a:xfrm>
-            <a:off x="530352" y="201168"/>
-            <a:ext cx="420624" cy="420624"/>
-          </a:xfrm>
-          <a:prstGeom prst="rect">
-            <a:avLst/>
-          </a:prstGeom>
-        </p:spPr>
-      </p:pic>
-      <p:sp>
-        <p:nvSpPr>
-          <p:cNvPr id="4" name="TextBox 3"/>
-          <p:cNvSpPr txBox="1"/>
-          <p:nvPr/>
-        </p:nvSpPr>
-        <p:spPr>
-          <a:xfrm>
-            <a:off x="1042416" y="228600"/>
-            <a:ext cx="5120640" cy="185166"/>
-          </a:xfrm>
-          <a:prstGeom prst="rect">
-            <a:avLst/>
-          </a:prstGeom>
-          <a:noFill/>
-        </p:spPr>
-        <p:txBody>
-          <a:bodyPr wrap="square" anchor="t" lIns="0" rIns="0" tIns="0" bIns="0">
-            <a:spAutoFit/>
-          </a:bodyPr>
-          <a:lstStyle/>
-          <a:p>
-            <a:pPr algn="l"/>
-            <a:r>
-              <a:rPr sz="900" b="1" i="0">
-                <a:solidFill>
-                  <a:srgbClr val="1A0F5C"/>
-                </a:solidFill>
-                <a:latin typeface="Calibri"/>
-              </a:rPr>
-              <a:t>Indian Institute of Technology Gandhinagar</a:t>
-            </a:r>
-          </a:p>
-        </p:txBody>
-      </p:sp>
-      <p:sp>
-        <p:nvSpPr>
-          <p:cNvPr id="5" name="TextBox 4"/>
-          <p:cNvSpPr txBox="1"/>
-          <p:nvPr/>
-        </p:nvSpPr>
-        <p:spPr>
-          <a:xfrm>
-            <a:off x="1042416" y="420623"/>
-            <a:ext cx="5852160" cy="127381"/>
-          </a:xfrm>
-          <a:prstGeom prst="rect">
-            <a:avLst/>
-          </a:prstGeom>
-          <a:noFill/>
-        </p:spPr>
-        <p:txBody>
-          <a:bodyPr wrap="square" anchor="t" lIns="0" rIns="0" tIns="0" bIns="0">
-            <a:spAutoFit/>
-          </a:bodyPr>
-          <a:lstStyle/>
-          <a:p>
-            <a:pPr algn="l"/>
-            <a:r>
-              <a:rPr sz="550" b="1" i="0" spc="300">
-                <a:solidFill>
-                  <a:srgbClr val="6B6690"/>
-                </a:solidFill>
-                <a:latin typeface="Calibri"/>
-              </a:rPr>
-              <a:t>ADMINISTERED THROUGH THE COMPETENCY ADVANCEMENT ACADEMY</a:t>
-            </a:r>
-          </a:p>
-        </p:txBody>
-      </p:sp>
-      <p:sp>
-        <p:nvSpPr>
-          <p:cNvPr id="6" name="TextBox 5"/>
-          <p:cNvSpPr txBox="1"/>
-          <p:nvPr/>
-        </p:nvSpPr>
-        <p:spPr>
-          <a:xfrm>
-            <a:off x="5992063" y="310896"/>
-            <a:ext cx="5669280" cy="127381"/>
-          </a:xfrm>
-          <a:prstGeom prst="rect">
-            <a:avLst/>
-          </a:prstGeom>
-          <a:noFill/>
-        </p:spPr>
-        <p:txBody>
-          <a:bodyPr wrap="square" anchor="t" lIns="0" rIns="0" tIns="0" bIns="0">
-            <a:spAutoFit/>
-          </a:bodyPr>
-          <a:lstStyle/>
-          <a:p>
-            <a:pPr algn="r"/>
-            <a:r>
-              <a:rPr sz="550" b="1" i="0" spc="300">
-                <a:solidFill>
-                  <a:srgbClr val="6B6690"/>
-                </a:solidFill>
-                <a:latin typeface="Calibri"/>
-              </a:rPr>
-              <a:t>WEEK 4  ·  DAY 5  ·  KALPA GLOBAL CAPABILITY CENTRE</a:t>
+              <a:t>WEEK 4  ·  FRIDAY  ·  FLIPKART, LUCKNOW  ·  ILLUSTRATIVE CASE</a:t>
             </a:r>
           </a:p>
         </p:txBody>
@@ -6567,7 +6411,7 @@
                 </a:solidFill>
                 <a:latin typeface="Calibri"/>
               </a:rPr>
-              <a:t>S11  ·  12 / 13</a:t>
+              <a:t>S11  ·  11 / 12</a:t>
             </a:r>
           </a:p>
         </p:txBody>
@@ -6580,7 +6424,7 @@
 </p:sld>
 </file>
 
-<file path=ppt/slides/slide13.xml><?xml version="1.0" encoding="utf-8"?>
+<file path=ppt/slides/slide12.xml><?xml version="1.0" encoding="utf-8"?>
 <p:sld xmlns:a="http://schemas.openxmlformats.org/drawingml/2006/main" xmlns:p="http://schemas.openxmlformats.org/presentationml/2006/main" xmlns:r="http://schemas.openxmlformats.org/officeDocument/2006/relationships">
   <p:cSld>
     <p:spTree>
@@ -6738,7 +6582,7 @@
                 </a:solidFill>
                 <a:latin typeface="Calibri"/>
               </a:rPr>
-              <a:t>WEEK 4  ·  DAY 5  ·  KALPA GLOBAL CAPABILITY CENTRE</a:t>
+              <a:t>WEEK 4  ·  FRIDAY  ·  FLIPKART, LUCKNOW  ·  ILLUSTRATIVE CASE</a:t>
             </a:r>
           </a:p>
         </p:txBody>
@@ -7613,7 +7457,7 @@
                 </a:solidFill>
                 <a:latin typeface="Calibri"/>
               </a:rPr>
-              <a:t>S12  ·  13 / 13</a:t>
+              <a:t>S12  ·  12 / 12</a:t>
             </a:r>
           </a:p>
         </p:txBody>
@@ -7784,7 +7628,7 @@
                 </a:solidFill>
                 <a:latin typeface="Calibri"/>
               </a:rPr>
-              <a:t>WEEK 4  ·  DAY 5  ·  KALPA GLOBAL CAPABILITY CENTRE</a:t>
+              <a:t>WEEK 4  ·  FRIDAY  ·  FLIPKART, LUCKNOW  ·  ILLUSTRATIVE CASE</a:t>
             </a:r>
           </a:p>
         </p:txBody>
@@ -7819,7 +7663,7 @@
                 </a:solidFill>
                 <a:latin typeface="Georgia"/>
               </a:rPr>
-              <a:t>The morning left a plan, a bar and a share</a:t>
+              <a:t>The staffing note: five lines, one page</a:t>
             </a:r>
           </a:p>
         </p:txBody>
@@ -7854,137 +7698,42 @@
                 </a:solidFill>
                 <a:latin typeface="Calibri"/>
               </a:rPr>
-              <a:t>What did the three chapters settle before lunch?</a:t>
-            </a:r>
-          </a:p>
-        </p:txBody>
-      </p:sp>
-      <p:sp>
-        <p:nvSpPr>
-          <p:cNvPr id="9" name="TextBox 8"/>
-          <p:cNvSpPr txBox="1"/>
+              <a:t>What does each group hand the regional operations head in twenty minutes?</a:t>
+            </a:r>
+          </a:p>
+        </p:txBody>
+      </p:sp>
+      <p:sp>
+        <p:nvSpPr>
+          <p:cNvPr id="9" name="Rounded Rectangle 8"/>
+          <p:cNvSpPr/>
           <p:nvPr/>
         </p:nvSpPr>
         <p:spPr>
           <a:xfrm>
             <a:off x="530352" y="1956816"/>
-            <a:ext cx="3527450" cy="698500"/>
-          </a:xfrm>
-          <a:prstGeom prst="rect">
-            <a:avLst/>
-          </a:prstGeom>
-          <a:noFill/>
-        </p:spPr>
-        <p:txBody>
-          <a:bodyPr wrap="square" anchor="t" lIns="0" rIns="0" tIns="0" bIns="0">
-            <a:spAutoFit/>
-          </a:bodyPr>
-          <a:lstStyle/>
-          <a:p>
-            <a:pPr algn="l"/>
-            <a:r>
-              <a:rPr sz="4400" b="0" i="0">
-                <a:solidFill>
-                  <a:srgbClr val="5B3FD6"/>
-                </a:solidFill>
-                <a:latin typeface="Georgia"/>
-              </a:rPr>
-              <a:t>20,275</a:t>
-            </a:r>
-          </a:p>
-        </p:txBody>
-      </p:sp>
-      <p:sp>
-        <p:nvSpPr>
-          <p:cNvPr id="10" name="TextBox 9"/>
-          <p:cNvSpPr txBox="1"/>
-          <p:nvPr/>
-        </p:nvSpPr>
-        <p:spPr>
-          <a:xfrm>
-            <a:off x="530352" y="2691892"/>
-            <a:ext cx="3527450" cy="168656"/>
-          </a:xfrm>
-          <a:prstGeom prst="rect">
-            <a:avLst/>
-          </a:prstGeom>
-          <a:noFill/>
-        </p:spPr>
-        <p:txBody>
-          <a:bodyPr wrap="square" anchor="t" lIns="0" rIns="0" tIns="0" bIns="0">
-            <a:spAutoFit/>
-          </a:bodyPr>
-          <a:lstStyle/>
-          <a:p>
-            <a:pPr algn="l"/>
-            <a:r>
-              <a:rPr sz="800" b="1" i="0" spc="250">
-                <a:solidFill>
-                  <a:srgbClr val="1A0F5C"/>
-                </a:solidFill>
-                <a:latin typeface="Calibri"/>
-              </a:rPr>
-              <a:t>PACKER SHIFTS OVER EIGHT WEEKS</a:t>
-            </a:r>
-          </a:p>
-        </p:txBody>
-      </p:sp>
-      <p:sp>
-        <p:nvSpPr>
-          <p:cNvPr id="11" name="TextBox 10"/>
-          <p:cNvSpPr txBox="1"/>
-          <p:nvPr/>
-        </p:nvSpPr>
-        <p:spPr>
-          <a:xfrm>
-            <a:off x="530352" y="2893060"/>
-            <a:ext cx="3527450" cy="350266"/>
-          </a:xfrm>
-          <a:prstGeom prst="rect">
-            <a:avLst/>
-          </a:prstGeom>
-          <a:noFill/>
-        </p:spPr>
-        <p:txBody>
-          <a:bodyPr wrap="square" anchor="t" lIns="0" rIns="0" tIns="0" bIns="0">
-            <a:spAutoFit/>
-          </a:bodyPr>
-          <a:lstStyle/>
-          <a:p>
-            <a:pPr algn="l"/>
-            <a:r>
-              <a:rPr sz="950" b="0" i="0">
-                <a:solidFill>
-                  <a:srgbClr val="6B6690"/>
-                </a:solidFill>
-                <a:latin typeface="Calibri"/>
-              </a:rPr>
-              <a:t>festival-aligned, raised 2.6 percent, 3,719 in the week of 19 October</a:t>
-            </a:r>
-          </a:p>
-        </p:txBody>
-      </p:sp>
-      <p:sp>
-        <p:nvSpPr>
-          <p:cNvPr id="12" name="Rectangle 11"/>
-          <p:cNvSpPr/>
-          <p:nvPr/>
-        </p:nvSpPr>
-        <p:spPr>
-          <a:xfrm>
-            <a:off x="530352" y="3145536"/>
-            <a:ext cx="3527450" cy="10972"/>
-          </a:xfrm>
-          <a:prstGeom prst="rect">
-            <a:avLst/>
+            <a:ext cx="2079894" cy="2575560"/>
+          </a:xfrm>
+          <a:prstGeom prst="roundRect">
+            <a:avLst>
+              <a:gd name="adj" fmla="val 5000"/>
+            </a:avLst>
           </a:prstGeom>
           <a:solidFill>
-            <a:srgbClr val="E4E1F1"/>
+            <a:srgbClr val="FFFFFF"/>
           </a:solidFill>
-          <a:ln>
-            <a:noFill/>
+          <a:ln w="9525">
+            <a:solidFill>
+              <a:srgbClr val="E4E1F1"/>
+            </a:solidFill>
           </a:ln>
-          <a:effectLst/>
+          <a:effectLst>
+            <a:outerShdw blurRad="76200" dist="19050" dir="5400000" algn="bl" rotWithShape="0">
+              <a:srgbClr val="1A0F5C">
+                <a:alpha val="12000"/>
+              </a:srgbClr>
+            </a:outerShdw>
+          </a:effectLst>
         </p:spPr>
         <p:style>
           <a:lnRef idx="1">
@@ -8010,125 +7759,20 @@
       </p:sp>
       <p:sp>
         <p:nvSpPr>
-          <p:cNvPr id="13" name="TextBox 12"/>
-          <p:cNvSpPr txBox="1"/>
-          <p:nvPr/>
-        </p:nvSpPr>
-        <p:spPr>
-          <a:xfrm>
-            <a:off x="4332122" y="1956816"/>
-            <a:ext cx="3527450" cy="698500"/>
-          </a:xfrm>
-          <a:prstGeom prst="rect">
-            <a:avLst/>
-          </a:prstGeom>
-          <a:noFill/>
-        </p:spPr>
-        <p:txBody>
-          <a:bodyPr wrap="square" anchor="t" lIns="0" rIns="0" tIns="0" bIns="0">
-            <a:spAutoFit/>
-          </a:bodyPr>
-          <a:lstStyle/>
-          <a:p>
-            <a:pPr algn="l"/>
-            <a:r>
-              <a:rPr sz="4400" b="0" i="0">
-                <a:solidFill>
-                  <a:srgbClr val="5B3FD6"/>
-                </a:solidFill>
-                <a:latin typeface="Georgia"/>
-              </a:rPr>
-              <a:t>6,615</a:t>
-            </a:r>
-          </a:p>
-        </p:txBody>
-      </p:sp>
-      <p:sp>
-        <p:nvSpPr>
-          <p:cNvPr id="14" name="TextBox 13"/>
-          <p:cNvSpPr txBox="1"/>
-          <p:nvPr/>
-        </p:nvSpPr>
-        <p:spPr>
-          <a:xfrm>
-            <a:off x="4332122" y="2691892"/>
-            <a:ext cx="3527450" cy="168656"/>
-          </a:xfrm>
-          <a:prstGeom prst="rect">
-            <a:avLst/>
-          </a:prstGeom>
-          <a:noFill/>
-        </p:spPr>
-        <p:txBody>
-          <a:bodyPr wrap="square" anchor="t" lIns="0" rIns="0" tIns="0" bIns="0">
-            <a:spAutoFit/>
-          </a:bodyPr>
-          <a:lstStyle/>
-          <a:p>
-            <a:pPr algn="l"/>
-            <a:r>
-              <a:rPr sz="800" b="1" i="0" spc="250">
-                <a:solidFill>
-                  <a:srgbClr val="1A0F5C"/>
-                </a:solidFill>
-                <a:latin typeface="Calibri"/>
-              </a:rPr>
-              <a:t>SHIPMENTS A WEEK, THE ERROR BAR</a:t>
-            </a:r>
-          </a:p>
-        </p:txBody>
-      </p:sp>
-      <p:sp>
-        <p:nvSpPr>
-          <p:cNvPr id="15" name="TextBox 14"/>
-          <p:cNvSpPr txBox="1"/>
-          <p:nvPr/>
-        </p:nvSpPr>
-        <p:spPr>
-          <a:xfrm>
-            <a:off x="4332122" y="2893060"/>
-            <a:ext cx="3527450" cy="350266"/>
-          </a:xfrm>
-          <a:prstGeom prst="rect">
-            <a:avLst/>
-          </a:prstGeom>
-          <a:noFill/>
-        </p:spPr>
-        <p:txBody>
-          <a:bodyPr wrap="square" anchor="t" lIns="0" rIns="0" tIns="0" bIns="0">
-            <a:spAutoFit/>
-          </a:bodyPr>
-          <a:lstStyle/>
-          <a:p>
-            <a:pPr algn="l"/>
-            <a:r>
-              <a:rPr sz="950" b="0" i="0">
-                <a:solidFill>
-                  <a:srgbClr val="6B6690"/>
-                </a:solidFill>
-                <a:latin typeface="Calibri"/>
-              </a:rPr>
-              <a:t>on thirteen hidden weeks: Rs 35,832 if high, Rs 1.7 lakh if low</a:t>
-            </a:r>
-          </a:p>
-        </p:txBody>
-      </p:sp>
-      <p:sp>
-        <p:nvSpPr>
-          <p:cNvPr id="16" name="Rectangle 15"/>
+          <p:cNvPr id="10" name="Oval 9"/>
           <p:cNvSpPr/>
           <p:nvPr/>
         </p:nvSpPr>
         <p:spPr>
           <a:xfrm>
-            <a:off x="4332122" y="3145536"/>
-            <a:ext cx="3527450" cy="10972"/>
-          </a:xfrm>
-          <a:prstGeom prst="rect">
+            <a:off x="731519" y="2157984"/>
+            <a:ext cx="457200" cy="457200"/>
+          </a:xfrm>
+          <a:prstGeom prst="ellipse">
             <a:avLst/>
           </a:prstGeom>
           <a:solidFill>
-            <a:srgbClr val="E4E1F1"/>
+            <a:srgbClr val="EEEAFB"/>
           </a:solidFill>
           <a:ln>
             <a:noFill/>
@@ -8157,16 +7801,40 @@
           </a:p>
         </p:txBody>
       </p:sp>
-      <p:sp>
-        <p:nvSpPr>
-          <p:cNvPr id="17" name="TextBox 16"/>
-          <p:cNvSpPr txBox="1"/>
-          <p:nvPr/>
-        </p:nvSpPr>
-        <p:spPr>
-          <a:xfrm>
-            <a:off x="8133892" y="1956816"/>
-            <a:ext cx="3527450" cy="698500"/>
+      <p:pic>
+        <p:nvPicPr>
+          <p:cNvPr id="11" name="Picture 10" descr="file-text_5c86fecc2881.png"/>
+          <p:cNvPicPr>
+            <a:picLocks noChangeAspect="1"/>
+          </p:cNvPicPr>
+          <p:nvPr/>
+        </p:nvPicPr>
+        <p:blipFill>
+          <a:blip r:embed="rId4"/>
+          <a:stretch>
+            <a:fillRect/>
+          </a:stretch>
+        </p:blipFill>
+        <p:spPr>
+          <a:xfrm>
+            <a:off x="841247" y="2267712"/>
+            <a:ext cx="237744" cy="237744"/>
+          </a:xfrm>
+          <a:prstGeom prst="rect">
+            <a:avLst/>
+          </a:prstGeom>
+        </p:spPr>
+      </p:pic>
+      <p:sp>
+        <p:nvSpPr>
+          <p:cNvPr id="12" name="TextBox 11"/>
+          <p:cNvSpPr txBox="1"/>
+          <p:nvPr/>
+        </p:nvSpPr>
+        <p:spPr>
+          <a:xfrm>
+            <a:off x="731519" y="2724912"/>
+            <a:ext cx="1677558" cy="160401"/>
           </a:xfrm>
           <a:prstGeom prst="rect">
             <a:avLst/>
@@ -8181,27 +7849,27 @@
           <a:p>
             <a:pPr algn="l"/>
             <a:r>
-              <a:rPr sz="4400" b="0" i="0">
+              <a:rPr sz="750" b="1" i="0" spc="250">
                 <a:solidFill>
                   <a:srgbClr val="5B3FD6"/>
                 </a:solidFill>
-                <a:latin typeface="Georgia"/>
-              </a:rPr>
-              <a:t>0.82</a:t>
-            </a:r>
-          </a:p>
-        </p:txBody>
-      </p:sp>
-      <p:sp>
-        <p:nvSpPr>
-          <p:cNvPr id="18" name="TextBox 17"/>
-          <p:cNvSpPr txBox="1"/>
-          <p:nvPr/>
-        </p:nvSpPr>
-        <p:spPr>
-          <a:xfrm>
-            <a:off x="8133892" y="2691892"/>
-            <a:ext cx="3527450" cy="168656"/>
+                <a:latin typeface="Calibri"/>
+              </a:rPr>
+              <a:t>1</a:t>
+            </a:r>
+          </a:p>
+        </p:txBody>
+      </p:sp>
+      <p:sp>
+        <p:nvSpPr>
+          <p:cNvPr id="13" name="TextBox 12"/>
+          <p:cNvSpPr txBox="1"/>
+          <p:nvPr/>
+        </p:nvSpPr>
+        <p:spPr>
+          <a:xfrm>
+            <a:off x="731519" y="2962656"/>
+            <a:ext cx="1677558" cy="498856"/>
           </a:xfrm>
           <a:prstGeom prst="rect">
             <a:avLst/>
@@ -8216,27 +7884,27 @@
           <a:p>
             <a:pPr algn="l"/>
             <a:r>
-              <a:rPr sz="800" b="1" i="0" spc="250">
+              <a:rPr sz="1400" b="1" i="0">
                 <a:solidFill>
                   <a:srgbClr val="1A0F5C"/>
                 </a:solidFill>
                 <a:latin typeface="Calibri"/>
               </a:rPr>
-              <a:t>THE SHARE OF WEEKS TO COVER</a:t>
-            </a:r>
-          </a:p>
-        </p:txBody>
-      </p:sp>
-      <p:sp>
-        <p:nvSpPr>
-          <p:cNvPr id="19" name="TextBox 18"/>
-          <p:cNvSpPr txBox="1"/>
-          <p:nvPr/>
-        </p:nvSpPr>
-        <p:spPr>
-          <a:xfrm>
-            <a:off x="8133892" y="2893060"/>
-            <a:ext cx="3527450" cy="193421"/>
+              <a:t>The claim as the title</a:t>
+            </a:r>
+          </a:p>
+        </p:txBody>
+      </p:sp>
+      <p:sp>
+        <p:nvSpPr>
+          <p:cNvPr id="14" name="TextBox 13"/>
+          <p:cNvSpPr txBox="1"/>
+          <p:nvPr/>
+        </p:nvSpPr>
+        <p:spPr>
+          <a:xfrm>
+            <a:off x="731519" y="3534664"/>
+            <a:ext cx="1677558" cy="581406"/>
           </a:xfrm>
           <a:prstGeom prst="rect">
             <a:avLst/>
@@ -8251,38 +7919,48 @@
           <a:p>
             <a:pPr algn="l"/>
             <a:r>
-              <a:rPr sz="950" b="0" i="0">
+              <a:rPr sz="1100" b="0" i="0">
                 <a:solidFill>
                   <a:srgbClr val="6B6690"/>
                 </a:solidFill>
                 <a:latin typeface="Calibri"/>
               </a:rPr>
-              <a:t>25 / (25 + 5.42): being short costs 4.6 times being long</a:t>
-            </a:r>
-          </a:p>
-        </p:txBody>
-      </p:sp>
-      <p:sp>
-        <p:nvSpPr>
-          <p:cNvPr id="20" name="Rectangle 19"/>
+              <a:t>How many shifts, which weeks, from which forecast, in one sentence.</a:t>
+            </a:r>
+          </a:p>
+        </p:txBody>
+      </p:sp>
+      <p:sp>
+        <p:nvSpPr>
+          <p:cNvPr id="15" name="Rounded Rectangle 14"/>
           <p:cNvSpPr/>
           <p:nvPr/>
         </p:nvSpPr>
         <p:spPr>
           <a:xfrm>
-            <a:off x="8133892" y="3145536"/>
-            <a:ext cx="3527450" cy="10972"/>
-          </a:xfrm>
-          <a:prstGeom prst="rect">
-            <a:avLst/>
+            <a:off x="2793126" y="1956816"/>
+            <a:ext cx="2079894" cy="2575560"/>
+          </a:xfrm>
+          <a:prstGeom prst="roundRect">
+            <a:avLst>
+              <a:gd name="adj" fmla="val 5000"/>
+            </a:avLst>
           </a:prstGeom>
           <a:solidFill>
-            <a:srgbClr val="E4E1F1"/>
+            <a:srgbClr val="FFFFFF"/>
           </a:solidFill>
-          <a:ln>
-            <a:noFill/>
+          <a:ln w="9525">
+            <a:solidFill>
+              <a:srgbClr val="E4E1F1"/>
+            </a:solidFill>
           </a:ln>
-          <a:effectLst/>
+          <a:effectLst>
+            <a:outerShdw blurRad="76200" dist="19050" dir="5400000" algn="bl" rotWithShape="0">
+              <a:srgbClr val="1A0F5C">
+                <a:alpha val="12000"/>
+              </a:srgbClr>
+            </a:outerShdw>
+          </a:effectLst>
         </p:spPr>
         <p:style>
           <a:lnRef idx="1">
@@ -8308,7 +7986,906 @@
       </p:sp>
       <p:sp>
         <p:nvSpPr>
-          <p:cNvPr id="21" name="TextBox 20"/>
+          <p:cNvPr id="16" name="Oval 15"/>
+          <p:cNvSpPr/>
+          <p:nvPr/>
+        </p:nvSpPr>
+        <p:spPr>
+          <a:xfrm>
+            <a:off x="2994294" y="2157984"/>
+            <a:ext cx="457200" cy="457200"/>
+          </a:xfrm>
+          <a:prstGeom prst="ellipse">
+            <a:avLst/>
+          </a:prstGeom>
+          <a:solidFill>
+            <a:srgbClr val="EEEAFB"/>
+          </a:solidFill>
+          <a:ln>
+            <a:noFill/>
+          </a:ln>
+          <a:effectLst/>
+        </p:spPr>
+        <p:style>
+          <a:lnRef idx="1">
+            <a:schemeClr val="accent1"/>
+          </a:lnRef>
+          <a:fillRef idx="3">
+            <a:schemeClr val="accent1"/>
+          </a:fillRef>
+          <a:effectRef idx="2">
+            <a:schemeClr val="accent1"/>
+          </a:effectRef>
+          <a:fontRef idx="minor">
+            <a:schemeClr val="lt1"/>
+          </a:fontRef>
+        </p:style>
+        <p:txBody>
+          <a:bodyPr rtlCol="0" anchor="ctr" wrap="square"/>
+          <a:lstStyle/>
+          <a:p>
+            <a:pPr algn="ctr"/>
+          </a:p>
+        </p:txBody>
+      </p:sp>
+      <p:pic>
+        <p:nvPicPr>
+          <p:cNvPr id="17" name="Picture 16" descr="calendar_52de2a000930.png"/>
+          <p:cNvPicPr>
+            <a:picLocks noChangeAspect="1"/>
+          </p:cNvPicPr>
+          <p:nvPr/>
+        </p:nvPicPr>
+        <p:blipFill>
+          <a:blip r:embed="rId5"/>
+          <a:stretch>
+            <a:fillRect/>
+          </a:stretch>
+        </p:blipFill>
+        <p:spPr>
+          <a:xfrm>
+            <a:off x="3104022" y="2267712"/>
+            <a:ext cx="237744" cy="237744"/>
+          </a:xfrm>
+          <a:prstGeom prst="rect">
+            <a:avLst/>
+          </a:prstGeom>
+        </p:spPr>
+      </p:pic>
+      <p:sp>
+        <p:nvSpPr>
+          <p:cNvPr id="18" name="TextBox 17"/>
+          <p:cNvSpPr txBox="1"/>
+          <p:nvPr/>
+        </p:nvSpPr>
+        <p:spPr>
+          <a:xfrm>
+            <a:off x="2994294" y="2724912"/>
+            <a:ext cx="1677558" cy="160401"/>
+          </a:xfrm>
+          <a:prstGeom prst="rect">
+            <a:avLst/>
+          </a:prstGeom>
+          <a:noFill/>
+        </p:spPr>
+        <p:txBody>
+          <a:bodyPr wrap="square" anchor="t" lIns="0" rIns="0" tIns="0" bIns="0">
+            <a:spAutoFit/>
+          </a:bodyPr>
+          <a:lstStyle/>
+          <a:p>
+            <a:pPr algn="l"/>
+            <a:r>
+              <a:rPr sz="750" b="1" i="0" spc="250">
+                <a:solidFill>
+                  <a:srgbClr val="5B3FD6"/>
+                </a:solidFill>
+                <a:latin typeface="Calibri"/>
+              </a:rPr>
+              <a:t>2</a:t>
+            </a:r>
+          </a:p>
+        </p:txBody>
+      </p:sp>
+      <p:sp>
+        <p:nvSpPr>
+          <p:cNvPr id="19" name="TextBox 18"/>
+          <p:cNvSpPr txBox="1"/>
+          <p:nvPr/>
+        </p:nvSpPr>
+        <p:spPr>
+          <a:xfrm>
+            <a:off x="2994294" y="2962656"/>
+            <a:ext cx="1677558" cy="498856"/>
+          </a:xfrm>
+          <a:prstGeom prst="rect">
+            <a:avLst/>
+          </a:prstGeom>
+          <a:noFill/>
+        </p:spPr>
+        <p:txBody>
+          <a:bodyPr wrap="square" anchor="t" lIns="0" rIns="0" tIns="0" bIns="0">
+            <a:spAutoFit/>
+          </a:bodyPr>
+          <a:lstStyle/>
+          <a:p>
+            <a:pPr algn="l"/>
+            <a:r>
+              <a:rPr sz="1400" b="1" i="0">
+                <a:solidFill>
+                  <a:srgbClr val="1A0F5C"/>
+                </a:solidFill>
+                <a:latin typeface="Calibri"/>
+              </a:rPr>
+              <a:t>The festival placed</a:t>
+            </a:r>
+          </a:p>
+        </p:txBody>
+      </p:sp>
+      <p:sp>
+        <p:nvSpPr>
+          <p:cNvPr id="20" name="TextBox 19"/>
+          <p:cNvSpPr txBox="1"/>
+          <p:nvPr/>
+        </p:nvSpPr>
+        <p:spPr>
+          <a:xfrm>
+            <a:off x="2994294" y="3534664"/>
+            <a:ext cx="1677558" cy="763016"/>
+          </a:xfrm>
+          <a:prstGeom prst="rect">
+            <a:avLst/>
+          </a:prstGeom>
+          <a:noFill/>
+        </p:spPr>
+        <p:txBody>
+          <a:bodyPr wrap="square" anchor="t" lIns="0" rIns="0" tIns="0" bIns="0">
+            <a:spAutoFit/>
+          </a:bodyPr>
+          <a:lstStyle/>
+          <a:p>
+            <a:pPr algn="l"/>
+            <a:r>
+              <a:rPr sz="1100" b="0" i="0">
+                <a:solidFill>
+                  <a:srgbClr val="6B6690"/>
+                </a:solidFill>
+                <a:latin typeface="Calibri"/>
+              </a:rPr>
+              <a:t>Which week is the peak and why: the distance from Diwali, never the calendar.</a:t>
+            </a:r>
+          </a:p>
+        </p:txBody>
+      </p:sp>
+      <p:sp>
+        <p:nvSpPr>
+          <p:cNvPr id="21" name="Rounded Rectangle 20"/>
+          <p:cNvSpPr/>
+          <p:nvPr/>
+        </p:nvSpPr>
+        <p:spPr>
+          <a:xfrm>
+            <a:off x="5055900" y="1956816"/>
+            <a:ext cx="2079894" cy="2575560"/>
+          </a:xfrm>
+          <a:prstGeom prst="roundRect">
+            <a:avLst>
+              <a:gd name="adj" fmla="val 5000"/>
+            </a:avLst>
+          </a:prstGeom>
+          <a:solidFill>
+            <a:srgbClr val="FFFFFF"/>
+          </a:solidFill>
+          <a:ln w="9525">
+            <a:solidFill>
+              <a:srgbClr val="E4E1F1"/>
+            </a:solidFill>
+          </a:ln>
+          <a:effectLst>
+            <a:outerShdw blurRad="76200" dist="19050" dir="5400000" algn="bl" rotWithShape="0">
+              <a:srgbClr val="1A0F5C">
+                <a:alpha val="12000"/>
+              </a:srgbClr>
+            </a:outerShdw>
+          </a:effectLst>
+        </p:spPr>
+        <p:style>
+          <a:lnRef idx="1">
+            <a:schemeClr val="accent1"/>
+          </a:lnRef>
+          <a:fillRef idx="3">
+            <a:schemeClr val="accent1"/>
+          </a:fillRef>
+          <a:effectRef idx="2">
+            <a:schemeClr val="accent1"/>
+          </a:effectRef>
+          <a:fontRef idx="minor">
+            <a:schemeClr val="lt1"/>
+          </a:fontRef>
+        </p:style>
+        <p:txBody>
+          <a:bodyPr rtlCol="0" anchor="ctr" wrap="square"/>
+          <a:lstStyle/>
+          <a:p>
+            <a:pPr algn="ctr"/>
+          </a:p>
+        </p:txBody>
+      </p:sp>
+      <p:sp>
+        <p:nvSpPr>
+          <p:cNvPr id="22" name="Oval 21"/>
+          <p:cNvSpPr/>
+          <p:nvPr/>
+        </p:nvSpPr>
+        <p:spPr>
+          <a:xfrm>
+            <a:off x="5257068" y="2157984"/>
+            <a:ext cx="457200" cy="457200"/>
+          </a:xfrm>
+          <a:prstGeom prst="ellipse">
+            <a:avLst/>
+          </a:prstGeom>
+          <a:solidFill>
+            <a:srgbClr val="EEEAFB"/>
+          </a:solidFill>
+          <a:ln>
+            <a:noFill/>
+          </a:ln>
+          <a:effectLst/>
+        </p:spPr>
+        <p:style>
+          <a:lnRef idx="1">
+            <a:schemeClr val="accent1"/>
+          </a:lnRef>
+          <a:fillRef idx="3">
+            <a:schemeClr val="accent1"/>
+          </a:fillRef>
+          <a:effectRef idx="2">
+            <a:schemeClr val="accent1"/>
+          </a:effectRef>
+          <a:fontRef idx="minor">
+            <a:schemeClr val="lt1"/>
+          </a:fontRef>
+        </p:style>
+        <p:txBody>
+          <a:bodyPr rtlCol="0" anchor="ctr" wrap="square"/>
+          <a:lstStyle/>
+          <a:p>
+            <a:pPr algn="ctr"/>
+          </a:p>
+        </p:txBody>
+      </p:sp>
+      <p:pic>
+        <p:nvPicPr>
+          <p:cNvPr id="23" name="Picture 22" descr="ruler_ec66f5961a99.png"/>
+          <p:cNvPicPr>
+            <a:picLocks noChangeAspect="1"/>
+          </p:cNvPicPr>
+          <p:nvPr/>
+        </p:nvPicPr>
+        <p:blipFill>
+          <a:blip r:embed="rId6"/>
+          <a:stretch>
+            <a:fillRect/>
+          </a:stretch>
+        </p:blipFill>
+        <p:spPr>
+          <a:xfrm>
+            <a:off x="5366796" y="2267712"/>
+            <a:ext cx="237744" cy="237744"/>
+          </a:xfrm>
+          <a:prstGeom prst="rect">
+            <a:avLst/>
+          </a:prstGeom>
+        </p:spPr>
+      </p:pic>
+      <p:sp>
+        <p:nvSpPr>
+          <p:cNvPr id="24" name="TextBox 23"/>
+          <p:cNvSpPr txBox="1"/>
+          <p:nvPr/>
+        </p:nvSpPr>
+        <p:spPr>
+          <a:xfrm>
+            <a:off x="5257068" y="2724912"/>
+            <a:ext cx="1677558" cy="160401"/>
+          </a:xfrm>
+          <a:prstGeom prst="rect">
+            <a:avLst/>
+          </a:prstGeom>
+          <a:noFill/>
+        </p:spPr>
+        <p:txBody>
+          <a:bodyPr wrap="square" anchor="t" lIns="0" rIns="0" tIns="0" bIns="0">
+            <a:spAutoFit/>
+          </a:bodyPr>
+          <a:lstStyle/>
+          <a:p>
+            <a:pPr algn="l"/>
+            <a:r>
+              <a:rPr sz="750" b="1" i="0" spc="250">
+                <a:solidFill>
+                  <a:srgbClr val="5B3FD6"/>
+                </a:solidFill>
+                <a:latin typeface="Calibri"/>
+              </a:rPr>
+              <a:t>3</a:t>
+            </a:r>
+          </a:p>
+        </p:txBody>
+      </p:sp>
+      <p:sp>
+        <p:nvSpPr>
+          <p:cNvPr id="25" name="TextBox 24"/>
+          <p:cNvSpPr txBox="1"/>
+          <p:nvPr/>
+        </p:nvSpPr>
+        <p:spPr>
+          <a:xfrm>
+            <a:off x="5257068" y="2962656"/>
+            <a:ext cx="1677558" cy="498856"/>
+          </a:xfrm>
+          <a:prstGeom prst="rect">
+            <a:avLst/>
+          </a:prstGeom>
+          <a:noFill/>
+        </p:spPr>
+        <p:txBody>
+          <a:bodyPr wrap="square" anchor="t" lIns="0" rIns="0" tIns="0" bIns="0">
+            <a:spAutoFit/>
+          </a:bodyPr>
+          <a:lstStyle/>
+          <a:p>
+            <a:pPr algn="l"/>
+            <a:r>
+              <a:rPr sz="1400" b="1" i="0">
+                <a:solidFill>
+                  <a:srgbClr val="1A0F5C"/>
+                </a:solidFill>
+                <a:latin typeface="Calibri"/>
+              </a:rPr>
+              <a:t>The error bar in rupees</a:t>
+            </a:r>
+          </a:p>
+        </p:txBody>
+      </p:sp>
+      <p:sp>
+        <p:nvSpPr>
+          <p:cNvPr id="26" name="TextBox 25"/>
+          <p:cNvSpPr txBox="1"/>
+          <p:nvPr/>
+        </p:nvSpPr>
+        <p:spPr>
+          <a:xfrm>
+            <a:off x="5257068" y="3534664"/>
+            <a:ext cx="1677558" cy="763016"/>
+          </a:xfrm>
+          <a:prstGeom prst="rect">
+            <a:avLst/>
+          </a:prstGeom>
+          <a:noFill/>
+        </p:spPr>
+        <p:txBody>
+          <a:bodyPr wrap="square" anchor="t" lIns="0" rIns="0" tIns="0" bIns="0">
+            <a:spAutoFit/>
+          </a:bodyPr>
+          <a:lstStyle/>
+          <a:p>
+            <a:pPr algn="l"/>
+            <a:r>
+              <a:rPr sz="1100" b="0" i="0">
+                <a:solidFill>
+                  <a:srgbClr val="6B6690"/>
+                </a:solidFill>
+                <a:latin typeface="Calibri"/>
+              </a:rPr>
+              <a:t>Shipments a week, priced in each direction, and the festival's own record.</a:t>
+            </a:r>
+          </a:p>
+        </p:txBody>
+      </p:sp>
+      <p:sp>
+        <p:nvSpPr>
+          <p:cNvPr id="27" name="Rounded Rectangle 26"/>
+          <p:cNvSpPr/>
+          <p:nvPr/>
+        </p:nvSpPr>
+        <p:spPr>
+          <a:xfrm>
+            <a:off x="7318674" y="1956816"/>
+            <a:ext cx="2079894" cy="2575560"/>
+          </a:xfrm>
+          <a:prstGeom prst="roundRect">
+            <a:avLst>
+              <a:gd name="adj" fmla="val 5000"/>
+            </a:avLst>
+          </a:prstGeom>
+          <a:solidFill>
+            <a:srgbClr val="FFFFFF"/>
+          </a:solidFill>
+          <a:ln w="9525">
+            <a:solidFill>
+              <a:srgbClr val="E4E1F1"/>
+            </a:solidFill>
+          </a:ln>
+          <a:effectLst>
+            <a:outerShdw blurRad="76200" dist="19050" dir="5400000" algn="bl" rotWithShape="0">
+              <a:srgbClr val="1A0F5C">
+                <a:alpha val="12000"/>
+              </a:srgbClr>
+            </a:outerShdw>
+          </a:effectLst>
+        </p:spPr>
+        <p:style>
+          <a:lnRef idx="1">
+            <a:schemeClr val="accent1"/>
+          </a:lnRef>
+          <a:fillRef idx="3">
+            <a:schemeClr val="accent1"/>
+          </a:fillRef>
+          <a:effectRef idx="2">
+            <a:schemeClr val="accent1"/>
+          </a:effectRef>
+          <a:fontRef idx="minor">
+            <a:schemeClr val="lt1"/>
+          </a:fontRef>
+        </p:style>
+        <p:txBody>
+          <a:bodyPr rtlCol="0" anchor="ctr" wrap="square"/>
+          <a:lstStyle/>
+          <a:p>
+            <a:pPr algn="ctr"/>
+          </a:p>
+        </p:txBody>
+      </p:sp>
+      <p:sp>
+        <p:nvSpPr>
+          <p:cNvPr id="28" name="Oval 27"/>
+          <p:cNvSpPr/>
+          <p:nvPr/>
+        </p:nvSpPr>
+        <p:spPr>
+          <a:xfrm>
+            <a:off x="7519842" y="2157984"/>
+            <a:ext cx="457200" cy="457200"/>
+          </a:xfrm>
+          <a:prstGeom prst="ellipse">
+            <a:avLst/>
+          </a:prstGeom>
+          <a:solidFill>
+            <a:srgbClr val="EEEAFB"/>
+          </a:solidFill>
+          <a:ln>
+            <a:noFill/>
+          </a:ln>
+          <a:effectLst/>
+        </p:spPr>
+        <p:style>
+          <a:lnRef idx="1">
+            <a:schemeClr val="accent1"/>
+          </a:lnRef>
+          <a:fillRef idx="3">
+            <a:schemeClr val="accent1"/>
+          </a:fillRef>
+          <a:effectRef idx="2">
+            <a:schemeClr val="accent1"/>
+          </a:effectRef>
+          <a:fontRef idx="minor">
+            <a:schemeClr val="lt1"/>
+          </a:fontRef>
+        </p:style>
+        <p:txBody>
+          <a:bodyPr rtlCol="0" anchor="ctr" wrap="square"/>
+          <a:lstStyle/>
+          <a:p>
+            <a:pPr algn="ctr"/>
+          </a:p>
+        </p:txBody>
+      </p:sp>
+      <p:pic>
+        <p:nvPicPr>
+          <p:cNvPr id="29" name="Picture 28" descr="circle-alert_2885187cc141.png"/>
+          <p:cNvPicPr>
+            <a:picLocks noChangeAspect="1"/>
+          </p:cNvPicPr>
+          <p:nvPr/>
+        </p:nvPicPr>
+        <p:blipFill>
+          <a:blip r:embed="rId7"/>
+          <a:stretch>
+            <a:fillRect/>
+          </a:stretch>
+        </p:blipFill>
+        <p:spPr>
+          <a:xfrm>
+            <a:off x="7629570" y="2267712"/>
+            <a:ext cx="237744" cy="237744"/>
+          </a:xfrm>
+          <a:prstGeom prst="rect">
+            <a:avLst/>
+          </a:prstGeom>
+        </p:spPr>
+      </p:pic>
+      <p:sp>
+        <p:nvSpPr>
+          <p:cNvPr id="30" name="TextBox 29"/>
+          <p:cNvSpPr txBox="1"/>
+          <p:nvPr/>
+        </p:nvSpPr>
+        <p:spPr>
+          <a:xfrm>
+            <a:off x="7519842" y="2724912"/>
+            <a:ext cx="1677558" cy="160401"/>
+          </a:xfrm>
+          <a:prstGeom prst="rect">
+            <a:avLst/>
+          </a:prstGeom>
+          <a:noFill/>
+        </p:spPr>
+        <p:txBody>
+          <a:bodyPr wrap="square" anchor="t" lIns="0" rIns="0" tIns="0" bIns="0">
+            <a:spAutoFit/>
+          </a:bodyPr>
+          <a:lstStyle/>
+          <a:p>
+            <a:pPr algn="l"/>
+            <a:r>
+              <a:rPr sz="750" b="1" i="0" spc="250">
+                <a:solidFill>
+                  <a:srgbClr val="5B3FD6"/>
+                </a:solidFill>
+                <a:latin typeface="Calibri"/>
+              </a:rPr>
+              <a:t>4</a:t>
+            </a:r>
+          </a:p>
+        </p:txBody>
+      </p:sp>
+      <p:sp>
+        <p:nvSpPr>
+          <p:cNvPr id="31" name="TextBox 30"/>
+          <p:cNvSpPr txBox="1"/>
+          <p:nvPr/>
+        </p:nvSpPr>
+        <p:spPr>
+          <a:xfrm>
+            <a:off x="7519842" y="2962656"/>
+            <a:ext cx="1677558" cy="498856"/>
+          </a:xfrm>
+          <a:prstGeom prst="rect">
+            <a:avLst/>
+          </a:prstGeom>
+          <a:noFill/>
+        </p:spPr>
+        <p:txBody>
+          <a:bodyPr wrap="square" anchor="t" lIns="0" rIns="0" tIns="0" bIns="0">
+            <a:spAutoFit/>
+          </a:bodyPr>
+          <a:lstStyle/>
+          <a:p>
+            <a:pPr algn="l"/>
+            <a:r>
+              <a:rPr sz="1400" b="1" i="0">
+                <a:solidFill>
+                  <a:srgbClr val="1A0F5C"/>
+                </a:solidFill>
+                <a:latin typeface="Calibri"/>
+              </a:rPr>
+              <a:t>What would make it wrong</a:t>
+            </a:r>
+          </a:p>
+        </p:txBody>
+      </p:sp>
+      <p:sp>
+        <p:nvSpPr>
+          <p:cNvPr id="32" name="TextBox 31"/>
+          <p:cNvSpPr txBox="1"/>
+          <p:nvPr/>
+        </p:nvSpPr>
+        <p:spPr>
+          <a:xfrm>
+            <a:off x="7519842" y="3534664"/>
+            <a:ext cx="1677558" cy="581406"/>
+          </a:xfrm>
+          <a:prstGeom prst="rect">
+            <a:avLst/>
+          </a:prstGeom>
+          <a:noFill/>
+        </p:spPr>
+        <p:txBody>
+          <a:bodyPr wrap="square" anchor="t" lIns="0" rIns="0" tIns="0" bIns="0">
+            <a:spAutoFit/>
+          </a:bodyPr>
+          <a:lstStyle/>
+          <a:p>
+            <a:pPr algn="l"/>
+            <a:r>
+              <a:rPr sz="1100" b="0" i="0">
+                <a:solidFill>
+                  <a:srgbClr val="6B6690"/>
+                </a:solidFill>
+                <a:latin typeface="Calibri"/>
+              </a:rPr>
+              <a:t>Three facts that would move the number, each with its check.</a:t>
+            </a:r>
+          </a:p>
+        </p:txBody>
+      </p:sp>
+      <p:sp>
+        <p:nvSpPr>
+          <p:cNvPr id="33" name="Rounded Rectangle 32"/>
+          <p:cNvSpPr/>
+          <p:nvPr/>
+        </p:nvSpPr>
+        <p:spPr>
+          <a:xfrm>
+            <a:off x="9581448" y="1956816"/>
+            <a:ext cx="2079894" cy="2575560"/>
+          </a:xfrm>
+          <a:prstGeom prst="roundRect">
+            <a:avLst>
+              <a:gd name="adj" fmla="val 5000"/>
+            </a:avLst>
+          </a:prstGeom>
+          <a:gradFill rotWithShape="1">
+            <a:gsLst>
+              <a:gs pos="0">
+                <a:srgbClr val="2C1A86"/>
+              </a:gs>
+              <a:gs pos="100000">
+                <a:srgbClr val="1A0F5C"/>
+              </a:gs>
+            </a:gsLst>
+            <a:lin scaled="0" ang="16200000"/>
+          </a:gradFill>
+          <a:ln>
+            <a:noFill/>
+          </a:ln>
+          <a:effectLst>
+            <a:outerShdw blurRad="76200" dist="19050" dir="5400000" algn="bl" rotWithShape="0">
+              <a:srgbClr val="1A0F5C">
+                <a:alpha val="12000"/>
+              </a:srgbClr>
+            </a:outerShdw>
+          </a:effectLst>
+        </p:spPr>
+        <p:style>
+          <a:lnRef idx="1">
+            <a:schemeClr val="accent1"/>
+          </a:lnRef>
+          <a:fillRef idx="3">
+            <a:schemeClr val="accent1"/>
+          </a:fillRef>
+          <a:effectRef idx="2">
+            <a:schemeClr val="accent1"/>
+          </a:effectRef>
+          <a:fontRef idx="minor">
+            <a:schemeClr val="lt1"/>
+          </a:fontRef>
+        </p:style>
+        <p:txBody>
+          <a:bodyPr rtlCol="0" anchor="ctr" wrap="square"/>
+          <a:lstStyle/>
+          <a:p>
+            <a:pPr algn="ctr"/>
+          </a:p>
+        </p:txBody>
+      </p:sp>
+      <p:sp>
+        <p:nvSpPr>
+          <p:cNvPr id="34" name="Oval 33"/>
+          <p:cNvSpPr/>
+          <p:nvPr/>
+        </p:nvSpPr>
+        <p:spPr>
+          <a:xfrm>
+            <a:off x="9782616" y="2157984"/>
+            <a:ext cx="457200" cy="457200"/>
+          </a:xfrm>
+          <a:prstGeom prst="ellipse">
+            <a:avLst/>
+          </a:prstGeom>
+          <a:solidFill>
+            <a:srgbClr val="5B3FD6"/>
+          </a:solidFill>
+          <a:ln>
+            <a:noFill/>
+          </a:ln>
+          <a:effectLst/>
+        </p:spPr>
+        <p:style>
+          <a:lnRef idx="1">
+            <a:schemeClr val="accent1"/>
+          </a:lnRef>
+          <a:fillRef idx="3">
+            <a:schemeClr val="accent1"/>
+          </a:fillRef>
+          <a:effectRef idx="2">
+            <a:schemeClr val="accent1"/>
+          </a:effectRef>
+          <a:fontRef idx="minor">
+            <a:schemeClr val="lt1"/>
+          </a:fontRef>
+        </p:style>
+        <p:txBody>
+          <a:bodyPr rtlCol="0" anchor="ctr" wrap="square"/>
+          <a:lstStyle/>
+          <a:p>
+            <a:pPr algn="ctr"/>
+          </a:p>
+        </p:txBody>
+      </p:sp>
+      <p:pic>
+        <p:nvPicPr>
+          <p:cNvPr id="35" name="Picture 34" descr="scale_e4d6117bdfb8.png"/>
+          <p:cNvPicPr>
+            <a:picLocks noChangeAspect="1"/>
+          </p:cNvPicPr>
+          <p:nvPr/>
+        </p:nvPicPr>
+        <p:blipFill>
+          <a:blip r:embed="rId8"/>
+          <a:stretch>
+            <a:fillRect/>
+          </a:stretch>
+        </p:blipFill>
+        <p:spPr>
+          <a:xfrm>
+            <a:off x="9892344" y="2267712"/>
+            <a:ext cx="237744" cy="237744"/>
+          </a:xfrm>
+          <a:prstGeom prst="rect">
+            <a:avLst/>
+          </a:prstGeom>
+        </p:spPr>
+      </p:pic>
+      <p:sp>
+        <p:nvSpPr>
+          <p:cNvPr id="36" name="TextBox 35"/>
+          <p:cNvSpPr txBox="1"/>
+          <p:nvPr/>
+        </p:nvSpPr>
+        <p:spPr>
+          <a:xfrm>
+            <a:off x="9782616" y="2724912"/>
+            <a:ext cx="1677558" cy="160401"/>
+          </a:xfrm>
+          <a:prstGeom prst="rect">
+            <a:avLst/>
+          </a:prstGeom>
+          <a:noFill/>
+        </p:spPr>
+        <p:txBody>
+          <a:bodyPr wrap="square" anchor="t" lIns="0" rIns="0" tIns="0" bIns="0">
+            <a:spAutoFit/>
+          </a:bodyPr>
+          <a:lstStyle/>
+          <a:p>
+            <a:pPr algn="l"/>
+            <a:r>
+              <a:rPr sz="750" b="1" i="0" spc="250">
+                <a:solidFill>
+                  <a:srgbClr val="D9A7FF"/>
+                </a:solidFill>
+                <a:latin typeface="Calibri"/>
+              </a:rPr>
+              <a:t>5</a:t>
+            </a:r>
+          </a:p>
+        </p:txBody>
+      </p:sp>
+      <p:sp>
+        <p:nvSpPr>
+          <p:cNvPr id="37" name="TextBox 36"/>
+          <p:cNvSpPr txBox="1"/>
+          <p:nvPr/>
+        </p:nvSpPr>
+        <p:spPr>
+          <a:xfrm>
+            <a:off x="9782616" y="2962656"/>
+            <a:ext cx="1677558" cy="267716"/>
+          </a:xfrm>
+          <a:prstGeom prst="rect">
+            <a:avLst/>
+          </a:prstGeom>
+          <a:noFill/>
+        </p:spPr>
+        <p:txBody>
+          <a:bodyPr wrap="square" anchor="t" lIns="0" rIns="0" tIns="0" bIns="0">
+            <a:spAutoFit/>
+          </a:bodyPr>
+          <a:lstStyle/>
+          <a:p>
+            <a:pPr algn="l"/>
+            <a:r>
+              <a:rPr sz="1400" b="1" i="0">
+                <a:solidFill>
+                  <a:srgbClr val="FFFFFF"/>
+                </a:solidFill>
+                <a:latin typeface="Calibri"/>
+              </a:rPr>
+              <a:t>The two answered</a:t>
+            </a:r>
+          </a:p>
+        </p:txBody>
+      </p:sp>
+      <p:sp>
+        <p:nvSpPr>
+          <p:cNvPr id="38" name="TextBox 37"/>
+          <p:cNvSpPr txBox="1"/>
+          <p:nvPr/>
+        </p:nvSpPr>
+        <p:spPr>
+          <a:xfrm>
+            <a:off x="9782616" y="3303524"/>
+            <a:ext cx="1677558" cy="763016"/>
+          </a:xfrm>
+          <a:prstGeom prst="rect">
+            <a:avLst/>
+          </a:prstGeom>
+          <a:noFill/>
+        </p:spPr>
+        <p:txBody>
+          <a:bodyPr wrap="square" anchor="t" lIns="0" rIns="0" tIns="0" bIns="0">
+            <a:spAutoFit/>
+          </a:bodyPr>
+          <a:lstStyle/>
+          <a:p>
+            <a:pPr algn="l"/>
+            <a:r>
+              <a:rPr sz="1100" b="0" i="0">
+                <a:solidFill>
+                  <a:srgbClr val="CFC9EE"/>
+                </a:solidFill>
+                <a:latin typeface="Calibri"/>
+              </a:rPr>
+              <a:t>One line to finance, one to the vendor's sponsor, conceding the true part.</a:t>
+            </a:r>
+          </a:p>
+        </p:txBody>
+      </p:sp>
+      <p:sp>
+        <p:nvSpPr>
+          <p:cNvPr id="39" name="TextBox 38"/>
+          <p:cNvSpPr txBox="1"/>
+          <p:nvPr/>
+        </p:nvSpPr>
+        <p:spPr>
+          <a:xfrm>
+            <a:off x="530352" y="4715256"/>
+            <a:ext cx="11130991" cy="772160"/>
+          </a:xfrm>
+          <a:prstGeom prst="rect">
+            <a:avLst/>
+          </a:prstGeom>
+          <a:noFill/>
+        </p:spPr>
+        <p:txBody>
+          <a:bodyPr wrap="square" anchor="t" lIns="0" rIns="0" tIns="0" bIns="0">
+            <a:spAutoFit/>
+          </a:bodyPr>
+          <a:lstStyle/>
+          <a:p>
+            <a:pPr>
+              <a:spcAft>
+                <a:spcPts val="800"/>
+              </a:spcAft>
+            </a:pPr>
+            <a:r>
+              <a:rPr sz="1600" b="0" i="0">
+                <a:solidFill>
+                  <a:srgbClr val="1A1440"/>
+                </a:solidFill>
+                <a:latin typeface="Calibri"/>
+              </a:rPr>
+              <a:t>The set is exercises/unguided/C2_W04_D05_staffing_note_STUDENT.md: the note's decisions as lettered items, then the note itself.</a:t>
+            </a:r>
+          </a:p>
+        </p:txBody>
+      </p:sp>
+      <p:sp>
+        <p:nvSpPr>
+          <p:cNvPr id="40" name="TextBox 39"/>
           <p:cNvSpPr txBox="1"/>
           <p:nvPr/>
         </p:nvSpPr>
@@ -8343,7 +8920,7 @@
       </p:sp>
       <p:sp>
         <p:nvSpPr>
-          <p:cNvPr id="22" name="TextBox 21"/>
+          <p:cNvPr id="41" name="TextBox 40"/>
           <p:cNvSpPr txBox="1"/>
           <p:nvPr/>
         </p:nvSpPr>
@@ -8371,7 +8948,7 @@
                 </a:solidFill>
                 <a:latin typeface="Calibri"/>
               </a:rPr>
-              <a:t>S1  ·  2 / 13</a:t>
+              <a:t>S2  ·  2 / 12</a:t>
             </a:r>
           </a:p>
         </p:txBody>
@@ -8542,1498 +9119,7 @@
                 </a:solidFill>
                 <a:latin typeface="Calibri"/>
               </a:rPr>
-              <a:t>WEEK 4  ·  DAY 5  ·  KALPA GLOBAL CAPABILITY CENTRE</a:t>
-            </a:r>
-          </a:p>
-        </p:txBody>
-      </p:sp>
-      <p:sp>
-        <p:nvSpPr>
-          <p:cNvPr id="7" name="TextBox 6"/>
-          <p:cNvSpPr txBox="1"/>
-          <p:nvPr/>
-        </p:nvSpPr>
-        <p:spPr>
-          <a:xfrm>
-            <a:off x="530352" y="676656"/>
-            <a:ext cx="11130991" cy="512064"/>
-          </a:xfrm>
-          <a:prstGeom prst="rect">
-            <a:avLst/>
-          </a:prstGeom>
-          <a:noFill/>
-        </p:spPr>
-        <p:txBody>
-          <a:bodyPr wrap="square" anchor="b" lIns="0" rIns="0" tIns="0" bIns="0">
-            <a:spAutoFit/>
-          </a:bodyPr>
-          <a:lstStyle/>
-          <a:p>
-            <a:pPr algn="l"/>
-            <a:r>
-              <a:rPr sz="2600" b="0" i="0">
-                <a:solidFill>
-                  <a:srgbClr val="1A0F5C"/>
-                </a:solidFill>
-                <a:latin typeface="Georgia"/>
-              </a:rPr>
-              <a:t>The staffing note: five lines, one page</a:t>
-            </a:r>
-          </a:p>
-        </p:txBody>
-      </p:sp>
-      <p:sp>
-        <p:nvSpPr>
-          <p:cNvPr id="8" name="TextBox 7"/>
-          <p:cNvSpPr txBox="1"/>
-          <p:nvPr/>
-        </p:nvSpPr>
-        <p:spPr>
-          <a:xfrm>
-            <a:off x="530352" y="1243584"/>
-            <a:ext cx="11130991" cy="234696"/>
-          </a:xfrm>
-          <a:prstGeom prst="rect">
-            <a:avLst/>
-          </a:prstGeom>
-          <a:noFill/>
-        </p:spPr>
-        <p:txBody>
-          <a:bodyPr wrap="square" anchor="t" lIns="0" rIns="0" tIns="0" bIns="0">
-            <a:spAutoFit/>
-          </a:bodyPr>
-          <a:lstStyle/>
-          <a:p>
-            <a:pPr algn="l"/>
-            <a:r>
-              <a:rPr sz="1200" b="0" i="0">
-                <a:solidFill>
-                  <a:srgbClr val="6B6690"/>
-                </a:solidFill>
-                <a:latin typeface="Calibri"/>
-              </a:rPr>
-              <a:t>What does each group hand the regional operations head in thirty minutes?</a:t>
-            </a:r>
-          </a:p>
-        </p:txBody>
-      </p:sp>
-      <p:sp>
-        <p:nvSpPr>
-          <p:cNvPr id="9" name="Rounded Rectangle 8"/>
-          <p:cNvSpPr/>
-          <p:nvPr/>
-        </p:nvSpPr>
-        <p:spPr>
-          <a:xfrm>
-            <a:off x="530352" y="1956816"/>
-            <a:ext cx="2079894" cy="2575560"/>
-          </a:xfrm>
-          <a:prstGeom prst="roundRect">
-            <a:avLst>
-              <a:gd name="adj" fmla="val 5000"/>
-            </a:avLst>
-          </a:prstGeom>
-          <a:solidFill>
-            <a:srgbClr val="FFFFFF"/>
-          </a:solidFill>
-          <a:ln w="9525">
-            <a:solidFill>
-              <a:srgbClr val="E4E1F1"/>
-            </a:solidFill>
-          </a:ln>
-          <a:effectLst>
-            <a:outerShdw blurRad="76200" dist="19050" dir="5400000" algn="bl" rotWithShape="0">
-              <a:srgbClr val="1A0F5C">
-                <a:alpha val="12000"/>
-              </a:srgbClr>
-            </a:outerShdw>
-          </a:effectLst>
-        </p:spPr>
-        <p:style>
-          <a:lnRef idx="1">
-            <a:schemeClr val="accent1"/>
-          </a:lnRef>
-          <a:fillRef idx="3">
-            <a:schemeClr val="accent1"/>
-          </a:fillRef>
-          <a:effectRef idx="2">
-            <a:schemeClr val="accent1"/>
-          </a:effectRef>
-          <a:fontRef idx="minor">
-            <a:schemeClr val="lt1"/>
-          </a:fontRef>
-        </p:style>
-        <p:txBody>
-          <a:bodyPr rtlCol="0" anchor="ctr" wrap="square"/>
-          <a:lstStyle/>
-          <a:p>
-            <a:pPr algn="ctr"/>
-          </a:p>
-        </p:txBody>
-      </p:sp>
-      <p:sp>
-        <p:nvSpPr>
-          <p:cNvPr id="10" name="Oval 9"/>
-          <p:cNvSpPr/>
-          <p:nvPr/>
-        </p:nvSpPr>
-        <p:spPr>
-          <a:xfrm>
-            <a:off x="731519" y="2157984"/>
-            <a:ext cx="457200" cy="457200"/>
-          </a:xfrm>
-          <a:prstGeom prst="ellipse">
-            <a:avLst/>
-          </a:prstGeom>
-          <a:solidFill>
-            <a:srgbClr val="EEEAFB"/>
-          </a:solidFill>
-          <a:ln>
-            <a:noFill/>
-          </a:ln>
-          <a:effectLst/>
-        </p:spPr>
-        <p:style>
-          <a:lnRef idx="1">
-            <a:schemeClr val="accent1"/>
-          </a:lnRef>
-          <a:fillRef idx="3">
-            <a:schemeClr val="accent1"/>
-          </a:fillRef>
-          <a:effectRef idx="2">
-            <a:schemeClr val="accent1"/>
-          </a:effectRef>
-          <a:fontRef idx="minor">
-            <a:schemeClr val="lt1"/>
-          </a:fontRef>
-        </p:style>
-        <p:txBody>
-          <a:bodyPr rtlCol="0" anchor="ctr" wrap="square"/>
-          <a:lstStyle/>
-          <a:p>
-            <a:pPr algn="ctr"/>
-          </a:p>
-        </p:txBody>
-      </p:sp>
-      <p:pic>
-        <p:nvPicPr>
-          <p:cNvPr id="11" name="Picture 10" descr="file-text_5c86fecc2881.png"/>
-          <p:cNvPicPr>
-            <a:picLocks noChangeAspect="1"/>
-          </p:cNvPicPr>
-          <p:nvPr/>
-        </p:nvPicPr>
-        <p:blipFill>
-          <a:blip r:embed="rId4"/>
-          <a:stretch>
-            <a:fillRect/>
-          </a:stretch>
-        </p:blipFill>
-        <p:spPr>
-          <a:xfrm>
-            <a:off x="841247" y="2267712"/>
-            <a:ext cx="237744" cy="237744"/>
-          </a:xfrm>
-          <a:prstGeom prst="rect">
-            <a:avLst/>
-          </a:prstGeom>
-        </p:spPr>
-      </p:pic>
-      <p:sp>
-        <p:nvSpPr>
-          <p:cNvPr id="12" name="TextBox 11"/>
-          <p:cNvSpPr txBox="1"/>
-          <p:nvPr/>
-        </p:nvSpPr>
-        <p:spPr>
-          <a:xfrm>
-            <a:off x="731519" y="2724912"/>
-            <a:ext cx="1677558" cy="160401"/>
-          </a:xfrm>
-          <a:prstGeom prst="rect">
-            <a:avLst/>
-          </a:prstGeom>
-          <a:noFill/>
-        </p:spPr>
-        <p:txBody>
-          <a:bodyPr wrap="square" anchor="t" lIns="0" rIns="0" tIns="0" bIns="0">
-            <a:spAutoFit/>
-          </a:bodyPr>
-          <a:lstStyle/>
-          <a:p>
-            <a:pPr algn="l"/>
-            <a:r>
-              <a:rPr sz="750" b="1" i="0" spc="250">
-                <a:solidFill>
-                  <a:srgbClr val="5B3FD6"/>
-                </a:solidFill>
-                <a:latin typeface="Calibri"/>
-              </a:rPr>
-              <a:t>1</a:t>
-            </a:r>
-          </a:p>
-        </p:txBody>
-      </p:sp>
-      <p:sp>
-        <p:nvSpPr>
-          <p:cNvPr id="13" name="TextBox 12"/>
-          <p:cNvSpPr txBox="1"/>
-          <p:nvPr/>
-        </p:nvSpPr>
-        <p:spPr>
-          <a:xfrm>
-            <a:off x="731519" y="2962656"/>
-            <a:ext cx="1677558" cy="498856"/>
-          </a:xfrm>
-          <a:prstGeom prst="rect">
-            <a:avLst/>
-          </a:prstGeom>
-          <a:noFill/>
-        </p:spPr>
-        <p:txBody>
-          <a:bodyPr wrap="square" anchor="t" lIns="0" rIns="0" tIns="0" bIns="0">
-            <a:spAutoFit/>
-          </a:bodyPr>
-          <a:lstStyle/>
-          <a:p>
-            <a:pPr algn="l"/>
-            <a:r>
-              <a:rPr sz="1400" b="1" i="0">
-                <a:solidFill>
-                  <a:srgbClr val="1A0F5C"/>
-                </a:solidFill>
-                <a:latin typeface="Calibri"/>
-              </a:rPr>
-              <a:t>The claim as the title</a:t>
-            </a:r>
-          </a:p>
-        </p:txBody>
-      </p:sp>
-      <p:sp>
-        <p:nvSpPr>
-          <p:cNvPr id="14" name="TextBox 13"/>
-          <p:cNvSpPr txBox="1"/>
-          <p:nvPr/>
-        </p:nvSpPr>
-        <p:spPr>
-          <a:xfrm>
-            <a:off x="731519" y="3534664"/>
-            <a:ext cx="1677558" cy="581406"/>
-          </a:xfrm>
-          <a:prstGeom prst="rect">
-            <a:avLst/>
-          </a:prstGeom>
-          <a:noFill/>
-        </p:spPr>
-        <p:txBody>
-          <a:bodyPr wrap="square" anchor="t" lIns="0" rIns="0" tIns="0" bIns="0">
-            <a:spAutoFit/>
-          </a:bodyPr>
-          <a:lstStyle/>
-          <a:p>
-            <a:pPr algn="l"/>
-            <a:r>
-              <a:rPr sz="1100" b="0" i="0">
-                <a:solidFill>
-                  <a:srgbClr val="6B6690"/>
-                </a:solidFill>
-                <a:latin typeface="Calibri"/>
-              </a:rPr>
-              <a:t>How many shifts, which weeks, from which forecast, in one sentence.</a:t>
-            </a:r>
-          </a:p>
-        </p:txBody>
-      </p:sp>
-      <p:sp>
-        <p:nvSpPr>
-          <p:cNvPr id="15" name="Rounded Rectangle 14"/>
-          <p:cNvSpPr/>
-          <p:nvPr/>
-        </p:nvSpPr>
-        <p:spPr>
-          <a:xfrm>
-            <a:off x="2793126" y="1956816"/>
-            <a:ext cx="2079894" cy="2575560"/>
-          </a:xfrm>
-          <a:prstGeom prst="roundRect">
-            <a:avLst>
-              <a:gd name="adj" fmla="val 5000"/>
-            </a:avLst>
-          </a:prstGeom>
-          <a:solidFill>
-            <a:srgbClr val="FFFFFF"/>
-          </a:solidFill>
-          <a:ln w="9525">
-            <a:solidFill>
-              <a:srgbClr val="E4E1F1"/>
-            </a:solidFill>
-          </a:ln>
-          <a:effectLst>
-            <a:outerShdw blurRad="76200" dist="19050" dir="5400000" algn="bl" rotWithShape="0">
-              <a:srgbClr val="1A0F5C">
-                <a:alpha val="12000"/>
-              </a:srgbClr>
-            </a:outerShdw>
-          </a:effectLst>
-        </p:spPr>
-        <p:style>
-          <a:lnRef idx="1">
-            <a:schemeClr val="accent1"/>
-          </a:lnRef>
-          <a:fillRef idx="3">
-            <a:schemeClr val="accent1"/>
-          </a:fillRef>
-          <a:effectRef idx="2">
-            <a:schemeClr val="accent1"/>
-          </a:effectRef>
-          <a:fontRef idx="minor">
-            <a:schemeClr val="lt1"/>
-          </a:fontRef>
-        </p:style>
-        <p:txBody>
-          <a:bodyPr rtlCol="0" anchor="ctr" wrap="square"/>
-          <a:lstStyle/>
-          <a:p>
-            <a:pPr algn="ctr"/>
-          </a:p>
-        </p:txBody>
-      </p:sp>
-      <p:sp>
-        <p:nvSpPr>
-          <p:cNvPr id="16" name="Oval 15"/>
-          <p:cNvSpPr/>
-          <p:nvPr/>
-        </p:nvSpPr>
-        <p:spPr>
-          <a:xfrm>
-            <a:off x="2994294" y="2157984"/>
-            <a:ext cx="457200" cy="457200"/>
-          </a:xfrm>
-          <a:prstGeom prst="ellipse">
-            <a:avLst/>
-          </a:prstGeom>
-          <a:solidFill>
-            <a:srgbClr val="EEEAFB"/>
-          </a:solidFill>
-          <a:ln>
-            <a:noFill/>
-          </a:ln>
-          <a:effectLst/>
-        </p:spPr>
-        <p:style>
-          <a:lnRef idx="1">
-            <a:schemeClr val="accent1"/>
-          </a:lnRef>
-          <a:fillRef idx="3">
-            <a:schemeClr val="accent1"/>
-          </a:fillRef>
-          <a:effectRef idx="2">
-            <a:schemeClr val="accent1"/>
-          </a:effectRef>
-          <a:fontRef idx="minor">
-            <a:schemeClr val="lt1"/>
-          </a:fontRef>
-        </p:style>
-        <p:txBody>
-          <a:bodyPr rtlCol="0" anchor="ctr" wrap="square"/>
-          <a:lstStyle/>
-          <a:p>
-            <a:pPr algn="ctr"/>
-          </a:p>
-        </p:txBody>
-      </p:sp>
-      <p:pic>
-        <p:nvPicPr>
-          <p:cNvPr id="17" name="Picture 16" descr="calendar_52de2a000930.png"/>
-          <p:cNvPicPr>
-            <a:picLocks noChangeAspect="1"/>
-          </p:cNvPicPr>
-          <p:nvPr/>
-        </p:nvPicPr>
-        <p:blipFill>
-          <a:blip r:embed="rId5"/>
-          <a:stretch>
-            <a:fillRect/>
-          </a:stretch>
-        </p:blipFill>
-        <p:spPr>
-          <a:xfrm>
-            <a:off x="3104022" y="2267712"/>
-            <a:ext cx="237744" cy="237744"/>
-          </a:xfrm>
-          <a:prstGeom prst="rect">
-            <a:avLst/>
-          </a:prstGeom>
-        </p:spPr>
-      </p:pic>
-      <p:sp>
-        <p:nvSpPr>
-          <p:cNvPr id="18" name="TextBox 17"/>
-          <p:cNvSpPr txBox="1"/>
-          <p:nvPr/>
-        </p:nvSpPr>
-        <p:spPr>
-          <a:xfrm>
-            <a:off x="2994294" y="2724912"/>
-            <a:ext cx="1677558" cy="160401"/>
-          </a:xfrm>
-          <a:prstGeom prst="rect">
-            <a:avLst/>
-          </a:prstGeom>
-          <a:noFill/>
-        </p:spPr>
-        <p:txBody>
-          <a:bodyPr wrap="square" anchor="t" lIns="0" rIns="0" tIns="0" bIns="0">
-            <a:spAutoFit/>
-          </a:bodyPr>
-          <a:lstStyle/>
-          <a:p>
-            <a:pPr algn="l"/>
-            <a:r>
-              <a:rPr sz="750" b="1" i="0" spc="250">
-                <a:solidFill>
-                  <a:srgbClr val="5B3FD6"/>
-                </a:solidFill>
-                <a:latin typeface="Calibri"/>
-              </a:rPr>
-              <a:t>2</a:t>
-            </a:r>
-          </a:p>
-        </p:txBody>
-      </p:sp>
-      <p:sp>
-        <p:nvSpPr>
-          <p:cNvPr id="19" name="TextBox 18"/>
-          <p:cNvSpPr txBox="1"/>
-          <p:nvPr/>
-        </p:nvSpPr>
-        <p:spPr>
-          <a:xfrm>
-            <a:off x="2994294" y="2962656"/>
-            <a:ext cx="1677558" cy="498856"/>
-          </a:xfrm>
-          <a:prstGeom prst="rect">
-            <a:avLst/>
-          </a:prstGeom>
-          <a:noFill/>
-        </p:spPr>
-        <p:txBody>
-          <a:bodyPr wrap="square" anchor="t" lIns="0" rIns="0" tIns="0" bIns="0">
-            <a:spAutoFit/>
-          </a:bodyPr>
-          <a:lstStyle/>
-          <a:p>
-            <a:pPr algn="l"/>
-            <a:r>
-              <a:rPr sz="1400" b="1" i="0">
-                <a:solidFill>
-                  <a:srgbClr val="1A0F5C"/>
-                </a:solidFill>
-                <a:latin typeface="Calibri"/>
-              </a:rPr>
-              <a:t>The festival placed</a:t>
-            </a:r>
-          </a:p>
-        </p:txBody>
-      </p:sp>
-      <p:sp>
-        <p:nvSpPr>
-          <p:cNvPr id="20" name="TextBox 19"/>
-          <p:cNvSpPr txBox="1"/>
-          <p:nvPr/>
-        </p:nvSpPr>
-        <p:spPr>
-          <a:xfrm>
-            <a:off x="2994294" y="3534664"/>
-            <a:ext cx="1677558" cy="763016"/>
-          </a:xfrm>
-          <a:prstGeom prst="rect">
-            <a:avLst/>
-          </a:prstGeom>
-          <a:noFill/>
-        </p:spPr>
-        <p:txBody>
-          <a:bodyPr wrap="square" anchor="t" lIns="0" rIns="0" tIns="0" bIns="0">
-            <a:spAutoFit/>
-          </a:bodyPr>
-          <a:lstStyle/>
-          <a:p>
-            <a:pPr algn="l"/>
-            <a:r>
-              <a:rPr sz="1100" b="0" i="0">
-                <a:solidFill>
-                  <a:srgbClr val="6B6690"/>
-                </a:solidFill>
-                <a:latin typeface="Calibri"/>
-              </a:rPr>
-              <a:t>Which week is the peak and why: the distance from Diwali, never the calendar.</a:t>
-            </a:r>
-          </a:p>
-        </p:txBody>
-      </p:sp>
-      <p:sp>
-        <p:nvSpPr>
-          <p:cNvPr id="21" name="Rounded Rectangle 20"/>
-          <p:cNvSpPr/>
-          <p:nvPr/>
-        </p:nvSpPr>
-        <p:spPr>
-          <a:xfrm>
-            <a:off x="5055900" y="1956816"/>
-            <a:ext cx="2079894" cy="2575560"/>
-          </a:xfrm>
-          <a:prstGeom prst="roundRect">
-            <a:avLst>
-              <a:gd name="adj" fmla="val 5000"/>
-            </a:avLst>
-          </a:prstGeom>
-          <a:solidFill>
-            <a:srgbClr val="FFFFFF"/>
-          </a:solidFill>
-          <a:ln w="9525">
-            <a:solidFill>
-              <a:srgbClr val="E4E1F1"/>
-            </a:solidFill>
-          </a:ln>
-          <a:effectLst>
-            <a:outerShdw blurRad="76200" dist="19050" dir="5400000" algn="bl" rotWithShape="0">
-              <a:srgbClr val="1A0F5C">
-                <a:alpha val="12000"/>
-              </a:srgbClr>
-            </a:outerShdw>
-          </a:effectLst>
-        </p:spPr>
-        <p:style>
-          <a:lnRef idx="1">
-            <a:schemeClr val="accent1"/>
-          </a:lnRef>
-          <a:fillRef idx="3">
-            <a:schemeClr val="accent1"/>
-          </a:fillRef>
-          <a:effectRef idx="2">
-            <a:schemeClr val="accent1"/>
-          </a:effectRef>
-          <a:fontRef idx="minor">
-            <a:schemeClr val="lt1"/>
-          </a:fontRef>
-        </p:style>
-        <p:txBody>
-          <a:bodyPr rtlCol="0" anchor="ctr" wrap="square"/>
-          <a:lstStyle/>
-          <a:p>
-            <a:pPr algn="ctr"/>
-          </a:p>
-        </p:txBody>
-      </p:sp>
-      <p:sp>
-        <p:nvSpPr>
-          <p:cNvPr id="22" name="Oval 21"/>
-          <p:cNvSpPr/>
-          <p:nvPr/>
-        </p:nvSpPr>
-        <p:spPr>
-          <a:xfrm>
-            <a:off x="5257068" y="2157984"/>
-            <a:ext cx="457200" cy="457200"/>
-          </a:xfrm>
-          <a:prstGeom prst="ellipse">
-            <a:avLst/>
-          </a:prstGeom>
-          <a:solidFill>
-            <a:srgbClr val="EEEAFB"/>
-          </a:solidFill>
-          <a:ln>
-            <a:noFill/>
-          </a:ln>
-          <a:effectLst/>
-        </p:spPr>
-        <p:style>
-          <a:lnRef idx="1">
-            <a:schemeClr val="accent1"/>
-          </a:lnRef>
-          <a:fillRef idx="3">
-            <a:schemeClr val="accent1"/>
-          </a:fillRef>
-          <a:effectRef idx="2">
-            <a:schemeClr val="accent1"/>
-          </a:effectRef>
-          <a:fontRef idx="minor">
-            <a:schemeClr val="lt1"/>
-          </a:fontRef>
-        </p:style>
-        <p:txBody>
-          <a:bodyPr rtlCol="0" anchor="ctr" wrap="square"/>
-          <a:lstStyle/>
-          <a:p>
-            <a:pPr algn="ctr"/>
-          </a:p>
-        </p:txBody>
-      </p:sp>
-      <p:pic>
-        <p:nvPicPr>
-          <p:cNvPr id="23" name="Picture 22" descr="ruler_ec66f5961a99.png"/>
-          <p:cNvPicPr>
-            <a:picLocks noChangeAspect="1"/>
-          </p:cNvPicPr>
-          <p:nvPr/>
-        </p:nvPicPr>
-        <p:blipFill>
-          <a:blip r:embed="rId6"/>
-          <a:stretch>
-            <a:fillRect/>
-          </a:stretch>
-        </p:blipFill>
-        <p:spPr>
-          <a:xfrm>
-            <a:off x="5366796" y="2267712"/>
-            <a:ext cx="237744" cy="237744"/>
-          </a:xfrm>
-          <a:prstGeom prst="rect">
-            <a:avLst/>
-          </a:prstGeom>
-        </p:spPr>
-      </p:pic>
-      <p:sp>
-        <p:nvSpPr>
-          <p:cNvPr id="24" name="TextBox 23"/>
-          <p:cNvSpPr txBox="1"/>
-          <p:nvPr/>
-        </p:nvSpPr>
-        <p:spPr>
-          <a:xfrm>
-            <a:off x="5257068" y="2724912"/>
-            <a:ext cx="1677558" cy="160401"/>
-          </a:xfrm>
-          <a:prstGeom prst="rect">
-            <a:avLst/>
-          </a:prstGeom>
-          <a:noFill/>
-        </p:spPr>
-        <p:txBody>
-          <a:bodyPr wrap="square" anchor="t" lIns="0" rIns="0" tIns="0" bIns="0">
-            <a:spAutoFit/>
-          </a:bodyPr>
-          <a:lstStyle/>
-          <a:p>
-            <a:pPr algn="l"/>
-            <a:r>
-              <a:rPr sz="750" b="1" i="0" spc="250">
-                <a:solidFill>
-                  <a:srgbClr val="5B3FD6"/>
-                </a:solidFill>
-                <a:latin typeface="Calibri"/>
-              </a:rPr>
-              <a:t>3</a:t>
-            </a:r>
-          </a:p>
-        </p:txBody>
-      </p:sp>
-      <p:sp>
-        <p:nvSpPr>
-          <p:cNvPr id="25" name="TextBox 24"/>
-          <p:cNvSpPr txBox="1"/>
-          <p:nvPr/>
-        </p:nvSpPr>
-        <p:spPr>
-          <a:xfrm>
-            <a:off x="5257068" y="2962656"/>
-            <a:ext cx="1677558" cy="498856"/>
-          </a:xfrm>
-          <a:prstGeom prst="rect">
-            <a:avLst/>
-          </a:prstGeom>
-          <a:noFill/>
-        </p:spPr>
-        <p:txBody>
-          <a:bodyPr wrap="square" anchor="t" lIns="0" rIns="0" tIns="0" bIns="0">
-            <a:spAutoFit/>
-          </a:bodyPr>
-          <a:lstStyle/>
-          <a:p>
-            <a:pPr algn="l"/>
-            <a:r>
-              <a:rPr sz="1400" b="1" i="0">
-                <a:solidFill>
-                  <a:srgbClr val="1A0F5C"/>
-                </a:solidFill>
-                <a:latin typeface="Calibri"/>
-              </a:rPr>
-              <a:t>The error bar in rupees</a:t>
-            </a:r>
-          </a:p>
-        </p:txBody>
-      </p:sp>
-      <p:sp>
-        <p:nvSpPr>
-          <p:cNvPr id="26" name="TextBox 25"/>
-          <p:cNvSpPr txBox="1"/>
-          <p:nvPr/>
-        </p:nvSpPr>
-        <p:spPr>
-          <a:xfrm>
-            <a:off x="5257068" y="3534664"/>
-            <a:ext cx="1677558" cy="763016"/>
-          </a:xfrm>
-          <a:prstGeom prst="rect">
-            <a:avLst/>
-          </a:prstGeom>
-          <a:noFill/>
-        </p:spPr>
-        <p:txBody>
-          <a:bodyPr wrap="square" anchor="t" lIns="0" rIns="0" tIns="0" bIns="0">
-            <a:spAutoFit/>
-          </a:bodyPr>
-          <a:lstStyle/>
-          <a:p>
-            <a:pPr algn="l"/>
-            <a:r>
-              <a:rPr sz="1100" b="0" i="0">
-                <a:solidFill>
-                  <a:srgbClr val="6B6690"/>
-                </a:solidFill>
-                <a:latin typeface="Calibri"/>
-              </a:rPr>
-              <a:t>Shipments a week, priced in each direction, and the festival's own record.</a:t>
-            </a:r>
-          </a:p>
-        </p:txBody>
-      </p:sp>
-      <p:sp>
-        <p:nvSpPr>
-          <p:cNvPr id="27" name="Rounded Rectangle 26"/>
-          <p:cNvSpPr/>
-          <p:nvPr/>
-        </p:nvSpPr>
-        <p:spPr>
-          <a:xfrm>
-            <a:off x="7318674" y="1956816"/>
-            <a:ext cx="2079894" cy="2575560"/>
-          </a:xfrm>
-          <a:prstGeom prst="roundRect">
-            <a:avLst>
-              <a:gd name="adj" fmla="val 5000"/>
-            </a:avLst>
-          </a:prstGeom>
-          <a:solidFill>
-            <a:srgbClr val="FFFFFF"/>
-          </a:solidFill>
-          <a:ln w="9525">
-            <a:solidFill>
-              <a:srgbClr val="E4E1F1"/>
-            </a:solidFill>
-          </a:ln>
-          <a:effectLst>
-            <a:outerShdw blurRad="76200" dist="19050" dir="5400000" algn="bl" rotWithShape="0">
-              <a:srgbClr val="1A0F5C">
-                <a:alpha val="12000"/>
-              </a:srgbClr>
-            </a:outerShdw>
-          </a:effectLst>
-        </p:spPr>
-        <p:style>
-          <a:lnRef idx="1">
-            <a:schemeClr val="accent1"/>
-          </a:lnRef>
-          <a:fillRef idx="3">
-            <a:schemeClr val="accent1"/>
-          </a:fillRef>
-          <a:effectRef idx="2">
-            <a:schemeClr val="accent1"/>
-          </a:effectRef>
-          <a:fontRef idx="minor">
-            <a:schemeClr val="lt1"/>
-          </a:fontRef>
-        </p:style>
-        <p:txBody>
-          <a:bodyPr rtlCol="0" anchor="ctr" wrap="square"/>
-          <a:lstStyle/>
-          <a:p>
-            <a:pPr algn="ctr"/>
-          </a:p>
-        </p:txBody>
-      </p:sp>
-      <p:sp>
-        <p:nvSpPr>
-          <p:cNvPr id="28" name="Oval 27"/>
-          <p:cNvSpPr/>
-          <p:nvPr/>
-        </p:nvSpPr>
-        <p:spPr>
-          <a:xfrm>
-            <a:off x="7519842" y="2157984"/>
-            <a:ext cx="457200" cy="457200"/>
-          </a:xfrm>
-          <a:prstGeom prst="ellipse">
-            <a:avLst/>
-          </a:prstGeom>
-          <a:solidFill>
-            <a:srgbClr val="EEEAFB"/>
-          </a:solidFill>
-          <a:ln>
-            <a:noFill/>
-          </a:ln>
-          <a:effectLst/>
-        </p:spPr>
-        <p:style>
-          <a:lnRef idx="1">
-            <a:schemeClr val="accent1"/>
-          </a:lnRef>
-          <a:fillRef idx="3">
-            <a:schemeClr val="accent1"/>
-          </a:fillRef>
-          <a:effectRef idx="2">
-            <a:schemeClr val="accent1"/>
-          </a:effectRef>
-          <a:fontRef idx="minor">
-            <a:schemeClr val="lt1"/>
-          </a:fontRef>
-        </p:style>
-        <p:txBody>
-          <a:bodyPr rtlCol="0" anchor="ctr" wrap="square"/>
-          <a:lstStyle/>
-          <a:p>
-            <a:pPr algn="ctr"/>
-          </a:p>
-        </p:txBody>
-      </p:sp>
-      <p:pic>
-        <p:nvPicPr>
-          <p:cNvPr id="29" name="Picture 28" descr="circle-alert_2885187cc141.png"/>
-          <p:cNvPicPr>
-            <a:picLocks noChangeAspect="1"/>
-          </p:cNvPicPr>
-          <p:nvPr/>
-        </p:nvPicPr>
-        <p:blipFill>
-          <a:blip r:embed="rId7"/>
-          <a:stretch>
-            <a:fillRect/>
-          </a:stretch>
-        </p:blipFill>
-        <p:spPr>
-          <a:xfrm>
-            <a:off x="7629570" y="2267712"/>
-            <a:ext cx="237744" cy="237744"/>
-          </a:xfrm>
-          <a:prstGeom prst="rect">
-            <a:avLst/>
-          </a:prstGeom>
-        </p:spPr>
-      </p:pic>
-      <p:sp>
-        <p:nvSpPr>
-          <p:cNvPr id="30" name="TextBox 29"/>
-          <p:cNvSpPr txBox="1"/>
-          <p:nvPr/>
-        </p:nvSpPr>
-        <p:spPr>
-          <a:xfrm>
-            <a:off x="7519842" y="2724912"/>
-            <a:ext cx="1677558" cy="160401"/>
-          </a:xfrm>
-          <a:prstGeom prst="rect">
-            <a:avLst/>
-          </a:prstGeom>
-          <a:noFill/>
-        </p:spPr>
-        <p:txBody>
-          <a:bodyPr wrap="square" anchor="t" lIns="0" rIns="0" tIns="0" bIns="0">
-            <a:spAutoFit/>
-          </a:bodyPr>
-          <a:lstStyle/>
-          <a:p>
-            <a:pPr algn="l"/>
-            <a:r>
-              <a:rPr sz="750" b="1" i="0" spc="250">
-                <a:solidFill>
-                  <a:srgbClr val="5B3FD6"/>
-                </a:solidFill>
-                <a:latin typeface="Calibri"/>
-              </a:rPr>
-              <a:t>4</a:t>
-            </a:r>
-          </a:p>
-        </p:txBody>
-      </p:sp>
-      <p:sp>
-        <p:nvSpPr>
-          <p:cNvPr id="31" name="TextBox 30"/>
-          <p:cNvSpPr txBox="1"/>
-          <p:nvPr/>
-        </p:nvSpPr>
-        <p:spPr>
-          <a:xfrm>
-            <a:off x="7519842" y="2962656"/>
-            <a:ext cx="1677558" cy="498856"/>
-          </a:xfrm>
-          <a:prstGeom prst="rect">
-            <a:avLst/>
-          </a:prstGeom>
-          <a:noFill/>
-        </p:spPr>
-        <p:txBody>
-          <a:bodyPr wrap="square" anchor="t" lIns="0" rIns="0" tIns="0" bIns="0">
-            <a:spAutoFit/>
-          </a:bodyPr>
-          <a:lstStyle/>
-          <a:p>
-            <a:pPr algn="l"/>
-            <a:r>
-              <a:rPr sz="1400" b="1" i="0">
-                <a:solidFill>
-                  <a:srgbClr val="1A0F5C"/>
-                </a:solidFill>
-                <a:latin typeface="Calibri"/>
-              </a:rPr>
-              <a:t>What would make it wrong</a:t>
-            </a:r>
-          </a:p>
-        </p:txBody>
-      </p:sp>
-      <p:sp>
-        <p:nvSpPr>
-          <p:cNvPr id="32" name="TextBox 31"/>
-          <p:cNvSpPr txBox="1"/>
-          <p:nvPr/>
-        </p:nvSpPr>
-        <p:spPr>
-          <a:xfrm>
-            <a:off x="7519842" y="3534664"/>
-            <a:ext cx="1677558" cy="581406"/>
-          </a:xfrm>
-          <a:prstGeom prst="rect">
-            <a:avLst/>
-          </a:prstGeom>
-          <a:noFill/>
-        </p:spPr>
-        <p:txBody>
-          <a:bodyPr wrap="square" anchor="t" lIns="0" rIns="0" tIns="0" bIns="0">
-            <a:spAutoFit/>
-          </a:bodyPr>
-          <a:lstStyle/>
-          <a:p>
-            <a:pPr algn="l"/>
-            <a:r>
-              <a:rPr sz="1100" b="0" i="0">
-                <a:solidFill>
-                  <a:srgbClr val="6B6690"/>
-                </a:solidFill>
-                <a:latin typeface="Calibri"/>
-              </a:rPr>
-              <a:t>Three facts that would move the number, each with its check.</a:t>
-            </a:r>
-          </a:p>
-        </p:txBody>
-      </p:sp>
-      <p:sp>
-        <p:nvSpPr>
-          <p:cNvPr id="33" name="Rounded Rectangle 32"/>
-          <p:cNvSpPr/>
-          <p:nvPr/>
-        </p:nvSpPr>
-        <p:spPr>
-          <a:xfrm>
-            <a:off x="9581448" y="1956816"/>
-            <a:ext cx="2079894" cy="2575560"/>
-          </a:xfrm>
-          <a:prstGeom prst="roundRect">
-            <a:avLst>
-              <a:gd name="adj" fmla="val 5000"/>
-            </a:avLst>
-          </a:prstGeom>
-          <a:gradFill rotWithShape="1">
-            <a:gsLst>
-              <a:gs pos="0">
-                <a:srgbClr val="2C1A86"/>
-              </a:gs>
-              <a:gs pos="100000">
-                <a:srgbClr val="1A0F5C"/>
-              </a:gs>
-            </a:gsLst>
-            <a:lin scaled="0" ang="16200000"/>
-          </a:gradFill>
-          <a:ln>
-            <a:noFill/>
-          </a:ln>
-          <a:effectLst>
-            <a:outerShdw blurRad="76200" dist="19050" dir="5400000" algn="bl" rotWithShape="0">
-              <a:srgbClr val="1A0F5C">
-                <a:alpha val="12000"/>
-              </a:srgbClr>
-            </a:outerShdw>
-          </a:effectLst>
-        </p:spPr>
-        <p:style>
-          <a:lnRef idx="1">
-            <a:schemeClr val="accent1"/>
-          </a:lnRef>
-          <a:fillRef idx="3">
-            <a:schemeClr val="accent1"/>
-          </a:fillRef>
-          <a:effectRef idx="2">
-            <a:schemeClr val="accent1"/>
-          </a:effectRef>
-          <a:fontRef idx="minor">
-            <a:schemeClr val="lt1"/>
-          </a:fontRef>
-        </p:style>
-        <p:txBody>
-          <a:bodyPr rtlCol="0" anchor="ctr" wrap="square"/>
-          <a:lstStyle/>
-          <a:p>
-            <a:pPr algn="ctr"/>
-          </a:p>
-        </p:txBody>
-      </p:sp>
-      <p:sp>
-        <p:nvSpPr>
-          <p:cNvPr id="34" name="Oval 33"/>
-          <p:cNvSpPr/>
-          <p:nvPr/>
-        </p:nvSpPr>
-        <p:spPr>
-          <a:xfrm>
-            <a:off x="9782616" y="2157984"/>
-            <a:ext cx="457200" cy="457200"/>
-          </a:xfrm>
-          <a:prstGeom prst="ellipse">
-            <a:avLst/>
-          </a:prstGeom>
-          <a:solidFill>
-            <a:srgbClr val="5B3FD6"/>
-          </a:solidFill>
-          <a:ln>
-            <a:noFill/>
-          </a:ln>
-          <a:effectLst/>
-        </p:spPr>
-        <p:style>
-          <a:lnRef idx="1">
-            <a:schemeClr val="accent1"/>
-          </a:lnRef>
-          <a:fillRef idx="3">
-            <a:schemeClr val="accent1"/>
-          </a:fillRef>
-          <a:effectRef idx="2">
-            <a:schemeClr val="accent1"/>
-          </a:effectRef>
-          <a:fontRef idx="minor">
-            <a:schemeClr val="lt1"/>
-          </a:fontRef>
-        </p:style>
-        <p:txBody>
-          <a:bodyPr rtlCol="0" anchor="ctr" wrap="square"/>
-          <a:lstStyle/>
-          <a:p>
-            <a:pPr algn="ctr"/>
-          </a:p>
-        </p:txBody>
-      </p:sp>
-      <p:pic>
-        <p:nvPicPr>
-          <p:cNvPr id="35" name="Picture 34" descr="scale_e4d6117bdfb8.png"/>
-          <p:cNvPicPr>
-            <a:picLocks noChangeAspect="1"/>
-          </p:cNvPicPr>
-          <p:nvPr/>
-        </p:nvPicPr>
-        <p:blipFill>
-          <a:blip r:embed="rId8"/>
-          <a:stretch>
-            <a:fillRect/>
-          </a:stretch>
-        </p:blipFill>
-        <p:spPr>
-          <a:xfrm>
-            <a:off x="9892344" y="2267712"/>
-            <a:ext cx="237744" cy="237744"/>
-          </a:xfrm>
-          <a:prstGeom prst="rect">
-            <a:avLst/>
-          </a:prstGeom>
-        </p:spPr>
-      </p:pic>
-      <p:sp>
-        <p:nvSpPr>
-          <p:cNvPr id="36" name="TextBox 35"/>
-          <p:cNvSpPr txBox="1"/>
-          <p:nvPr/>
-        </p:nvSpPr>
-        <p:spPr>
-          <a:xfrm>
-            <a:off x="9782616" y="2724912"/>
-            <a:ext cx="1677558" cy="160401"/>
-          </a:xfrm>
-          <a:prstGeom prst="rect">
-            <a:avLst/>
-          </a:prstGeom>
-          <a:noFill/>
-        </p:spPr>
-        <p:txBody>
-          <a:bodyPr wrap="square" anchor="t" lIns="0" rIns="0" tIns="0" bIns="0">
-            <a:spAutoFit/>
-          </a:bodyPr>
-          <a:lstStyle/>
-          <a:p>
-            <a:pPr algn="l"/>
-            <a:r>
-              <a:rPr sz="750" b="1" i="0" spc="250">
-                <a:solidFill>
-                  <a:srgbClr val="D9A7FF"/>
-                </a:solidFill>
-                <a:latin typeface="Calibri"/>
-              </a:rPr>
-              <a:t>5</a:t>
-            </a:r>
-          </a:p>
-        </p:txBody>
-      </p:sp>
-      <p:sp>
-        <p:nvSpPr>
-          <p:cNvPr id="37" name="TextBox 36"/>
-          <p:cNvSpPr txBox="1"/>
-          <p:nvPr/>
-        </p:nvSpPr>
-        <p:spPr>
-          <a:xfrm>
-            <a:off x="9782616" y="2962656"/>
-            <a:ext cx="1677558" cy="267716"/>
-          </a:xfrm>
-          <a:prstGeom prst="rect">
-            <a:avLst/>
-          </a:prstGeom>
-          <a:noFill/>
-        </p:spPr>
-        <p:txBody>
-          <a:bodyPr wrap="square" anchor="t" lIns="0" rIns="0" tIns="0" bIns="0">
-            <a:spAutoFit/>
-          </a:bodyPr>
-          <a:lstStyle/>
-          <a:p>
-            <a:pPr algn="l"/>
-            <a:r>
-              <a:rPr sz="1400" b="1" i="0">
-                <a:solidFill>
-                  <a:srgbClr val="FFFFFF"/>
-                </a:solidFill>
-                <a:latin typeface="Calibri"/>
-              </a:rPr>
-              <a:t>The two answered</a:t>
-            </a:r>
-          </a:p>
-        </p:txBody>
-      </p:sp>
-      <p:sp>
-        <p:nvSpPr>
-          <p:cNvPr id="38" name="TextBox 37"/>
-          <p:cNvSpPr txBox="1"/>
-          <p:nvPr/>
-        </p:nvSpPr>
-        <p:spPr>
-          <a:xfrm>
-            <a:off x="9782616" y="3303524"/>
-            <a:ext cx="1677558" cy="763016"/>
-          </a:xfrm>
-          <a:prstGeom prst="rect">
-            <a:avLst/>
-          </a:prstGeom>
-          <a:noFill/>
-        </p:spPr>
-        <p:txBody>
-          <a:bodyPr wrap="square" anchor="t" lIns="0" rIns="0" tIns="0" bIns="0">
-            <a:spAutoFit/>
-          </a:bodyPr>
-          <a:lstStyle/>
-          <a:p>
-            <a:pPr algn="l"/>
-            <a:r>
-              <a:rPr sz="1100" b="0" i="0">
-                <a:solidFill>
-                  <a:srgbClr val="CFC9EE"/>
-                </a:solidFill>
-                <a:latin typeface="Calibri"/>
-              </a:rPr>
-              <a:t>One line to finance, one to the vendor's sponsor, conceding the true part.</a:t>
-            </a:r>
-          </a:p>
-        </p:txBody>
-      </p:sp>
-      <p:sp>
-        <p:nvSpPr>
-          <p:cNvPr id="39" name="TextBox 38"/>
-          <p:cNvSpPr txBox="1"/>
-          <p:nvPr/>
-        </p:nvSpPr>
-        <p:spPr>
-          <a:xfrm>
-            <a:off x="530352" y="4715256"/>
-            <a:ext cx="11130991" cy="772160"/>
-          </a:xfrm>
-          <a:prstGeom prst="rect">
-            <a:avLst/>
-          </a:prstGeom>
-          <a:noFill/>
-        </p:spPr>
-        <p:txBody>
-          <a:bodyPr wrap="square" anchor="t" lIns="0" rIns="0" tIns="0" bIns="0">
-            <a:spAutoFit/>
-          </a:bodyPr>
-          <a:lstStyle/>
-          <a:p>
-            <a:pPr>
-              <a:spcAft>
-                <a:spcPts val="800"/>
-              </a:spcAft>
-            </a:pPr>
-            <a:r>
-              <a:rPr sz="1600" b="0" i="0">
-                <a:solidFill>
-                  <a:srgbClr val="1A1440"/>
-                </a:solidFill>
-                <a:latin typeface="Calibri"/>
-              </a:rPr>
-              <a:t>The set is exercises/unguided/C2_W04_D05_staffing_note_STUDENT.md: the note's decisions as lettered items, then the note itself.</a:t>
-            </a:r>
-          </a:p>
-        </p:txBody>
-      </p:sp>
-      <p:sp>
-        <p:nvSpPr>
-          <p:cNvPr id="40" name="TextBox 39"/>
-          <p:cNvSpPr txBox="1"/>
-          <p:nvPr/>
-        </p:nvSpPr>
-        <p:spPr>
-          <a:xfrm>
-            <a:off x="530352" y="6437376"/>
-            <a:ext cx="9667951" cy="160401"/>
-          </a:xfrm>
-          <a:prstGeom prst="rect">
-            <a:avLst/>
-          </a:prstGeom>
-          <a:noFill/>
-        </p:spPr>
-        <p:txBody>
-          <a:bodyPr wrap="square" anchor="t" lIns="0" rIns="0" tIns="0" bIns="0">
-            <a:spAutoFit/>
-          </a:bodyPr>
-          <a:lstStyle/>
-          <a:p>
-            <a:pPr algn="l"/>
-            <a:r>
-              <a:rPr sz="750" b="0" i="0">
-                <a:solidFill>
-                  <a:srgbClr val="6B6690"/>
-                </a:solidFill>
-                <a:latin typeface="Calibri"/>
-              </a:rPr>
-              <a:t>Week 4 Day 5: how much is coming, and how wrong could we be</a:t>
-            </a:r>
-          </a:p>
-        </p:txBody>
-      </p:sp>
-      <p:sp>
-        <p:nvSpPr>
-          <p:cNvPr id="41" name="TextBox 40"/>
-          <p:cNvSpPr txBox="1"/>
-          <p:nvPr/>
-        </p:nvSpPr>
-        <p:spPr>
-          <a:xfrm>
-            <a:off x="10198303" y="6437376"/>
-            <a:ext cx="1463040" cy="160401"/>
-          </a:xfrm>
-          <a:prstGeom prst="rect">
-            <a:avLst/>
-          </a:prstGeom>
-          <a:noFill/>
-        </p:spPr>
-        <p:txBody>
-          <a:bodyPr wrap="square" anchor="t" lIns="0" rIns="0" tIns="0" bIns="0">
-            <a:spAutoFit/>
-          </a:bodyPr>
-          <a:lstStyle/>
-          <a:p>
-            <a:pPr algn="r"/>
-            <a:r>
-              <a:rPr sz="750" b="0" i="0">
-                <a:solidFill>
-                  <a:srgbClr val="6B6690"/>
-                </a:solidFill>
-                <a:latin typeface="Calibri"/>
-              </a:rPr>
-              <a:t>S2  ·  3 / 13</a:t>
-            </a:r>
-          </a:p>
-        </p:txBody>
-      </p:sp>
-    </p:spTree>
-  </p:cSld>
-  <p:clrMapOvr>
-    <a:masterClrMapping/>
-  </p:clrMapOvr>
-</p:sld>
-</file>
-
-<file path=ppt/slides/slide4.xml><?xml version="1.0" encoding="utf-8"?>
-<p:sld xmlns:a="http://schemas.openxmlformats.org/drawingml/2006/main" xmlns:p="http://schemas.openxmlformats.org/presentationml/2006/main" xmlns:r="http://schemas.openxmlformats.org/officeDocument/2006/relationships">
-  <p:cSld>
-    <p:spTree>
-      <p:nvGrpSpPr>
-        <p:cNvPr id="1" name=""/>
-        <p:cNvGrpSpPr/>
-        <p:nvPr/>
-      </p:nvGrpSpPr>
-      <p:grpSpPr/>
-      <p:pic>
-        <p:nvPicPr>
-          <p:cNvPr id="2" name="Picture 1" descr="bg_light.jpg"/>
-          <p:cNvPicPr>
-            <a:picLocks noChangeAspect="1"/>
-          </p:cNvPicPr>
-          <p:nvPr/>
-        </p:nvPicPr>
-        <p:blipFill>
-          <a:blip r:embed="rId2"/>
-          <a:stretch>
-            <a:fillRect/>
-          </a:stretch>
-        </p:blipFill>
-        <p:spPr>
-          <a:xfrm>
-            <a:off x="0" y="0"/>
-            <a:ext cx="12191695" cy="6858000"/>
-          </a:xfrm>
-          <a:prstGeom prst="rect">
-            <a:avLst/>
-          </a:prstGeom>
-        </p:spPr>
-      </p:pic>
-      <p:pic>
-        <p:nvPicPr>
-          <p:cNvPr id="3" name="Picture 2" descr="iitgn_logo.png"/>
-          <p:cNvPicPr>
-            <a:picLocks noChangeAspect="1"/>
-          </p:cNvPicPr>
-          <p:nvPr/>
-        </p:nvPicPr>
-        <p:blipFill>
-          <a:blip r:embed="rId3"/>
-          <a:stretch>
-            <a:fillRect/>
-          </a:stretch>
-        </p:blipFill>
-        <p:spPr>
-          <a:xfrm>
-            <a:off x="530352" y="201168"/>
-            <a:ext cx="420624" cy="420624"/>
-          </a:xfrm>
-          <a:prstGeom prst="rect">
-            <a:avLst/>
-          </a:prstGeom>
-        </p:spPr>
-      </p:pic>
-      <p:sp>
-        <p:nvSpPr>
-          <p:cNvPr id="4" name="TextBox 3"/>
-          <p:cNvSpPr txBox="1"/>
-          <p:nvPr/>
-        </p:nvSpPr>
-        <p:spPr>
-          <a:xfrm>
-            <a:off x="1042416" y="228600"/>
-            <a:ext cx="5120640" cy="185166"/>
-          </a:xfrm>
-          <a:prstGeom prst="rect">
-            <a:avLst/>
-          </a:prstGeom>
-          <a:noFill/>
-        </p:spPr>
-        <p:txBody>
-          <a:bodyPr wrap="square" anchor="t" lIns="0" rIns="0" tIns="0" bIns="0">
-            <a:spAutoFit/>
-          </a:bodyPr>
-          <a:lstStyle/>
-          <a:p>
-            <a:pPr algn="l"/>
-            <a:r>
-              <a:rPr sz="900" b="1" i="0">
-                <a:solidFill>
-                  <a:srgbClr val="1A0F5C"/>
-                </a:solidFill>
-                <a:latin typeface="Calibri"/>
-              </a:rPr>
-              <a:t>Indian Institute of Technology Gandhinagar</a:t>
-            </a:r>
-          </a:p>
-        </p:txBody>
-      </p:sp>
-      <p:sp>
-        <p:nvSpPr>
-          <p:cNvPr id="5" name="TextBox 4"/>
-          <p:cNvSpPr txBox="1"/>
-          <p:nvPr/>
-        </p:nvSpPr>
-        <p:spPr>
-          <a:xfrm>
-            <a:off x="1042416" y="420623"/>
-            <a:ext cx="5852160" cy="127381"/>
-          </a:xfrm>
-          <a:prstGeom prst="rect">
-            <a:avLst/>
-          </a:prstGeom>
-          <a:noFill/>
-        </p:spPr>
-        <p:txBody>
-          <a:bodyPr wrap="square" anchor="t" lIns="0" rIns="0" tIns="0" bIns="0">
-            <a:spAutoFit/>
-          </a:bodyPr>
-          <a:lstStyle/>
-          <a:p>
-            <a:pPr algn="l"/>
-            <a:r>
-              <a:rPr sz="550" b="1" i="0" spc="300">
-                <a:solidFill>
-                  <a:srgbClr val="6B6690"/>
-                </a:solidFill>
-                <a:latin typeface="Calibri"/>
-              </a:rPr>
-              <a:t>ADMINISTERED THROUGH THE COMPETENCY ADVANCEMENT ACADEMY</a:t>
-            </a:r>
-          </a:p>
-        </p:txBody>
-      </p:sp>
-      <p:sp>
-        <p:nvSpPr>
-          <p:cNvPr id="6" name="TextBox 5"/>
-          <p:cNvSpPr txBox="1"/>
-          <p:nvPr/>
-        </p:nvSpPr>
-        <p:spPr>
-          <a:xfrm>
-            <a:off x="5992063" y="310896"/>
-            <a:ext cx="5669280" cy="127381"/>
-          </a:xfrm>
-          <a:prstGeom prst="rect">
-            <a:avLst/>
-          </a:prstGeom>
-          <a:noFill/>
-        </p:spPr>
-        <p:txBody>
-          <a:bodyPr wrap="square" anchor="t" lIns="0" rIns="0" tIns="0" bIns="0">
-            <a:spAutoFit/>
-          </a:bodyPr>
-          <a:lstStyle/>
-          <a:p>
-            <a:pPr algn="r"/>
-            <a:r>
-              <a:rPr sz="550" b="1" i="0" spc="300">
-                <a:solidFill>
-                  <a:srgbClr val="6B6690"/>
-                </a:solidFill>
-                <a:latin typeface="Calibri"/>
-              </a:rPr>
-              <a:t>WEEK 4  ·  DAY 5  ·  KALPA GLOBAL CAPABILITY CENTRE</a:t>
+              <a:t>WEEK 4  ·  FRIDAY  ·  FLIPKART, LUCKNOW  ·  ILLUSTRATIVE CASE</a:t>
             </a:r>
           </a:p>
         </p:txBody>
@@ -10383,7 +9469,772 @@
                 </a:solidFill>
                 <a:latin typeface="Calibri"/>
               </a:rPr>
-              <a:t>S3  ·  4 / 13</a:t>
+              <a:t>S3  ·  3 / 12</a:t>
+            </a:r>
+          </a:p>
+        </p:txBody>
+      </p:sp>
+    </p:spTree>
+  </p:cSld>
+  <p:clrMapOvr>
+    <a:masterClrMapping/>
+  </p:clrMapOvr>
+</p:sld>
+</file>
+
+<file path=ppt/slides/slide4.xml><?xml version="1.0" encoding="utf-8"?>
+<p:sld xmlns:a="http://schemas.openxmlformats.org/drawingml/2006/main" xmlns:p="http://schemas.openxmlformats.org/presentationml/2006/main" xmlns:r="http://schemas.openxmlformats.org/officeDocument/2006/relationships">
+  <p:cSld>
+    <p:spTree>
+      <p:nvGrpSpPr>
+        <p:cNvPr id="1" name=""/>
+        <p:cNvGrpSpPr/>
+        <p:nvPr/>
+      </p:nvGrpSpPr>
+      <p:grpSpPr/>
+      <p:pic>
+        <p:nvPicPr>
+          <p:cNvPr id="2" name="Picture 1" descr="bg_light.jpg"/>
+          <p:cNvPicPr>
+            <a:picLocks noChangeAspect="1"/>
+          </p:cNvPicPr>
+          <p:nvPr/>
+        </p:nvPicPr>
+        <p:blipFill>
+          <a:blip r:embed="rId2"/>
+          <a:stretch>
+            <a:fillRect/>
+          </a:stretch>
+        </p:blipFill>
+        <p:spPr>
+          <a:xfrm>
+            <a:off x="0" y="0"/>
+            <a:ext cx="12191695" cy="6858000"/>
+          </a:xfrm>
+          <a:prstGeom prst="rect">
+            <a:avLst/>
+          </a:prstGeom>
+        </p:spPr>
+      </p:pic>
+      <p:pic>
+        <p:nvPicPr>
+          <p:cNvPr id="3" name="Picture 2" descr="iitgn_logo.png"/>
+          <p:cNvPicPr>
+            <a:picLocks noChangeAspect="1"/>
+          </p:cNvPicPr>
+          <p:nvPr/>
+        </p:nvPicPr>
+        <p:blipFill>
+          <a:blip r:embed="rId3"/>
+          <a:stretch>
+            <a:fillRect/>
+          </a:stretch>
+        </p:blipFill>
+        <p:spPr>
+          <a:xfrm>
+            <a:off x="530352" y="201168"/>
+            <a:ext cx="420624" cy="420624"/>
+          </a:xfrm>
+          <a:prstGeom prst="rect">
+            <a:avLst/>
+          </a:prstGeom>
+        </p:spPr>
+      </p:pic>
+      <p:sp>
+        <p:nvSpPr>
+          <p:cNvPr id="4" name="TextBox 3"/>
+          <p:cNvSpPr txBox="1"/>
+          <p:nvPr/>
+        </p:nvSpPr>
+        <p:spPr>
+          <a:xfrm>
+            <a:off x="1042416" y="228600"/>
+            <a:ext cx="5120640" cy="185166"/>
+          </a:xfrm>
+          <a:prstGeom prst="rect">
+            <a:avLst/>
+          </a:prstGeom>
+          <a:noFill/>
+        </p:spPr>
+        <p:txBody>
+          <a:bodyPr wrap="square" anchor="t" lIns="0" rIns="0" tIns="0" bIns="0">
+            <a:spAutoFit/>
+          </a:bodyPr>
+          <a:lstStyle/>
+          <a:p>
+            <a:pPr algn="l"/>
+            <a:r>
+              <a:rPr sz="900" b="1" i="0">
+                <a:solidFill>
+                  <a:srgbClr val="1A0F5C"/>
+                </a:solidFill>
+                <a:latin typeface="Calibri"/>
+              </a:rPr>
+              <a:t>Indian Institute of Technology Gandhinagar</a:t>
+            </a:r>
+          </a:p>
+        </p:txBody>
+      </p:sp>
+      <p:sp>
+        <p:nvSpPr>
+          <p:cNvPr id="5" name="TextBox 4"/>
+          <p:cNvSpPr txBox="1"/>
+          <p:nvPr/>
+        </p:nvSpPr>
+        <p:spPr>
+          <a:xfrm>
+            <a:off x="1042416" y="420623"/>
+            <a:ext cx="5852160" cy="127381"/>
+          </a:xfrm>
+          <a:prstGeom prst="rect">
+            <a:avLst/>
+          </a:prstGeom>
+          <a:noFill/>
+        </p:spPr>
+        <p:txBody>
+          <a:bodyPr wrap="square" anchor="t" lIns="0" rIns="0" tIns="0" bIns="0">
+            <a:spAutoFit/>
+          </a:bodyPr>
+          <a:lstStyle/>
+          <a:p>
+            <a:pPr algn="l"/>
+            <a:r>
+              <a:rPr sz="550" b="1" i="0" spc="300">
+                <a:solidFill>
+                  <a:srgbClr val="6B6690"/>
+                </a:solidFill>
+                <a:latin typeface="Calibri"/>
+              </a:rPr>
+              <a:t>ADMINISTERED THROUGH THE COMPETENCY ADVANCEMENT ACADEMY</a:t>
+            </a:r>
+          </a:p>
+        </p:txBody>
+      </p:sp>
+      <p:sp>
+        <p:nvSpPr>
+          <p:cNvPr id="6" name="TextBox 5"/>
+          <p:cNvSpPr txBox="1"/>
+          <p:nvPr/>
+        </p:nvSpPr>
+        <p:spPr>
+          <a:xfrm>
+            <a:off x="5992063" y="310896"/>
+            <a:ext cx="5669280" cy="127381"/>
+          </a:xfrm>
+          <a:prstGeom prst="rect">
+            <a:avLst/>
+          </a:prstGeom>
+          <a:noFill/>
+        </p:spPr>
+        <p:txBody>
+          <a:bodyPr wrap="square" anchor="t" lIns="0" rIns="0" tIns="0" bIns="0">
+            <a:spAutoFit/>
+          </a:bodyPr>
+          <a:lstStyle/>
+          <a:p>
+            <a:pPr algn="r"/>
+            <a:r>
+              <a:rPr sz="550" b="1" i="0" spc="300">
+                <a:solidFill>
+                  <a:srgbClr val="6B6690"/>
+                </a:solidFill>
+                <a:latin typeface="Calibri"/>
+              </a:rPr>
+              <a:t>WEEK 4  ·  FRIDAY  ·  FLIPKART, LUCKNOW  ·  ILLUSTRATIVE CASE</a:t>
+            </a:r>
+          </a:p>
+        </p:txBody>
+      </p:sp>
+      <p:sp>
+        <p:nvSpPr>
+          <p:cNvPr id="7" name="TextBox 6"/>
+          <p:cNvSpPr txBox="1"/>
+          <p:nvPr/>
+        </p:nvSpPr>
+        <p:spPr>
+          <a:xfrm>
+            <a:off x="530352" y="676656"/>
+            <a:ext cx="11130991" cy="512064"/>
+          </a:xfrm>
+          <a:prstGeom prst="rect">
+            <a:avLst/>
+          </a:prstGeom>
+          <a:noFill/>
+        </p:spPr>
+        <p:txBody>
+          <a:bodyPr wrap="square" anchor="b" lIns="0" rIns="0" tIns="0" bIns="0">
+            <a:spAutoFit/>
+          </a:bodyPr>
+          <a:lstStyle/>
+          <a:p>
+            <a:pPr algn="l"/>
+            <a:r>
+              <a:rPr sz="2600" b="0" i="0">
+                <a:solidFill>
+                  <a:srgbClr val="1A0F5C"/>
+                </a:solidFill>
+                <a:latin typeface="Georgia"/>
+              </a:rPr>
+              <a:t>Finance and the vendor's sponsor are each partly right</a:t>
+            </a:r>
+          </a:p>
+        </p:txBody>
+      </p:sp>
+      <p:sp>
+        <p:nvSpPr>
+          <p:cNvPr id="8" name="TextBox 7"/>
+          <p:cNvSpPr txBox="1"/>
+          <p:nvPr/>
+        </p:nvSpPr>
+        <p:spPr>
+          <a:xfrm>
+            <a:off x="530352" y="1243584"/>
+            <a:ext cx="11130991" cy="234696"/>
+          </a:xfrm>
+          <a:prstGeom prst="rect">
+            <a:avLst/>
+          </a:prstGeom>
+          <a:noFill/>
+        </p:spPr>
+        <p:txBody>
+          <a:bodyPr wrap="square" anchor="t" lIns="0" rIns="0" tIns="0" bIns="0">
+            <a:spAutoFit/>
+          </a:bodyPr>
+          <a:lstStyle/>
+          <a:p>
+            <a:pPr algn="l"/>
+            <a:r>
+              <a:rPr sz="1200" b="0" i="0">
+                <a:solidFill>
+                  <a:srgbClr val="6B6690"/>
+                </a:solidFill>
+                <a:latin typeface="Calibri"/>
+              </a:rPr>
+              <a:t>What is true in each objection, and what answers the rest?</a:t>
+            </a:r>
+          </a:p>
+        </p:txBody>
+      </p:sp>
+      <p:sp>
+        <p:nvSpPr>
+          <p:cNvPr id="9" name="Rounded Rectangle 8"/>
+          <p:cNvSpPr/>
+          <p:nvPr/>
+        </p:nvSpPr>
+        <p:spPr>
+          <a:xfrm>
+            <a:off x="530352" y="1956816"/>
+            <a:ext cx="5474055" cy="2154428"/>
+          </a:xfrm>
+          <a:prstGeom prst="roundRect">
+            <a:avLst>
+              <a:gd name="adj" fmla="val 5000"/>
+            </a:avLst>
+          </a:prstGeom>
+          <a:solidFill>
+            <a:srgbClr val="FFFFFF"/>
+          </a:solidFill>
+          <a:ln w="9525">
+            <a:solidFill>
+              <a:srgbClr val="E4E1F1"/>
+            </a:solidFill>
+          </a:ln>
+          <a:effectLst>
+            <a:outerShdw blurRad="76200" dist="19050" dir="5400000" algn="bl" rotWithShape="0">
+              <a:srgbClr val="1A0F5C">
+                <a:alpha val="12000"/>
+              </a:srgbClr>
+            </a:outerShdw>
+          </a:effectLst>
+        </p:spPr>
+        <p:style>
+          <a:lnRef idx="1">
+            <a:schemeClr val="accent1"/>
+          </a:lnRef>
+          <a:fillRef idx="3">
+            <a:schemeClr val="accent1"/>
+          </a:fillRef>
+          <a:effectRef idx="2">
+            <a:schemeClr val="accent1"/>
+          </a:effectRef>
+          <a:fontRef idx="minor">
+            <a:schemeClr val="lt1"/>
+          </a:fontRef>
+        </p:style>
+        <p:txBody>
+          <a:bodyPr rtlCol="0" anchor="ctr" wrap="square"/>
+          <a:lstStyle/>
+          <a:p>
+            <a:pPr algn="ctr"/>
+          </a:p>
+        </p:txBody>
+      </p:sp>
+      <p:sp>
+        <p:nvSpPr>
+          <p:cNvPr id="10" name="Oval 9"/>
+          <p:cNvSpPr/>
+          <p:nvPr/>
+        </p:nvSpPr>
+        <p:spPr>
+          <a:xfrm>
+            <a:off x="731519" y="2157984"/>
+            <a:ext cx="457200" cy="457200"/>
+          </a:xfrm>
+          <a:prstGeom prst="ellipse">
+            <a:avLst/>
+          </a:prstGeom>
+          <a:solidFill>
+            <a:srgbClr val="EEEAFB"/>
+          </a:solidFill>
+          <a:ln>
+            <a:noFill/>
+          </a:ln>
+          <a:effectLst/>
+        </p:spPr>
+        <p:style>
+          <a:lnRef idx="1">
+            <a:schemeClr val="accent1"/>
+          </a:lnRef>
+          <a:fillRef idx="3">
+            <a:schemeClr val="accent1"/>
+          </a:fillRef>
+          <a:effectRef idx="2">
+            <a:schemeClr val="accent1"/>
+          </a:effectRef>
+          <a:fontRef idx="minor">
+            <a:schemeClr val="lt1"/>
+          </a:fontRef>
+        </p:style>
+        <p:txBody>
+          <a:bodyPr rtlCol="0" anchor="ctr" wrap="square"/>
+          <a:lstStyle/>
+          <a:p>
+            <a:pPr algn="ctr"/>
+          </a:p>
+        </p:txBody>
+      </p:sp>
+      <p:pic>
+        <p:nvPicPr>
+          <p:cNvPr id="11" name="Picture 10" descr="calculator_852ec1ae1794.png"/>
+          <p:cNvPicPr>
+            <a:picLocks noChangeAspect="1"/>
+          </p:cNvPicPr>
+          <p:nvPr/>
+        </p:nvPicPr>
+        <p:blipFill>
+          <a:blip r:embed="rId4"/>
+          <a:stretch>
+            <a:fillRect/>
+          </a:stretch>
+        </p:blipFill>
+        <p:spPr>
+          <a:xfrm>
+            <a:off x="841247" y="2267712"/>
+            <a:ext cx="237744" cy="237744"/>
+          </a:xfrm>
+          <a:prstGeom prst="rect">
+            <a:avLst/>
+          </a:prstGeom>
+        </p:spPr>
+      </p:pic>
+      <p:sp>
+        <p:nvSpPr>
+          <p:cNvPr id="12" name="TextBox 11"/>
+          <p:cNvSpPr txBox="1"/>
+          <p:nvPr/>
+        </p:nvSpPr>
+        <p:spPr>
+          <a:xfrm>
+            <a:off x="731519" y="2724912"/>
+            <a:ext cx="5071719" cy="160401"/>
+          </a:xfrm>
+          <a:prstGeom prst="rect">
+            <a:avLst/>
+          </a:prstGeom>
+          <a:noFill/>
+        </p:spPr>
+        <p:txBody>
+          <a:bodyPr wrap="square" anchor="t" lIns="0" rIns="0" tIns="0" bIns="0">
+            <a:spAutoFit/>
+          </a:bodyPr>
+          <a:lstStyle/>
+          <a:p>
+            <a:pPr algn="l"/>
+            <a:r>
+              <a:rPr sz="750" b="1" i="0" spc="250">
+                <a:solidFill>
+                  <a:srgbClr val="5B3FD6"/>
+                </a:solidFill>
+                <a:latin typeface="Calibri"/>
+              </a:rPr>
+              <a:t>FINANCE</a:t>
+            </a:r>
+          </a:p>
+        </p:txBody>
+      </p:sp>
+      <p:sp>
+        <p:nvSpPr>
+          <p:cNvPr id="13" name="TextBox 12"/>
+          <p:cNvSpPr txBox="1"/>
+          <p:nvPr/>
+        </p:nvSpPr>
+        <p:spPr>
+          <a:xfrm>
+            <a:off x="731519" y="2962656"/>
+            <a:ext cx="5071719" cy="267716"/>
+          </a:xfrm>
+          <a:prstGeom prst="rect">
+            <a:avLst/>
+          </a:prstGeom>
+          <a:noFill/>
+        </p:spPr>
+        <p:txBody>
+          <a:bodyPr wrap="square" anchor="t" lIns="0" rIns="0" tIns="0" bIns="0">
+            <a:spAutoFit/>
+          </a:bodyPr>
+          <a:lstStyle/>
+          <a:p>
+            <a:pPr algn="l"/>
+            <a:r>
+              <a:rPr sz="1400" b="1" i="0">
+                <a:solidFill>
+                  <a:srgbClr val="1A0F5C"/>
+                </a:solidFill>
+                <a:latin typeface="Calibri"/>
+              </a:rPr>
+              <a:t>"Last year plus 4 is what the budget holds"</a:t>
+            </a:r>
+          </a:p>
+        </p:txBody>
+      </p:sp>
+      <p:sp>
+        <p:nvSpPr>
+          <p:cNvPr id="14" name="TextBox 13"/>
+          <p:cNvSpPr txBox="1"/>
+          <p:nvPr/>
+        </p:nvSpPr>
+        <p:spPr>
+          <a:xfrm>
+            <a:off x="731519" y="3303524"/>
+            <a:ext cx="5071719" cy="581406"/>
+          </a:xfrm>
+          <a:prstGeom prst="rect">
+            <a:avLst/>
+          </a:prstGeom>
+          <a:noFill/>
+        </p:spPr>
+        <p:txBody>
+          <a:bodyPr wrap="square" anchor="t" lIns="0" rIns="0" tIns="0" bIns="0">
+            <a:spAutoFit/>
+          </a:bodyPr>
+          <a:lstStyle/>
+          <a:p>
+            <a:pPr algn="l"/>
+            <a:r>
+              <a:rPr sz="1100" b="0" i="0">
+                <a:solidFill>
+                  <a:srgbClr val="6B6690"/>
+                </a:solidFill>
+                <a:latin typeface="Calibri"/>
+              </a:rPr>
+              <a:t>True: the two years grew 4.0 percent. Not true for the weeks: copied by calendar it books the peak on 5 October and sits 308,048 shipments short.</a:t>
+            </a:r>
+          </a:p>
+        </p:txBody>
+      </p:sp>
+      <p:sp>
+        <p:nvSpPr>
+          <p:cNvPr id="15" name="Rounded Rectangle 14"/>
+          <p:cNvSpPr/>
+          <p:nvPr/>
+        </p:nvSpPr>
+        <p:spPr>
+          <a:xfrm>
+            <a:off x="6187287" y="1956816"/>
+            <a:ext cx="5474055" cy="2154428"/>
+          </a:xfrm>
+          <a:prstGeom prst="roundRect">
+            <a:avLst>
+              <a:gd name="adj" fmla="val 5000"/>
+            </a:avLst>
+          </a:prstGeom>
+          <a:solidFill>
+            <a:srgbClr val="FFFFFF"/>
+          </a:solidFill>
+          <a:ln w="9525">
+            <a:solidFill>
+              <a:srgbClr val="E4E1F1"/>
+            </a:solidFill>
+          </a:ln>
+          <a:effectLst>
+            <a:outerShdw blurRad="76200" dist="19050" dir="5400000" algn="bl" rotWithShape="0">
+              <a:srgbClr val="1A0F5C">
+                <a:alpha val="12000"/>
+              </a:srgbClr>
+            </a:outerShdw>
+          </a:effectLst>
+        </p:spPr>
+        <p:style>
+          <a:lnRef idx="1">
+            <a:schemeClr val="accent1"/>
+          </a:lnRef>
+          <a:fillRef idx="3">
+            <a:schemeClr val="accent1"/>
+          </a:fillRef>
+          <a:effectRef idx="2">
+            <a:schemeClr val="accent1"/>
+          </a:effectRef>
+          <a:fontRef idx="minor">
+            <a:schemeClr val="lt1"/>
+          </a:fontRef>
+        </p:style>
+        <p:txBody>
+          <a:bodyPr rtlCol="0" anchor="ctr" wrap="square"/>
+          <a:lstStyle/>
+          <a:p>
+            <a:pPr algn="ctr"/>
+          </a:p>
+        </p:txBody>
+      </p:sp>
+      <p:sp>
+        <p:nvSpPr>
+          <p:cNvPr id="16" name="Oval 15"/>
+          <p:cNvSpPr/>
+          <p:nvPr/>
+        </p:nvSpPr>
+        <p:spPr>
+          <a:xfrm>
+            <a:off x="6388455" y="2157984"/>
+            <a:ext cx="457200" cy="457200"/>
+          </a:xfrm>
+          <a:prstGeom prst="ellipse">
+            <a:avLst/>
+          </a:prstGeom>
+          <a:solidFill>
+            <a:srgbClr val="EEEAFB"/>
+          </a:solidFill>
+          <a:ln>
+            <a:noFill/>
+          </a:ln>
+          <a:effectLst/>
+        </p:spPr>
+        <p:style>
+          <a:lnRef idx="1">
+            <a:schemeClr val="accent1"/>
+          </a:lnRef>
+          <a:fillRef idx="3">
+            <a:schemeClr val="accent1"/>
+          </a:fillRef>
+          <a:effectRef idx="2">
+            <a:schemeClr val="accent1"/>
+          </a:effectRef>
+          <a:fontRef idx="minor">
+            <a:schemeClr val="lt1"/>
+          </a:fontRef>
+        </p:style>
+        <p:txBody>
+          <a:bodyPr rtlCol="0" anchor="ctr" wrap="square"/>
+          <a:lstStyle/>
+          <a:p>
+            <a:pPr algn="ctr"/>
+          </a:p>
+        </p:txBody>
+      </p:sp>
+      <p:pic>
+        <p:nvPicPr>
+          <p:cNvPr id="17" name="Picture 16" descr="trending-up_0f9f07881489.png"/>
+          <p:cNvPicPr>
+            <a:picLocks noChangeAspect="1"/>
+          </p:cNvPicPr>
+          <p:nvPr/>
+        </p:nvPicPr>
+        <p:blipFill>
+          <a:blip r:embed="rId5"/>
+          <a:stretch>
+            <a:fillRect/>
+          </a:stretch>
+        </p:blipFill>
+        <p:spPr>
+          <a:xfrm>
+            <a:off x="6498183" y="2267712"/>
+            <a:ext cx="237744" cy="237744"/>
+          </a:xfrm>
+          <a:prstGeom prst="rect">
+            <a:avLst/>
+          </a:prstGeom>
+        </p:spPr>
+      </p:pic>
+      <p:sp>
+        <p:nvSpPr>
+          <p:cNvPr id="18" name="TextBox 17"/>
+          <p:cNvSpPr txBox="1"/>
+          <p:nvPr/>
+        </p:nvSpPr>
+        <p:spPr>
+          <a:xfrm>
+            <a:off x="6388455" y="2724912"/>
+            <a:ext cx="5071719" cy="160401"/>
+          </a:xfrm>
+          <a:prstGeom prst="rect">
+            <a:avLst/>
+          </a:prstGeom>
+          <a:noFill/>
+        </p:spPr>
+        <p:txBody>
+          <a:bodyPr wrap="square" anchor="t" lIns="0" rIns="0" tIns="0" bIns="0">
+            <a:spAutoFit/>
+          </a:bodyPr>
+          <a:lstStyle/>
+          <a:p>
+            <a:pPr algn="l"/>
+            <a:r>
+              <a:rPr sz="750" b="1" i="0" spc="250">
+                <a:solidFill>
+                  <a:srgbClr val="5B3FD6"/>
+                </a:solidFill>
+                <a:latin typeface="Calibri"/>
+              </a:rPr>
+              <a:t>THE VENDOR'S SPONSOR</a:t>
+            </a:r>
+          </a:p>
+        </p:txBody>
+      </p:sp>
+      <p:sp>
+        <p:nvSpPr>
+          <p:cNvPr id="19" name="TextBox 18"/>
+          <p:cNvSpPr txBox="1"/>
+          <p:nvPr/>
+        </p:nvSpPr>
+        <p:spPr>
+          <a:xfrm>
+            <a:off x="6388455" y="2962656"/>
+            <a:ext cx="5071719" cy="267716"/>
+          </a:xfrm>
+          <a:prstGeom prst="rect">
+            <a:avLst/>
+          </a:prstGeom>
+          <a:noFill/>
+        </p:spPr>
+        <p:txBody>
+          <a:bodyPr wrap="square" anchor="t" lIns="0" rIns="0" tIns="0" bIns="0">
+            <a:spAutoFit/>
+          </a:bodyPr>
+          <a:lstStyle/>
+          <a:p>
+            <a:pPr algn="l"/>
+            <a:r>
+              <a:rPr sz="1400" b="1" i="0">
+                <a:solidFill>
+                  <a:srgbClr val="1A0F5C"/>
+                </a:solidFill>
+                <a:latin typeface="Calibri"/>
+              </a:rPr>
+              <a:t>"The model fits every week of history"</a:t>
+            </a:r>
+          </a:p>
+        </p:txBody>
+      </p:sp>
+      <p:sp>
+        <p:nvSpPr>
+          <p:cNvPr id="20" name="TextBox 19"/>
+          <p:cNvSpPr txBox="1"/>
+          <p:nvPr/>
+        </p:nvSpPr>
+        <p:spPr>
+          <a:xfrm>
+            <a:off x="6388455" y="3303524"/>
+            <a:ext cx="5071719" cy="581406"/>
+          </a:xfrm>
+          <a:prstGeom prst="rect">
+            <a:avLst/>
+          </a:prstGeom>
+          <a:noFill/>
+        </p:spPr>
+        <p:txBody>
+          <a:bodyPr wrap="square" anchor="t" lIns="0" rIns="0" tIns="0" bIns="0">
+            <a:spAutoFit/>
+          </a:bodyPr>
+          <a:lstStyle/>
+          <a:p>
+            <a:pPr algn="l"/>
+            <a:r>
+              <a:rPr sz="1100" b="0" i="0">
+                <a:solidFill>
+                  <a:srgbClr val="6B6690"/>
+                </a:solidFill>
+                <a:latin typeface="Calibri"/>
+              </a:rPr>
+              <a:t>True: within 1.4 percent. That is the problem: on thirteen weeks it never saw it missed by 16,400 a week, 67 percent worse than the copy of last year.</a:t>
+            </a:r>
+          </a:p>
+        </p:txBody>
+      </p:sp>
+      <p:sp>
+        <p:nvSpPr>
+          <p:cNvPr id="21" name="TextBox 20"/>
+          <p:cNvSpPr txBox="1"/>
+          <p:nvPr/>
+        </p:nvSpPr>
+        <p:spPr>
+          <a:xfrm>
+            <a:off x="530352" y="6437376"/>
+            <a:ext cx="9667951" cy="160401"/>
+          </a:xfrm>
+          <a:prstGeom prst="rect">
+            <a:avLst/>
+          </a:prstGeom>
+          <a:noFill/>
+        </p:spPr>
+        <p:txBody>
+          <a:bodyPr wrap="square" anchor="t" lIns="0" rIns="0" tIns="0" bIns="0">
+            <a:spAutoFit/>
+          </a:bodyPr>
+          <a:lstStyle/>
+          <a:p>
+            <a:pPr algn="l"/>
+            <a:r>
+              <a:rPr sz="750" b="0" i="0">
+                <a:solidFill>
+                  <a:srgbClr val="6B6690"/>
+                </a:solidFill>
+                <a:latin typeface="Calibri"/>
+              </a:rPr>
+              <a:t>Week 4 Day 5: how much is coming, and how wrong could we be</a:t>
+            </a:r>
+          </a:p>
+        </p:txBody>
+      </p:sp>
+      <p:sp>
+        <p:nvSpPr>
+          <p:cNvPr id="22" name="TextBox 21"/>
+          <p:cNvSpPr txBox="1"/>
+          <p:nvPr/>
+        </p:nvSpPr>
+        <p:spPr>
+          <a:xfrm>
+            <a:off x="10198303" y="6437376"/>
+            <a:ext cx="1463040" cy="160401"/>
+          </a:xfrm>
+          <a:prstGeom prst="rect">
+            <a:avLst/>
+          </a:prstGeom>
+          <a:noFill/>
+        </p:spPr>
+        <p:txBody>
+          <a:bodyPr wrap="square" anchor="t" lIns="0" rIns="0" tIns="0" bIns="0">
+            <a:spAutoFit/>
+          </a:bodyPr>
+          <a:lstStyle/>
+          <a:p>
+            <a:pPr algn="r"/>
+            <a:r>
+              <a:rPr sz="750" b="0" i="0">
+                <a:solidFill>
+                  <a:srgbClr val="6B6690"/>
+                </a:solidFill>
+                <a:latin typeface="Calibri"/>
+              </a:rPr>
+              <a:t>S4  ·  4 / 12</a:t>
             </a:r>
           </a:p>
         </p:txBody>
@@ -10554,7 +10405,7 @@
                 </a:solidFill>
                 <a:latin typeface="Calibri"/>
               </a:rPr>
-              <a:t>WEEK 4  ·  DAY 5  ·  KALPA GLOBAL CAPABILITY CENTRE</a:t>
+              <a:t>WEEK 4  ·  FRIDAY  ·  FLIPKART, LUCKNOW  ·  ILLUSTRATIVE CASE</a:t>
             </a:r>
           </a:p>
         </p:txBody>
@@ -10589,7 +10440,7 @@
                 </a:solidFill>
                 <a:latin typeface="Georgia"/>
               </a:rPr>
-              <a:t>Finance and the vendor's sponsor are each partly right</a:t>
+              <a:t>Three of four forecasts book the wrong week</a:t>
             </a:r>
           </a:p>
         </p:txBody>
@@ -10624,112 +10475,14 @@
                 </a:solidFill>
                 <a:latin typeface="Calibri"/>
               </a:rPr>
-              <a:t>What is true in each objection, and what answers the rest?</a:t>
-            </a:r>
-          </a:p>
-        </p:txBody>
-      </p:sp>
-      <p:sp>
-        <p:nvSpPr>
-          <p:cNvPr id="9" name="Rounded Rectangle 8"/>
-          <p:cNvSpPr/>
-          <p:nvPr/>
-        </p:nvSpPr>
-        <p:spPr>
-          <a:xfrm>
-            <a:off x="530352" y="1956816"/>
-            <a:ext cx="5474055" cy="2154428"/>
-          </a:xfrm>
-          <a:prstGeom prst="roundRect">
-            <a:avLst>
-              <a:gd name="adj" fmla="val 5000"/>
-            </a:avLst>
-          </a:prstGeom>
-          <a:solidFill>
-            <a:srgbClr val="FFFFFF"/>
-          </a:solidFill>
-          <a:ln w="9525">
-            <a:solidFill>
-              <a:srgbClr val="E4E1F1"/>
-            </a:solidFill>
-          </a:ln>
-          <a:effectLst>
-            <a:outerShdw blurRad="76200" dist="19050" dir="5400000" algn="bl" rotWithShape="0">
-              <a:srgbClr val="1A0F5C">
-                <a:alpha val="12000"/>
-              </a:srgbClr>
-            </a:outerShdw>
-          </a:effectLst>
-        </p:spPr>
-        <p:style>
-          <a:lnRef idx="1">
-            <a:schemeClr val="accent1"/>
-          </a:lnRef>
-          <a:fillRef idx="3">
-            <a:schemeClr val="accent1"/>
-          </a:fillRef>
-          <a:effectRef idx="2">
-            <a:schemeClr val="accent1"/>
-          </a:effectRef>
-          <a:fontRef idx="minor">
-            <a:schemeClr val="lt1"/>
-          </a:fontRef>
-        </p:style>
-        <p:txBody>
-          <a:bodyPr rtlCol="0" anchor="ctr" wrap="square"/>
-          <a:lstStyle/>
-          <a:p>
-            <a:pPr algn="ctr"/>
-          </a:p>
-        </p:txBody>
-      </p:sp>
-      <p:sp>
-        <p:nvSpPr>
-          <p:cNvPr id="10" name="Oval 9"/>
-          <p:cNvSpPr/>
-          <p:nvPr/>
-        </p:nvSpPr>
-        <p:spPr>
-          <a:xfrm>
-            <a:off x="731519" y="2157984"/>
-            <a:ext cx="457200" cy="457200"/>
-          </a:xfrm>
-          <a:prstGeom prst="ellipse">
-            <a:avLst/>
-          </a:prstGeom>
-          <a:solidFill>
-            <a:srgbClr val="EEEAFB"/>
-          </a:solidFill>
-          <a:ln>
-            <a:noFill/>
-          </a:ln>
-          <a:effectLst/>
-        </p:spPr>
-        <p:style>
-          <a:lnRef idx="1">
-            <a:schemeClr val="accent1"/>
-          </a:lnRef>
-          <a:fillRef idx="3">
-            <a:schemeClr val="accent1"/>
-          </a:fillRef>
-          <a:effectRef idx="2">
-            <a:schemeClr val="accent1"/>
-          </a:effectRef>
-          <a:fontRef idx="minor">
-            <a:schemeClr val="lt1"/>
-          </a:fontRef>
-        </p:style>
-        <p:txBody>
-          <a:bodyPr rtlCol="0" anchor="ctr" wrap="square"/>
-          <a:lstStyle/>
-          <a:p>
-            <a:pPr algn="ctr"/>
+              <a:t>Which weeks does each forecast book the most packers for?</a:t>
+            </a:r>
           </a:p>
         </p:txBody>
       </p:sp>
       <p:pic>
         <p:nvPicPr>
-          <p:cNvPr id="11" name="Picture 10" descr="calculator_852ec1ae1794.png"/>
+          <p:cNvPr id="9" name="mermaid diagram" descr="C2_W04_D05_window_2026_STUDENT.png"/>
           <p:cNvPicPr>
             <a:picLocks noChangeAspect="1"/>
           </p:cNvPicPr>
@@ -10743,8 +10496,8 @@
         </p:blipFill>
         <p:spPr>
           <a:xfrm>
-            <a:off x="841247" y="2267712"/>
-            <a:ext cx="237744" cy="237744"/>
+            <a:off x="1605364" y="1664208"/>
+            <a:ext cx="8980966" cy="3491992"/>
           </a:xfrm>
           <a:prstGeom prst="rect">
             <a:avLst/>
@@ -10753,339 +10506,76 @@
       </p:pic>
       <p:sp>
         <p:nvSpPr>
+          <p:cNvPr id="10" name="picture caption"/>
+          <p:cNvSpPr txBox="1"/>
+          <p:nvPr/>
+        </p:nvSpPr>
+        <p:spPr>
+          <a:xfrm>
+            <a:off x="530352" y="5192776"/>
+            <a:ext cx="11130991" cy="316992"/>
+          </a:xfrm>
+          <a:prstGeom prst="rect">
+            <a:avLst/>
+          </a:prstGeom>
+          <a:noFill/>
+        </p:spPr>
+        <p:txBody>
+          <a:bodyPr wrap="square" anchor="t" lIns="0" rIns="0" tIns="0" bIns="0">
+            <a:spAutoFit/>
+          </a:bodyPr>
+          <a:lstStyle/>
+          <a:p>
+            <a:pPr algn="ctr"/>
+            <a:r>
+              <a:rPr sz="1200" b="0" i="0">
+                <a:solidFill>
+                  <a:srgbClr val="6B6690"/>
+                </a:solidFill>
+                <a:latin typeface="Calibri"/>
+              </a:rPr>
+              <a:t>Four forecasts for 28 September to 30 November 2026</a:t>
+            </a:r>
+          </a:p>
+        </p:txBody>
+      </p:sp>
+      <p:sp>
+        <p:nvSpPr>
+          <p:cNvPr id="11" name="TextBox 10"/>
+          <p:cNvSpPr txBox="1"/>
+          <p:nvPr/>
+        </p:nvSpPr>
+        <p:spPr>
+          <a:xfrm>
+            <a:off x="530352" y="5518912"/>
+            <a:ext cx="11130991" cy="680720"/>
+          </a:xfrm>
+          <a:prstGeom prst="rect">
+            <a:avLst/>
+          </a:prstGeom>
+          <a:noFill/>
+        </p:spPr>
+        <p:txBody>
+          <a:bodyPr wrap="square" anchor="t" lIns="0" rIns="0" tIns="0" bIns="0">
+            <a:spAutoFit/>
+          </a:bodyPr>
+          <a:lstStyle/>
+          <a:p>
+            <a:r>
+              <a:rPr sz="1600" b="0" i="0">
+                <a:solidFill>
+                  <a:srgbClr val="1A1440"/>
+                </a:solidFill>
+                <a:latin typeface="Calibri"/>
+              </a:rPr>
+              <a:t>The house bot, finance's rule and the vendor book their biggest week on 5 October; festival-aligned books it on 19 October, two weeks before Diwali's week.</a:t>
+            </a:r>
+          </a:p>
+        </p:txBody>
+      </p:sp>
+      <p:sp>
+        <p:nvSpPr>
           <p:cNvPr id="12" name="TextBox 11"/>
-          <p:cNvSpPr txBox="1"/>
-          <p:nvPr/>
-        </p:nvSpPr>
-        <p:spPr>
-          <a:xfrm>
-            <a:off x="731519" y="2724912"/>
-            <a:ext cx="5071719" cy="160401"/>
-          </a:xfrm>
-          <a:prstGeom prst="rect">
-            <a:avLst/>
-          </a:prstGeom>
-          <a:noFill/>
-        </p:spPr>
-        <p:txBody>
-          <a:bodyPr wrap="square" anchor="t" lIns="0" rIns="0" tIns="0" bIns="0">
-            <a:spAutoFit/>
-          </a:bodyPr>
-          <a:lstStyle/>
-          <a:p>
-            <a:pPr algn="l"/>
-            <a:r>
-              <a:rPr sz="750" b="1" i="0" spc="250">
-                <a:solidFill>
-                  <a:srgbClr val="5B3FD6"/>
-                </a:solidFill>
-                <a:latin typeface="Calibri"/>
-              </a:rPr>
-              <a:t>FINANCE</a:t>
-            </a:r>
-          </a:p>
-        </p:txBody>
-      </p:sp>
-      <p:sp>
-        <p:nvSpPr>
-          <p:cNvPr id="13" name="TextBox 12"/>
-          <p:cNvSpPr txBox="1"/>
-          <p:nvPr/>
-        </p:nvSpPr>
-        <p:spPr>
-          <a:xfrm>
-            <a:off x="731519" y="2962656"/>
-            <a:ext cx="5071719" cy="267716"/>
-          </a:xfrm>
-          <a:prstGeom prst="rect">
-            <a:avLst/>
-          </a:prstGeom>
-          <a:noFill/>
-        </p:spPr>
-        <p:txBody>
-          <a:bodyPr wrap="square" anchor="t" lIns="0" rIns="0" tIns="0" bIns="0">
-            <a:spAutoFit/>
-          </a:bodyPr>
-          <a:lstStyle/>
-          <a:p>
-            <a:pPr algn="l"/>
-            <a:r>
-              <a:rPr sz="1400" b="1" i="0">
-                <a:solidFill>
-                  <a:srgbClr val="1A0F5C"/>
-                </a:solidFill>
-                <a:latin typeface="Calibri"/>
-              </a:rPr>
-              <a:t>"Last year plus 4 is what the budget holds"</a:t>
-            </a:r>
-          </a:p>
-        </p:txBody>
-      </p:sp>
-      <p:sp>
-        <p:nvSpPr>
-          <p:cNvPr id="14" name="TextBox 13"/>
-          <p:cNvSpPr txBox="1"/>
-          <p:nvPr/>
-        </p:nvSpPr>
-        <p:spPr>
-          <a:xfrm>
-            <a:off x="731519" y="3303524"/>
-            <a:ext cx="5071719" cy="581406"/>
-          </a:xfrm>
-          <a:prstGeom prst="rect">
-            <a:avLst/>
-          </a:prstGeom>
-          <a:noFill/>
-        </p:spPr>
-        <p:txBody>
-          <a:bodyPr wrap="square" anchor="t" lIns="0" rIns="0" tIns="0" bIns="0">
-            <a:spAutoFit/>
-          </a:bodyPr>
-          <a:lstStyle/>
-          <a:p>
-            <a:pPr algn="l"/>
-            <a:r>
-              <a:rPr sz="1100" b="0" i="0">
-                <a:solidFill>
-                  <a:srgbClr val="6B6690"/>
-                </a:solidFill>
-                <a:latin typeface="Calibri"/>
-              </a:rPr>
-              <a:t>True: the two years grew 4.0 percent. Not true for the weeks: copied by calendar it books the peak on 5 October and sits 308,048 shipments short.</a:t>
-            </a:r>
-          </a:p>
-        </p:txBody>
-      </p:sp>
-      <p:sp>
-        <p:nvSpPr>
-          <p:cNvPr id="15" name="Rounded Rectangle 14"/>
-          <p:cNvSpPr/>
-          <p:nvPr/>
-        </p:nvSpPr>
-        <p:spPr>
-          <a:xfrm>
-            <a:off x="6187287" y="1956816"/>
-            <a:ext cx="5474055" cy="2154428"/>
-          </a:xfrm>
-          <a:prstGeom prst="roundRect">
-            <a:avLst>
-              <a:gd name="adj" fmla="val 5000"/>
-            </a:avLst>
-          </a:prstGeom>
-          <a:solidFill>
-            <a:srgbClr val="FFFFFF"/>
-          </a:solidFill>
-          <a:ln w="9525">
-            <a:solidFill>
-              <a:srgbClr val="E4E1F1"/>
-            </a:solidFill>
-          </a:ln>
-          <a:effectLst>
-            <a:outerShdw blurRad="76200" dist="19050" dir="5400000" algn="bl" rotWithShape="0">
-              <a:srgbClr val="1A0F5C">
-                <a:alpha val="12000"/>
-              </a:srgbClr>
-            </a:outerShdw>
-          </a:effectLst>
-        </p:spPr>
-        <p:style>
-          <a:lnRef idx="1">
-            <a:schemeClr val="accent1"/>
-          </a:lnRef>
-          <a:fillRef idx="3">
-            <a:schemeClr val="accent1"/>
-          </a:fillRef>
-          <a:effectRef idx="2">
-            <a:schemeClr val="accent1"/>
-          </a:effectRef>
-          <a:fontRef idx="minor">
-            <a:schemeClr val="lt1"/>
-          </a:fontRef>
-        </p:style>
-        <p:txBody>
-          <a:bodyPr rtlCol="0" anchor="ctr" wrap="square"/>
-          <a:lstStyle/>
-          <a:p>
-            <a:pPr algn="ctr"/>
-          </a:p>
-        </p:txBody>
-      </p:sp>
-      <p:sp>
-        <p:nvSpPr>
-          <p:cNvPr id="16" name="Oval 15"/>
-          <p:cNvSpPr/>
-          <p:nvPr/>
-        </p:nvSpPr>
-        <p:spPr>
-          <a:xfrm>
-            <a:off x="6388455" y="2157984"/>
-            <a:ext cx="457200" cy="457200"/>
-          </a:xfrm>
-          <a:prstGeom prst="ellipse">
-            <a:avLst/>
-          </a:prstGeom>
-          <a:solidFill>
-            <a:srgbClr val="EEEAFB"/>
-          </a:solidFill>
-          <a:ln>
-            <a:noFill/>
-          </a:ln>
-          <a:effectLst/>
-        </p:spPr>
-        <p:style>
-          <a:lnRef idx="1">
-            <a:schemeClr val="accent1"/>
-          </a:lnRef>
-          <a:fillRef idx="3">
-            <a:schemeClr val="accent1"/>
-          </a:fillRef>
-          <a:effectRef idx="2">
-            <a:schemeClr val="accent1"/>
-          </a:effectRef>
-          <a:fontRef idx="minor">
-            <a:schemeClr val="lt1"/>
-          </a:fontRef>
-        </p:style>
-        <p:txBody>
-          <a:bodyPr rtlCol="0" anchor="ctr" wrap="square"/>
-          <a:lstStyle/>
-          <a:p>
-            <a:pPr algn="ctr"/>
-          </a:p>
-        </p:txBody>
-      </p:sp>
-      <p:pic>
-        <p:nvPicPr>
-          <p:cNvPr id="17" name="Picture 16" descr="trending-up_0f9f07881489.png"/>
-          <p:cNvPicPr>
-            <a:picLocks noChangeAspect="1"/>
-          </p:cNvPicPr>
-          <p:nvPr/>
-        </p:nvPicPr>
-        <p:blipFill>
-          <a:blip r:embed="rId5"/>
-          <a:stretch>
-            <a:fillRect/>
-          </a:stretch>
-        </p:blipFill>
-        <p:spPr>
-          <a:xfrm>
-            <a:off x="6498183" y="2267712"/>
-            <a:ext cx="237744" cy="237744"/>
-          </a:xfrm>
-          <a:prstGeom prst="rect">
-            <a:avLst/>
-          </a:prstGeom>
-        </p:spPr>
-      </p:pic>
-      <p:sp>
-        <p:nvSpPr>
-          <p:cNvPr id="18" name="TextBox 17"/>
-          <p:cNvSpPr txBox="1"/>
-          <p:nvPr/>
-        </p:nvSpPr>
-        <p:spPr>
-          <a:xfrm>
-            <a:off x="6388455" y="2724912"/>
-            <a:ext cx="5071719" cy="160401"/>
-          </a:xfrm>
-          <a:prstGeom prst="rect">
-            <a:avLst/>
-          </a:prstGeom>
-          <a:noFill/>
-        </p:spPr>
-        <p:txBody>
-          <a:bodyPr wrap="square" anchor="t" lIns="0" rIns="0" tIns="0" bIns="0">
-            <a:spAutoFit/>
-          </a:bodyPr>
-          <a:lstStyle/>
-          <a:p>
-            <a:pPr algn="l"/>
-            <a:r>
-              <a:rPr sz="750" b="1" i="0" spc="250">
-                <a:solidFill>
-                  <a:srgbClr val="5B3FD6"/>
-                </a:solidFill>
-                <a:latin typeface="Calibri"/>
-              </a:rPr>
-              <a:t>THE VENDOR'S SPONSOR</a:t>
-            </a:r>
-          </a:p>
-        </p:txBody>
-      </p:sp>
-      <p:sp>
-        <p:nvSpPr>
-          <p:cNvPr id="19" name="TextBox 18"/>
-          <p:cNvSpPr txBox="1"/>
-          <p:nvPr/>
-        </p:nvSpPr>
-        <p:spPr>
-          <a:xfrm>
-            <a:off x="6388455" y="2962656"/>
-            <a:ext cx="5071719" cy="267716"/>
-          </a:xfrm>
-          <a:prstGeom prst="rect">
-            <a:avLst/>
-          </a:prstGeom>
-          <a:noFill/>
-        </p:spPr>
-        <p:txBody>
-          <a:bodyPr wrap="square" anchor="t" lIns="0" rIns="0" tIns="0" bIns="0">
-            <a:spAutoFit/>
-          </a:bodyPr>
-          <a:lstStyle/>
-          <a:p>
-            <a:pPr algn="l"/>
-            <a:r>
-              <a:rPr sz="1400" b="1" i="0">
-                <a:solidFill>
-                  <a:srgbClr val="1A0F5C"/>
-                </a:solidFill>
-                <a:latin typeface="Calibri"/>
-              </a:rPr>
-              <a:t>"The model fits every week of history"</a:t>
-            </a:r>
-          </a:p>
-        </p:txBody>
-      </p:sp>
-      <p:sp>
-        <p:nvSpPr>
-          <p:cNvPr id="20" name="TextBox 19"/>
-          <p:cNvSpPr txBox="1"/>
-          <p:nvPr/>
-        </p:nvSpPr>
-        <p:spPr>
-          <a:xfrm>
-            <a:off x="6388455" y="3303524"/>
-            <a:ext cx="5071719" cy="581406"/>
-          </a:xfrm>
-          <a:prstGeom prst="rect">
-            <a:avLst/>
-          </a:prstGeom>
-          <a:noFill/>
-        </p:spPr>
-        <p:txBody>
-          <a:bodyPr wrap="square" anchor="t" lIns="0" rIns="0" tIns="0" bIns="0">
-            <a:spAutoFit/>
-          </a:bodyPr>
-          <a:lstStyle/>
-          <a:p>
-            <a:pPr algn="l"/>
-            <a:r>
-              <a:rPr sz="1100" b="0" i="0">
-                <a:solidFill>
-                  <a:srgbClr val="6B6690"/>
-                </a:solidFill>
-                <a:latin typeface="Calibri"/>
-              </a:rPr>
-              <a:t>True: within 1.4 percent. That is the problem: on thirteen weeks it never saw it missed by 16,400 a week, 67 percent worse than the copy of last year.</a:t>
-            </a:r>
-          </a:p>
-        </p:txBody>
-      </p:sp>
-      <p:sp>
-        <p:nvSpPr>
-          <p:cNvPr id="21" name="TextBox 20"/>
           <p:cNvSpPr txBox="1"/>
           <p:nvPr/>
         </p:nvSpPr>
@@ -11120,7 +10610,7 @@
       </p:sp>
       <p:sp>
         <p:nvSpPr>
-          <p:cNvPr id="22" name="TextBox 21"/>
+          <p:cNvPr id="13" name="TextBox 12"/>
           <p:cNvSpPr txBox="1"/>
           <p:nvPr/>
         </p:nvSpPr>
@@ -11148,7 +10638,7 @@
                 </a:solidFill>
                 <a:latin typeface="Calibri"/>
               </a:rPr>
-              <a:t>S4  ·  5 / 13</a:t>
+              <a:t>S5  ·  5 / 12</a:t>
             </a:r>
           </a:p>
         </p:txBody>
@@ -11319,411 +10809,7 @@
                 </a:solidFill>
                 <a:latin typeface="Calibri"/>
               </a:rPr>
-              <a:t>WEEK 4  ·  DAY 5  ·  KALPA GLOBAL CAPABILITY CENTRE</a:t>
-            </a:r>
-          </a:p>
-        </p:txBody>
-      </p:sp>
-      <p:sp>
-        <p:nvSpPr>
-          <p:cNvPr id="7" name="TextBox 6"/>
-          <p:cNvSpPr txBox="1"/>
-          <p:nvPr/>
-        </p:nvSpPr>
-        <p:spPr>
-          <a:xfrm>
-            <a:off x="530352" y="676656"/>
-            <a:ext cx="11130991" cy="512064"/>
-          </a:xfrm>
-          <a:prstGeom prst="rect">
-            <a:avLst/>
-          </a:prstGeom>
-          <a:noFill/>
-        </p:spPr>
-        <p:txBody>
-          <a:bodyPr wrap="square" anchor="b" lIns="0" rIns="0" tIns="0" bIns="0">
-            <a:spAutoFit/>
-          </a:bodyPr>
-          <a:lstStyle/>
-          <a:p>
-            <a:pPr algn="l"/>
-            <a:r>
-              <a:rPr sz="2600" b="0" i="0">
-                <a:solidFill>
-                  <a:srgbClr val="1A0F5C"/>
-                </a:solidFill>
-                <a:latin typeface="Georgia"/>
-              </a:rPr>
-              <a:t>Three of four forecasts book the wrong week</a:t>
-            </a:r>
-          </a:p>
-        </p:txBody>
-      </p:sp>
-      <p:sp>
-        <p:nvSpPr>
-          <p:cNvPr id="8" name="TextBox 7"/>
-          <p:cNvSpPr txBox="1"/>
-          <p:nvPr/>
-        </p:nvSpPr>
-        <p:spPr>
-          <a:xfrm>
-            <a:off x="530352" y="1243584"/>
-            <a:ext cx="11130991" cy="234696"/>
-          </a:xfrm>
-          <a:prstGeom prst="rect">
-            <a:avLst/>
-          </a:prstGeom>
-          <a:noFill/>
-        </p:spPr>
-        <p:txBody>
-          <a:bodyPr wrap="square" anchor="t" lIns="0" rIns="0" tIns="0" bIns="0">
-            <a:spAutoFit/>
-          </a:bodyPr>
-          <a:lstStyle/>
-          <a:p>
-            <a:pPr algn="l"/>
-            <a:r>
-              <a:rPr sz="1200" b="0" i="0">
-                <a:solidFill>
-                  <a:srgbClr val="6B6690"/>
-                </a:solidFill>
-                <a:latin typeface="Calibri"/>
-              </a:rPr>
-              <a:t>Which weeks does each forecast book the most packers for?</a:t>
-            </a:r>
-          </a:p>
-        </p:txBody>
-      </p:sp>
-      <p:pic>
-        <p:nvPicPr>
-          <p:cNvPr id="9" name="mermaid diagram" descr="C2_W04_D05_window_2026_STUDENT.png"/>
-          <p:cNvPicPr>
-            <a:picLocks noChangeAspect="1"/>
-          </p:cNvPicPr>
-          <p:nvPr/>
-        </p:nvPicPr>
-        <p:blipFill>
-          <a:blip r:embed="rId4"/>
-          <a:stretch>
-            <a:fillRect/>
-          </a:stretch>
-        </p:blipFill>
-        <p:spPr>
-          <a:xfrm>
-            <a:off x="1605364" y="1664208"/>
-            <a:ext cx="8980966" cy="3491992"/>
-          </a:xfrm>
-          <a:prstGeom prst="rect">
-            <a:avLst/>
-          </a:prstGeom>
-        </p:spPr>
-      </p:pic>
-      <p:sp>
-        <p:nvSpPr>
-          <p:cNvPr id="10" name="picture caption"/>
-          <p:cNvSpPr txBox="1"/>
-          <p:nvPr/>
-        </p:nvSpPr>
-        <p:spPr>
-          <a:xfrm>
-            <a:off x="530352" y="5192776"/>
-            <a:ext cx="11130991" cy="316992"/>
-          </a:xfrm>
-          <a:prstGeom prst="rect">
-            <a:avLst/>
-          </a:prstGeom>
-          <a:noFill/>
-        </p:spPr>
-        <p:txBody>
-          <a:bodyPr wrap="square" anchor="t" lIns="0" rIns="0" tIns="0" bIns="0">
-            <a:spAutoFit/>
-          </a:bodyPr>
-          <a:lstStyle/>
-          <a:p>
-            <a:pPr algn="ctr"/>
-            <a:r>
-              <a:rPr sz="1200" b="0" i="0">
-                <a:solidFill>
-                  <a:srgbClr val="6B6690"/>
-                </a:solidFill>
-                <a:latin typeface="Calibri"/>
-              </a:rPr>
-              <a:t>Four forecasts for 28 September to 30 November 2026</a:t>
-            </a:r>
-          </a:p>
-        </p:txBody>
-      </p:sp>
-      <p:sp>
-        <p:nvSpPr>
-          <p:cNvPr id="11" name="TextBox 10"/>
-          <p:cNvSpPr txBox="1"/>
-          <p:nvPr/>
-        </p:nvSpPr>
-        <p:spPr>
-          <a:xfrm>
-            <a:off x="530352" y="5518912"/>
-            <a:ext cx="11130991" cy="680720"/>
-          </a:xfrm>
-          <a:prstGeom prst="rect">
-            <a:avLst/>
-          </a:prstGeom>
-          <a:noFill/>
-        </p:spPr>
-        <p:txBody>
-          <a:bodyPr wrap="square" anchor="t" lIns="0" rIns="0" tIns="0" bIns="0">
-            <a:spAutoFit/>
-          </a:bodyPr>
-          <a:lstStyle/>
-          <a:p>
-            <a:r>
-              <a:rPr sz="1600" b="0" i="0">
-                <a:solidFill>
-                  <a:srgbClr val="1A1440"/>
-                </a:solidFill>
-                <a:latin typeface="Calibri"/>
-              </a:rPr>
-              <a:t>The house bot, finance's rule and the vendor book their biggest week on 5 October; festival-aligned books it on 19 October, two weeks before Diwali's week.</a:t>
-            </a:r>
-          </a:p>
-        </p:txBody>
-      </p:sp>
-      <p:sp>
-        <p:nvSpPr>
-          <p:cNvPr id="12" name="TextBox 11"/>
-          <p:cNvSpPr txBox="1"/>
-          <p:nvPr/>
-        </p:nvSpPr>
-        <p:spPr>
-          <a:xfrm>
-            <a:off x="530352" y="6437376"/>
-            <a:ext cx="9667951" cy="160401"/>
-          </a:xfrm>
-          <a:prstGeom prst="rect">
-            <a:avLst/>
-          </a:prstGeom>
-          <a:noFill/>
-        </p:spPr>
-        <p:txBody>
-          <a:bodyPr wrap="square" anchor="t" lIns="0" rIns="0" tIns="0" bIns="0">
-            <a:spAutoFit/>
-          </a:bodyPr>
-          <a:lstStyle/>
-          <a:p>
-            <a:pPr algn="l"/>
-            <a:r>
-              <a:rPr sz="750" b="0" i="0">
-                <a:solidFill>
-                  <a:srgbClr val="6B6690"/>
-                </a:solidFill>
-                <a:latin typeface="Calibri"/>
-              </a:rPr>
-              <a:t>Week 4 Day 5: how much is coming, and how wrong could we be</a:t>
-            </a:r>
-          </a:p>
-        </p:txBody>
-      </p:sp>
-      <p:sp>
-        <p:nvSpPr>
-          <p:cNvPr id="13" name="TextBox 12"/>
-          <p:cNvSpPr txBox="1"/>
-          <p:nvPr/>
-        </p:nvSpPr>
-        <p:spPr>
-          <a:xfrm>
-            <a:off x="10198303" y="6437376"/>
-            <a:ext cx="1463040" cy="160401"/>
-          </a:xfrm>
-          <a:prstGeom prst="rect">
-            <a:avLst/>
-          </a:prstGeom>
-          <a:noFill/>
-        </p:spPr>
-        <p:txBody>
-          <a:bodyPr wrap="square" anchor="t" lIns="0" rIns="0" tIns="0" bIns="0">
-            <a:spAutoFit/>
-          </a:bodyPr>
-          <a:lstStyle/>
-          <a:p>
-            <a:pPr algn="r"/>
-            <a:r>
-              <a:rPr sz="750" b="0" i="0">
-                <a:solidFill>
-                  <a:srgbClr val="6B6690"/>
-                </a:solidFill>
-                <a:latin typeface="Calibri"/>
-              </a:rPr>
-              <a:t>S5  ·  6 / 13</a:t>
-            </a:r>
-          </a:p>
-        </p:txBody>
-      </p:sp>
-    </p:spTree>
-  </p:cSld>
-  <p:clrMapOvr>
-    <a:masterClrMapping/>
-  </p:clrMapOvr>
-</p:sld>
-</file>
-
-<file path=ppt/slides/slide7.xml><?xml version="1.0" encoding="utf-8"?>
-<p:sld xmlns:a="http://schemas.openxmlformats.org/drawingml/2006/main" xmlns:p="http://schemas.openxmlformats.org/presentationml/2006/main" xmlns:r="http://schemas.openxmlformats.org/officeDocument/2006/relationships">
-  <p:cSld>
-    <p:spTree>
-      <p:nvGrpSpPr>
-        <p:cNvPr id="1" name=""/>
-        <p:cNvGrpSpPr/>
-        <p:nvPr/>
-      </p:nvGrpSpPr>
-      <p:grpSpPr/>
-      <p:pic>
-        <p:nvPicPr>
-          <p:cNvPr id="2" name="Picture 1" descr="bg_light.jpg"/>
-          <p:cNvPicPr>
-            <a:picLocks noChangeAspect="1"/>
-          </p:cNvPicPr>
-          <p:nvPr/>
-        </p:nvPicPr>
-        <p:blipFill>
-          <a:blip r:embed="rId2"/>
-          <a:stretch>
-            <a:fillRect/>
-          </a:stretch>
-        </p:blipFill>
-        <p:spPr>
-          <a:xfrm>
-            <a:off x="0" y="0"/>
-            <a:ext cx="12191695" cy="6858000"/>
-          </a:xfrm>
-          <a:prstGeom prst="rect">
-            <a:avLst/>
-          </a:prstGeom>
-        </p:spPr>
-      </p:pic>
-      <p:pic>
-        <p:nvPicPr>
-          <p:cNvPr id="3" name="Picture 2" descr="iitgn_logo.png"/>
-          <p:cNvPicPr>
-            <a:picLocks noChangeAspect="1"/>
-          </p:cNvPicPr>
-          <p:nvPr/>
-        </p:nvPicPr>
-        <p:blipFill>
-          <a:blip r:embed="rId3"/>
-          <a:stretch>
-            <a:fillRect/>
-          </a:stretch>
-        </p:blipFill>
-        <p:spPr>
-          <a:xfrm>
-            <a:off x="530352" y="201168"/>
-            <a:ext cx="420624" cy="420624"/>
-          </a:xfrm>
-          <a:prstGeom prst="rect">
-            <a:avLst/>
-          </a:prstGeom>
-        </p:spPr>
-      </p:pic>
-      <p:sp>
-        <p:nvSpPr>
-          <p:cNvPr id="4" name="TextBox 3"/>
-          <p:cNvSpPr txBox="1"/>
-          <p:nvPr/>
-        </p:nvSpPr>
-        <p:spPr>
-          <a:xfrm>
-            <a:off x="1042416" y="228600"/>
-            <a:ext cx="5120640" cy="185166"/>
-          </a:xfrm>
-          <a:prstGeom prst="rect">
-            <a:avLst/>
-          </a:prstGeom>
-          <a:noFill/>
-        </p:spPr>
-        <p:txBody>
-          <a:bodyPr wrap="square" anchor="t" lIns="0" rIns="0" tIns="0" bIns="0">
-            <a:spAutoFit/>
-          </a:bodyPr>
-          <a:lstStyle/>
-          <a:p>
-            <a:pPr algn="l"/>
-            <a:r>
-              <a:rPr sz="900" b="1" i="0">
-                <a:solidFill>
-                  <a:srgbClr val="1A0F5C"/>
-                </a:solidFill>
-                <a:latin typeface="Calibri"/>
-              </a:rPr>
-              <a:t>Indian Institute of Technology Gandhinagar</a:t>
-            </a:r>
-          </a:p>
-        </p:txBody>
-      </p:sp>
-      <p:sp>
-        <p:nvSpPr>
-          <p:cNvPr id="5" name="TextBox 4"/>
-          <p:cNvSpPr txBox="1"/>
-          <p:nvPr/>
-        </p:nvSpPr>
-        <p:spPr>
-          <a:xfrm>
-            <a:off x="1042416" y="420623"/>
-            <a:ext cx="5852160" cy="127381"/>
-          </a:xfrm>
-          <a:prstGeom prst="rect">
-            <a:avLst/>
-          </a:prstGeom>
-          <a:noFill/>
-        </p:spPr>
-        <p:txBody>
-          <a:bodyPr wrap="square" anchor="t" lIns="0" rIns="0" tIns="0" bIns="0">
-            <a:spAutoFit/>
-          </a:bodyPr>
-          <a:lstStyle/>
-          <a:p>
-            <a:pPr algn="l"/>
-            <a:r>
-              <a:rPr sz="550" b="1" i="0" spc="300">
-                <a:solidFill>
-                  <a:srgbClr val="6B6690"/>
-                </a:solidFill>
-                <a:latin typeface="Calibri"/>
-              </a:rPr>
-              <a:t>ADMINISTERED THROUGH THE COMPETENCY ADVANCEMENT ACADEMY</a:t>
-            </a:r>
-          </a:p>
-        </p:txBody>
-      </p:sp>
-      <p:sp>
-        <p:nvSpPr>
-          <p:cNvPr id="6" name="TextBox 5"/>
-          <p:cNvSpPr txBox="1"/>
-          <p:nvPr/>
-        </p:nvSpPr>
-        <p:spPr>
-          <a:xfrm>
-            <a:off x="5992063" y="310896"/>
-            <a:ext cx="5669280" cy="127381"/>
-          </a:xfrm>
-          <a:prstGeom prst="rect">
-            <a:avLst/>
-          </a:prstGeom>
-          <a:noFill/>
-        </p:spPr>
-        <p:txBody>
-          <a:bodyPr wrap="square" anchor="t" lIns="0" rIns="0" tIns="0" bIns="0">
-            <a:spAutoFit/>
-          </a:bodyPr>
-          <a:lstStyle/>
-          <a:p>
-            <a:pPr algn="r"/>
-            <a:r>
-              <a:rPr sz="550" b="1" i="0" spc="300">
-                <a:solidFill>
-                  <a:srgbClr val="6B6690"/>
-                </a:solidFill>
-                <a:latin typeface="Calibri"/>
-              </a:rPr>
-              <a:t>WEEK 4  ·  DAY 5  ·  KALPA GLOBAL CAPABILITY CENTRE</a:t>
+              <a:t>WEEK 4  ·  FRIDAY  ·  FLIPKART, LUCKNOW  ·  ILLUSTRATIVE CASE</a:t>
             </a:r>
           </a:p>
         </p:txBody>
@@ -12165,7 +11251,977 @@
                 </a:solidFill>
                 <a:latin typeface="Calibri"/>
               </a:rPr>
-              <a:t>S6  ·  7 / 13</a:t>
+              <a:t>S6  ·  6 / 12</a:t>
+            </a:r>
+          </a:p>
+        </p:txBody>
+      </p:sp>
+    </p:spTree>
+  </p:cSld>
+  <p:clrMapOvr>
+    <a:masterClrMapping/>
+  </p:clrMapOvr>
+</p:sld>
+</file>
+
+<file path=ppt/slides/slide7.xml><?xml version="1.0" encoding="utf-8"?>
+<p:sld xmlns:a="http://schemas.openxmlformats.org/drawingml/2006/main" xmlns:p="http://schemas.openxmlformats.org/presentationml/2006/main" xmlns:r="http://schemas.openxmlformats.org/officeDocument/2006/relationships">
+  <p:cSld>
+    <p:spTree>
+      <p:nvGrpSpPr>
+        <p:cNvPr id="1" name=""/>
+        <p:cNvGrpSpPr/>
+        <p:nvPr/>
+      </p:nvGrpSpPr>
+      <p:grpSpPr/>
+      <p:pic>
+        <p:nvPicPr>
+          <p:cNvPr id="2" name="Picture 1" descr="bg_light.jpg"/>
+          <p:cNvPicPr>
+            <a:picLocks noChangeAspect="1"/>
+          </p:cNvPicPr>
+          <p:nvPr/>
+        </p:nvPicPr>
+        <p:blipFill>
+          <a:blip r:embed="rId2"/>
+          <a:stretch>
+            <a:fillRect/>
+          </a:stretch>
+        </p:blipFill>
+        <p:spPr>
+          <a:xfrm>
+            <a:off x="0" y="0"/>
+            <a:ext cx="12191695" cy="6858000"/>
+          </a:xfrm>
+          <a:prstGeom prst="rect">
+            <a:avLst/>
+          </a:prstGeom>
+        </p:spPr>
+      </p:pic>
+      <p:pic>
+        <p:nvPicPr>
+          <p:cNvPr id="3" name="Picture 2" descr="iitgn_logo.png"/>
+          <p:cNvPicPr>
+            <a:picLocks noChangeAspect="1"/>
+          </p:cNvPicPr>
+          <p:nvPr/>
+        </p:nvPicPr>
+        <p:blipFill>
+          <a:blip r:embed="rId3"/>
+          <a:stretch>
+            <a:fillRect/>
+          </a:stretch>
+        </p:blipFill>
+        <p:spPr>
+          <a:xfrm>
+            <a:off x="530352" y="201168"/>
+            <a:ext cx="420624" cy="420624"/>
+          </a:xfrm>
+          <a:prstGeom prst="rect">
+            <a:avLst/>
+          </a:prstGeom>
+        </p:spPr>
+      </p:pic>
+      <p:sp>
+        <p:nvSpPr>
+          <p:cNvPr id="4" name="TextBox 3"/>
+          <p:cNvSpPr txBox="1"/>
+          <p:nvPr/>
+        </p:nvSpPr>
+        <p:spPr>
+          <a:xfrm>
+            <a:off x="1042416" y="228600"/>
+            <a:ext cx="5120640" cy="185166"/>
+          </a:xfrm>
+          <a:prstGeom prst="rect">
+            <a:avLst/>
+          </a:prstGeom>
+          <a:noFill/>
+        </p:spPr>
+        <p:txBody>
+          <a:bodyPr wrap="square" anchor="t" lIns="0" rIns="0" tIns="0" bIns="0">
+            <a:spAutoFit/>
+          </a:bodyPr>
+          <a:lstStyle/>
+          <a:p>
+            <a:pPr algn="l"/>
+            <a:r>
+              <a:rPr sz="900" b="1" i="0">
+                <a:solidFill>
+                  <a:srgbClr val="1A0F5C"/>
+                </a:solidFill>
+                <a:latin typeface="Calibri"/>
+              </a:rPr>
+              <a:t>Indian Institute of Technology Gandhinagar</a:t>
+            </a:r>
+          </a:p>
+        </p:txBody>
+      </p:sp>
+      <p:sp>
+        <p:nvSpPr>
+          <p:cNvPr id="5" name="TextBox 4"/>
+          <p:cNvSpPr txBox="1"/>
+          <p:nvPr/>
+        </p:nvSpPr>
+        <p:spPr>
+          <a:xfrm>
+            <a:off x="1042416" y="420623"/>
+            <a:ext cx="5852160" cy="127381"/>
+          </a:xfrm>
+          <a:prstGeom prst="rect">
+            <a:avLst/>
+          </a:prstGeom>
+          <a:noFill/>
+        </p:spPr>
+        <p:txBody>
+          <a:bodyPr wrap="square" anchor="t" lIns="0" rIns="0" tIns="0" bIns="0">
+            <a:spAutoFit/>
+          </a:bodyPr>
+          <a:lstStyle/>
+          <a:p>
+            <a:pPr algn="l"/>
+            <a:r>
+              <a:rPr sz="550" b="1" i="0" spc="300">
+                <a:solidFill>
+                  <a:srgbClr val="6B6690"/>
+                </a:solidFill>
+                <a:latin typeface="Calibri"/>
+              </a:rPr>
+              <a:t>ADMINISTERED THROUGH THE COMPETENCY ADVANCEMENT ACADEMY</a:t>
+            </a:r>
+          </a:p>
+        </p:txBody>
+      </p:sp>
+      <p:sp>
+        <p:nvSpPr>
+          <p:cNvPr id="6" name="TextBox 5"/>
+          <p:cNvSpPr txBox="1"/>
+          <p:nvPr/>
+        </p:nvSpPr>
+        <p:spPr>
+          <a:xfrm>
+            <a:off x="5992063" y="310896"/>
+            <a:ext cx="5669280" cy="127381"/>
+          </a:xfrm>
+          <a:prstGeom prst="rect">
+            <a:avLst/>
+          </a:prstGeom>
+          <a:noFill/>
+        </p:spPr>
+        <p:txBody>
+          <a:bodyPr wrap="square" anchor="t" lIns="0" rIns="0" tIns="0" bIns="0">
+            <a:spAutoFit/>
+          </a:bodyPr>
+          <a:lstStyle/>
+          <a:p>
+            <a:pPr algn="r"/>
+            <a:r>
+              <a:rPr sz="550" b="1" i="0" spc="300">
+                <a:solidFill>
+                  <a:srgbClr val="6B6690"/>
+                </a:solidFill>
+                <a:latin typeface="Calibri"/>
+              </a:rPr>
+              <a:t>WEEK 4  ·  FRIDAY  ·  FLIPKART, LUCKNOW  ·  ILLUSTRATIVE CASE</a:t>
+            </a:r>
+          </a:p>
+        </p:txBody>
+      </p:sp>
+      <p:sp>
+        <p:nvSpPr>
+          <p:cNvPr id="7" name="TextBox 6"/>
+          <p:cNvSpPr txBox="1"/>
+          <p:nvPr/>
+        </p:nvSpPr>
+        <p:spPr>
+          <a:xfrm>
+            <a:off x="530352" y="676656"/>
+            <a:ext cx="11130991" cy="512064"/>
+          </a:xfrm>
+          <a:prstGeom prst="rect">
+            <a:avLst/>
+          </a:prstGeom>
+          <a:noFill/>
+        </p:spPr>
+        <p:txBody>
+          <a:bodyPr wrap="square" anchor="b" lIns="0" rIns="0" tIns="0" bIns="0">
+            <a:spAutoFit/>
+          </a:bodyPr>
+          <a:lstStyle/>
+          <a:p>
+            <a:pPr algn="l"/>
+            <a:r>
+              <a:rPr sz="2600" b="0" i="0">
+                <a:solidFill>
+                  <a:srgbClr val="1A0F5C"/>
+                </a:solidFill>
+                <a:latin typeface="Georgia"/>
+              </a:rPr>
+              <a:t>Three follow-ups that change the question</a:t>
+            </a:r>
+          </a:p>
+        </p:txBody>
+      </p:sp>
+      <p:sp>
+        <p:nvSpPr>
+          <p:cNvPr id="8" name="TextBox 7"/>
+          <p:cNvSpPr txBox="1"/>
+          <p:nvPr/>
+        </p:nvSpPr>
+        <p:spPr>
+          <a:xfrm>
+            <a:off x="530352" y="1243584"/>
+            <a:ext cx="11130991" cy="234696"/>
+          </a:xfrm>
+          <a:prstGeom prst="rect">
+            <a:avLst/>
+          </a:prstGeom>
+          <a:noFill/>
+        </p:spPr>
+        <p:txBody>
+          <a:bodyPr wrap="square" anchor="t" lIns="0" rIns="0" tIns="0" bIns="0">
+            <a:spAutoFit/>
+          </a:bodyPr>
+          <a:lstStyle/>
+          <a:p>
+            <a:pPr algn="l"/>
+            <a:r>
+              <a:rPr sz="1200" b="0" i="0">
+                <a:solidFill>
+                  <a:srgbClr val="6B6690"/>
+                </a:solidFill>
+                <a:latin typeface="Calibri"/>
+              </a:rPr>
+              <a:t>What does the interviewer ask next, and what does a strong candidate say?</a:t>
+            </a:r>
+          </a:p>
+        </p:txBody>
+      </p:sp>
+      <p:sp>
+        <p:nvSpPr>
+          <p:cNvPr id="9" name="Rectangle 8"/>
+          <p:cNvSpPr/>
+          <p:nvPr/>
+        </p:nvSpPr>
+        <p:spPr>
+          <a:xfrm>
+            <a:off x="2324557" y="2523744"/>
+            <a:ext cx="7542580" cy="18288"/>
+          </a:xfrm>
+          <a:prstGeom prst="rect">
+            <a:avLst/>
+          </a:prstGeom>
+          <a:solidFill>
+            <a:srgbClr val="CFC9EE"/>
+          </a:solidFill>
+          <a:ln>
+            <a:noFill/>
+          </a:ln>
+          <a:effectLst/>
+        </p:spPr>
+        <p:style>
+          <a:lnRef idx="1">
+            <a:schemeClr val="accent1"/>
+          </a:lnRef>
+          <a:fillRef idx="3">
+            <a:schemeClr val="accent1"/>
+          </a:fillRef>
+          <a:effectRef idx="2">
+            <a:schemeClr val="accent1"/>
+          </a:effectRef>
+          <a:fontRef idx="minor">
+            <a:schemeClr val="lt1"/>
+          </a:fontRef>
+        </p:style>
+        <p:txBody>
+          <a:bodyPr rtlCol="0" anchor="ctr" wrap="square"/>
+          <a:lstStyle/>
+          <a:p>
+            <a:pPr algn="ctr"/>
+          </a:p>
+        </p:txBody>
+      </p:sp>
+      <p:sp>
+        <p:nvSpPr>
+          <p:cNvPr id="10" name="TextBox 9"/>
+          <p:cNvSpPr txBox="1"/>
+          <p:nvPr/>
+        </p:nvSpPr>
+        <p:spPr>
+          <a:xfrm>
+            <a:off x="530352" y="1956816"/>
+            <a:ext cx="3588410" cy="168656"/>
+          </a:xfrm>
+          <a:prstGeom prst="rect">
+            <a:avLst/>
+          </a:prstGeom>
+          <a:noFill/>
+        </p:spPr>
+        <p:txBody>
+          <a:bodyPr wrap="square" anchor="t" lIns="0" rIns="0" tIns="0" bIns="0">
+            <a:spAutoFit/>
+          </a:bodyPr>
+          <a:lstStyle/>
+          <a:p>
+            <a:pPr algn="ctr"/>
+            <a:r>
+              <a:rPr sz="800" b="1" i="0" spc="250">
+                <a:solidFill>
+                  <a:srgbClr val="5B3FD6"/>
+                </a:solidFill>
+                <a:latin typeface="Calibri"/>
+              </a:rPr>
+              <a:t>FOLLOW-UP 1</a:t>
+            </a:r>
+          </a:p>
+        </p:txBody>
+      </p:sp>
+      <p:sp>
+        <p:nvSpPr>
+          <p:cNvPr id="11" name="Oval 10"/>
+          <p:cNvSpPr/>
+          <p:nvPr/>
+        </p:nvSpPr>
+        <p:spPr>
+          <a:xfrm>
+            <a:off x="2223973" y="2432304"/>
+            <a:ext cx="201168" cy="201168"/>
+          </a:xfrm>
+          <a:prstGeom prst="ellipse">
+            <a:avLst/>
+          </a:prstGeom>
+          <a:solidFill>
+            <a:srgbClr val="5B3FD6"/>
+          </a:solidFill>
+          <a:ln>
+            <a:noFill/>
+          </a:ln>
+          <a:effectLst/>
+        </p:spPr>
+        <p:style>
+          <a:lnRef idx="1">
+            <a:schemeClr val="accent1"/>
+          </a:lnRef>
+          <a:fillRef idx="3">
+            <a:schemeClr val="accent1"/>
+          </a:fillRef>
+          <a:effectRef idx="2">
+            <a:schemeClr val="accent1"/>
+          </a:effectRef>
+          <a:fontRef idx="minor">
+            <a:schemeClr val="lt1"/>
+          </a:fontRef>
+        </p:style>
+        <p:txBody>
+          <a:bodyPr rtlCol="0" anchor="ctr" wrap="square"/>
+          <a:lstStyle/>
+          <a:p>
+            <a:pPr algn="ctr"/>
+          </a:p>
+        </p:txBody>
+      </p:sp>
+      <p:sp>
+        <p:nvSpPr>
+          <p:cNvPr id="12" name="Rounded Rectangle 11"/>
+          <p:cNvSpPr/>
+          <p:nvPr/>
+        </p:nvSpPr>
+        <p:spPr>
+          <a:xfrm>
+            <a:off x="530352" y="2843784"/>
+            <a:ext cx="3588410" cy="1249680"/>
+          </a:xfrm>
+          <a:prstGeom prst="roundRect">
+            <a:avLst>
+              <a:gd name="adj" fmla="val 5000"/>
+            </a:avLst>
+          </a:prstGeom>
+          <a:solidFill>
+            <a:srgbClr val="FFFFFF"/>
+          </a:solidFill>
+          <a:ln w="9525">
+            <a:solidFill>
+              <a:srgbClr val="E4E1F1"/>
+            </a:solidFill>
+          </a:ln>
+          <a:effectLst>
+            <a:outerShdw blurRad="76200" dist="19050" dir="5400000" algn="bl" rotWithShape="0">
+              <a:srgbClr val="1A0F5C">
+                <a:alpha val="12000"/>
+              </a:srgbClr>
+            </a:outerShdw>
+          </a:effectLst>
+        </p:spPr>
+        <p:style>
+          <a:lnRef idx="1">
+            <a:schemeClr val="accent1"/>
+          </a:lnRef>
+          <a:fillRef idx="3">
+            <a:schemeClr val="accent1"/>
+          </a:fillRef>
+          <a:effectRef idx="2">
+            <a:schemeClr val="accent1"/>
+          </a:effectRef>
+          <a:fontRef idx="minor">
+            <a:schemeClr val="lt1"/>
+          </a:fontRef>
+        </p:style>
+        <p:txBody>
+          <a:bodyPr rtlCol="0" anchor="ctr" wrap="square"/>
+          <a:lstStyle/>
+          <a:p>
+            <a:pPr algn="ctr"/>
+          </a:p>
+        </p:txBody>
+      </p:sp>
+      <p:sp>
+        <p:nvSpPr>
+          <p:cNvPr id="13" name="TextBox 12"/>
+          <p:cNvSpPr txBox="1"/>
+          <p:nvPr/>
+        </p:nvSpPr>
+        <p:spPr>
+          <a:xfrm>
+            <a:off x="694944" y="2990088"/>
+            <a:ext cx="3259226" cy="251205"/>
+          </a:xfrm>
+          <a:prstGeom prst="rect">
+            <a:avLst/>
+          </a:prstGeom>
+          <a:noFill/>
+        </p:spPr>
+        <p:txBody>
+          <a:bodyPr wrap="square" anchor="t" lIns="0" rIns="0" tIns="0" bIns="0">
+            <a:spAutoFit/>
+          </a:bodyPr>
+          <a:lstStyle/>
+          <a:p>
+            <a:pPr algn="l"/>
+            <a:r>
+              <a:rPr sz="1300" b="1" i="0">
+                <a:solidFill>
+                  <a:srgbClr val="1A0F5C"/>
+                </a:solidFill>
+                <a:latin typeface="Calibri"/>
+              </a:rPr>
+              <a:t>MAE or MAPE, and when?</a:t>
+            </a:r>
+          </a:p>
+        </p:txBody>
+      </p:sp>
+      <p:sp>
+        <p:nvSpPr>
+          <p:cNvPr id="14" name="TextBox 13"/>
+          <p:cNvSpPr txBox="1"/>
+          <p:nvPr/>
+        </p:nvSpPr>
+        <p:spPr>
+          <a:xfrm>
+            <a:off x="694944" y="3277870"/>
+            <a:ext cx="3259226" cy="366776"/>
+          </a:xfrm>
+          <a:prstGeom prst="rect">
+            <a:avLst/>
+          </a:prstGeom>
+          <a:noFill/>
+        </p:spPr>
+        <p:txBody>
+          <a:bodyPr wrap="square" anchor="t" lIns="0" rIns="0" tIns="0" bIns="0">
+            <a:spAutoFit/>
+          </a:bodyPr>
+          <a:lstStyle/>
+          <a:p>
+            <a:pPr algn="l"/>
+            <a:r>
+              <a:rPr sz="1000" b="0" i="0">
+                <a:solidFill>
+                  <a:srgbClr val="6B6690"/>
+                </a:solidFill>
+                <a:latin typeface="Calibri"/>
+              </a:rPr>
+              <a:t>Shipments when the cost is per shipment; percent only to compare series of different sizes.</a:t>
+            </a:r>
+          </a:p>
+        </p:txBody>
+      </p:sp>
+      <p:sp>
+        <p:nvSpPr>
+          <p:cNvPr id="15" name="TextBox 14"/>
+          <p:cNvSpPr txBox="1"/>
+          <p:nvPr/>
+        </p:nvSpPr>
+        <p:spPr>
+          <a:xfrm>
+            <a:off x="4301642" y="1956816"/>
+            <a:ext cx="3588410" cy="168656"/>
+          </a:xfrm>
+          <a:prstGeom prst="rect">
+            <a:avLst/>
+          </a:prstGeom>
+          <a:noFill/>
+        </p:spPr>
+        <p:txBody>
+          <a:bodyPr wrap="square" anchor="t" lIns="0" rIns="0" tIns="0" bIns="0">
+            <a:spAutoFit/>
+          </a:bodyPr>
+          <a:lstStyle/>
+          <a:p>
+            <a:pPr algn="ctr"/>
+            <a:r>
+              <a:rPr sz="800" b="1" i="0" spc="250">
+                <a:solidFill>
+                  <a:srgbClr val="5B3FD6"/>
+                </a:solidFill>
+                <a:latin typeface="Calibri"/>
+              </a:rPr>
+              <a:t>FOLLOW-UP 2</a:t>
+            </a:r>
+          </a:p>
+        </p:txBody>
+      </p:sp>
+      <p:sp>
+        <p:nvSpPr>
+          <p:cNvPr id="16" name="Oval 15"/>
+          <p:cNvSpPr/>
+          <p:nvPr/>
+        </p:nvSpPr>
+        <p:spPr>
+          <a:xfrm>
+            <a:off x="5995263" y="2432304"/>
+            <a:ext cx="201168" cy="201168"/>
+          </a:xfrm>
+          <a:prstGeom prst="ellipse">
+            <a:avLst/>
+          </a:prstGeom>
+          <a:solidFill>
+            <a:srgbClr val="5B3FD6"/>
+          </a:solidFill>
+          <a:ln>
+            <a:noFill/>
+          </a:ln>
+          <a:effectLst/>
+        </p:spPr>
+        <p:style>
+          <a:lnRef idx="1">
+            <a:schemeClr val="accent1"/>
+          </a:lnRef>
+          <a:fillRef idx="3">
+            <a:schemeClr val="accent1"/>
+          </a:fillRef>
+          <a:effectRef idx="2">
+            <a:schemeClr val="accent1"/>
+          </a:effectRef>
+          <a:fontRef idx="minor">
+            <a:schemeClr val="lt1"/>
+          </a:fontRef>
+        </p:style>
+        <p:txBody>
+          <a:bodyPr rtlCol="0" anchor="ctr" wrap="square"/>
+          <a:lstStyle/>
+          <a:p>
+            <a:pPr algn="ctr"/>
+          </a:p>
+        </p:txBody>
+      </p:sp>
+      <p:sp>
+        <p:nvSpPr>
+          <p:cNvPr id="17" name="Rounded Rectangle 16"/>
+          <p:cNvSpPr/>
+          <p:nvPr/>
+        </p:nvSpPr>
+        <p:spPr>
+          <a:xfrm>
+            <a:off x="4301642" y="2843784"/>
+            <a:ext cx="3588410" cy="1249680"/>
+          </a:xfrm>
+          <a:prstGeom prst="roundRect">
+            <a:avLst>
+              <a:gd name="adj" fmla="val 5000"/>
+            </a:avLst>
+          </a:prstGeom>
+          <a:solidFill>
+            <a:srgbClr val="FFFFFF"/>
+          </a:solidFill>
+          <a:ln w="9525">
+            <a:solidFill>
+              <a:srgbClr val="E4E1F1"/>
+            </a:solidFill>
+          </a:ln>
+          <a:effectLst>
+            <a:outerShdw blurRad="76200" dist="19050" dir="5400000" algn="bl" rotWithShape="0">
+              <a:srgbClr val="1A0F5C">
+                <a:alpha val="12000"/>
+              </a:srgbClr>
+            </a:outerShdw>
+          </a:effectLst>
+        </p:spPr>
+        <p:style>
+          <a:lnRef idx="1">
+            <a:schemeClr val="accent1"/>
+          </a:lnRef>
+          <a:fillRef idx="3">
+            <a:schemeClr val="accent1"/>
+          </a:fillRef>
+          <a:effectRef idx="2">
+            <a:schemeClr val="accent1"/>
+          </a:effectRef>
+          <a:fontRef idx="minor">
+            <a:schemeClr val="lt1"/>
+          </a:fontRef>
+        </p:style>
+        <p:txBody>
+          <a:bodyPr rtlCol="0" anchor="ctr" wrap="square"/>
+          <a:lstStyle/>
+          <a:p>
+            <a:pPr algn="ctr"/>
+          </a:p>
+        </p:txBody>
+      </p:sp>
+      <p:sp>
+        <p:nvSpPr>
+          <p:cNvPr id="18" name="TextBox 17"/>
+          <p:cNvSpPr txBox="1"/>
+          <p:nvPr/>
+        </p:nvSpPr>
+        <p:spPr>
+          <a:xfrm>
+            <a:off x="4466234" y="2990088"/>
+            <a:ext cx="3259226" cy="465836"/>
+          </a:xfrm>
+          <a:prstGeom prst="rect">
+            <a:avLst/>
+          </a:prstGeom>
+          <a:noFill/>
+        </p:spPr>
+        <p:txBody>
+          <a:bodyPr wrap="square" anchor="t" lIns="0" rIns="0" tIns="0" bIns="0">
+            <a:spAutoFit/>
+          </a:bodyPr>
+          <a:lstStyle/>
+          <a:p>
+            <a:pPr algn="l"/>
+            <a:r>
+              <a:rPr sz="1300" b="1" i="0">
+                <a:solidFill>
+                  <a:srgbClr val="1A0F5C"/>
+                </a:solidFill>
+                <a:latin typeface="Calibri"/>
+              </a:rPr>
+              <a:t>The festival moves three weeks: what breaks?</a:t>
+            </a:r>
+          </a:p>
+        </p:txBody>
+      </p:sp>
+      <p:sp>
+        <p:nvSpPr>
+          <p:cNvPr id="19" name="TextBox 18"/>
+          <p:cNvSpPr txBox="1"/>
+          <p:nvPr/>
+        </p:nvSpPr>
+        <p:spPr>
+          <a:xfrm>
+            <a:off x="4466234" y="3492500"/>
+            <a:ext cx="3259226" cy="366776"/>
+          </a:xfrm>
+          <a:prstGeom prst="rect">
+            <a:avLst/>
+          </a:prstGeom>
+          <a:noFill/>
+        </p:spPr>
+        <p:txBody>
+          <a:bodyPr wrap="square" anchor="t" lIns="0" rIns="0" tIns="0" bIns="0">
+            <a:spAutoFit/>
+          </a:bodyPr>
+          <a:lstStyle/>
+          <a:p>
+            <a:pPr algn="l"/>
+            <a:r>
+              <a:rPr sz="1000" b="0" i="0">
+                <a:solidFill>
+                  <a:srgbClr val="6B6690"/>
+                </a:solidFill>
+                <a:latin typeface="Calibri"/>
+              </a:rPr>
+              <a:t>Every calendar copy, the house bot and finance's rule; the festival-aligned copy moves with it.</a:t>
+            </a:r>
+          </a:p>
+        </p:txBody>
+      </p:sp>
+      <p:sp>
+        <p:nvSpPr>
+          <p:cNvPr id="20" name="TextBox 19"/>
+          <p:cNvSpPr txBox="1"/>
+          <p:nvPr/>
+        </p:nvSpPr>
+        <p:spPr>
+          <a:xfrm>
+            <a:off x="8072932" y="1956816"/>
+            <a:ext cx="3588410" cy="168656"/>
+          </a:xfrm>
+          <a:prstGeom prst="rect">
+            <a:avLst/>
+          </a:prstGeom>
+          <a:noFill/>
+        </p:spPr>
+        <p:txBody>
+          <a:bodyPr wrap="square" anchor="t" lIns="0" rIns="0" tIns="0" bIns="0">
+            <a:spAutoFit/>
+          </a:bodyPr>
+          <a:lstStyle/>
+          <a:p>
+            <a:pPr algn="ctr"/>
+            <a:r>
+              <a:rPr sz="800" b="1" i="0" spc="250">
+                <a:solidFill>
+                  <a:srgbClr val="5B3FD6"/>
+                </a:solidFill>
+                <a:latin typeface="Calibri"/>
+              </a:rPr>
+              <a:t>FOLLOW-UP 3</a:t>
+            </a:r>
+          </a:p>
+        </p:txBody>
+      </p:sp>
+      <p:sp>
+        <p:nvSpPr>
+          <p:cNvPr id="21" name="Oval 20"/>
+          <p:cNvSpPr/>
+          <p:nvPr/>
+        </p:nvSpPr>
+        <p:spPr>
+          <a:xfrm>
+            <a:off x="9766554" y="2432304"/>
+            <a:ext cx="201168" cy="201168"/>
+          </a:xfrm>
+          <a:prstGeom prst="ellipse">
+            <a:avLst/>
+          </a:prstGeom>
+          <a:solidFill>
+            <a:srgbClr val="D9A7FF"/>
+          </a:solidFill>
+          <a:ln>
+            <a:noFill/>
+          </a:ln>
+          <a:effectLst/>
+        </p:spPr>
+        <p:style>
+          <a:lnRef idx="1">
+            <a:schemeClr val="accent1"/>
+          </a:lnRef>
+          <a:fillRef idx="3">
+            <a:schemeClr val="accent1"/>
+          </a:fillRef>
+          <a:effectRef idx="2">
+            <a:schemeClr val="accent1"/>
+          </a:effectRef>
+          <a:fontRef idx="minor">
+            <a:schemeClr val="lt1"/>
+          </a:fontRef>
+        </p:style>
+        <p:txBody>
+          <a:bodyPr rtlCol="0" anchor="ctr" wrap="square"/>
+          <a:lstStyle/>
+          <a:p>
+            <a:pPr algn="ctr"/>
+          </a:p>
+        </p:txBody>
+      </p:sp>
+      <p:sp>
+        <p:nvSpPr>
+          <p:cNvPr id="22" name="Rounded Rectangle 21"/>
+          <p:cNvSpPr/>
+          <p:nvPr/>
+        </p:nvSpPr>
+        <p:spPr>
+          <a:xfrm>
+            <a:off x="8072932" y="2843784"/>
+            <a:ext cx="3588410" cy="1249680"/>
+          </a:xfrm>
+          <a:prstGeom prst="roundRect">
+            <a:avLst>
+              <a:gd name="adj" fmla="val 5000"/>
+            </a:avLst>
+          </a:prstGeom>
+          <a:gradFill rotWithShape="1">
+            <a:gsLst>
+              <a:gs pos="0">
+                <a:srgbClr val="2C1A86"/>
+              </a:gs>
+              <a:gs pos="100000">
+                <a:srgbClr val="1A0F5C"/>
+              </a:gs>
+            </a:gsLst>
+            <a:lin scaled="0" ang="16200000"/>
+          </a:gradFill>
+          <a:ln>
+            <a:noFill/>
+          </a:ln>
+          <a:effectLst>
+            <a:outerShdw blurRad="76200" dist="19050" dir="5400000" algn="bl" rotWithShape="0">
+              <a:srgbClr val="1A0F5C">
+                <a:alpha val="12000"/>
+              </a:srgbClr>
+            </a:outerShdw>
+          </a:effectLst>
+        </p:spPr>
+        <p:style>
+          <a:lnRef idx="1">
+            <a:schemeClr val="accent1"/>
+          </a:lnRef>
+          <a:fillRef idx="3">
+            <a:schemeClr val="accent1"/>
+          </a:fillRef>
+          <a:effectRef idx="2">
+            <a:schemeClr val="accent1"/>
+          </a:effectRef>
+          <a:fontRef idx="minor">
+            <a:schemeClr val="lt1"/>
+          </a:fontRef>
+        </p:style>
+        <p:txBody>
+          <a:bodyPr rtlCol="0" anchor="ctr" wrap="square"/>
+          <a:lstStyle/>
+          <a:p>
+            <a:pPr algn="ctr"/>
+          </a:p>
+        </p:txBody>
+      </p:sp>
+      <p:sp>
+        <p:nvSpPr>
+          <p:cNvPr id="23" name="TextBox 22"/>
+          <p:cNvSpPr txBox="1"/>
+          <p:nvPr/>
+        </p:nvSpPr>
+        <p:spPr>
+          <a:xfrm>
+            <a:off x="8237524" y="2990088"/>
+            <a:ext cx="3259226" cy="251205"/>
+          </a:xfrm>
+          <a:prstGeom prst="rect">
+            <a:avLst/>
+          </a:prstGeom>
+          <a:noFill/>
+        </p:spPr>
+        <p:txBody>
+          <a:bodyPr wrap="square" anchor="t" lIns="0" rIns="0" tIns="0" bIns="0">
+            <a:spAutoFit/>
+          </a:bodyPr>
+          <a:lstStyle/>
+          <a:p>
+            <a:pPr algn="l"/>
+            <a:r>
+              <a:rPr sz="1300" b="1" i="0">
+                <a:solidFill>
+                  <a:srgbClr val="FFFFFF"/>
+                </a:solidFill>
+                <a:latin typeface="Calibri"/>
+              </a:rPr>
+              <a:t>What did a forecast cost Zillow?</a:t>
+            </a:r>
+          </a:p>
+        </p:txBody>
+      </p:sp>
+      <p:sp>
+        <p:nvSpPr>
+          <p:cNvPr id="24" name="TextBox 23"/>
+          <p:cNvSpPr txBox="1"/>
+          <p:nvPr/>
+        </p:nvSpPr>
+        <p:spPr>
+          <a:xfrm>
+            <a:off x="8237524" y="3277870"/>
+            <a:ext cx="3259226" cy="531876"/>
+          </a:xfrm>
+          <a:prstGeom prst="rect">
+            <a:avLst/>
+          </a:prstGeom>
+          <a:noFill/>
+        </p:spPr>
+        <p:txBody>
+          <a:bodyPr wrap="square" anchor="t" lIns="0" rIns="0" tIns="0" bIns="0">
+            <a:spAutoFit/>
+          </a:bodyPr>
+          <a:lstStyle/>
+          <a:p>
+            <a:pPr algn="l"/>
+            <a:r>
+              <a:rPr sz="1000" b="0" i="0">
+                <a:solidFill>
+                  <a:srgbClr val="CFC9EE"/>
+                </a:solidFill>
+                <a:latin typeface="Calibri"/>
+              </a:rPr>
+              <a:t>A guardrail of plus or minus 200 basis points swung about 1,200; a write-down of about USD 304 million (F3).</a:t>
+            </a:r>
+          </a:p>
+        </p:txBody>
+      </p:sp>
+      <p:sp>
+        <p:nvSpPr>
+          <p:cNvPr id="25" name="TextBox 24"/>
+          <p:cNvSpPr txBox="1"/>
+          <p:nvPr/>
+        </p:nvSpPr>
+        <p:spPr>
+          <a:xfrm>
+            <a:off x="530352" y="6437376"/>
+            <a:ext cx="9667951" cy="160401"/>
+          </a:xfrm>
+          <a:prstGeom prst="rect">
+            <a:avLst/>
+          </a:prstGeom>
+          <a:noFill/>
+        </p:spPr>
+        <p:txBody>
+          <a:bodyPr wrap="square" anchor="t" lIns="0" rIns="0" tIns="0" bIns="0">
+            <a:spAutoFit/>
+          </a:bodyPr>
+          <a:lstStyle/>
+          <a:p>
+            <a:pPr algn="l"/>
+            <a:r>
+              <a:rPr sz="750" b="0" i="0">
+                <a:solidFill>
+                  <a:srgbClr val="6B6690"/>
+                </a:solidFill>
+                <a:latin typeface="Calibri"/>
+              </a:rPr>
+              <a:t>Week 4 Day 5: how much is coming, and how wrong could we be</a:t>
+            </a:r>
+          </a:p>
+        </p:txBody>
+      </p:sp>
+      <p:sp>
+        <p:nvSpPr>
+          <p:cNvPr id="26" name="TextBox 25"/>
+          <p:cNvSpPr txBox="1"/>
+          <p:nvPr/>
+        </p:nvSpPr>
+        <p:spPr>
+          <a:xfrm>
+            <a:off x="10198303" y="6437376"/>
+            <a:ext cx="1463040" cy="160401"/>
+          </a:xfrm>
+          <a:prstGeom prst="rect">
+            <a:avLst/>
+          </a:prstGeom>
+          <a:noFill/>
+        </p:spPr>
+        <p:txBody>
+          <a:bodyPr wrap="square" anchor="t" lIns="0" rIns="0" tIns="0" bIns="0">
+            <a:spAutoFit/>
+          </a:bodyPr>
+          <a:lstStyle/>
+          <a:p>
+            <a:pPr algn="r"/>
+            <a:r>
+              <a:rPr sz="750" b="0" i="0">
+                <a:solidFill>
+                  <a:srgbClr val="6B6690"/>
+                </a:solidFill>
+                <a:latin typeface="Calibri"/>
+              </a:rPr>
+              <a:t>S7  ·  7 / 12</a:t>
             </a:r>
           </a:p>
         </p:txBody>
@@ -12336,7 +12392,7 @@
                 </a:solidFill>
                 <a:latin typeface="Calibri"/>
               </a:rPr>
-              <a:t>WEEK 4  ·  DAY 5  ·  KALPA GLOBAL CAPABILITY CENTRE</a:t>
+              <a:t>WEEK 4  ·  FRIDAY  ·  FLIPKART, LUCKNOW  ·  ILLUSTRATIVE CASE</a:t>
             </a:r>
           </a:p>
         </p:txBody>
@@ -12371,7 +12427,7 @@
                 </a:solidFill>
                 <a:latin typeface="Georgia"/>
               </a:rPr>
-              <a:t>Three follow-ups that change the question</a:t>
+              <a:t>AI variant: inference capacity for a launch</a:t>
             </a:r>
           </a:p>
         </p:txBody>
@@ -12406,55 +12462,35 @@
                 </a:solidFill>
                 <a:latin typeface="Calibri"/>
               </a:rPr>
-              <a:t>What does the interviewer ask next, and what does a strong candidate say?</a:t>
-            </a:r>
-          </a:p>
-        </p:txBody>
-      </p:sp>
-      <p:sp>
-        <p:nvSpPr>
-          <p:cNvPr id="9" name="Rectangle 8"/>
-          <p:cNvSpPr/>
-          <p:nvPr/>
-        </p:nvSpPr>
-        <p:spPr>
-          <a:xfrm>
-            <a:off x="2324557" y="2523744"/>
-            <a:ext cx="7542580" cy="18288"/>
-          </a:xfrm>
-          <a:prstGeom prst="rect">
-            <a:avLst/>
-          </a:prstGeom>
-          <a:solidFill>
-            <a:srgbClr val="CFC9EE"/>
-          </a:solidFill>
-          <a:ln>
-            <a:noFill/>
-          </a:ln>
-          <a:effectLst/>
-        </p:spPr>
-        <p:style>
-          <a:lnRef idx="1">
-            <a:schemeClr val="accent1"/>
-          </a:lnRef>
-          <a:fillRef idx="3">
-            <a:schemeClr val="accent1"/>
-          </a:fillRef>
-          <a:effectRef idx="2">
-            <a:schemeClr val="accent1"/>
-          </a:effectRef>
-          <a:fontRef idx="minor">
-            <a:schemeClr val="lt1"/>
-          </a:fontRef>
-        </p:style>
-        <p:txBody>
-          <a:bodyPr rtlCol="0" anchor="ctr" wrap="square"/>
-          <a:lstStyle/>
-          <a:p>
-            <a:pPr algn="ctr"/>
-          </a:p>
-        </p:txBody>
-      </p:sp>
+              <a:t>How would the same method size servers for an AI product launch?</a:t>
+            </a:r>
+          </a:p>
+        </p:txBody>
+      </p:sp>
+      <p:pic>
+        <p:nvPicPr>
+          <p:cNvPr id="9" name="mermaid diagram" descr="055ea139bd333f68.png"/>
+          <p:cNvPicPr>
+            <a:picLocks noChangeAspect="1"/>
+          </p:cNvPicPr>
+          <p:nvPr/>
+        </p:nvPicPr>
+        <p:blipFill>
+          <a:blip r:embed="rId5"/>
+          <a:stretch>
+            <a:fillRect/>
+          </a:stretch>
+        </p:blipFill>
+        <p:spPr>
+          <a:xfrm>
+            <a:off x="780897" y="1956816"/>
+            <a:ext cx="10629900" cy="2100262"/>
+          </a:xfrm>
+          <a:prstGeom prst="rect">
+            <a:avLst/>
+          </a:prstGeom>
+        </p:spPr>
+      </p:pic>
       <p:sp>
         <p:nvSpPr>
           <p:cNvPr id="10" name="TextBox 9"/>
@@ -12463,8 +12499,8 @@
         </p:nvSpPr>
         <p:spPr>
           <a:xfrm>
-            <a:off x="530352" y="1956816"/>
-            <a:ext cx="3588410" cy="168656"/>
+            <a:off x="530352" y="4203382"/>
+            <a:ext cx="11130991" cy="1048512"/>
           </a:xfrm>
           <a:prstGeom prst="rect">
             <a:avLst/>
@@ -12477,602 +12513,26 @@
           </a:bodyPr>
           <a:lstStyle/>
           <a:p>
-            <a:pPr algn="ctr"/>
-            <a:r>
-              <a:rPr sz="800" b="1" i="0" spc="250">
-                <a:solidFill>
-                  <a:srgbClr val="5B3FD6"/>
+            <a:pPr>
+              <a:spcAft>
+                <a:spcPts val="800"/>
+              </a:spcAft>
+            </a:pPr>
+            <a:r>
+              <a:rPr sz="1600" b="0" i="0">
+                <a:solidFill>
+                  <a:srgbClr val="1A1440"/>
                 </a:solidFill>
                 <a:latin typeface="Calibri"/>
               </a:rPr>
-              <a:t>FOLLOW-UP 1</a:t>
-            </a:r>
-          </a:p>
-        </p:txBody>
-      </p:sp>
-      <p:sp>
-        <p:nvSpPr>
-          <p:cNvPr id="11" name="Oval 10"/>
-          <p:cNvSpPr/>
-          <p:nvPr/>
-        </p:nvSpPr>
-        <p:spPr>
-          <a:xfrm>
-            <a:off x="2223973" y="2432304"/>
-            <a:ext cx="201168" cy="201168"/>
-          </a:xfrm>
-          <a:prstGeom prst="ellipse">
-            <a:avLst/>
-          </a:prstGeom>
-          <a:solidFill>
-            <a:srgbClr val="5B3FD6"/>
-          </a:solidFill>
-          <a:ln>
-            <a:noFill/>
-          </a:ln>
-          <a:effectLst/>
-        </p:spPr>
-        <p:style>
-          <a:lnRef idx="1">
-            <a:schemeClr val="accent1"/>
-          </a:lnRef>
-          <a:fillRef idx="3">
-            <a:schemeClr val="accent1"/>
-          </a:fillRef>
-          <a:effectRef idx="2">
-            <a:schemeClr val="accent1"/>
-          </a:effectRef>
-          <a:fontRef idx="minor">
-            <a:schemeClr val="lt1"/>
-          </a:fontRef>
-        </p:style>
-        <p:txBody>
-          <a:bodyPr rtlCol="0" anchor="ctr" wrap="square"/>
-          <a:lstStyle/>
-          <a:p>
-            <a:pPr algn="ctr"/>
-          </a:p>
-        </p:txBody>
-      </p:sp>
-      <p:sp>
-        <p:nvSpPr>
-          <p:cNvPr id="12" name="Rounded Rectangle 11"/>
-          <p:cNvSpPr/>
-          <p:nvPr/>
-        </p:nvSpPr>
-        <p:spPr>
-          <a:xfrm>
-            <a:off x="530352" y="2843784"/>
-            <a:ext cx="3588410" cy="1249680"/>
-          </a:xfrm>
-          <a:prstGeom prst="roundRect">
-            <a:avLst>
-              <a:gd name="adj" fmla="val 5000"/>
-            </a:avLst>
-          </a:prstGeom>
-          <a:solidFill>
-            <a:srgbClr val="FFFFFF"/>
-          </a:solidFill>
-          <a:ln w="9525">
-            <a:solidFill>
-              <a:srgbClr val="E4E1F1"/>
-            </a:solidFill>
-          </a:ln>
-          <a:effectLst>
-            <a:outerShdw blurRad="76200" dist="19050" dir="5400000" algn="bl" rotWithShape="0">
-              <a:srgbClr val="1A0F5C">
-                <a:alpha val="12000"/>
-              </a:srgbClr>
-            </a:outerShdw>
-          </a:effectLst>
-        </p:spPr>
-        <p:style>
-          <a:lnRef idx="1">
-            <a:schemeClr val="accent1"/>
-          </a:lnRef>
-          <a:fillRef idx="3">
-            <a:schemeClr val="accent1"/>
-          </a:fillRef>
-          <a:effectRef idx="2">
-            <a:schemeClr val="accent1"/>
-          </a:effectRef>
-          <a:fontRef idx="minor">
-            <a:schemeClr val="lt1"/>
-          </a:fontRef>
-        </p:style>
-        <p:txBody>
-          <a:bodyPr rtlCol="0" anchor="ctr" wrap="square"/>
-          <a:lstStyle/>
-          <a:p>
-            <a:pPr algn="ctr"/>
-          </a:p>
-        </p:txBody>
-      </p:sp>
-      <p:sp>
-        <p:nvSpPr>
-          <p:cNvPr id="13" name="TextBox 12"/>
-          <p:cNvSpPr txBox="1"/>
-          <p:nvPr/>
-        </p:nvSpPr>
-        <p:spPr>
-          <a:xfrm>
-            <a:off x="694944" y="2990088"/>
-            <a:ext cx="3259226" cy="251205"/>
-          </a:xfrm>
-          <a:prstGeom prst="rect">
-            <a:avLst/>
-          </a:prstGeom>
-          <a:noFill/>
-        </p:spPr>
-        <p:txBody>
-          <a:bodyPr wrap="square" anchor="t" lIns="0" rIns="0" tIns="0" bIns="0">
-            <a:spAutoFit/>
-          </a:bodyPr>
-          <a:lstStyle/>
-          <a:p>
-            <a:pPr algn="l"/>
-            <a:r>
-              <a:rPr sz="1300" b="1" i="0">
-                <a:solidFill>
-                  <a:srgbClr val="1A0F5C"/>
-                </a:solidFill>
-                <a:latin typeface="Calibri"/>
-              </a:rPr>
-              <a:t>MAE or MAPE, and when?</a:t>
-            </a:r>
-          </a:p>
-        </p:txBody>
-      </p:sp>
-      <p:sp>
-        <p:nvSpPr>
-          <p:cNvPr id="14" name="TextBox 13"/>
-          <p:cNvSpPr txBox="1"/>
-          <p:nvPr/>
-        </p:nvSpPr>
-        <p:spPr>
-          <a:xfrm>
-            <a:off x="694944" y="3277870"/>
-            <a:ext cx="3259226" cy="366776"/>
-          </a:xfrm>
-          <a:prstGeom prst="rect">
-            <a:avLst/>
-          </a:prstGeom>
-          <a:noFill/>
-        </p:spPr>
-        <p:txBody>
-          <a:bodyPr wrap="square" anchor="t" lIns="0" rIns="0" tIns="0" bIns="0">
-            <a:spAutoFit/>
-          </a:bodyPr>
-          <a:lstStyle/>
-          <a:p>
-            <a:pPr algn="l"/>
-            <a:r>
-              <a:rPr sz="1000" b="0" i="0">
-                <a:solidFill>
-                  <a:srgbClr val="6B6690"/>
-                </a:solidFill>
-                <a:latin typeface="Calibri"/>
-              </a:rPr>
-              <a:t>Shipments when the cost is per shipment; percent only to compare series of different sizes.</a:t>
-            </a:r>
-          </a:p>
-        </p:txBody>
-      </p:sp>
-      <p:sp>
-        <p:nvSpPr>
-          <p:cNvPr id="15" name="TextBox 14"/>
-          <p:cNvSpPr txBox="1"/>
-          <p:nvPr/>
-        </p:nvSpPr>
-        <p:spPr>
-          <a:xfrm>
-            <a:off x="4301642" y="1956816"/>
-            <a:ext cx="3588410" cy="168656"/>
-          </a:xfrm>
-          <a:prstGeom prst="rect">
-            <a:avLst/>
-          </a:prstGeom>
-          <a:noFill/>
-        </p:spPr>
-        <p:txBody>
-          <a:bodyPr wrap="square" anchor="t" lIns="0" rIns="0" tIns="0" bIns="0">
-            <a:spAutoFit/>
-          </a:bodyPr>
-          <a:lstStyle/>
-          <a:p>
-            <a:pPr algn="ctr"/>
-            <a:r>
-              <a:rPr sz="800" b="1" i="0" spc="250">
-                <a:solidFill>
-                  <a:srgbClr val="5B3FD6"/>
-                </a:solidFill>
-                <a:latin typeface="Calibri"/>
-              </a:rPr>
-              <a:t>FOLLOW-UP 2</a:t>
-            </a:r>
-          </a:p>
-        </p:txBody>
-      </p:sp>
-      <p:sp>
-        <p:nvSpPr>
-          <p:cNvPr id="16" name="Oval 15"/>
-          <p:cNvSpPr/>
-          <p:nvPr/>
-        </p:nvSpPr>
-        <p:spPr>
-          <a:xfrm>
-            <a:off x="5995263" y="2432304"/>
-            <a:ext cx="201168" cy="201168"/>
-          </a:xfrm>
-          <a:prstGeom prst="ellipse">
-            <a:avLst/>
-          </a:prstGeom>
-          <a:solidFill>
-            <a:srgbClr val="5B3FD6"/>
-          </a:solidFill>
-          <a:ln>
-            <a:noFill/>
-          </a:ln>
-          <a:effectLst/>
-        </p:spPr>
-        <p:style>
-          <a:lnRef idx="1">
-            <a:schemeClr val="accent1"/>
-          </a:lnRef>
-          <a:fillRef idx="3">
-            <a:schemeClr val="accent1"/>
-          </a:fillRef>
-          <a:effectRef idx="2">
-            <a:schemeClr val="accent1"/>
-          </a:effectRef>
-          <a:fontRef idx="minor">
-            <a:schemeClr val="lt1"/>
-          </a:fontRef>
-        </p:style>
-        <p:txBody>
-          <a:bodyPr rtlCol="0" anchor="ctr" wrap="square"/>
-          <a:lstStyle/>
-          <a:p>
-            <a:pPr algn="ctr"/>
-          </a:p>
-        </p:txBody>
-      </p:sp>
-      <p:sp>
-        <p:nvSpPr>
-          <p:cNvPr id="17" name="Rounded Rectangle 16"/>
-          <p:cNvSpPr/>
-          <p:nvPr/>
-        </p:nvSpPr>
-        <p:spPr>
-          <a:xfrm>
-            <a:off x="4301642" y="2843784"/>
-            <a:ext cx="3588410" cy="1249680"/>
-          </a:xfrm>
-          <a:prstGeom prst="roundRect">
-            <a:avLst>
-              <a:gd name="adj" fmla="val 5000"/>
-            </a:avLst>
-          </a:prstGeom>
-          <a:solidFill>
-            <a:srgbClr val="FFFFFF"/>
-          </a:solidFill>
-          <a:ln w="9525">
-            <a:solidFill>
-              <a:srgbClr val="E4E1F1"/>
-            </a:solidFill>
-          </a:ln>
-          <a:effectLst>
-            <a:outerShdw blurRad="76200" dist="19050" dir="5400000" algn="bl" rotWithShape="0">
-              <a:srgbClr val="1A0F5C">
-                <a:alpha val="12000"/>
-              </a:srgbClr>
-            </a:outerShdw>
-          </a:effectLst>
-        </p:spPr>
-        <p:style>
-          <a:lnRef idx="1">
-            <a:schemeClr val="accent1"/>
-          </a:lnRef>
-          <a:fillRef idx="3">
-            <a:schemeClr val="accent1"/>
-          </a:fillRef>
-          <a:effectRef idx="2">
-            <a:schemeClr val="accent1"/>
-          </a:effectRef>
-          <a:fontRef idx="minor">
-            <a:schemeClr val="lt1"/>
-          </a:fontRef>
-        </p:style>
-        <p:txBody>
-          <a:bodyPr rtlCol="0" anchor="ctr" wrap="square"/>
-          <a:lstStyle/>
-          <a:p>
-            <a:pPr algn="ctr"/>
-          </a:p>
-        </p:txBody>
-      </p:sp>
-      <p:sp>
-        <p:nvSpPr>
-          <p:cNvPr id="18" name="TextBox 17"/>
-          <p:cNvSpPr txBox="1"/>
-          <p:nvPr/>
-        </p:nvSpPr>
-        <p:spPr>
-          <a:xfrm>
-            <a:off x="4466234" y="2990088"/>
-            <a:ext cx="3259226" cy="465836"/>
-          </a:xfrm>
-          <a:prstGeom prst="rect">
-            <a:avLst/>
-          </a:prstGeom>
-          <a:noFill/>
-        </p:spPr>
-        <p:txBody>
-          <a:bodyPr wrap="square" anchor="t" lIns="0" rIns="0" tIns="0" bIns="0">
-            <a:spAutoFit/>
-          </a:bodyPr>
-          <a:lstStyle/>
-          <a:p>
-            <a:pPr algn="l"/>
-            <a:r>
-              <a:rPr sz="1300" b="1" i="0">
-                <a:solidFill>
-                  <a:srgbClr val="1A0F5C"/>
-                </a:solidFill>
-                <a:latin typeface="Calibri"/>
-              </a:rPr>
-              <a:t>The festival moves three weeks: what breaks?</a:t>
-            </a:r>
-          </a:p>
-        </p:txBody>
-      </p:sp>
-      <p:sp>
-        <p:nvSpPr>
-          <p:cNvPr id="19" name="TextBox 18"/>
-          <p:cNvSpPr txBox="1"/>
-          <p:nvPr/>
-        </p:nvSpPr>
-        <p:spPr>
-          <a:xfrm>
-            <a:off x="4466234" y="3492500"/>
-            <a:ext cx="3259226" cy="366776"/>
-          </a:xfrm>
-          <a:prstGeom prst="rect">
-            <a:avLst/>
-          </a:prstGeom>
-          <a:noFill/>
-        </p:spPr>
-        <p:txBody>
-          <a:bodyPr wrap="square" anchor="t" lIns="0" rIns="0" tIns="0" bIns="0">
-            <a:spAutoFit/>
-          </a:bodyPr>
-          <a:lstStyle/>
-          <a:p>
-            <a:pPr algn="l"/>
-            <a:r>
-              <a:rPr sz="1000" b="0" i="0">
-                <a:solidFill>
-                  <a:srgbClr val="6B6690"/>
-                </a:solidFill>
-                <a:latin typeface="Calibri"/>
-              </a:rPr>
-              <a:t>Every calendar copy, the house bot and finance's rule; the festival-aligned copy moves with it.</a:t>
-            </a:r>
-          </a:p>
-        </p:txBody>
-      </p:sp>
-      <p:sp>
-        <p:nvSpPr>
-          <p:cNvPr id="20" name="TextBox 19"/>
-          <p:cNvSpPr txBox="1"/>
-          <p:nvPr/>
-        </p:nvSpPr>
-        <p:spPr>
-          <a:xfrm>
-            <a:off x="8072932" y="1956816"/>
-            <a:ext cx="3588410" cy="168656"/>
-          </a:xfrm>
-          <a:prstGeom prst="rect">
-            <a:avLst/>
-          </a:prstGeom>
-          <a:noFill/>
-        </p:spPr>
-        <p:txBody>
-          <a:bodyPr wrap="square" anchor="t" lIns="0" rIns="0" tIns="0" bIns="0">
-            <a:spAutoFit/>
-          </a:bodyPr>
-          <a:lstStyle/>
-          <a:p>
-            <a:pPr algn="ctr"/>
-            <a:r>
-              <a:rPr sz="800" b="1" i="0" spc="250">
-                <a:solidFill>
-                  <a:srgbClr val="5B3FD6"/>
-                </a:solidFill>
-                <a:latin typeface="Calibri"/>
-              </a:rPr>
-              <a:t>FOLLOW-UP 3</a:t>
-            </a:r>
-          </a:p>
-        </p:txBody>
-      </p:sp>
-      <p:sp>
-        <p:nvSpPr>
-          <p:cNvPr id="21" name="Oval 20"/>
-          <p:cNvSpPr/>
-          <p:nvPr/>
-        </p:nvSpPr>
-        <p:spPr>
-          <a:xfrm>
-            <a:off x="9766554" y="2432304"/>
-            <a:ext cx="201168" cy="201168"/>
-          </a:xfrm>
-          <a:prstGeom prst="ellipse">
-            <a:avLst/>
-          </a:prstGeom>
-          <a:solidFill>
-            <a:srgbClr val="D9A7FF"/>
-          </a:solidFill>
-          <a:ln>
-            <a:noFill/>
-          </a:ln>
-          <a:effectLst/>
-        </p:spPr>
-        <p:style>
-          <a:lnRef idx="1">
-            <a:schemeClr val="accent1"/>
-          </a:lnRef>
-          <a:fillRef idx="3">
-            <a:schemeClr val="accent1"/>
-          </a:fillRef>
-          <a:effectRef idx="2">
-            <a:schemeClr val="accent1"/>
-          </a:effectRef>
-          <a:fontRef idx="minor">
-            <a:schemeClr val="lt1"/>
-          </a:fontRef>
-        </p:style>
-        <p:txBody>
-          <a:bodyPr rtlCol="0" anchor="ctr" wrap="square"/>
-          <a:lstStyle/>
-          <a:p>
-            <a:pPr algn="ctr"/>
-          </a:p>
-        </p:txBody>
-      </p:sp>
-      <p:sp>
-        <p:nvSpPr>
-          <p:cNvPr id="22" name="Rounded Rectangle 21"/>
-          <p:cNvSpPr/>
-          <p:nvPr/>
-        </p:nvSpPr>
-        <p:spPr>
-          <a:xfrm>
-            <a:off x="8072932" y="2843784"/>
-            <a:ext cx="3588410" cy="1249680"/>
-          </a:xfrm>
-          <a:prstGeom prst="roundRect">
-            <a:avLst>
-              <a:gd name="adj" fmla="val 5000"/>
-            </a:avLst>
-          </a:prstGeom>
-          <a:gradFill rotWithShape="1">
-            <a:gsLst>
-              <a:gs pos="0">
-                <a:srgbClr val="2C1A86"/>
-              </a:gs>
-              <a:gs pos="100000">
-                <a:srgbClr val="1A0F5C"/>
-              </a:gs>
-            </a:gsLst>
-            <a:lin scaled="0" ang="16200000"/>
-          </a:gradFill>
-          <a:ln>
-            <a:noFill/>
-          </a:ln>
-          <a:effectLst>
-            <a:outerShdw blurRad="76200" dist="19050" dir="5400000" algn="bl" rotWithShape="0">
-              <a:srgbClr val="1A0F5C">
-                <a:alpha val="12000"/>
-              </a:srgbClr>
-            </a:outerShdw>
-          </a:effectLst>
-        </p:spPr>
-        <p:style>
-          <a:lnRef idx="1">
-            <a:schemeClr val="accent1"/>
-          </a:lnRef>
-          <a:fillRef idx="3">
-            <a:schemeClr val="accent1"/>
-          </a:fillRef>
-          <a:effectRef idx="2">
-            <a:schemeClr val="accent1"/>
-          </a:effectRef>
-          <a:fontRef idx="minor">
-            <a:schemeClr val="lt1"/>
-          </a:fontRef>
-        </p:style>
-        <p:txBody>
-          <a:bodyPr rtlCol="0" anchor="ctr" wrap="square"/>
-          <a:lstStyle/>
-          <a:p>
-            <a:pPr algn="ctr"/>
-          </a:p>
-        </p:txBody>
-      </p:sp>
-      <p:sp>
-        <p:nvSpPr>
-          <p:cNvPr id="23" name="TextBox 22"/>
-          <p:cNvSpPr txBox="1"/>
-          <p:nvPr/>
-        </p:nvSpPr>
-        <p:spPr>
-          <a:xfrm>
-            <a:off x="8237524" y="2990088"/>
-            <a:ext cx="3259226" cy="251205"/>
-          </a:xfrm>
-          <a:prstGeom prst="rect">
-            <a:avLst/>
-          </a:prstGeom>
-          <a:noFill/>
-        </p:spPr>
-        <p:txBody>
-          <a:bodyPr wrap="square" anchor="t" lIns="0" rIns="0" tIns="0" bIns="0">
-            <a:spAutoFit/>
-          </a:bodyPr>
-          <a:lstStyle/>
-          <a:p>
-            <a:pPr algn="l"/>
-            <a:r>
-              <a:rPr sz="1300" b="1" i="0">
-                <a:solidFill>
-                  <a:srgbClr val="FFFFFF"/>
-                </a:solidFill>
-                <a:latin typeface="Calibri"/>
-              </a:rPr>
-              <a:t>What did a forecast cost Zillow?</a:t>
-            </a:r>
-          </a:p>
-        </p:txBody>
-      </p:sp>
-      <p:sp>
-        <p:nvSpPr>
-          <p:cNvPr id="24" name="TextBox 23"/>
-          <p:cNvSpPr txBox="1"/>
-          <p:nvPr/>
-        </p:nvSpPr>
-        <p:spPr>
-          <a:xfrm>
-            <a:off x="8237524" y="3277870"/>
-            <a:ext cx="3259226" cy="531876"/>
-          </a:xfrm>
-          <a:prstGeom prst="rect">
-            <a:avLst/>
-          </a:prstGeom>
-          <a:noFill/>
-        </p:spPr>
-        <p:txBody>
-          <a:bodyPr wrap="square" anchor="t" lIns="0" rIns="0" tIns="0" bIns="0">
-            <a:spAutoFit/>
-          </a:bodyPr>
-          <a:lstStyle/>
-          <a:p>
-            <a:pPr algn="l"/>
-            <a:r>
-              <a:rPr sz="1000" b="0" i="0">
-                <a:solidFill>
-                  <a:srgbClr val="CFC9EE"/>
-                </a:solidFill>
-                <a:latin typeface="Calibri"/>
-              </a:rPr>
-              <a:t>A guardrail of plus or minus 200 basis points swung about 1,200; a write-down of about USD 304 million (F3).</a:t>
-            </a:r>
-          </a:p>
-        </p:txBody>
-      </p:sp>
-      <p:sp>
-        <p:nvSpPr>
-          <p:cNvPr id="25" name="TextBox 24"/>
+              <a:t>The launch is the festival: line it up by days from the launch, never by calendar date. The plan sits above the forecast because being short means timeouts. This variant is written for the programme and quotes no company's figures.</a:t>
+            </a:r>
+          </a:p>
+        </p:txBody>
+      </p:sp>
+      <p:sp>
+        <p:nvSpPr>
+          <p:cNvPr id="11" name="TextBox 10"/>
           <p:cNvSpPr txBox="1"/>
           <p:nvPr/>
         </p:nvSpPr>
@@ -13107,7 +12567,7 @@
       </p:sp>
       <p:sp>
         <p:nvSpPr>
-          <p:cNvPr id="26" name="TextBox 25"/>
+          <p:cNvPr id="12" name="TextBox 11"/>
           <p:cNvSpPr txBox="1"/>
           <p:nvPr/>
         </p:nvSpPr>
@@ -13135,7 +12595,7 @@
                 </a:solidFill>
                 <a:latin typeface="Calibri"/>
               </a:rPr>
-              <a:t>S7  ·  8 / 13</a:t>
+              <a:t>S8  ·  8 / 12</a:t>
             </a:r>
           </a:p>
         </p:txBody>
@@ -13306,7 +12766,7 @@
                 </a:solidFill>
                 <a:latin typeface="Calibri"/>
               </a:rPr>
-              <a:t>WEEK 4  ·  DAY 5  ·  KALPA GLOBAL CAPABILITY CENTRE</a:t>
+              <a:t>WEEK 4  ·  FRIDAY  ·  FLIPKART, LUCKNOW  ·  ILLUSTRATIVE CASE</a:t>
             </a:r>
           </a:p>
         </p:txBody>
@@ -13341,7 +12801,7 @@
                 </a:solidFill>
                 <a:latin typeface="Georgia"/>
               </a:rPr>
-              <a:t>AI variant: inference capacity for a launch</a:t>
+              <a:t>Two-wheelers a year: about 2.16 crore, checked</a:t>
             </a:r>
           </a:p>
         </p:txBody>
@@ -13376,14 +12836,14 @@
                 </a:solidFill>
                 <a:latin typeface="Calibri"/>
               </a:rPr>
-              <a:t>How would the same method size servers for an AI product launch?</a:t>
+              <a:t>How do you size a number from nothing, and check it against something known?</a:t>
             </a:r>
           </a:p>
         </p:txBody>
       </p:sp>
       <p:pic>
         <p:nvPicPr>
-          <p:cNvPr id="9" name="mermaid diagram" descr="055ea139bd333f68.png"/>
+          <p:cNvPr id="9" name="mermaid diagram" descr="dc4977127c51dc04.png"/>
           <p:cNvPicPr>
             <a:picLocks noChangeAspect="1"/>
           </p:cNvPicPr>
@@ -13397,8 +12857,8 @@
         </p:blipFill>
         <p:spPr>
           <a:xfrm>
-            <a:off x="780897" y="1956816"/>
-            <a:ext cx="10629900" cy="2100262"/>
+            <a:off x="530352" y="1956816"/>
+            <a:ext cx="11130991" cy="1962193"/>
           </a:xfrm>
           <a:prstGeom prst="rect">
             <a:avLst/>
@@ -13407,46 +12867,144 @@
       </p:pic>
       <p:sp>
         <p:nvSpPr>
-          <p:cNvPr id="10" name="TextBox 9"/>
-          <p:cNvSpPr txBox="1"/>
-          <p:nvPr/>
-        </p:nvSpPr>
-        <p:spPr>
-          <a:xfrm>
-            <a:off x="530352" y="4203382"/>
-            <a:ext cx="11130991" cy="1048512"/>
-          </a:xfrm>
-          <a:prstGeom prst="rect">
-            <a:avLst/>
-          </a:prstGeom>
-          <a:noFill/>
-        </p:spPr>
-        <p:txBody>
-          <a:bodyPr wrap="square" anchor="t" lIns="0" rIns="0" tIns="0" bIns="0">
-            <a:spAutoFit/>
-          </a:bodyPr>
-          <a:lstStyle/>
-          <a:p>
-            <a:pPr>
-              <a:spcAft>
-                <a:spcPts val="800"/>
-              </a:spcAft>
-            </a:pPr>
-            <a:r>
-              <a:rPr sz="1600" b="0" i="0">
+          <p:cNvPr id="10" name="Rounded Rectangle 9"/>
+          <p:cNvSpPr/>
+          <p:nvPr/>
+        </p:nvSpPr>
+        <p:spPr>
+          <a:xfrm>
+            <a:off x="530352" y="4065313"/>
+            <a:ext cx="11130991" cy="1074420"/>
+          </a:xfrm>
+          <a:prstGeom prst="roundRect">
+            <a:avLst>
+              <a:gd name="adj" fmla="val 8000"/>
+            </a:avLst>
+          </a:prstGeom>
+          <a:solidFill>
+            <a:srgbClr val="F7F5FD"/>
+          </a:solidFill>
+          <a:ln w="9525">
+            <a:solidFill>
+              <a:srgbClr val="E4E1F1"/>
+            </a:solidFill>
+          </a:ln>
+          <a:effectLst/>
+        </p:spPr>
+        <p:style>
+          <a:lnRef idx="1">
+            <a:schemeClr val="accent1"/>
+          </a:lnRef>
+          <a:fillRef idx="3">
+            <a:schemeClr val="accent1"/>
+          </a:fillRef>
+          <a:effectRef idx="2">
+            <a:schemeClr val="accent1"/>
+          </a:effectRef>
+          <a:fontRef idx="minor">
+            <a:schemeClr val="lt1"/>
+          </a:fontRef>
+        </p:style>
+        <p:txBody>
+          <a:bodyPr rtlCol="0" anchor="ctr" wrap="square"/>
+          <a:lstStyle/>
+          <a:p>
+            <a:pPr algn="ctr"/>
+          </a:p>
+        </p:txBody>
+      </p:sp>
+      <p:sp>
+        <p:nvSpPr>
+          <p:cNvPr id="11" name="Rounded Rectangle 10"/>
+          <p:cNvSpPr/>
+          <p:nvPr/>
+        </p:nvSpPr>
+        <p:spPr>
+          <a:xfrm>
+            <a:off x="676656" y="4193329"/>
+            <a:ext cx="45720" cy="818388"/>
+          </a:xfrm>
+          <a:prstGeom prst="roundRect">
+            <a:avLst>
+              <a:gd name="adj" fmla="val 50000"/>
+            </a:avLst>
+          </a:prstGeom>
+          <a:solidFill>
+            <a:srgbClr val="5B3FD6"/>
+          </a:solidFill>
+          <a:ln>
+            <a:noFill/>
+          </a:ln>
+          <a:effectLst/>
+        </p:spPr>
+        <p:style>
+          <a:lnRef idx="1">
+            <a:schemeClr val="accent1"/>
+          </a:lnRef>
+          <a:fillRef idx="3">
+            <a:schemeClr val="accent1"/>
+          </a:fillRef>
+          <a:effectRef idx="2">
+            <a:schemeClr val="accent1"/>
+          </a:effectRef>
+          <a:fontRef idx="minor">
+            <a:schemeClr val="lt1"/>
+          </a:fontRef>
+        </p:style>
+        <p:txBody>
+          <a:bodyPr rtlCol="0" anchor="ctr" wrap="square"/>
+          <a:lstStyle/>
+          <a:p>
+            <a:pPr algn="ctr"/>
+          </a:p>
+        </p:txBody>
+      </p:sp>
+      <p:sp>
+        <p:nvSpPr>
+          <p:cNvPr id="12" name="TextBox 11"/>
+          <p:cNvSpPr txBox="1"/>
+          <p:nvPr/>
+        </p:nvSpPr>
+        <p:spPr>
+          <a:xfrm>
+            <a:off x="877824" y="4184185"/>
+            <a:ext cx="10564063" cy="891540"/>
+          </a:xfrm>
+          <a:prstGeom prst="rect">
+            <a:avLst/>
+          </a:prstGeom>
+          <a:noFill/>
+        </p:spPr>
+        <p:txBody>
+          <a:bodyPr wrap="square" anchor="ctr" lIns="0" rIns="0" tIns="0" bIns="0">
+            <a:spAutoFit/>
+          </a:bodyPr>
+          <a:lstStyle/>
+          <a:p>
+            <a:r>
+              <a:rPr sz="1500" b="1">
+                <a:solidFill>
+                  <a:srgbClr val="5B3FD6"/>
+                </a:solidFill>
+                <a:latin typeface="Calibri"/>
+              </a:rPr>
+              <a:t>The catch. </a:t>
+            </a:r>
+            <a:r>
+              <a:rPr sz="1500" b="0" i="0">
                 <a:solidFill>
                   <a:srgbClr val="1A1440"/>
                 </a:solidFill>
                 <a:latin typeface="Calibri"/>
               </a:rPr>
-              <a:t>The launch is the festival: line it up by days from the launch, never by calendar date. The plan sits above the forecast because being short means timeouts. This variant is written for the programme and quotes no company's figures.</a:t>
-            </a:r>
-          </a:p>
-        </p:txBody>
-      </p:sp>
-      <p:sp>
-        <p:nvSpPr>
-          <p:cNvPr id="11" name="TextBox 10"/>
+              <a:t>October 2025's retail alone was 31,49,846 two-wheelers (FADA, F5); times twelve that is about 3.78 crore, 74 percent too high: never annualise a festive month. SIAM's figure is from its FY 2025-26 release (T3, checked 12 October 2026).</a:t>
+            </a:r>
+          </a:p>
+        </p:txBody>
+      </p:sp>
+      <p:sp>
+        <p:nvSpPr>
+          <p:cNvPr id="13" name="TextBox 12"/>
           <p:cNvSpPr txBox="1"/>
           <p:nvPr/>
         </p:nvSpPr>
@@ -13481,7 +13039,7 @@
       </p:sp>
       <p:sp>
         <p:nvSpPr>
-          <p:cNvPr id="12" name="TextBox 11"/>
+          <p:cNvPr id="14" name="TextBox 13"/>
           <p:cNvSpPr txBox="1"/>
           <p:nvPr/>
         </p:nvSpPr>
@@ -13509,7 +13067,7 @@
                 </a:solidFill>
                 <a:latin typeface="Calibri"/>
               </a:rPr>
-              <a:t>S8  ·  9 / 13</a:t>
+              <a:t>S9  ·  9 / 12</a:t>
             </a:r>
           </a:p>
         </p:txBody>

--- a/content/W04/D5/slides/C2_W04_D05_half2_STUDENT.pptx
+++ b/content/W04/D5/slides/C2_W04_D05_half2_STUDENT.pptx
@@ -1238,7 +1238,17 @@
           </a:p>
           <a:p>
             <a:r>
-              <a:t>figures are from its Q3 2021 shareholder letter, checked 12 October 2026. Transition: the same idea</a:t>
+              <a:t>figures are from its Q3 2021 shareholder letter, checked 12 October 2026: a guardrail of plus or</a:t>
+            </a:r>
+          </a:p>
+          <a:p>
+            <a:r>
+              <a:t>minus 200 basis points (a basis point is a hundredth of a percent) of breakeven unit economics, a</a:t>
+            </a:r>
+          </a:p>
+          <a:p>
+            <a:r>
+              <a:t>swing of about 1,200 basis points, an inventory write-down of about USD 304 million. Transition: the same idea</a:t>
             </a:r>
           </a:p>
           <a:p>
@@ -4871,7 +4881,7 @@
                 </a:solidFill>
                 <a:latin typeface="Calibri"/>
               </a:rPr>
-              <a:t>on thirteen hidden weeks: Rs 35,832 if high, Rs 1.7 lakh if low</a:t>
+              <a:t>on thirteen hidden weeks: about Rs 35,800 if high, Rs 1.65 lakh if low</a:t>
             </a:r>
           </a:p>
         </p:txBody>
@@ -5866,7 +5876,7 @@
                 </a:solidFill>
                 <a:latin typeface="Georgia"/>
               </a:rPr>
-              <a:t>Kahoot: eight calls in twenty seconds each</a:t>
+              <a:t>Kahoot: eight calls, twenty seconds each, item 7 forty</a:t>
             </a:r>
           </a:p>
         </p:txBody>
@@ -6666,7 +6676,7 @@
         <p:spPr>
           <a:xfrm>
             <a:off x="530352" y="1956816"/>
-            <a:ext cx="3588410" cy="1964436"/>
+            <a:ext cx="3588410" cy="2154428"/>
           </a:xfrm>
           <a:prstGeom prst="roundRect">
             <a:avLst>
@@ -6899,7 +6909,7 @@
         <p:spPr>
           <a:xfrm>
             <a:off x="4301642" y="1956816"/>
-            <a:ext cx="3588410" cy="1964436"/>
+            <a:ext cx="3588410" cy="2154428"/>
           </a:xfrm>
           <a:prstGeom prst="roundRect">
             <a:avLst>
@@ -7126,7 +7136,7 @@
         <p:spPr>
           <a:xfrm>
             <a:off x="8072932" y="1956816"/>
-            <a:ext cx="3588410" cy="1964436"/>
+            <a:ext cx="3588410" cy="2154428"/>
           </a:xfrm>
           <a:prstGeom prst="roundRect">
             <a:avLst>
@@ -7304,7 +7314,7 @@
                 </a:solidFill>
                 <a:latin typeface="Calibri"/>
               </a:rPr>
-              <a:t>Plan at the 0.82 share</a:t>
+              <a:t>Cover 0.82 of weeks</a:t>
             </a:r>
           </a:p>
         </p:txBody>
@@ -7318,7 +7328,7 @@
         <p:spPr>
           <a:xfrm>
             <a:off x="8274100" y="3303524"/>
-            <a:ext cx="3186074" cy="399796"/>
+            <a:ext cx="3186074" cy="581406"/>
           </a:xfrm>
           <a:prstGeom prst="rect">
             <a:avLst/>
@@ -7339,7 +7349,7 @@
                 </a:solidFill>
                 <a:latin typeface="Calibri"/>
               </a:rPr>
-              <a:t>Being short costs 4.6 times being long, so the plan sits 2.6 percent above the forecast.</a:t>
+              <a:t>A late shipment costs 4.6 times a spare one, so the plan sits 2.6 percent above the forecast.</a:t>
             </a:r>
           </a:p>
         </p:txBody>
@@ -7352,7 +7362,7 @@
         </p:nvSpPr>
         <p:spPr>
           <a:xfrm>
-            <a:off x="530352" y="4104132"/>
+            <a:off x="530352" y="4294124"/>
             <a:ext cx="11130991" cy="772160"/>
           </a:xfrm>
           <a:prstGeom prst="rect">
@@ -7712,7 +7722,7 @@
         <p:spPr>
           <a:xfrm>
             <a:off x="530352" y="1956816"/>
-            <a:ext cx="2079894" cy="2575560"/>
+            <a:ext cx="2079894" cy="2765552"/>
           </a:xfrm>
           <a:prstGeom prst="roundRect">
             <a:avLst>
@@ -7939,7 +7949,7 @@
         <p:spPr>
           <a:xfrm>
             <a:off x="2793126" y="1956816"/>
-            <a:ext cx="2079894" cy="2575560"/>
+            <a:ext cx="2079894" cy="2765552"/>
           </a:xfrm>
           <a:prstGeom prst="roundRect">
             <a:avLst>
@@ -8166,7 +8176,7 @@
         <p:spPr>
           <a:xfrm>
             <a:off x="5055900" y="1956816"/>
-            <a:ext cx="2079894" cy="2575560"/>
+            <a:ext cx="2079894" cy="2765552"/>
           </a:xfrm>
           <a:prstGeom prst="roundRect">
             <a:avLst>
@@ -8358,7 +8368,7 @@
         <p:spPr>
           <a:xfrm>
             <a:off x="5257068" y="3534664"/>
-            <a:ext cx="1677558" cy="763016"/>
+            <a:ext cx="1677558" cy="944626"/>
           </a:xfrm>
           <a:prstGeom prst="rect">
             <a:avLst/>
@@ -8379,7 +8389,7 @@
                 </a:solidFill>
                 <a:latin typeface="Calibri"/>
               </a:rPr>
-              <a:t>Shipments a week, priced in each direction, and the festival's own record.</a:t>
+              <a:t>The miss a week in shipments, its cost if high and if low, and the rule's record on 2025's festival.</a:t>
             </a:r>
           </a:p>
         </p:txBody>
@@ -8393,7 +8403,7 @@
         <p:spPr>
           <a:xfrm>
             <a:off x="7318674" y="1956816"/>
-            <a:ext cx="2079894" cy="2575560"/>
+            <a:ext cx="2079894" cy="2765552"/>
           </a:xfrm>
           <a:prstGeom prst="roundRect">
             <a:avLst>
@@ -8620,7 +8630,7 @@
         <p:spPr>
           <a:xfrm>
             <a:off x="9581448" y="1956816"/>
-            <a:ext cx="2079894" cy="2575560"/>
+            <a:ext cx="2079894" cy="2765552"/>
           </a:xfrm>
           <a:prstGeom prst="roundRect">
             <a:avLst>
@@ -8852,7 +8862,7 @@
         </p:nvSpPr>
         <p:spPr>
           <a:xfrm>
-            <a:off x="530352" y="4715256"/>
+            <a:off x="530352" y="4905248"/>
             <a:ext cx="11130991" cy="772160"/>
           </a:xfrm>
           <a:prstGeom prst="rect">
@@ -11629,7 +11639,7 @@
         <p:spPr>
           <a:xfrm>
             <a:off x="530352" y="2843784"/>
-            <a:ext cx="3588410" cy="1249680"/>
+            <a:ext cx="3588410" cy="1422400"/>
           </a:xfrm>
           <a:prstGeom prst="roundRect">
             <a:avLst>
@@ -11832,7 +11842,7 @@
         <p:spPr>
           <a:xfrm>
             <a:off x="4301642" y="2843784"/>
-            <a:ext cx="3588410" cy="1249680"/>
+            <a:ext cx="3588410" cy="1422400"/>
           </a:xfrm>
           <a:prstGeom prst="roundRect">
             <a:avLst>
@@ -12035,7 +12045,7 @@
         <p:spPr>
           <a:xfrm>
             <a:off x="8072932" y="2843784"/>
-            <a:ext cx="3588410" cy="1249680"/>
+            <a:ext cx="3588410" cy="1422400"/>
           </a:xfrm>
           <a:prstGeom prst="roundRect">
             <a:avLst>
@@ -12130,7 +12140,7 @@
         <p:spPr>
           <a:xfrm>
             <a:off x="8237524" y="3277870"/>
-            <a:ext cx="3259226" cy="531876"/>
+            <a:ext cx="3259226" cy="696976"/>
           </a:xfrm>
           <a:prstGeom prst="rect">
             <a:avLst/>
@@ -12151,7 +12161,7 @@
                 </a:solidFill>
                 <a:latin typeface="Calibri"/>
               </a:rPr>
-              <a:t>A guardrail of plus or minus 200 basis points swung about 1,200; a write-down of about USD 304 million (F3).</a:t>
+              <a:t>Its profit on each resold home was meant to stay within 2 percent of zero; it swung about 12 percentage points, and USD 304 million of homes were marked down.</a:t>
             </a:r>
           </a:p>
         </p:txBody>
@@ -12519,13 +12529,22 @@
               </a:spcAft>
             </a:pPr>
             <a:r>
+              <a:rPr sz="1600" b="1" i="0">
+                <a:solidFill>
+                  <a:srgbClr val="1A1440"/>
+                </a:solidFill>
+                <a:latin typeface="Calibri"/>
+              </a:rPr>
+              <a:t>Inference</a:t>
+            </a:r>
+            <a:r>
               <a:rPr sz="1600" b="0" i="0">
                 <a:solidFill>
                   <a:srgbClr val="1A1440"/>
                 </a:solidFill>
                 <a:latin typeface="Calibri"/>
               </a:rPr>
-              <a:t>The launch is the festival: line it up by days from the launch, never by calendar date. The plan sits above the forecast because being short means timeouts. This variant is written for the programme and quotes no company's figures.</a:t>
+              <a:t> is the computing a model does each time it answers a user. The launch is the festival: line it up by days from the launch, never by calendar date. The plan sits above the forecast because being short means timeouts. This variant is written for the programme and quotes no company's figures.</a:t>
             </a:r>
           </a:p>
         </p:txBody>
@@ -12843,7 +12862,7 @@
       </p:sp>
       <p:pic>
         <p:nvPicPr>
-          <p:cNvPr id="9" name="mermaid diagram" descr="dc4977127c51dc04.png"/>
+          <p:cNvPr id="9" name="mermaid diagram" descr="424bc198147ede57.png"/>
           <p:cNvPicPr>
             <a:picLocks noChangeAspect="1"/>
           </p:cNvPicPr>
@@ -12874,7 +12893,7 @@
         <p:spPr>
           <a:xfrm>
             <a:off x="530352" y="4065313"/>
-            <a:ext cx="11130991" cy="1074420"/>
+            <a:ext cx="11130991" cy="1341120"/>
           </a:xfrm>
           <a:prstGeom prst="roundRect">
             <a:avLst>
@@ -12922,7 +12941,7 @@
         <p:spPr>
           <a:xfrm>
             <a:off x="676656" y="4193329"/>
-            <a:ext cx="45720" cy="818388"/>
+            <a:ext cx="45720" cy="1085088"/>
           </a:xfrm>
           <a:prstGeom prst="roundRect">
             <a:avLst>
@@ -12968,7 +12987,7 @@
         <p:spPr>
           <a:xfrm>
             <a:off x="877824" y="4184185"/>
-            <a:ext cx="10564063" cy="891540"/>
+            <a:ext cx="10564063" cy="1158240"/>
           </a:xfrm>
           <a:prstGeom prst="rect">
             <a:avLst/>
@@ -12997,7 +13016,7 @@
                 </a:solidFill>
                 <a:latin typeface="Calibri"/>
               </a:rPr>
-              <a:t>October 2025's retail alone was 31,49,846 two-wheelers (FADA, F5); times twelve that is about 3.78 crore, 74 percent too high: never annualise a festive month. SIAM's figure is from its FY 2025-26 release (T3, checked 12 October 2026).</a:t>
+              <a:t>October 2025's two-wheeler sales to buyers alone were 31.5 lakh (FADA, the Federation of Automobile Dealers Associations); times twelve that is about 3.78 crore, 74 percent too high: never annualise a festive month. SIAM, the Society of Indian Automobile Manufacturers, reported 2.17 crore for FY 2025-26 (its release, checked 12 October 2026).</a:t>
             </a:r>
           </a:p>
         </p:txBody>

--- a/content/W04/D5/slides/C2_W04_D05_half2_STUDENT.pptx
+++ b/content/W04/D5/slides/C2_W04_D05_half2_STUDENT.pptx
@@ -603,7 +603,12 @@
           <a:lstStyle/>
           <a:p>
             <a:r>
-              <a:t>LIVE, 2 minutes. Read the handoff line as written.</a:t>
+              <a:t>LIVE, 2 minutes. Read the handoff line as written, then point at the four words: the faculty</a:t>
+            </a:r>
+          </a:p>
+          <a:p>
+            <a:r>
+              <a:t>session defines them properly, and this table only says what each one is for.</a:t>
             </a:r>
           </a:p>
           <a:p>
@@ -5424,7 +5429,7 @@
                 </a:solidFill>
                 <a:latin typeface="Calibri"/>
               </a:rPr>
-              <a:t>What does the IITGN faculty session W4-4 (tentative) pick up from here?</a:t>
+              <a:t>What does the IITGN faculty session W4-4 pick up from here? It is tentative, and the fallback hour runs if it cannot.</a:t>
             </a:r>
           </a:p>
         </p:txBody>
@@ -5438,7 +5443,7 @@
         <p:spPr>
           <a:xfrm>
             <a:off x="530352" y="1956816"/>
-            <a:ext cx="11130991" cy="1341120"/>
+            <a:ext cx="11130991" cy="967740"/>
           </a:xfrm>
           <a:prstGeom prst="roundRect">
             <a:avLst>
@@ -5486,7 +5491,7 @@
         <p:spPr>
           <a:xfrm>
             <a:off x="676656" y="2084832"/>
-            <a:ext cx="45720" cy="1085088"/>
+            <a:ext cx="45720" cy="711708"/>
           </a:xfrm>
           <a:prstGeom prst="roundRect">
             <a:avLst>
@@ -5532,7 +5537,7 @@
         <p:spPr>
           <a:xfrm>
             <a:off x="877824" y="2075688"/>
-            <a:ext cx="10564063" cy="1158240"/>
+            <a:ext cx="10564063" cy="784860"/>
           </a:xfrm>
           <a:prstGeom prst="rect">
             <a:avLst/>
@@ -5546,7 +5551,7 @@
           <a:lstStyle/>
           <a:p>
             <a:r>
-              <a:rPr sz="1500" b="1">
+              <a:rPr sz="1300" b="1">
                 <a:solidFill>
                   <a:srgbClr val="5B3FD6"/>
                 </a:solidFill>
@@ -5555,7 +5560,7 @@
               <a:t>The handoff line. </a:t>
             </a:r>
             <a:r>
-              <a:rPr sz="1500" b="0" i="0">
+              <a:rPr sz="1300" b="0" i="0">
                 <a:solidFill>
                   <a:srgbClr val="1A1440"/>
                 </a:solidFill>
@@ -5566,45 +5571,262 @@
           </a:p>
         </p:txBody>
       </p:sp>
-      <p:sp>
-        <p:nvSpPr>
-          <p:cNvPr id="12" name="TextBox 11"/>
-          <p:cNvSpPr txBox="1"/>
-          <p:nvPr/>
-        </p:nvSpPr>
-        <p:spPr>
-          <a:xfrm>
-            <a:off x="530352" y="3462528"/>
-            <a:ext cx="11130991" cy="772160"/>
-          </a:xfrm>
-          <a:prstGeom prst="rect">
-            <a:avLst/>
-          </a:prstGeom>
-          <a:noFill/>
-        </p:spPr>
-        <p:txBody>
-          <a:bodyPr wrap="square" anchor="t" lIns="0" rIns="0" tIns="0" bIns="0">
-            <a:spAutoFit/>
-          </a:bodyPr>
-          <a:lstStyle/>
-          <a:p>
-            <a:pPr>
-              <a:spcAft>
-                <a:spcPts val="800"/>
-              </a:spcAft>
-            </a:pPr>
-            <a:r>
-              <a:rPr sz="1600" b="0" i="0">
-                <a:solidFill>
-                  <a:srgbClr val="1A1440"/>
-                </a:solidFill>
-                <a:latin typeface="Calibri"/>
-              </a:rPr>
-              <a:t>The faculty session is tentative until IIT Gandhinagar confirms it; if it does not run today, the fallback hour runs in its place.</a:t>
-            </a:r>
-          </a:p>
-        </p:txBody>
-      </p:sp>
+      <p:graphicFrame>
+        <p:nvGraphicFramePr>
+          <p:cNvPr id="12" name="Table 11"/>
+          <p:cNvGraphicFramePr>
+            <a:graphicFrameLocks noGrp="1"/>
+          </p:cNvGraphicFramePr>
+          <p:nvPr/>
+        </p:nvGraphicFramePr>
+        <p:xfrm>
+          <a:off x="530352" y="3089148"/>
+          <a:ext cx="11130991" cy="2298192"/>
+        </p:xfrm>
+        <a:graphic>
+          <a:graphicData uri="http://schemas.openxmlformats.org/drawingml/2006/table">
+            <a:tbl>
+              <a:tblPr firstRow="0" bandRow="0">
+                <a:tableStyleId>{2D5ABB26-0587-4C30-8999-92F81FD0307C}</a:tableStyleId>
+              </a:tblPr>
+              <a:tblGrid>
+                <a:gridCol w="3114997"/>
+                <a:gridCol w="8015994"/>
+              </a:tblGrid>
+              <a:tr h="335280">
+                <a:tc>
+                  <a:txBody>
+                    <a:bodyPr/>
+                    <a:lstStyle/>
+                    <a:p>
+                      <a:r>
+                        <a:rPr sz="1250" b="1" i="0">
+                          <a:solidFill>
+                            <a:srgbClr val="FFFFFF"/>
+                          </a:solidFill>
+                          <a:latin typeface="Calibri"/>
+                        </a:rPr>
+                        <a:t>The word you will hear</a:t>
+                      </a:r>
+                    </a:p>
+                  </a:txBody>
+                  <a:tcPr marL="101600" marR="101600" marT="38100" marB="38100" anchor="ctr">
+                    <a:solidFill>
+                      <a:srgbClr val="1A0F5C"/>
+                    </a:solidFill>
+                  </a:tcPr>
+                </a:tc>
+                <a:tc>
+                  <a:txBody>
+                    <a:bodyPr/>
+                    <a:lstStyle/>
+                    <a:p>
+                      <a:r>
+                        <a:rPr sz="1250" b="1" i="0">
+                          <a:solidFill>
+                            <a:srgbClr val="FFFFFF"/>
+                          </a:solidFill>
+                          <a:latin typeface="Calibri"/>
+                        </a:rPr>
+                        <a:t>What it means here</a:t>
+                      </a:r>
+                    </a:p>
+                  </a:txBody>
+                  <a:tcPr marL="101600" marR="101600" marT="38100" marB="38100" anchor="ctr">
+                    <a:solidFill>
+                      <a:srgbClr val="1A0F5C"/>
+                    </a:solidFill>
+                  </a:tcPr>
+                </a:tc>
+              </a:tr>
+              <a:tr h="542544">
+                <a:tc>
+                  <a:txBody>
+                    <a:bodyPr/>
+                    <a:lstStyle/>
+                    <a:p>
+                      <a:r>
+                        <a:rPr sz="1200" b="0" i="0">
+                          <a:solidFill>
+                            <a:srgbClr val="1A1440"/>
+                          </a:solidFill>
+                          <a:latin typeface="Calibri"/>
+                        </a:rPr>
+                        <a:t>Baseline</a:t>
+                      </a:r>
+                    </a:p>
+                  </a:txBody>
+                  <a:tcPr marL="101600" marR="101600" marT="38100" marB="38100" anchor="ctr">
+                    <a:solidFill>
+                      <a:srgbClr val="FFFFFF"/>
+                    </a:solidFill>
+                  </a:tcPr>
+                </a:tc>
+                <a:tc>
+                  <a:txBody>
+                    <a:bodyPr/>
+                    <a:lstStyle/>
+                    <a:p>
+                      <a:r>
+                        <a:rPr sz="1200" b="0" i="0">
+                          <a:solidFill>
+                            <a:srgbClr val="1A1440"/>
+                          </a:solidFill>
+                          <a:latin typeface="Calibri"/>
+                        </a:rPr>
+                        <a:t>It is the simple copy any model must beat on the hidden weeks: festival-aligned, which missed by 6,615 a week.</a:t>
+                      </a:r>
+                    </a:p>
+                  </a:txBody>
+                  <a:tcPr marL="101600" marR="101600" marT="38100" marB="38100" anchor="ctr">
+                    <a:solidFill>
+                      <a:srgbClr val="FFFFFF"/>
+                    </a:solidFill>
+                  </a:tcPr>
+                </a:tc>
+              </a:tr>
+              <a:tr h="542544">
+                <a:tc>
+                  <a:txBody>
+                    <a:bodyPr/>
+                    <a:lstStyle/>
+                    <a:p>
+                      <a:r>
+                        <a:rPr sz="1200" b="0" i="0">
+                          <a:solidFill>
+                            <a:srgbClr val="1A1440"/>
+                          </a:solidFill>
+                          <a:latin typeface="Calibri"/>
+                        </a:rPr>
+                        <a:t>Autocorrelation</a:t>
+                      </a:r>
+                    </a:p>
+                  </a:txBody>
+                  <a:tcPr marL="101600" marR="101600" marT="38100" marB="38100" anchor="ctr">
+                    <a:solidFill>
+                      <a:srgbClr val="F4F2FA"/>
+                    </a:solidFill>
+                  </a:tcPr>
+                </a:tc>
+                <a:tc>
+                  <a:txBody>
+                    <a:bodyPr/>
+                    <a:lstStyle/>
+                    <a:p>
+                      <a:r>
+                        <a:rPr sz="1200" b="0" i="0">
+                          <a:solidFill>
+                            <a:srgbClr val="1A1440"/>
+                          </a:solidFill>
+                          <a:latin typeface="Calibri"/>
+                        </a:rPr>
+                        <a:t>It measures how closely each week's shipments follow the week a fixed number of weeks earlier, one back or 52 back.</a:t>
+                      </a:r>
+                    </a:p>
+                  </a:txBody>
+                  <a:tcPr marL="101600" marR="101600" marT="38100" marB="38100" anchor="ctr">
+                    <a:solidFill>
+                      <a:srgbClr val="F4F2FA"/>
+                    </a:solidFill>
+                  </a:tcPr>
+                </a:tc>
+              </a:tr>
+              <a:tr h="335280">
+                <a:tc>
+                  <a:txBody>
+                    <a:bodyPr/>
+                    <a:lstStyle/>
+                    <a:p>
+                      <a:r>
+                        <a:rPr sz="1200" b="0" i="0">
+                          <a:solidFill>
+                            <a:srgbClr val="1A1440"/>
+                          </a:solidFill>
+                          <a:latin typeface="Calibri"/>
+                        </a:rPr>
+                        <a:t>Smoothing</a:t>
+                      </a:r>
+                    </a:p>
+                  </a:txBody>
+                  <a:tcPr marL="101600" marR="101600" marT="38100" marB="38100" anchor="ctr">
+                    <a:solidFill>
+                      <a:srgbClr val="FFFFFF"/>
+                    </a:solidFill>
+                  </a:tcPr>
+                </a:tc>
+                <a:tc>
+                  <a:txBody>
+                    <a:bodyPr/>
+                    <a:lstStyle/>
+                    <a:p>
+                      <a:r>
+                        <a:rPr sz="1200" b="0" i="0">
+                          <a:solidFill>
+                            <a:srgbClr val="1A1440"/>
+                          </a:solidFill>
+                          <a:latin typeface="Calibri"/>
+                        </a:rPr>
+                        <a:t>It forecasts from an average of past weeks that gives the most recent weeks the most weight.</a:t>
+                      </a:r>
+                    </a:p>
+                  </a:txBody>
+                  <a:tcPr marL="101600" marR="101600" marT="38100" marB="38100" anchor="ctr">
+                    <a:solidFill>
+                      <a:srgbClr val="FFFFFF"/>
+                    </a:solidFill>
+                  </a:tcPr>
+                </a:tc>
+              </a:tr>
+              <a:tr h="542544">
+                <a:tc>
+                  <a:txBody>
+                    <a:bodyPr/>
+                    <a:lstStyle/>
+                    <a:p>
+                      <a:r>
+                        <a:rPr sz="1200" b="0" i="0">
+                          <a:solidFill>
+                            <a:srgbClr val="1A1440"/>
+                          </a:solidFill>
+                          <a:latin typeface="Calibri"/>
+                        </a:rPr>
+                        <a:t>ARIMA</a:t>
+                      </a:r>
+                    </a:p>
+                  </a:txBody>
+                  <a:tcPr marL="101600" marR="101600" marT="38100" marB="38100" anchor="ctr">
+                    <a:solidFill>
+                      <a:srgbClr val="F4F2FA"/>
+                    </a:solidFill>
+                  </a:tcPr>
+                </a:tc>
+                <a:tc>
+                  <a:txBody>
+                    <a:bodyPr/>
+                    <a:lstStyle/>
+                    <a:p>
+                      <a:r>
+                        <a:rPr sz="1200" b="0" i="0">
+                          <a:solidFill>
+                            <a:srgbClr val="1A1440"/>
+                          </a:solidFill>
+                          <a:latin typeface="Calibri"/>
+                        </a:rPr>
+                        <a:t>It forecasts from the series' own past weeks and its own past misses, the pattern autocorrelation measures.</a:t>
+                      </a:r>
+                    </a:p>
+                  </a:txBody>
+                  <a:tcPr marL="101600" marR="101600" marT="38100" marB="38100" anchor="ctr">
+                    <a:solidFill>
+                      <a:srgbClr val="F4F2FA"/>
+                    </a:solidFill>
+                  </a:tcPr>
+                </a:tc>
+              </a:tr>
+            </a:tbl>
+          </a:graphicData>
+        </a:graphic>
+      </p:graphicFrame>
       <p:sp>
         <p:nvSpPr>
           <p:cNvPr id="13" name="TextBox 12"/>

--- a/content/W04/D5/slides/C2_W04_D05_half2_STUDENT.pptx
+++ b/content/W04/D5/slides/C2_W04_D05_half2_STUDENT.pptx
@@ -1243,22 +1243,42 @@
           </a:p>
           <a:p>
             <a:r>
-              <a:t>figures are from its Q3 2021 shareholder letter, checked 12 October 2026: a guardrail of plus or</a:t>
-            </a:r>
-          </a:p>
-          <a:p>
-            <a:r>
-              <a:t>minus 200 basis points (a basis point is a hundredth of a percent) of breakeven unit economics, a</a:t>
-            </a:r>
-          </a:p>
-          <a:p>
-            <a:r>
-              <a:t>swing of about 1,200 basis points, an inventory write-down of about USD 304 million. Transition: the same idea</a:t>
-            </a:r>
-          </a:p>
-          <a:p>
-            <a:r>
-              <a:t>at an AI company.</a:t>
+              <a:t>figures are from its Q3 2021 shareholder letter, checked 12 October 2026: price forecasts three to</a:t>
+            </a:r>
+          </a:p>
+          <a:p>
+            <a:r>
+              <a:t>six months ahead, a public guardrail of plus or minus 200 basis points (a basis point is a</a:t>
+            </a:r>
+          </a:p>
+          <a:p>
+            <a:r>
+              <a:t>hundredth of a percent) of breakeven unit economics, a swing of about 1,200 basis points to an</a:t>
+            </a:r>
+          </a:p>
+          <a:p>
+            <a:r>
+              <a:t>expected minus 500 to minus 700, more homes bought than planned, renovation capacity short, an</a:t>
+            </a:r>
+          </a:p>
+          <a:p>
+            <a:r>
+              <a:t>inventory write-down of about USD 304 million and the business wound down. The guardrail sat on the</a:t>
+            </a:r>
+          </a:p>
+          <a:p>
+            <a:r>
+              <a:t>margin; the forecast's error was wider than the band. Two more follow-ups sit in the transcripts:</a:t>
+            </a:r>
+          </a:p>
+          <a:p>
+            <a:r>
+              <a:t>the cushion read from the scored weeks, and the overtime that may cap the peak. Transition: the same</a:t>
+            </a:r>
+          </a:p>
+          <a:p>
+            <a:r>
+              <a:t>idea at an AI company.</a:t>
             </a:r>
           </a:p>
         </p:txBody>
@@ -1328,12 +1348,27 @@
           <a:lstStyle/>
           <a:p>
             <a:r>
-              <a:t>LIVE, 3 minutes. Ask the room which cost is the Rs 25 and which the Rs 5.42 here. Transition: the</a:t>
-            </a:r>
-          </a:p>
-          <a:p>
-            <a:r>
-              <a:t>guesstimate.</a:t>
+              <a:t>LIVE, 3 minutes. Ask the room which cost is the Rs 25 and which the Rs 5.42 here: a timeout and an</a:t>
+            </a:r>
+          </a:p>
+          <a:p>
+            <a:r>
+              <a:t>idle GPU hour. Ask what the forecast can be tested on if the feature has never launched: nothing,</a:t>
+            </a:r>
+          </a:p>
+          <a:p>
+            <a:r>
+              <a:t>so say it is untested and keep capacity that can stretch. The worked sizing (2 lakh users, 10</a:t>
+            </a:r>
+          </a:p>
+          <a:p>
+            <a:r>
+              <a:t>percent in the peak minute, 1,500 tokens, all invented, about 5 lakh tokens a second) is in the</a:t>
+            </a:r>
+          </a:p>
+          <a:p>
+            <a:r>
+              <a:t>transcripts. Transition: the guesstimate.</a:t>
             </a:r>
           </a:p>
         </p:txBody>
@@ -4886,7 +4921,7 @@
                 </a:solidFill>
                 <a:latin typeface="Calibri"/>
               </a:rPr>
-              <a:t>on thirteen hidden weeks: about Rs 35,800 if high, Rs 1.65 lakh if low</a:t>
+              <a:t>the forecast's average miss on thirteen hidden weeks: about Rs 35,800 if it runs high, Rs 1.65 lakh if low</a:t>
             </a:r>
           </a:p>
         </p:txBody>
@@ -5014,7 +5049,7 @@
         <p:spPr>
           <a:xfrm>
             <a:off x="8133892" y="2893060"/>
-            <a:ext cx="3527450" cy="193421"/>
+            <a:ext cx="3527450" cy="350266"/>
           </a:xfrm>
           <a:prstGeom prst="rect">
             <a:avLst/>
@@ -5035,7 +5070,7 @@
                 </a:solidFill>
                 <a:latin typeface="Calibri"/>
               </a:rPr>
-              <a:t>25 / (25 + 5.42): being short costs 4.6 times being long</a:t>
+              <a:t>25 / (25 + 5.42): a late shipment costs 4.6 times a spare one</a:t>
             </a:r>
           </a:p>
         </p:txBody>
@@ -5442,7 +5477,7 @@
         </p:nvSpPr>
         <p:spPr>
           <a:xfrm>
-            <a:off x="530352" y="1956816"/>
+            <a:off x="530352" y="1954530"/>
             <a:ext cx="11130991" cy="967740"/>
           </a:xfrm>
           <a:prstGeom prst="roundRect">
@@ -5490,7 +5525,7 @@
         </p:nvSpPr>
         <p:spPr>
           <a:xfrm>
-            <a:off x="676656" y="2084832"/>
+            <a:off x="676656" y="2082546"/>
             <a:ext cx="45720" cy="711708"/>
           </a:xfrm>
           <a:prstGeom prst="roundRect">
@@ -5536,7 +5571,7 @@
         </p:nvSpPr>
         <p:spPr>
           <a:xfrm>
-            <a:off x="877824" y="2075688"/>
+            <a:off x="877824" y="2073402"/>
             <a:ext cx="10564063" cy="784860"/>
           </a:xfrm>
           <a:prstGeom prst="rect">
@@ -5580,8 +5615,8 @@
           <p:nvPr/>
         </p:nvGraphicFramePr>
         <p:xfrm>
-          <a:off x="530352" y="3089148"/>
-          <a:ext cx="11130991" cy="2298192"/>
+          <a:off x="530352" y="3086862"/>
+          <a:ext cx="11130991" cy="2840736"/>
         </p:xfrm>
         <a:graphic>
           <a:graphicData uri="http://schemas.openxmlformats.org/drawingml/2006/table">
@@ -5819,6 +5854,52 @@
                   <a:tcPr marL="101600" marR="101600" marT="38100" marB="38100" anchor="ctr">
                     <a:solidFill>
                       <a:srgbClr val="F4F2FA"/>
+                    </a:solidFill>
+                  </a:tcPr>
+                </a:tc>
+              </a:tr>
+              <a:tr h="542544">
+                <a:tc>
+                  <a:txBody>
+                    <a:bodyPr/>
+                    <a:lstStyle/>
+                    <a:p>
+                      <a:r>
+                        <a:rPr sz="1200" b="0" i="0">
+                          <a:solidFill>
+                            <a:srgbClr val="1A1440"/>
+                          </a:solidFill>
+                          <a:latin typeface="Calibri"/>
+                        </a:rPr>
+                        <a:t>Held-out weeks</a:t>
+                      </a:r>
+                    </a:p>
+                  </a:txBody>
+                  <a:tcPr marL="101600" marR="101600" marT="38100" marB="38100" anchor="ctr">
+                    <a:solidFill>
+                      <a:srgbClr val="FFFFFF"/>
+                    </a:solidFill>
+                  </a:tcPr>
+                </a:tc>
+                <a:tc>
+                  <a:txBody>
+                    <a:bodyPr/>
+                    <a:lstStyle/>
+                    <a:p>
+                      <a:r>
+                        <a:rPr sz="1200" b="0" i="0">
+                          <a:solidFill>
+                            <a:srgbClr val="1A1440"/>
+                          </a:solidFill>
+                          <a:latin typeface="Calibri"/>
+                        </a:rPr>
+                        <a:t>These thirteen have already picked the rule and set the cushion, so a new model is fairest judged on weeks no choice has used, such as a rolling origin through 2025's festival.</a:t>
+                      </a:r>
+                    </a:p>
+                  </a:txBody>
+                  <a:tcPr marL="101600" marR="101600" marT="38100" marB="38100" anchor="ctr">
+                    <a:solidFill>
+                      <a:srgbClr val="FFFFFF"/>
                     </a:solidFill>
                   </a:tcPr>
                 </a:tc>
@@ -9621,7 +9702,7 @@
                           </a:solidFill>
                           <a:latin typeface="Calibri"/>
                         </a:rPr>
-                        <a:t>"Finance's 4 percent is the right growth on the wrong weeks: it books the peak on 5 October"</a:t>
+                        <a:t>"Finance's 4 percent is the right growth on the wrong weeks: it puts the peak on 5 October, before the plan's first week"</a:t>
                       </a:r>
                     </a:p>
                   </a:txBody>
@@ -10169,7 +10250,7 @@
                 </a:solidFill>
                 <a:latin typeface="Calibri"/>
               </a:rPr>
-              <a:t>True: the two years grew 4.0 percent. Not true for the weeks: copied by calendar it books the peak on 5 October and sits 308,048 shipments short.</a:t>
+              <a:t>True: the two years grew 4.0 percent. Not true for the weeks: copied by calendar it puts the peak on 5 October, before the plan's first week, and sits 308,048 shipments short.</a:t>
             </a:r>
           </a:p>
         </p:txBody>
@@ -10800,7 +10881,7 @@
                 </a:solidFill>
                 <a:latin typeface="Calibri"/>
               </a:rPr>
-              <a:t>The house bot, finance's rule and the vendor book their biggest week on 5 October; festival-aligned books it on 19 October, two weeks before Diwali's week.</a:t>
+              <a:t>The house bot, finance's rule and the vendor put their biggest week on 5 October, a week before the plan's first week; festival-aligned puts it on 19 October, two weeks before Diwali's week.</a:t>
             </a:r>
           </a:p>
         </p:txBody>
@@ -11126,7 +11207,7 @@
         </p:nvGraphicFramePr>
         <p:xfrm>
           <a:off x="530352" y="1956816"/>
-          <a:ext cx="11130991" cy="2460752"/>
+          <a:ext cx="11130991" cy="2944368"/>
         </p:xfrm>
         <a:graphic>
           <a:graphicData uri="http://schemas.openxmlformats.org/drawingml/2006/table">
@@ -11184,7 +11265,7 @@
                   </a:tcPr>
                 </a:tc>
               </a:tr>
-              <a:tr h="611632">
+              <a:tr h="853440">
                 <a:tc>
                   <a:txBody>
                     <a:bodyPr/>
@@ -11219,7 +11300,7 @@
                           </a:solidFill>
                           <a:latin typeface="Calibri"/>
                         </a:rPr>
-                        <a:t>"I hide the latest weeks, at least as many as the plan covers, and forecast them from one week."</a:t>
+                        <a:t>"I hold out the latest weeks as a test set, at least as many as the forecast must reach ahead, and forecast them from one origin."</a:t>
                       </a:r>
                     </a:p>
                   </a:txBody>
@@ -11243,7 +11324,7 @@
                           </a:solidFill>
                           <a:latin typeface="Calibri"/>
                         </a:rPr>
-                        <a:t>Judges by the fit to history</a:t>
+                        <a:t>Judges by the fit to history, or a random split</a:t>
                       </a:r>
                     </a:p>
                   </a:txBody>
@@ -11265,7 +11346,7 @@
                           </a:solidFill>
                           <a:latin typeface="Calibri"/>
                         </a:rPr>
-                        <a:t>Scores only weeks the model never saw</a:t>
+                        <a:t>Scores only weeks after the origin, then rolls the origin</a:t>
                       </a:r>
                     </a:p>
                   </a:txBody>
@@ -11276,7 +11357,7 @@
                   </a:tcPr>
                 </a:tc>
               </a:tr>
-              <a:tr h="369824">
+              <a:tr h="611632">
                 <a:tc>
                   <a:txBody>
                     <a:bodyPr/>
@@ -11311,7 +11392,7 @@
                           </a:solidFill>
                           <a:latin typeface="Calibri"/>
                         </a:rPr>
-                        <a:t>The error in shipments, then priced in each direction</a:t>
+                        <a:t>The error in shipments, then priced each way, each forecast at its own 0.82 point</a:t>
                       </a:r>
                     </a:p>
                   </a:txBody>
@@ -11950,7 +12031,7 @@
         <p:spPr>
           <a:xfrm>
             <a:off x="694944" y="3277870"/>
-            <a:ext cx="3259226" cy="366776"/>
+            <a:ext cx="3259226" cy="531876"/>
           </a:xfrm>
           <a:prstGeom prst="rect">
             <a:avLst/>
@@ -11971,7 +12052,7 @@
                 </a:solidFill>
                 <a:latin typeface="Calibri"/>
               </a:rPr>
-              <a:t>Shipments when the cost is per shipment; percent only to compare series of different sizes.</a:t>
+              <a:t>Shipments when the cost is per shipment; MASE or WAPE across centres, since MAPE explodes near zero and punishes forecasts that land high.</a:t>
             </a:r>
           </a:p>
         </p:txBody>
@@ -12153,7 +12234,7 @@
         <p:spPr>
           <a:xfrm>
             <a:off x="4466234" y="3492500"/>
-            <a:ext cx="3259226" cy="366776"/>
+            <a:ext cx="3259226" cy="531876"/>
           </a:xfrm>
           <a:prstGeom prst="rect">
             <a:avLst/>
@@ -12174,7 +12255,7 @@
                 </a:solidFill>
                 <a:latin typeface="Calibri"/>
               </a:rPr>
-              <a:t>Every calendar copy, the house bot and finance's rule; the festival-aligned copy moves with it.</a:t>
+              <a:t>Every calendar copy, the seasonal naive and finance's rule; the festival-aligned copy moves with it.</a:t>
             </a:r>
           </a:p>
         </p:txBody>
@@ -12383,7 +12464,7 @@
                 </a:solidFill>
                 <a:latin typeface="Calibri"/>
               </a:rPr>
-              <a:t>Its profit on each resold home was meant to stay within 2 percent of zero; it swung about 12 percentage points, and USD 304 million of homes were marked down.</a:t>
+              <a:t>Its margin guardrail was 2 percentage points either side of breakeven; price forecasts six months out missed by more, the margin swung about 12, and Zillow wrote down about USD 304 million.</a:t>
             </a:r>
           </a:p>
         </p:txBody>
@@ -12701,7 +12782,7 @@
       </p:sp>
       <p:pic>
         <p:nvPicPr>
-          <p:cNvPr id="9" name="mermaid diagram" descr="055ea139bd333f68.png"/>
+          <p:cNvPr id="9" name="mermaid diagram" descr="a1326bd9825a5eed.png"/>
           <p:cNvPicPr>
             <a:picLocks noChangeAspect="1"/>
           </p:cNvPicPr>
@@ -12732,7 +12813,7 @@
         <p:spPr>
           <a:xfrm>
             <a:off x="530352" y="4203382"/>
-            <a:ext cx="11130991" cy="1048512"/>
+            <a:ext cx="11130991" cy="1601216"/>
           </a:xfrm>
           <a:prstGeom prst="rect">
             <a:avLst/>
@@ -12766,7 +12847,7 @@
                 </a:solidFill>
                 <a:latin typeface="Calibri"/>
               </a:rPr>
-              <a:t> is the computing a model does each time it answers a user. The launch is the festival: line it up by days from the launch, never by calendar date. The plan sits above the forecast because being short means timeouts. This variant is written for the programme and quotes no company's figures.</a:t>
+              <a:t> is the computing a model does each time it answers a user. Size the peak in tokens a second from the ground up, check it against earlier launches lined up by days from launch with the weekday kept, and set capacity to the latency target with headroom; the two costs decide how much to book ahead, and on-demand capacity, rate limits and a waitlist cover the rest. Written for the programme; it quotes no company's figures.</a:t>
             </a:r>
           </a:p>
         </p:txBody>
@@ -13042,7 +13123,7 @@
                 </a:solidFill>
                 <a:latin typeface="Georgia"/>
               </a:rPr>
-              <a:t>Two-wheelers a year: about 2.16 crore, checked</a:t>
+              <a:t>Two-wheelers a year: about 2.2 crore, checked</a:t>
             </a:r>
           </a:p>
         </p:txBody>
@@ -13084,7 +13165,7 @@
       </p:sp>
       <p:pic>
         <p:nvPicPr>
-          <p:cNvPr id="9" name="mermaid diagram" descr="424bc198147ede57.png"/>
+          <p:cNvPr id="9" name="mermaid diagram" descr="629daa93d3849711.png"/>
           <p:cNvPicPr>
             <a:picLocks noChangeAspect="1"/>
           </p:cNvPicPr>
@@ -13098,8 +13179,8 @@
         </p:blipFill>
         <p:spPr>
           <a:xfrm>
-            <a:off x="530352" y="1956816"/>
-            <a:ext cx="11130991" cy="1962193"/>
+            <a:off x="530352" y="1874794"/>
+            <a:ext cx="11130991" cy="2378416"/>
           </a:xfrm>
           <a:prstGeom prst="rect">
             <a:avLst/>
@@ -13114,8 +13195,8 @@
         </p:nvSpPr>
         <p:spPr>
           <a:xfrm>
-            <a:off x="530352" y="4065313"/>
-            <a:ext cx="11130991" cy="1341120"/>
+            <a:off x="530352" y="4399514"/>
+            <a:ext cx="11130991" cy="1607820"/>
           </a:xfrm>
           <a:prstGeom prst="roundRect">
             <a:avLst>
@@ -13162,8 +13243,8 @@
         </p:nvSpPr>
         <p:spPr>
           <a:xfrm>
-            <a:off x="676656" y="4193329"/>
-            <a:ext cx="45720" cy="1085088"/>
+            <a:off x="676656" y="4527530"/>
+            <a:ext cx="45720" cy="1351788"/>
           </a:xfrm>
           <a:prstGeom prst="roundRect">
             <a:avLst>
@@ -13208,8 +13289,8 @@
         </p:nvSpPr>
         <p:spPr>
           <a:xfrm>
-            <a:off x="877824" y="4184185"/>
-            <a:ext cx="10564063" cy="1158240"/>
+            <a:off x="877824" y="4518386"/>
+            <a:ext cx="10564063" cy="1424940"/>
           </a:xfrm>
           <a:prstGeom prst="rect">
             <a:avLst/>
@@ -13238,7 +13319,7 @@
                 </a:solidFill>
                 <a:latin typeface="Calibri"/>
               </a:rPr>
-              <a:t>October 2025's two-wheeler sales to buyers alone were 31.5 lakh (FADA, the Federation of Automobile Dealers Associations); times twelve that is about 3.78 crore, 74 percent too high: never annualise a festive month. SIAM, the Society of Indian Automobile Manufacturers, reported 2.17 crore for FY 2025-26 (its release, checked 12 October 2026).</a:t>
+              <a:t>October 2025's two-wheeler retail registrations alone were 31.5 lakh (FADA, the Federation of Automobile Dealers Associations), after a September whose first 21 days were almost quiet ahead of the GST cut; times twelve that is about 3.78 crore, 74 percent above the year: never annualise a peak month. SIAM, the Society of Indian Automobile Manufacturers, counts makers' sales to dealers: 2.17 crore in FY 2025-26 (both releases checked 12 October 2026).</a:t>
             </a:r>
           </a:p>
         </p:txBody>

--- a/content/W04/D5/slides/C2_W04_D05_half2_STUDENT.pptx
+++ b/content/W04/D5/slides/C2_W04_D05_half2_STUDENT.pptx
@@ -17,6 +17,9 @@
     <p:sldId id="265" r:id="rId17"/>
     <p:sldId id="266" r:id="rId18"/>
     <p:sldId id="267" r:id="rId19"/>
+    <p:sldId id="268" r:id="rId20"/>
+    <p:sldId id="269" r:id="rId21"/>
+    <p:sldId id="270" r:id="rId22"/>
   </p:sldIdLst>
   <p:sldSz cx="12191695" cy="6858000" type="screen4x3"/>
   <p:notesSz cx="6858000" cy="9144000"/>
@@ -528,12 +531,7 @@
           </a:p>
           <a:p>
             <a:r>
-              <a:t>Read the three numbers; every group's note starts from them. Transition: what the</a:t>
-            </a:r>
-          </a:p>
-          <a:p>
-            <a:r>
-              <a:t>note must carry.</a:t>
+              <a:t>Read the three numbers; every group's note starts from them. Transition: the morning on one board.</a:t>
             </a:r>
           </a:p>
         </p:txBody>
@@ -603,22 +601,47 @@
           <a:lstStyle/>
           <a:p>
             <a:r>
-              <a:t>LIVE, 2 minutes. Read the handoff line as written, then point at the four words: the faculty</a:t>
-            </a:r>
-          </a:p>
-          <a:p>
-            <a:r>
-              <a:t>session defines them properly, and this table only says what each one is for.</a:t>
-            </a:r>
-          </a:p>
-          <a:p>
-            <a:r>
-              <a:t>Park any "is the vendor's model an ARIMA" question for the faculty session (tentative).</a:t>
-            </a:r>
-          </a:p>
-          <a:p>
-            <a:r>
-              <a:t>Transition: the Kahoot.</a:t>
+              <a:t>LIVE, 3 minutes. Each follow-up changes the question so only the reasoning transfers. Zillow's</a:t>
+            </a:r>
+          </a:p>
+          <a:p>
+            <a:r>
+              <a:t>figures are from its Q3 2021 shareholder letter, checked 12 October 2026: price forecasts three to</a:t>
+            </a:r>
+          </a:p>
+          <a:p>
+            <a:r>
+              <a:t>six months ahead, a public guardrail of plus or minus 200 basis points (a basis point is a</a:t>
+            </a:r>
+          </a:p>
+          <a:p>
+            <a:r>
+              <a:t>hundredth of a percent) of breakeven unit economics, a swing of about 1,200 basis points to an</a:t>
+            </a:r>
+          </a:p>
+          <a:p>
+            <a:r>
+              <a:t>expected minus 500 to minus 700, more homes bought than planned, renovation capacity short, an</a:t>
+            </a:r>
+          </a:p>
+          <a:p>
+            <a:r>
+              <a:t>inventory write-down of about USD 304 million and the business wound down. The guardrail sat on the</a:t>
+            </a:r>
+          </a:p>
+          <a:p>
+            <a:r>
+              <a:t>margin; the forecast's error was wider than the band. Two more follow-ups sit in the transcripts:</a:t>
+            </a:r>
+          </a:p>
+          <a:p>
+            <a:r>
+              <a:t>the cushion read from the scored weeks, and the overtime that may cap the peak. Transition: the same</a:t>
+            </a:r>
+          </a:p>
+          <a:p>
+            <a:r>
+              <a:t>idea at an AI company.</a:t>
             </a:r>
           </a:p>
         </p:txBody>
@@ -688,17 +711,27 @@
           <a:lstStyle/>
           <a:p>
             <a:r>
-              <a:t>LIVE, 12 minutes. Kahoot is ungraded. The pack is `kahoot/C2_W04_D05_quiz_STUDENT.md`. Spend two</a:t>
-            </a:r>
-          </a:p>
-          <a:p>
-            <a:r>
-              <a:t>minutes on item 6 if the room splits: the blend is a size-weighted average of cohort rates.</a:t>
-            </a:r>
-          </a:p>
-          <a:p>
-            <a:r>
-              <a:t>Transition: Saturday.</a:t>
+              <a:t>LIVE, 3 minutes. Ask the room which cost is the Rs 25 and which the Rs 5.42 here: a timeout and an</a:t>
+            </a:r>
+          </a:p>
+          <a:p>
+            <a:r>
+              <a:t>idle GPU hour. Ask what the forecast can be tested on if the feature has never launched: nothing,</a:t>
+            </a:r>
+          </a:p>
+          <a:p>
+            <a:r>
+              <a:t>so say it is untested and keep capacity that can stretch. The worked sizing (2 lakh users, 10</a:t>
+            </a:r>
+          </a:p>
+          <a:p>
+            <a:r>
+              <a:t>percent in the peak minute, 1,500 tokens, all invented, about 5 lakh tokens a second) is in the</a:t>
+            </a:r>
+          </a:p>
+          <a:p>
+            <a:r>
+              <a:t>transcripts. Transition: the guesstimate.</a:t>
             </a:r>
           </a:p>
         </p:txBody>
@@ -768,6 +801,246 @@
           <a:lstStyle/>
           <a:p>
             <a:r>
+              <a:t>LIVE, 3 minutes if time allows, in pairs against a three-minute clock. The scorer checks the</a:t>
+            </a:r>
+          </a:p>
+          <a:p>
+            <a:r>
+              <a:t>structure and the sanity check, never the final number. Transition: the handoff.</a:t>
+            </a:r>
+          </a:p>
+        </p:txBody>
+      </p:sp>
+      <p:sp>
+        <p:nvSpPr>
+          <p:cNvPr id="4" name="Slide Number Placeholder 3"/>
+          <p:cNvSpPr>
+            <a:spLocks noGrp="1"/>
+          </p:cNvSpPr>
+          <p:nvPr>
+            <p:ph type="sldNum" idx="5" sz="quarter"/>
+          </p:nvPr>
+        </p:nvSpPr>
+        <p:spPr/>
+      </p:sp>
+    </p:spTree>
+  </p:cSld>
+  <p:clrMapOvr>
+    <a:masterClrMapping/>
+  </p:clrMapOvr>
+</p:notes>
+</file>
+
+<file path=ppt/notesSlides/notesSlide13.xml><?xml version="1.0" encoding="utf-8"?>
+<p:notes xmlns:a="http://schemas.openxmlformats.org/drawingml/2006/main" xmlns:p="http://schemas.openxmlformats.org/presentationml/2006/main" xmlns:r="http://schemas.openxmlformats.org/officeDocument/2006/relationships">
+  <p:cSld>
+    <p:spTree>
+      <p:nvGrpSpPr>
+        <p:cNvPr id="1" name=""/>
+        <p:cNvGrpSpPr/>
+        <p:nvPr/>
+      </p:nvGrpSpPr>
+      <p:grpSpPr>
+        <a:xfrm>
+          <a:off x="0" y="0"/>
+          <a:ext cx="0" cy="0"/>
+          <a:chOff x="0" y="0"/>
+          <a:chExt cx="0" cy="0"/>
+        </a:xfrm>
+      </p:grpSpPr>
+      <p:sp>
+        <p:nvSpPr>
+          <p:cNvPr id="2" name="Slide Image Placeholder 1"/>
+          <p:cNvSpPr>
+            <a:spLocks noGrp="1"/>
+          </p:cNvSpPr>
+          <p:nvPr>
+            <p:ph type="sldImg" idx="2"/>
+          </p:nvPr>
+        </p:nvSpPr>
+        <p:spPr/>
+      </p:sp>
+      <p:sp>
+        <p:nvSpPr>
+          <p:cNvPr id="3" name="Notes Placeholder 2"/>
+          <p:cNvSpPr>
+            <a:spLocks noGrp="1"/>
+          </p:cNvSpPr>
+          <p:nvPr>
+            <p:ph type="body" idx="3" sz="quarter"/>
+          </p:nvPr>
+        </p:nvSpPr>
+        <p:spPr/>
+        <p:txBody>
+          <a:bodyPr/>
+          <a:lstStyle/>
+          <a:p>
+            <a:r>
+              <a:t>LIVE, 2 minutes. Read the handoff line as written, then point at the four words: the faculty</a:t>
+            </a:r>
+          </a:p>
+          <a:p>
+            <a:r>
+              <a:t>session defines them properly, and this table only says what each one is for.</a:t>
+            </a:r>
+          </a:p>
+          <a:p>
+            <a:r>
+              <a:t>Park any "is the vendor's model an ARIMA" question for the faculty session (tentative).</a:t>
+            </a:r>
+          </a:p>
+          <a:p>
+            <a:r>
+              <a:t>Transition: the Kahoot.</a:t>
+            </a:r>
+          </a:p>
+        </p:txBody>
+      </p:sp>
+      <p:sp>
+        <p:nvSpPr>
+          <p:cNvPr id="4" name="Slide Number Placeholder 3"/>
+          <p:cNvSpPr>
+            <a:spLocks noGrp="1"/>
+          </p:cNvSpPr>
+          <p:nvPr>
+            <p:ph type="sldNum" idx="5" sz="quarter"/>
+          </p:nvPr>
+        </p:nvSpPr>
+        <p:spPr/>
+      </p:sp>
+    </p:spTree>
+  </p:cSld>
+  <p:clrMapOvr>
+    <a:masterClrMapping/>
+  </p:clrMapOvr>
+</p:notes>
+</file>
+
+<file path=ppt/notesSlides/notesSlide14.xml><?xml version="1.0" encoding="utf-8"?>
+<p:notes xmlns:a="http://schemas.openxmlformats.org/drawingml/2006/main" xmlns:p="http://schemas.openxmlformats.org/presentationml/2006/main" xmlns:r="http://schemas.openxmlformats.org/officeDocument/2006/relationships">
+  <p:cSld>
+    <p:spTree>
+      <p:nvGrpSpPr>
+        <p:cNvPr id="1" name=""/>
+        <p:cNvGrpSpPr/>
+        <p:nvPr/>
+      </p:nvGrpSpPr>
+      <p:grpSpPr>
+        <a:xfrm>
+          <a:off x="0" y="0"/>
+          <a:ext cx="0" cy="0"/>
+          <a:chOff x="0" y="0"/>
+          <a:chExt cx="0" cy="0"/>
+        </a:xfrm>
+      </p:grpSpPr>
+      <p:sp>
+        <p:nvSpPr>
+          <p:cNvPr id="2" name="Slide Image Placeholder 1"/>
+          <p:cNvSpPr>
+            <a:spLocks noGrp="1"/>
+          </p:cNvSpPr>
+          <p:nvPr>
+            <p:ph type="sldImg" idx="2"/>
+          </p:nvPr>
+        </p:nvSpPr>
+        <p:spPr/>
+      </p:sp>
+      <p:sp>
+        <p:nvSpPr>
+          <p:cNvPr id="3" name="Notes Placeholder 2"/>
+          <p:cNvSpPr>
+            <a:spLocks noGrp="1"/>
+          </p:cNvSpPr>
+          <p:nvPr>
+            <p:ph type="body" idx="3" sz="quarter"/>
+          </p:nvPr>
+        </p:nvSpPr>
+        <p:spPr/>
+        <p:txBody>
+          <a:bodyPr/>
+          <a:lstStyle/>
+          <a:p>
+            <a:r>
+              <a:t>LIVE, 12 minutes. Kahoot is ungraded. The pack is `kahoot/C2_W04_D05_quiz_STUDENT.md`. Spend two</a:t>
+            </a:r>
+          </a:p>
+          <a:p>
+            <a:r>
+              <a:t>minutes on item 6 if the room splits: the blend is a size-weighted average of cohort rates.</a:t>
+            </a:r>
+          </a:p>
+          <a:p>
+            <a:r>
+              <a:t>Transition: Saturday.</a:t>
+            </a:r>
+          </a:p>
+        </p:txBody>
+      </p:sp>
+      <p:sp>
+        <p:nvSpPr>
+          <p:cNvPr id="4" name="Slide Number Placeholder 3"/>
+          <p:cNvSpPr>
+            <a:spLocks noGrp="1"/>
+          </p:cNvSpPr>
+          <p:nvPr>
+            <p:ph type="sldNum" idx="5" sz="quarter"/>
+          </p:nvPr>
+        </p:nvSpPr>
+        <p:spPr/>
+      </p:sp>
+    </p:spTree>
+  </p:cSld>
+  <p:clrMapOvr>
+    <a:masterClrMapping/>
+  </p:clrMapOvr>
+</p:notes>
+</file>
+
+<file path=ppt/notesSlides/notesSlide15.xml><?xml version="1.0" encoding="utf-8"?>
+<p:notes xmlns:a="http://schemas.openxmlformats.org/drawingml/2006/main" xmlns:p="http://schemas.openxmlformats.org/presentationml/2006/main" xmlns:r="http://schemas.openxmlformats.org/officeDocument/2006/relationships">
+  <p:cSld>
+    <p:spTree>
+      <p:nvGrpSpPr>
+        <p:cNvPr id="1" name=""/>
+        <p:cNvGrpSpPr/>
+        <p:nvPr/>
+      </p:nvGrpSpPr>
+      <p:grpSpPr>
+        <a:xfrm>
+          <a:off x="0" y="0"/>
+          <a:ext cx="0" cy="0"/>
+          <a:chOff x="0" y="0"/>
+          <a:chExt cx="0" cy="0"/>
+        </a:xfrm>
+      </p:grpSpPr>
+      <p:sp>
+        <p:nvSpPr>
+          <p:cNvPr id="2" name="Slide Image Placeholder 1"/>
+          <p:cNvSpPr>
+            <a:spLocks noGrp="1"/>
+          </p:cNvSpPr>
+          <p:nvPr>
+            <p:ph type="sldImg" idx="2"/>
+          </p:nvPr>
+        </p:nvSpPr>
+        <p:spPr/>
+      </p:sp>
+      <p:sp>
+        <p:nvSpPr>
+          <p:cNvPr id="3" name="Notes Placeholder 2"/>
+          <p:cNvSpPr>
+            <a:spLocks noGrp="1"/>
+          </p:cNvSpPr>
+          <p:nvPr>
+            <p:ph type="body" idx="3" sz="quarter"/>
+          </p:nvPr>
+        </p:nvSpPr>
+        <p:spPr/>
+        <p:txBody>
+          <a:bodyPr/>
+          <a:lstStyle/>
+          <a:p>
+            <a:r>
               <a:t>LIVE, 3 minutes. The three cards are the cheat sheet's crux lines, word for word. Transition: the</a:t>
             </a:r>
           </a:p>
@@ -843,22 +1116,17 @@
           <a:lstStyle/>
           <a:p>
             <a:r>
-              <a:t>LIVE, 20 minutes, unguided, in groups of about four. TAs circulate with the scorer's card from Tuesday:</a:t>
-            </a:r>
-          </a:p>
-          <a:p>
-            <a:r>
-              <a:t>claim as title, one piece of evidence with its denominator, the caveat in sight, the action with its</a:t>
-            </a:r>
-          </a:p>
-          <a:p>
-            <a:r>
-              <a:t>cost. A group that splits the difference between 4 and 22 is asked which rule either one beat on</a:t>
-            </a:r>
-          </a:p>
-          <a:p>
-            <a:r>
-              <a:t>the hidden weeks. Transition: what a strong first line looks like.</a:t>
+              <a:t>LIVE, 1 minute. Read the question at the top with its anchor, then region one. The board grows a</a:t>
+            </a:r>
+          </a:p>
+          <a:p>
+            <a:r>
+              <a:t>region a slide and ends with every pitfall the morning met. Explorer: scene F1.</a:t>
+            </a:r>
+          </a:p>
+          <a:p>
+            <a:r>
+              <a:t>Transition: region two.</a:t>
             </a:r>
           </a:p>
         </p:txBody>
@@ -928,12 +1196,17 @@
           <a:lstStyle/>
           <a:p>
             <a:r>
-              <a:t>LIVE, 3 minutes. Tuesday's rule: the title is the claim. Read each pair aloud and ask which line a</a:t>
-            </a:r>
-          </a:p>
-          <a:p>
-            <a:r>
-              <a:t>regional head could forward unchanged. Transition: the two people who will object.</a:t>
+              <a:t>LIVE, 1 minute. Region two holds the vendor's two mistakes: a close fit, and the 2025 spike read</a:t>
+            </a:r>
+          </a:p>
+          <a:p>
+            <a:r>
+              <a:t>as growth, which is why its curve climbs with the weeks ahead. Explorer: scene F2. Transition:</a:t>
+            </a:r>
+          </a:p>
+          <a:p>
+            <a:r>
+              <a:t>region three.</a:t>
             </a:r>
           </a:p>
         </p:txBody>
@@ -1003,17 +1276,12 @@
           <a:lstStyle/>
           <a:p>
             <a:r>
-              <a:t>LIVE, 3 minutes. Concede the true half first, then answer from the evidence, then say what would</a:t>
-            </a:r>
-          </a:p>
-          <a:p>
-            <a:r>
-              <a:t>change your mind: a vendor forecast scored on 2025's festival from data to September 2025.</a:t>
-            </a:r>
-          </a:p>
-          <a:p>
-            <a:r>
-              <a:t>Transition: the interview question.</a:t>
+              <a:t>LIVE, 1 minute. The finished board is the staffing note's skeleton: one line per region, then the</a:t>
+            </a:r>
+          </a:p>
+          <a:p>
+            <a:r>
+              <a:t>shifts. Explorer: scenes F3 and F4. Transition: what the note must carry.</a:t>
             </a:r>
           </a:p>
         </p:txBody>
@@ -1083,12 +1351,22 @@
           <a:lstStyle/>
           <a:p>
             <a:r>
-              <a:t>LIVE, 2 minutes. The picture every note should be able to describe in one sentence. Transition:</a:t>
-            </a:r>
-          </a:p>
-          <a:p>
-            <a:r>
-              <a:t>the interview question.</a:t>
+              <a:t>LIVE, 20 minutes, unguided, in groups of about four. TAs circulate with the scorer's card from Tuesday:</a:t>
+            </a:r>
+          </a:p>
+          <a:p>
+            <a:r>
+              <a:t>claim as title, one piece of evidence with its denominator, the caveat in sight, the action with its</a:t>
+            </a:r>
+          </a:p>
+          <a:p>
+            <a:r>
+              <a:t>cost. A group that splits the difference between 4 and 22 is asked which rule either one beat on</a:t>
+            </a:r>
+          </a:p>
+          <a:p>
+            <a:r>
+              <a:t>the hidden weeks. Transition: what a strong first line looks like.</a:t>
             </a:r>
           </a:p>
         </p:txBody>
@@ -1158,17 +1436,12 @@
           <a:lstStyle/>
           <a:p>
             <a:r>
-              <a:t>LIVE, 4 minutes. The full transcript, with the clarifying questions and the scorecard, is in</a:t>
-            </a:r>
-          </a:p>
-          <a:p>
-            <a:r>
-              <a:t>`extras/C2_W04_D05_interview_transcripts_STUDENT.md`; pairs read it and score the hire-grade answer</a:t>
-            </a:r>
-          </a:p>
-          <a:p>
-            <a:r>
-              <a:t>on the card. Transition: the follow-ups.</a:t>
+              <a:t>LIVE, 3 minutes. Tuesday's rule: the title is the claim. Read each pair aloud and ask which line a</a:t>
+            </a:r>
+          </a:p>
+          <a:p>
+            <a:r>
+              <a:t>regional head could forward unchanged. Transition: the two people who will object.</a:t>
             </a:r>
           </a:p>
         </p:txBody>
@@ -1238,47 +1511,17 @@
           <a:lstStyle/>
           <a:p>
             <a:r>
-              <a:t>LIVE, 3 minutes. Each follow-up changes the question so only the reasoning transfers. Zillow's</a:t>
-            </a:r>
-          </a:p>
-          <a:p>
-            <a:r>
-              <a:t>figures are from its Q3 2021 shareholder letter, checked 12 October 2026: price forecasts three to</a:t>
-            </a:r>
-          </a:p>
-          <a:p>
-            <a:r>
-              <a:t>six months ahead, a public guardrail of plus or minus 200 basis points (a basis point is a</a:t>
-            </a:r>
-          </a:p>
-          <a:p>
-            <a:r>
-              <a:t>hundredth of a percent) of breakeven unit economics, a swing of about 1,200 basis points to an</a:t>
-            </a:r>
-          </a:p>
-          <a:p>
-            <a:r>
-              <a:t>expected minus 500 to minus 700, more homes bought than planned, renovation capacity short, an</a:t>
-            </a:r>
-          </a:p>
-          <a:p>
-            <a:r>
-              <a:t>inventory write-down of about USD 304 million and the business wound down. The guardrail sat on the</a:t>
-            </a:r>
-          </a:p>
-          <a:p>
-            <a:r>
-              <a:t>margin; the forecast's error was wider than the band. Two more follow-ups sit in the transcripts:</a:t>
-            </a:r>
-          </a:p>
-          <a:p>
-            <a:r>
-              <a:t>the cushion read from the scored weeks, and the overtime that may cap the peak. Transition: the same</a:t>
-            </a:r>
-          </a:p>
-          <a:p>
-            <a:r>
-              <a:t>idea at an AI company.</a:t>
+              <a:t>LIVE, 3 minutes. Concede the true half first, then answer from the evidence, then say what would</a:t>
+            </a:r>
+          </a:p>
+          <a:p>
+            <a:r>
+              <a:t>change your mind: a vendor forecast scored on 2025's festival from data to September 2025.</a:t>
+            </a:r>
+          </a:p>
+          <a:p>
+            <a:r>
+              <a:t>Transition: the interview question.</a:t>
             </a:r>
           </a:p>
         </p:txBody>
@@ -1348,27 +1591,12 @@
           <a:lstStyle/>
           <a:p>
             <a:r>
-              <a:t>LIVE, 3 minutes. Ask the room which cost is the Rs 25 and which the Rs 5.42 here: a timeout and an</a:t>
-            </a:r>
-          </a:p>
-          <a:p>
-            <a:r>
-              <a:t>idle GPU hour. Ask what the forecast can be tested on if the feature has never launched: nothing,</a:t>
-            </a:r>
-          </a:p>
-          <a:p>
-            <a:r>
-              <a:t>so say it is untested and keep capacity that can stretch. The worked sizing (2 lakh users, 10</a:t>
-            </a:r>
-          </a:p>
-          <a:p>
-            <a:r>
-              <a:t>percent in the peak minute, 1,500 tokens, all invented, about 5 lakh tokens a second) is in the</a:t>
-            </a:r>
-          </a:p>
-          <a:p>
-            <a:r>
-              <a:t>transcripts. Transition: the guesstimate.</a:t>
+              <a:t>LIVE, 2 minutes. The picture every note should be able to describe in one sentence. Transition:</a:t>
+            </a:r>
+          </a:p>
+          <a:p>
+            <a:r>
+              <a:t>the interview question.</a:t>
             </a:r>
           </a:p>
         </p:txBody>
@@ -1438,12 +1666,17 @@
           <a:lstStyle/>
           <a:p>
             <a:r>
-              <a:t>LIVE, 3 minutes if time allows, in pairs against a three-minute clock. The scorer checks the</a:t>
-            </a:r>
-          </a:p>
-          <a:p>
-            <a:r>
-              <a:t>structure and the sanity check, never the final number. Transition: the handoff.</a:t>
+              <a:t>LIVE, 4 minutes. The full transcript, with the clarifying questions and the scorecard, is in</a:t>
+            </a:r>
+          </a:p>
+          <a:p>
+            <a:r>
+              <a:t>`extras/C2_W04_D05_interview_transcripts_STUDENT.md`; pairs read it and score the hire-grade answer</a:t>
+            </a:r>
+          </a:p>
+          <a:p>
+            <a:r>
+              <a:t>on the card. Transition: the follow-ups.</a:t>
             </a:r>
           </a:p>
         </p:txBody>
@@ -5223,7 +5456,7 @@
                 </a:solidFill>
                 <a:latin typeface="Calibri"/>
               </a:rPr>
-              <a:t>S1  ·  1 / 12</a:t>
+              <a:t>S1  ·  1 / 15</a:t>
             </a:r>
           </a:p>
         </p:txBody>
@@ -5237,6 +5470,1831 @@
 </file>
 
 <file path=ppt/slides/slide10.xml><?xml version="1.0" encoding="utf-8"?>
+<p:sld xmlns:a="http://schemas.openxmlformats.org/drawingml/2006/main" xmlns:p="http://schemas.openxmlformats.org/presentationml/2006/main" xmlns:r="http://schemas.openxmlformats.org/officeDocument/2006/relationships">
+  <p:cSld>
+    <p:spTree>
+      <p:nvGrpSpPr>
+        <p:cNvPr id="1" name=""/>
+        <p:cNvGrpSpPr/>
+        <p:nvPr/>
+      </p:nvGrpSpPr>
+      <p:grpSpPr/>
+      <p:pic>
+        <p:nvPicPr>
+          <p:cNvPr id="2" name="Picture 1" descr="bg_light.jpg"/>
+          <p:cNvPicPr>
+            <a:picLocks noChangeAspect="1"/>
+          </p:cNvPicPr>
+          <p:nvPr/>
+        </p:nvPicPr>
+        <p:blipFill>
+          <a:blip r:embed="rId2"/>
+          <a:stretch>
+            <a:fillRect/>
+          </a:stretch>
+        </p:blipFill>
+        <p:spPr>
+          <a:xfrm>
+            <a:off x="0" y="0"/>
+            <a:ext cx="12191695" cy="6858000"/>
+          </a:xfrm>
+          <a:prstGeom prst="rect">
+            <a:avLst/>
+          </a:prstGeom>
+        </p:spPr>
+      </p:pic>
+      <p:pic>
+        <p:nvPicPr>
+          <p:cNvPr id="3" name="Picture 2" descr="iitgn_logo.png"/>
+          <p:cNvPicPr>
+            <a:picLocks noChangeAspect="1"/>
+          </p:cNvPicPr>
+          <p:nvPr/>
+        </p:nvPicPr>
+        <p:blipFill>
+          <a:blip r:embed="rId3"/>
+          <a:stretch>
+            <a:fillRect/>
+          </a:stretch>
+        </p:blipFill>
+        <p:spPr>
+          <a:xfrm>
+            <a:off x="530352" y="201168"/>
+            <a:ext cx="420624" cy="420624"/>
+          </a:xfrm>
+          <a:prstGeom prst="rect">
+            <a:avLst/>
+          </a:prstGeom>
+        </p:spPr>
+      </p:pic>
+      <p:sp>
+        <p:nvSpPr>
+          <p:cNvPr id="4" name="TextBox 3"/>
+          <p:cNvSpPr txBox="1"/>
+          <p:nvPr/>
+        </p:nvSpPr>
+        <p:spPr>
+          <a:xfrm>
+            <a:off x="1042416" y="228600"/>
+            <a:ext cx="5120640" cy="185166"/>
+          </a:xfrm>
+          <a:prstGeom prst="rect">
+            <a:avLst/>
+          </a:prstGeom>
+          <a:noFill/>
+        </p:spPr>
+        <p:txBody>
+          <a:bodyPr wrap="square" anchor="t" lIns="0" rIns="0" tIns="0" bIns="0">
+            <a:spAutoFit/>
+          </a:bodyPr>
+          <a:lstStyle/>
+          <a:p>
+            <a:pPr algn="l"/>
+            <a:r>
+              <a:rPr sz="900" b="1" i="0">
+                <a:solidFill>
+                  <a:srgbClr val="1A0F5C"/>
+                </a:solidFill>
+                <a:latin typeface="Calibri"/>
+              </a:rPr>
+              <a:t>Indian Institute of Technology Gandhinagar</a:t>
+            </a:r>
+          </a:p>
+        </p:txBody>
+      </p:sp>
+      <p:sp>
+        <p:nvSpPr>
+          <p:cNvPr id="5" name="TextBox 4"/>
+          <p:cNvSpPr txBox="1"/>
+          <p:nvPr/>
+        </p:nvSpPr>
+        <p:spPr>
+          <a:xfrm>
+            <a:off x="1042416" y="420623"/>
+            <a:ext cx="5852160" cy="127381"/>
+          </a:xfrm>
+          <a:prstGeom prst="rect">
+            <a:avLst/>
+          </a:prstGeom>
+          <a:noFill/>
+        </p:spPr>
+        <p:txBody>
+          <a:bodyPr wrap="square" anchor="t" lIns="0" rIns="0" tIns="0" bIns="0">
+            <a:spAutoFit/>
+          </a:bodyPr>
+          <a:lstStyle/>
+          <a:p>
+            <a:pPr algn="l"/>
+            <a:r>
+              <a:rPr sz="550" b="1" i="0" spc="300">
+                <a:solidFill>
+                  <a:srgbClr val="6B6690"/>
+                </a:solidFill>
+                <a:latin typeface="Calibri"/>
+              </a:rPr>
+              <a:t>ADMINISTERED THROUGH THE COMPETENCY ADVANCEMENT ACADEMY</a:t>
+            </a:r>
+          </a:p>
+        </p:txBody>
+      </p:sp>
+      <p:sp>
+        <p:nvSpPr>
+          <p:cNvPr id="6" name="TextBox 5"/>
+          <p:cNvSpPr txBox="1"/>
+          <p:nvPr/>
+        </p:nvSpPr>
+        <p:spPr>
+          <a:xfrm>
+            <a:off x="5992063" y="310896"/>
+            <a:ext cx="5669280" cy="127381"/>
+          </a:xfrm>
+          <a:prstGeom prst="rect">
+            <a:avLst/>
+          </a:prstGeom>
+          <a:noFill/>
+        </p:spPr>
+        <p:txBody>
+          <a:bodyPr wrap="square" anchor="t" lIns="0" rIns="0" tIns="0" bIns="0">
+            <a:spAutoFit/>
+          </a:bodyPr>
+          <a:lstStyle/>
+          <a:p>
+            <a:pPr algn="r"/>
+            <a:r>
+              <a:rPr sz="550" b="1" i="0" spc="300">
+                <a:solidFill>
+                  <a:srgbClr val="6B6690"/>
+                </a:solidFill>
+                <a:latin typeface="Calibri"/>
+              </a:rPr>
+              <a:t>WEEK 4  ·  FRIDAY  ·  FLIPKART, LUCKNOW  ·  ILLUSTRATIVE CASE</a:t>
+            </a:r>
+          </a:p>
+        </p:txBody>
+      </p:sp>
+      <p:sp>
+        <p:nvSpPr>
+          <p:cNvPr id="7" name="TextBox 6"/>
+          <p:cNvSpPr txBox="1"/>
+          <p:nvPr/>
+        </p:nvSpPr>
+        <p:spPr>
+          <a:xfrm>
+            <a:off x="530352" y="676656"/>
+            <a:ext cx="11130991" cy="512064"/>
+          </a:xfrm>
+          <a:prstGeom prst="rect">
+            <a:avLst/>
+          </a:prstGeom>
+          <a:noFill/>
+        </p:spPr>
+        <p:txBody>
+          <a:bodyPr wrap="square" anchor="b" lIns="0" rIns="0" tIns="0" bIns="0">
+            <a:spAutoFit/>
+          </a:bodyPr>
+          <a:lstStyle/>
+          <a:p>
+            <a:pPr algn="l"/>
+            <a:r>
+              <a:rPr sz="2600" b="0" i="0">
+                <a:solidFill>
+                  <a:srgbClr val="1A0F5C"/>
+                </a:solidFill>
+                <a:latin typeface="Georgia"/>
+              </a:rPr>
+              <a:t>Three follow-ups that change the question</a:t>
+            </a:r>
+          </a:p>
+        </p:txBody>
+      </p:sp>
+      <p:sp>
+        <p:nvSpPr>
+          <p:cNvPr id="8" name="TextBox 7"/>
+          <p:cNvSpPr txBox="1"/>
+          <p:nvPr/>
+        </p:nvSpPr>
+        <p:spPr>
+          <a:xfrm>
+            <a:off x="530352" y="1243584"/>
+            <a:ext cx="11130991" cy="234696"/>
+          </a:xfrm>
+          <a:prstGeom prst="rect">
+            <a:avLst/>
+          </a:prstGeom>
+          <a:noFill/>
+        </p:spPr>
+        <p:txBody>
+          <a:bodyPr wrap="square" anchor="t" lIns="0" rIns="0" tIns="0" bIns="0">
+            <a:spAutoFit/>
+          </a:bodyPr>
+          <a:lstStyle/>
+          <a:p>
+            <a:pPr algn="l"/>
+            <a:r>
+              <a:rPr sz="1200" b="0" i="0">
+                <a:solidFill>
+                  <a:srgbClr val="6B6690"/>
+                </a:solidFill>
+                <a:latin typeface="Calibri"/>
+              </a:rPr>
+              <a:t>What does the interviewer ask next, and what does a strong candidate say?</a:t>
+            </a:r>
+          </a:p>
+        </p:txBody>
+      </p:sp>
+      <p:sp>
+        <p:nvSpPr>
+          <p:cNvPr id="9" name="Rectangle 8"/>
+          <p:cNvSpPr/>
+          <p:nvPr/>
+        </p:nvSpPr>
+        <p:spPr>
+          <a:xfrm>
+            <a:off x="2324557" y="2523744"/>
+            <a:ext cx="7542580" cy="18288"/>
+          </a:xfrm>
+          <a:prstGeom prst="rect">
+            <a:avLst/>
+          </a:prstGeom>
+          <a:solidFill>
+            <a:srgbClr val="CFC9EE"/>
+          </a:solidFill>
+          <a:ln>
+            <a:noFill/>
+          </a:ln>
+          <a:effectLst/>
+        </p:spPr>
+        <p:style>
+          <a:lnRef idx="1">
+            <a:schemeClr val="accent1"/>
+          </a:lnRef>
+          <a:fillRef idx="3">
+            <a:schemeClr val="accent1"/>
+          </a:fillRef>
+          <a:effectRef idx="2">
+            <a:schemeClr val="accent1"/>
+          </a:effectRef>
+          <a:fontRef idx="minor">
+            <a:schemeClr val="lt1"/>
+          </a:fontRef>
+        </p:style>
+        <p:txBody>
+          <a:bodyPr rtlCol="0" anchor="ctr" wrap="square"/>
+          <a:lstStyle/>
+          <a:p>
+            <a:pPr algn="ctr"/>
+          </a:p>
+        </p:txBody>
+      </p:sp>
+      <p:sp>
+        <p:nvSpPr>
+          <p:cNvPr id="10" name="TextBox 9"/>
+          <p:cNvSpPr txBox="1"/>
+          <p:nvPr/>
+        </p:nvSpPr>
+        <p:spPr>
+          <a:xfrm>
+            <a:off x="530352" y="1956816"/>
+            <a:ext cx="3588410" cy="168656"/>
+          </a:xfrm>
+          <a:prstGeom prst="rect">
+            <a:avLst/>
+          </a:prstGeom>
+          <a:noFill/>
+        </p:spPr>
+        <p:txBody>
+          <a:bodyPr wrap="square" anchor="t" lIns="0" rIns="0" tIns="0" bIns="0">
+            <a:spAutoFit/>
+          </a:bodyPr>
+          <a:lstStyle/>
+          <a:p>
+            <a:pPr algn="ctr"/>
+            <a:r>
+              <a:rPr sz="800" b="1" i="0" spc="250">
+                <a:solidFill>
+                  <a:srgbClr val="5B3FD6"/>
+                </a:solidFill>
+                <a:latin typeface="Calibri"/>
+              </a:rPr>
+              <a:t>FOLLOW-UP 1</a:t>
+            </a:r>
+          </a:p>
+        </p:txBody>
+      </p:sp>
+      <p:sp>
+        <p:nvSpPr>
+          <p:cNvPr id="11" name="Oval 10"/>
+          <p:cNvSpPr/>
+          <p:nvPr/>
+        </p:nvSpPr>
+        <p:spPr>
+          <a:xfrm>
+            <a:off x="2223973" y="2432304"/>
+            <a:ext cx="201168" cy="201168"/>
+          </a:xfrm>
+          <a:prstGeom prst="ellipse">
+            <a:avLst/>
+          </a:prstGeom>
+          <a:solidFill>
+            <a:srgbClr val="5B3FD6"/>
+          </a:solidFill>
+          <a:ln>
+            <a:noFill/>
+          </a:ln>
+          <a:effectLst/>
+        </p:spPr>
+        <p:style>
+          <a:lnRef idx="1">
+            <a:schemeClr val="accent1"/>
+          </a:lnRef>
+          <a:fillRef idx="3">
+            <a:schemeClr val="accent1"/>
+          </a:fillRef>
+          <a:effectRef idx="2">
+            <a:schemeClr val="accent1"/>
+          </a:effectRef>
+          <a:fontRef idx="minor">
+            <a:schemeClr val="lt1"/>
+          </a:fontRef>
+        </p:style>
+        <p:txBody>
+          <a:bodyPr rtlCol="0" anchor="ctr" wrap="square"/>
+          <a:lstStyle/>
+          <a:p>
+            <a:pPr algn="ctr"/>
+          </a:p>
+        </p:txBody>
+      </p:sp>
+      <p:sp>
+        <p:nvSpPr>
+          <p:cNvPr id="12" name="Rounded Rectangle 11"/>
+          <p:cNvSpPr/>
+          <p:nvPr/>
+        </p:nvSpPr>
+        <p:spPr>
+          <a:xfrm>
+            <a:off x="530352" y="2843784"/>
+            <a:ext cx="3588410" cy="1422400"/>
+          </a:xfrm>
+          <a:prstGeom prst="roundRect">
+            <a:avLst>
+              <a:gd name="adj" fmla="val 5000"/>
+            </a:avLst>
+          </a:prstGeom>
+          <a:solidFill>
+            <a:srgbClr val="FFFFFF"/>
+          </a:solidFill>
+          <a:ln w="9525">
+            <a:solidFill>
+              <a:srgbClr val="E4E1F1"/>
+            </a:solidFill>
+          </a:ln>
+          <a:effectLst>
+            <a:outerShdw blurRad="76200" dist="19050" dir="5400000" algn="bl" rotWithShape="0">
+              <a:srgbClr val="1A0F5C">
+                <a:alpha val="12000"/>
+              </a:srgbClr>
+            </a:outerShdw>
+          </a:effectLst>
+        </p:spPr>
+        <p:style>
+          <a:lnRef idx="1">
+            <a:schemeClr val="accent1"/>
+          </a:lnRef>
+          <a:fillRef idx="3">
+            <a:schemeClr val="accent1"/>
+          </a:fillRef>
+          <a:effectRef idx="2">
+            <a:schemeClr val="accent1"/>
+          </a:effectRef>
+          <a:fontRef idx="minor">
+            <a:schemeClr val="lt1"/>
+          </a:fontRef>
+        </p:style>
+        <p:txBody>
+          <a:bodyPr rtlCol="0" anchor="ctr" wrap="square"/>
+          <a:lstStyle/>
+          <a:p>
+            <a:pPr algn="ctr"/>
+          </a:p>
+        </p:txBody>
+      </p:sp>
+      <p:sp>
+        <p:nvSpPr>
+          <p:cNvPr id="13" name="TextBox 12"/>
+          <p:cNvSpPr txBox="1"/>
+          <p:nvPr/>
+        </p:nvSpPr>
+        <p:spPr>
+          <a:xfrm>
+            <a:off x="694944" y="2990088"/>
+            <a:ext cx="3259226" cy="251205"/>
+          </a:xfrm>
+          <a:prstGeom prst="rect">
+            <a:avLst/>
+          </a:prstGeom>
+          <a:noFill/>
+        </p:spPr>
+        <p:txBody>
+          <a:bodyPr wrap="square" anchor="t" lIns="0" rIns="0" tIns="0" bIns="0">
+            <a:spAutoFit/>
+          </a:bodyPr>
+          <a:lstStyle/>
+          <a:p>
+            <a:pPr algn="l"/>
+            <a:r>
+              <a:rPr sz="1300" b="1" i="0">
+                <a:solidFill>
+                  <a:srgbClr val="1A0F5C"/>
+                </a:solidFill>
+                <a:latin typeface="Calibri"/>
+              </a:rPr>
+              <a:t>MAE or MAPE, and when?</a:t>
+            </a:r>
+          </a:p>
+        </p:txBody>
+      </p:sp>
+      <p:sp>
+        <p:nvSpPr>
+          <p:cNvPr id="14" name="TextBox 13"/>
+          <p:cNvSpPr txBox="1"/>
+          <p:nvPr/>
+        </p:nvSpPr>
+        <p:spPr>
+          <a:xfrm>
+            <a:off x="694944" y="3277870"/>
+            <a:ext cx="3259226" cy="531876"/>
+          </a:xfrm>
+          <a:prstGeom prst="rect">
+            <a:avLst/>
+          </a:prstGeom>
+          <a:noFill/>
+        </p:spPr>
+        <p:txBody>
+          <a:bodyPr wrap="square" anchor="t" lIns="0" rIns="0" tIns="0" bIns="0">
+            <a:spAutoFit/>
+          </a:bodyPr>
+          <a:lstStyle/>
+          <a:p>
+            <a:pPr algn="l"/>
+            <a:r>
+              <a:rPr sz="1000" b="0" i="0">
+                <a:solidFill>
+                  <a:srgbClr val="6B6690"/>
+                </a:solidFill>
+                <a:latin typeface="Calibri"/>
+              </a:rPr>
+              <a:t>Shipments when the cost is per shipment; MASE or WAPE across centres, since MAPE explodes near zero and punishes forecasts that land high.</a:t>
+            </a:r>
+          </a:p>
+        </p:txBody>
+      </p:sp>
+      <p:sp>
+        <p:nvSpPr>
+          <p:cNvPr id="15" name="TextBox 14"/>
+          <p:cNvSpPr txBox="1"/>
+          <p:nvPr/>
+        </p:nvSpPr>
+        <p:spPr>
+          <a:xfrm>
+            <a:off x="4301642" y="1956816"/>
+            <a:ext cx="3588410" cy="168656"/>
+          </a:xfrm>
+          <a:prstGeom prst="rect">
+            <a:avLst/>
+          </a:prstGeom>
+          <a:noFill/>
+        </p:spPr>
+        <p:txBody>
+          <a:bodyPr wrap="square" anchor="t" lIns="0" rIns="0" tIns="0" bIns="0">
+            <a:spAutoFit/>
+          </a:bodyPr>
+          <a:lstStyle/>
+          <a:p>
+            <a:pPr algn="ctr"/>
+            <a:r>
+              <a:rPr sz="800" b="1" i="0" spc="250">
+                <a:solidFill>
+                  <a:srgbClr val="5B3FD6"/>
+                </a:solidFill>
+                <a:latin typeface="Calibri"/>
+              </a:rPr>
+              <a:t>FOLLOW-UP 2</a:t>
+            </a:r>
+          </a:p>
+        </p:txBody>
+      </p:sp>
+      <p:sp>
+        <p:nvSpPr>
+          <p:cNvPr id="16" name="Oval 15"/>
+          <p:cNvSpPr/>
+          <p:nvPr/>
+        </p:nvSpPr>
+        <p:spPr>
+          <a:xfrm>
+            <a:off x="5995263" y="2432304"/>
+            <a:ext cx="201168" cy="201168"/>
+          </a:xfrm>
+          <a:prstGeom prst="ellipse">
+            <a:avLst/>
+          </a:prstGeom>
+          <a:solidFill>
+            <a:srgbClr val="5B3FD6"/>
+          </a:solidFill>
+          <a:ln>
+            <a:noFill/>
+          </a:ln>
+          <a:effectLst/>
+        </p:spPr>
+        <p:style>
+          <a:lnRef idx="1">
+            <a:schemeClr val="accent1"/>
+          </a:lnRef>
+          <a:fillRef idx="3">
+            <a:schemeClr val="accent1"/>
+          </a:fillRef>
+          <a:effectRef idx="2">
+            <a:schemeClr val="accent1"/>
+          </a:effectRef>
+          <a:fontRef idx="minor">
+            <a:schemeClr val="lt1"/>
+          </a:fontRef>
+        </p:style>
+        <p:txBody>
+          <a:bodyPr rtlCol="0" anchor="ctr" wrap="square"/>
+          <a:lstStyle/>
+          <a:p>
+            <a:pPr algn="ctr"/>
+          </a:p>
+        </p:txBody>
+      </p:sp>
+      <p:sp>
+        <p:nvSpPr>
+          <p:cNvPr id="17" name="Rounded Rectangle 16"/>
+          <p:cNvSpPr/>
+          <p:nvPr/>
+        </p:nvSpPr>
+        <p:spPr>
+          <a:xfrm>
+            <a:off x="4301642" y="2843784"/>
+            <a:ext cx="3588410" cy="1422400"/>
+          </a:xfrm>
+          <a:prstGeom prst="roundRect">
+            <a:avLst>
+              <a:gd name="adj" fmla="val 5000"/>
+            </a:avLst>
+          </a:prstGeom>
+          <a:solidFill>
+            <a:srgbClr val="FFFFFF"/>
+          </a:solidFill>
+          <a:ln w="9525">
+            <a:solidFill>
+              <a:srgbClr val="E4E1F1"/>
+            </a:solidFill>
+          </a:ln>
+          <a:effectLst>
+            <a:outerShdw blurRad="76200" dist="19050" dir="5400000" algn="bl" rotWithShape="0">
+              <a:srgbClr val="1A0F5C">
+                <a:alpha val="12000"/>
+              </a:srgbClr>
+            </a:outerShdw>
+          </a:effectLst>
+        </p:spPr>
+        <p:style>
+          <a:lnRef idx="1">
+            <a:schemeClr val="accent1"/>
+          </a:lnRef>
+          <a:fillRef idx="3">
+            <a:schemeClr val="accent1"/>
+          </a:fillRef>
+          <a:effectRef idx="2">
+            <a:schemeClr val="accent1"/>
+          </a:effectRef>
+          <a:fontRef idx="minor">
+            <a:schemeClr val="lt1"/>
+          </a:fontRef>
+        </p:style>
+        <p:txBody>
+          <a:bodyPr rtlCol="0" anchor="ctr" wrap="square"/>
+          <a:lstStyle/>
+          <a:p>
+            <a:pPr algn="ctr"/>
+          </a:p>
+        </p:txBody>
+      </p:sp>
+      <p:sp>
+        <p:nvSpPr>
+          <p:cNvPr id="18" name="TextBox 17"/>
+          <p:cNvSpPr txBox="1"/>
+          <p:nvPr/>
+        </p:nvSpPr>
+        <p:spPr>
+          <a:xfrm>
+            <a:off x="4466234" y="2990088"/>
+            <a:ext cx="3259226" cy="465836"/>
+          </a:xfrm>
+          <a:prstGeom prst="rect">
+            <a:avLst/>
+          </a:prstGeom>
+          <a:noFill/>
+        </p:spPr>
+        <p:txBody>
+          <a:bodyPr wrap="square" anchor="t" lIns="0" rIns="0" tIns="0" bIns="0">
+            <a:spAutoFit/>
+          </a:bodyPr>
+          <a:lstStyle/>
+          <a:p>
+            <a:pPr algn="l"/>
+            <a:r>
+              <a:rPr sz="1300" b="1" i="0">
+                <a:solidFill>
+                  <a:srgbClr val="1A0F5C"/>
+                </a:solidFill>
+                <a:latin typeface="Calibri"/>
+              </a:rPr>
+              <a:t>The festival moves three weeks: what breaks?</a:t>
+            </a:r>
+          </a:p>
+        </p:txBody>
+      </p:sp>
+      <p:sp>
+        <p:nvSpPr>
+          <p:cNvPr id="19" name="TextBox 18"/>
+          <p:cNvSpPr txBox="1"/>
+          <p:nvPr/>
+        </p:nvSpPr>
+        <p:spPr>
+          <a:xfrm>
+            <a:off x="4466234" y="3492500"/>
+            <a:ext cx="3259226" cy="531876"/>
+          </a:xfrm>
+          <a:prstGeom prst="rect">
+            <a:avLst/>
+          </a:prstGeom>
+          <a:noFill/>
+        </p:spPr>
+        <p:txBody>
+          <a:bodyPr wrap="square" anchor="t" lIns="0" rIns="0" tIns="0" bIns="0">
+            <a:spAutoFit/>
+          </a:bodyPr>
+          <a:lstStyle/>
+          <a:p>
+            <a:pPr algn="l"/>
+            <a:r>
+              <a:rPr sz="1000" b="0" i="0">
+                <a:solidFill>
+                  <a:srgbClr val="6B6690"/>
+                </a:solidFill>
+                <a:latin typeface="Calibri"/>
+              </a:rPr>
+              <a:t>Every calendar copy, the seasonal naive and finance's rule; the festival-aligned copy moves with it.</a:t>
+            </a:r>
+          </a:p>
+        </p:txBody>
+      </p:sp>
+      <p:sp>
+        <p:nvSpPr>
+          <p:cNvPr id="20" name="TextBox 19"/>
+          <p:cNvSpPr txBox="1"/>
+          <p:nvPr/>
+        </p:nvSpPr>
+        <p:spPr>
+          <a:xfrm>
+            <a:off x="8072932" y="1956816"/>
+            <a:ext cx="3588410" cy="168656"/>
+          </a:xfrm>
+          <a:prstGeom prst="rect">
+            <a:avLst/>
+          </a:prstGeom>
+          <a:noFill/>
+        </p:spPr>
+        <p:txBody>
+          <a:bodyPr wrap="square" anchor="t" lIns="0" rIns="0" tIns="0" bIns="0">
+            <a:spAutoFit/>
+          </a:bodyPr>
+          <a:lstStyle/>
+          <a:p>
+            <a:pPr algn="ctr"/>
+            <a:r>
+              <a:rPr sz="800" b="1" i="0" spc="250">
+                <a:solidFill>
+                  <a:srgbClr val="5B3FD6"/>
+                </a:solidFill>
+                <a:latin typeface="Calibri"/>
+              </a:rPr>
+              <a:t>FOLLOW-UP 3</a:t>
+            </a:r>
+          </a:p>
+        </p:txBody>
+      </p:sp>
+      <p:sp>
+        <p:nvSpPr>
+          <p:cNvPr id="21" name="Oval 20"/>
+          <p:cNvSpPr/>
+          <p:nvPr/>
+        </p:nvSpPr>
+        <p:spPr>
+          <a:xfrm>
+            <a:off x="9766554" y="2432304"/>
+            <a:ext cx="201168" cy="201168"/>
+          </a:xfrm>
+          <a:prstGeom prst="ellipse">
+            <a:avLst/>
+          </a:prstGeom>
+          <a:solidFill>
+            <a:srgbClr val="D9A7FF"/>
+          </a:solidFill>
+          <a:ln>
+            <a:noFill/>
+          </a:ln>
+          <a:effectLst/>
+        </p:spPr>
+        <p:style>
+          <a:lnRef idx="1">
+            <a:schemeClr val="accent1"/>
+          </a:lnRef>
+          <a:fillRef idx="3">
+            <a:schemeClr val="accent1"/>
+          </a:fillRef>
+          <a:effectRef idx="2">
+            <a:schemeClr val="accent1"/>
+          </a:effectRef>
+          <a:fontRef idx="minor">
+            <a:schemeClr val="lt1"/>
+          </a:fontRef>
+        </p:style>
+        <p:txBody>
+          <a:bodyPr rtlCol="0" anchor="ctr" wrap="square"/>
+          <a:lstStyle/>
+          <a:p>
+            <a:pPr algn="ctr"/>
+          </a:p>
+        </p:txBody>
+      </p:sp>
+      <p:sp>
+        <p:nvSpPr>
+          <p:cNvPr id="22" name="Rounded Rectangle 21"/>
+          <p:cNvSpPr/>
+          <p:nvPr/>
+        </p:nvSpPr>
+        <p:spPr>
+          <a:xfrm>
+            <a:off x="8072932" y="2843784"/>
+            <a:ext cx="3588410" cy="1422400"/>
+          </a:xfrm>
+          <a:prstGeom prst="roundRect">
+            <a:avLst>
+              <a:gd name="adj" fmla="val 5000"/>
+            </a:avLst>
+          </a:prstGeom>
+          <a:gradFill rotWithShape="1">
+            <a:gsLst>
+              <a:gs pos="0">
+                <a:srgbClr val="2C1A86"/>
+              </a:gs>
+              <a:gs pos="100000">
+                <a:srgbClr val="1A0F5C"/>
+              </a:gs>
+            </a:gsLst>
+            <a:lin scaled="0" ang="16200000"/>
+          </a:gradFill>
+          <a:ln>
+            <a:noFill/>
+          </a:ln>
+          <a:effectLst>
+            <a:outerShdw blurRad="76200" dist="19050" dir="5400000" algn="bl" rotWithShape="0">
+              <a:srgbClr val="1A0F5C">
+                <a:alpha val="12000"/>
+              </a:srgbClr>
+            </a:outerShdw>
+          </a:effectLst>
+        </p:spPr>
+        <p:style>
+          <a:lnRef idx="1">
+            <a:schemeClr val="accent1"/>
+          </a:lnRef>
+          <a:fillRef idx="3">
+            <a:schemeClr val="accent1"/>
+          </a:fillRef>
+          <a:effectRef idx="2">
+            <a:schemeClr val="accent1"/>
+          </a:effectRef>
+          <a:fontRef idx="minor">
+            <a:schemeClr val="lt1"/>
+          </a:fontRef>
+        </p:style>
+        <p:txBody>
+          <a:bodyPr rtlCol="0" anchor="ctr" wrap="square"/>
+          <a:lstStyle/>
+          <a:p>
+            <a:pPr algn="ctr"/>
+          </a:p>
+        </p:txBody>
+      </p:sp>
+      <p:sp>
+        <p:nvSpPr>
+          <p:cNvPr id="23" name="TextBox 22"/>
+          <p:cNvSpPr txBox="1"/>
+          <p:nvPr/>
+        </p:nvSpPr>
+        <p:spPr>
+          <a:xfrm>
+            <a:off x="8237524" y="2990088"/>
+            <a:ext cx="3259226" cy="251205"/>
+          </a:xfrm>
+          <a:prstGeom prst="rect">
+            <a:avLst/>
+          </a:prstGeom>
+          <a:noFill/>
+        </p:spPr>
+        <p:txBody>
+          <a:bodyPr wrap="square" anchor="t" lIns="0" rIns="0" tIns="0" bIns="0">
+            <a:spAutoFit/>
+          </a:bodyPr>
+          <a:lstStyle/>
+          <a:p>
+            <a:pPr algn="l"/>
+            <a:r>
+              <a:rPr sz="1300" b="1" i="0">
+                <a:solidFill>
+                  <a:srgbClr val="FFFFFF"/>
+                </a:solidFill>
+                <a:latin typeface="Calibri"/>
+              </a:rPr>
+              <a:t>What did a forecast cost Zillow?</a:t>
+            </a:r>
+          </a:p>
+        </p:txBody>
+      </p:sp>
+      <p:sp>
+        <p:nvSpPr>
+          <p:cNvPr id="24" name="TextBox 23"/>
+          <p:cNvSpPr txBox="1"/>
+          <p:nvPr/>
+        </p:nvSpPr>
+        <p:spPr>
+          <a:xfrm>
+            <a:off x="8237524" y="3277870"/>
+            <a:ext cx="3259226" cy="696976"/>
+          </a:xfrm>
+          <a:prstGeom prst="rect">
+            <a:avLst/>
+          </a:prstGeom>
+          <a:noFill/>
+        </p:spPr>
+        <p:txBody>
+          <a:bodyPr wrap="square" anchor="t" lIns="0" rIns="0" tIns="0" bIns="0">
+            <a:spAutoFit/>
+          </a:bodyPr>
+          <a:lstStyle/>
+          <a:p>
+            <a:pPr algn="l"/>
+            <a:r>
+              <a:rPr sz="1000" b="0" i="0">
+                <a:solidFill>
+                  <a:srgbClr val="CFC9EE"/>
+                </a:solidFill>
+                <a:latin typeface="Calibri"/>
+              </a:rPr>
+              <a:t>Its margin guardrail was 2 percentage points either side of breakeven; price forecasts six months out missed by more, the margin swung about 12, and Zillow wrote down about USD 304 million.</a:t>
+            </a:r>
+          </a:p>
+        </p:txBody>
+      </p:sp>
+      <p:sp>
+        <p:nvSpPr>
+          <p:cNvPr id="25" name="TextBox 24"/>
+          <p:cNvSpPr txBox="1"/>
+          <p:nvPr/>
+        </p:nvSpPr>
+        <p:spPr>
+          <a:xfrm>
+            <a:off x="530352" y="6437376"/>
+            <a:ext cx="9667951" cy="160401"/>
+          </a:xfrm>
+          <a:prstGeom prst="rect">
+            <a:avLst/>
+          </a:prstGeom>
+          <a:noFill/>
+        </p:spPr>
+        <p:txBody>
+          <a:bodyPr wrap="square" anchor="t" lIns="0" rIns="0" tIns="0" bIns="0">
+            <a:spAutoFit/>
+          </a:bodyPr>
+          <a:lstStyle/>
+          <a:p>
+            <a:pPr algn="l"/>
+            <a:r>
+              <a:rPr sz="750" b="0" i="0">
+                <a:solidFill>
+                  <a:srgbClr val="6B6690"/>
+                </a:solidFill>
+                <a:latin typeface="Calibri"/>
+              </a:rPr>
+              <a:t>Week 4 Day 5: how much is coming, and how wrong could we be</a:t>
+            </a:r>
+          </a:p>
+        </p:txBody>
+      </p:sp>
+      <p:sp>
+        <p:nvSpPr>
+          <p:cNvPr id="26" name="TextBox 25"/>
+          <p:cNvSpPr txBox="1"/>
+          <p:nvPr/>
+        </p:nvSpPr>
+        <p:spPr>
+          <a:xfrm>
+            <a:off x="10198303" y="6437376"/>
+            <a:ext cx="1463040" cy="160401"/>
+          </a:xfrm>
+          <a:prstGeom prst="rect">
+            <a:avLst/>
+          </a:prstGeom>
+          <a:noFill/>
+        </p:spPr>
+        <p:txBody>
+          <a:bodyPr wrap="square" anchor="t" lIns="0" rIns="0" tIns="0" bIns="0">
+            <a:spAutoFit/>
+          </a:bodyPr>
+          <a:lstStyle/>
+          <a:p>
+            <a:pPr algn="r"/>
+            <a:r>
+              <a:rPr sz="750" b="0" i="0">
+                <a:solidFill>
+                  <a:srgbClr val="6B6690"/>
+                </a:solidFill>
+                <a:latin typeface="Calibri"/>
+              </a:rPr>
+              <a:t>S7  ·  10 / 15</a:t>
+            </a:r>
+          </a:p>
+        </p:txBody>
+      </p:sp>
+    </p:spTree>
+  </p:cSld>
+  <p:clrMapOvr>
+    <a:masterClrMapping/>
+  </p:clrMapOvr>
+</p:sld>
+</file>
+
+<file path=ppt/slides/slide11.xml><?xml version="1.0" encoding="utf-8"?>
+<p:sld xmlns:a="http://schemas.openxmlformats.org/drawingml/2006/main" xmlns:p="http://schemas.openxmlformats.org/presentationml/2006/main" xmlns:r="http://schemas.openxmlformats.org/officeDocument/2006/relationships">
+  <p:cSld>
+    <p:spTree>
+      <p:nvGrpSpPr>
+        <p:cNvPr id="1" name=""/>
+        <p:cNvGrpSpPr/>
+        <p:nvPr/>
+      </p:nvGrpSpPr>
+      <p:grpSpPr/>
+      <p:pic>
+        <p:nvPicPr>
+          <p:cNvPr id="2" name="Picture 1" descr="bg_light.jpg"/>
+          <p:cNvPicPr>
+            <a:picLocks noChangeAspect="1"/>
+          </p:cNvPicPr>
+          <p:nvPr/>
+        </p:nvPicPr>
+        <p:blipFill>
+          <a:blip r:embed="rId2"/>
+          <a:stretch>
+            <a:fillRect/>
+          </a:stretch>
+        </p:blipFill>
+        <p:spPr>
+          <a:xfrm>
+            <a:off x="0" y="0"/>
+            <a:ext cx="12191695" cy="6858000"/>
+          </a:xfrm>
+          <a:prstGeom prst="rect">
+            <a:avLst/>
+          </a:prstGeom>
+        </p:spPr>
+      </p:pic>
+      <p:pic>
+        <p:nvPicPr>
+          <p:cNvPr id="3" name="Picture 2" descr="iitgn_logo.png"/>
+          <p:cNvPicPr>
+            <a:picLocks noChangeAspect="1"/>
+          </p:cNvPicPr>
+          <p:nvPr/>
+        </p:nvPicPr>
+        <p:blipFill>
+          <a:blip r:embed="rId3"/>
+          <a:stretch>
+            <a:fillRect/>
+          </a:stretch>
+        </p:blipFill>
+        <p:spPr>
+          <a:xfrm>
+            <a:off x="530352" y="201168"/>
+            <a:ext cx="420624" cy="420624"/>
+          </a:xfrm>
+          <a:prstGeom prst="rect">
+            <a:avLst/>
+          </a:prstGeom>
+        </p:spPr>
+      </p:pic>
+      <p:sp>
+        <p:nvSpPr>
+          <p:cNvPr id="4" name="TextBox 3"/>
+          <p:cNvSpPr txBox="1"/>
+          <p:nvPr/>
+        </p:nvSpPr>
+        <p:spPr>
+          <a:xfrm>
+            <a:off x="1042416" y="228600"/>
+            <a:ext cx="5120640" cy="185166"/>
+          </a:xfrm>
+          <a:prstGeom prst="rect">
+            <a:avLst/>
+          </a:prstGeom>
+          <a:noFill/>
+        </p:spPr>
+        <p:txBody>
+          <a:bodyPr wrap="square" anchor="t" lIns="0" rIns="0" tIns="0" bIns="0">
+            <a:spAutoFit/>
+          </a:bodyPr>
+          <a:lstStyle/>
+          <a:p>
+            <a:pPr algn="l"/>
+            <a:r>
+              <a:rPr sz="900" b="1" i="0">
+                <a:solidFill>
+                  <a:srgbClr val="1A0F5C"/>
+                </a:solidFill>
+                <a:latin typeface="Calibri"/>
+              </a:rPr>
+              <a:t>Indian Institute of Technology Gandhinagar</a:t>
+            </a:r>
+          </a:p>
+        </p:txBody>
+      </p:sp>
+      <p:sp>
+        <p:nvSpPr>
+          <p:cNvPr id="5" name="TextBox 4"/>
+          <p:cNvSpPr txBox="1"/>
+          <p:nvPr/>
+        </p:nvSpPr>
+        <p:spPr>
+          <a:xfrm>
+            <a:off x="1042416" y="420623"/>
+            <a:ext cx="5852160" cy="127381"/>
+          </a:xfrm>
+          <a:prstGeom prst="rect">
+            <a:avLst/>
+          </a:prstGeom>
+          <a:noFill/>
+        </p:spPr>
+        <p:txBody>
+          <a:bodyPr wrap="square" anchor="t" lIns="0" rIns="0" tIns="0" bIns="0">
+            <a:spAutoFit/>
+          </a:bodyPr>
+          <a:lstStyle/>
+          <a:p>
+            <a:pPr algn="l"/>
+            <a:r>
+              <a:rPr sz="550" b="1" i="0" spc="300">
+                <a:solidFill>
+                  <a:srgbClr val="6B6690"/>
+                </a:solidFill>
+                <a:latin typeface="Calibri"/>
+              </a:rPr>
+              <a:t>ADMINISTERED THROUGH THE COMPETENCY ADVANCEMENT ACADEMY</a:t>
+            </a:r>
+          </a:p>
+        </p:txBody>
+      </p:sp>
+      <p:sp>
+        <p:nvSpPr>
+          <p:cNvPr id="6" name="TextBox 5"/>
+          <p:cNvSpPr txBox="1"/>
+          <p:nvPr/>
+        </p:nvSpPr>
+        <p:spPr>
+          <a:xfrm>
+            <a:off x="5992063" y="310896"/>
+            <a:ext cx="5669280" cy="127381"/>
+          </a:xfrm>
+          <a:prstGeom prst="rect">
+            <a:avLst/>
+          </a:prstGeom>
+          <a:noFill/>
+        </p:spPr>
+        <p:txBody>
+          <a:bodyPr wrap="square" anchor="t" lIns="0" rIns="0" tIns="0" bIns="0">
+            <a:spAutoFit/>
+          </a:bodyPr>
+          <a:lstStyle/>
+          <a:p>
+            <a:pPr algn="r"/>
+            <a:r>
+              <a:rPr sz="550" b="1" i="0" spc="300">
+                <a:solidFill>
+                  <a:srgbClr val="6B6690"/>
+                </a:solidFill>
+                <a:latin typeface="Calibri"/>
+              </a:rPr>
+              <a:t>WEEK 4  ·  FRIDAY  ·  FLIPKART, LUCKNOW  ·  ILLUSTRATIVE CASE</a:t>
+            </a:r>
+          </a:p>
+        </p:txBody>
+      </p:sp>
+      <p:sp>
+        <p:nvSpPr>
+          <p:cNvPr id="7" name="TextBox 6"/>
+          <p:cNvSpPr txBox="1"/>
+          <p:nvPr/>
+        </p:nvSpPr>
+        <p:spPr>
+          <a:xfrm>
+            <a:off x="530352" y="676656"/>
+            <a:ext cx="11130991" cy="512064"/>
+          </a:xfrm>
+          <a:prstGeom prst="rect">
+            <a:avLst/>
+          </a:prstGeom>
+          <a:noFill/>
+        </p:spPr>
+        <p:txBody>
+          <a:bodyPr wrap="square" anchor="b" lIns="0" rIns="0" tIns="0" bIns="0">
+            <a:spAutoFit/>
+          </a:bodyPr>
+          <a:lstStyle/>
+          <a:p>
+            <a:pPr algn="l"/>
+            <a:r>
+              <a:rPr sz="2600" b="0" i="0">
+                <a:solidFill>
+                  <a:srgbClr val="1A0F5C"/>
+                </a:solidFill>
+                <a:latin typeface="Georgia"/>
+              </a:rPr>
+              <a:t>AI variant: inference capacity for a launch</a:t>
+            </a:r>
+          </a:p>
+        </p:txBody>
+      </p:sp>
+      <p:sp>
+        <p:nvSpPr>
+          <p:cNvPr id="8" name="TextBox 7"/>
+          <p:cNvSpPr txBox="1"/>
+          <p:nvPr/>
+        </p:nvSpPr>
+        <p:spPr>
+          <a:xfrm>
+            <a:off x="530352" y="1243584"/>
+            <a:ext cx="11130991" cy="234696"/>
+          </a:xfrm>
+          <a:prstGeom prst="rect">
+            <a:avLst/>
+          </a:prstGeom>
+          <a:noFill/>
+        </p:spPr>
+        <p:txBody>
+          <a:bodyPr wrap="square" anchor="t" lIns="0" rIns="0" tIns="0" bIns="0">
+            <a:spAutoFit/>
+          </a:bodyPr>
+          <a:lstStyle/>
+          <a:p>
+            <a:pPr algn="l"/>
+            <a:r>
+              <a:rPr sz="1200" b="0" i="0">
+                <a:solidFill>
+                  <a:srgbClr val="6B6690"/>
+                </a:solidFill>
+                <a:latin typeface="Calibri"/>
+              </a:rPr>
+              <a:t>How would the same method size servers for an AI product launch?</a:t>
+            </a:r>
+          </a:p>
+        </p:txBody>
+      </p:sp>
+      <p:pic>
+        <p:nvPicPr>
+          <p:cNvPr id="9" name="mermaid diagram" descr="a1326bd9825a5eed.png"/>
+          <p:cNvPicPr>
+            <a:picLocks noChangeAspect="1"/>
+          </p:cNvPicPr>
+          <p:nvPr/>
+        </p:nvPicPr>
+        <p:blipFill>
+          <a:blip r:embed="rId5"/>
+          <a:stretch>
+            <a:fillRect/>
+          </a:stretch>
+        </p:blipFill>
+        <p:spPr>
+          <a:xfrm>
+            <a:off x="780897" y="1956816"/>
+            <a:ext cx="10629900" cy="2100262"/>
+          </a:xfrm>
+          <a:prstGeom prst="rect">
+            <a:avLst/>
+          </a:prstGeom>
+        </p:spPr>
+      </p:pic>
+      <p:sp>
+        <p:nvSpPr>
+          <p:cNvPr id="10" name="TextBox 9"/>
+          <p:cNvSpPr txBox="1"/>
+          <p:nvPr/>
+        </p:nvSpPr>
+        <p:spPr>
+          <a:xfrm>
+            <a:off x="530352" y="4203382"/>
+            <a:ext cx="11130991" cy="1601216"/>
+          </a:xfrm>
+          <a:prstGeom prst="rect">
+            <a:avLst/>
+          </a:prstGeom>
+          <a:noFill/>
+        </p:spPr>
+        <p:txBody>
+          <a:bodyPr wrap="square" anchor="t" lIns="0" rIns="0" tIns="0" bIns="0">
+            <a:spAutoFit/>
+          </a:bodyPr>
+          <a:lstStyle/>
+          <a:p>
+            <a:pPr>
+              <a:spcAft>
+                <a:spcPts val="800"/>
+              </a:spcAft>
+            </a:pPr>
+            <a:r>
+              <a:rPr sz="1600" b="1" i="0">
+                <a:solidFill>
+                  <a:srgbClr val="1A1440"/>
+                </a:solidFill>
+                <a:latin typeface="Calibri"/>
+              </a:rPr>
+              <a:t>Inference</a:t>
+            </a:r>
+            <a:r>
+              <a:rPr sz="1600" b="0" i="0">
+                <a:solidFill>
+                  <a:srgbClr val="1A1440"/>
+                </a:solidFill>
+                <a:latin typeface="Calibri"/>
+              </a:rPr>
+              <a:t> is the computing a model does each time it answers a user. Size the peak in tokens a second from the ground up, check it against earlier launches lined up by days from launch with the weekday kept, and set capacity to the latency target with headroom; the two costs decide how much to book ahead, and on-demand capacity, rate limits and a waitlist cover the rest. Written for the programme; it quotes no company's figures.</a:t>
+            </a:r>
+          </a:p>
+        </p:txBody>
+      </p:sp>
+      <p:sp>
+        <p:nvSpPr>
+          <p:cNvPr id="11" name="TextBox 10"/>
+          <p:cNvSpPr txBox="1"/>
+          <p:nvPr/>
+        </p:nvSpPr>
+        <p:spPr>
+          <a:xfrm>
+            <a:off x="530352" y="6437376"/>
+            <a:ext cx="9667951" cy="160401"/>
+          </a:xfrm>
+          <a:prstGeom prst="rect">
+            <a:avLst/>
+          </a:prstGeom>
+          <a:noFill/>
+        </p:spPr>
+        <p:txBody>
+          <a:bodyPr wrap="square" anchor="t" lIns="0" rIns="0" tIns="0" bIns="0">
+            <a:spAutoFit/>
+          </a:bodyPr>
+          <a:lstStyle/>
+          <a:p>
+            <a:pPr algn="l"/>
+            <a:r>
+              <a:rPr sz="750" b="0" i="0">
+                <a:solidFill>
+                  <a:srgbClr val="6B6690"/>
+                </a:solidFill>
+                <a:latin typeface="Calibri"/>
+              </a:rPr>
+              <a:t>Week 4 Day 5: how much is coming, and how wrong could we be</a:t>
+            </a:r>
+          </a:p>
+        </p:txBody>
+      </p:sp>
+      <p:sp>
+        <p:nvSpPr>
+          <p:cNvPr id="12" name="TextBox 11"/>
+          <p:cNvSpPr txBox="1"/>
+          <p:nvPr/>
+        </p:nvSpPr>
+        <p:spPr>
+          <a:xfrm>
+            <a:off x="10198303" y="6437376"/>
+            <a:ext cx="1463040" cy="160401"/>
+          </a:xfrm>
+          <a:prstGeom prst="rect">
+            <a:avLst/>
+          </a:prstGeom>
+          <a:noFill/>
+        </p:spPr>
+        <p:txBody>
+          <a:bodyPr wrap="square" anchor="t" lIns="0" rIns="0" tIns="0" bIns="0">
+            <a:spAutoFit/>
+          </a:bodyPr>
+          <a:lstStyle/>
+          <a:p>
+            <a:pPr algn="r"/>
+            <a:r>
+              <a:rPr sz="750" b="0" i="0">
+                <a:solidFill>
+                  <a:srgbClr val="6B6690"/>
+                </a:solidFill>
+                <a:latin typeface="Calibri"/>
+              </a:rPr>
+              <a:t>S8  ·  11 / 15</a:t>
+            </a:r>
+          </a:p>
+        </p:txBody>
+      </p:sp>
+    </p:spTree>
+  </p:cSld>
+  <p:clrMapOvr>
+    <a:masterClrMapping/>
+  </p:clrMapOvr>
+</p:sld>
+</file>
+
+<file path=ppt/slides/slide12.xml><?xml version="1.0" encoding="utf-8"?>
+<p:sld xmlns:a="http://schemas.openxmlformats.org/drawingml/2006/main" xmlns:p="http://schemas.openxmlformats.org/presentationml/2006/main" xmlns:r="http://schemas.openxmlformats.org/officeDocument/2006/relationships">
+  <p:cSld>
+    <p:spTree>
+      <p:nvGrpSpPr>
+        <p:cNvPr id="1" name=""/>
+        <p:cNvGrpSpPr/>
+        <p:nvPr/>
+      </p:nvGrpSpPr>
+      <p:grpSpPr/>
+      <p:pic>
+        <p:nvPicPr>
+          <p:cNvPr id="2" name="Picture 1" descr="bg_light.jpg"/>
+          <p:cNvPicPr>
+            <a:picLocks noChangeAspect="1"/>
+          </p:cNvPicPr>
+          <p:nvPr/>
+        </p:nvPicPr>
+        <p:blipFill>
+          <a:blip r:embed="rId2"/>
+          <a:stretch>
+            <a:fillRect/>
+          </a:stretch>
+        </p:blipFill>
+        <p:spPr>
+          <a:xfrm>
+            <a:off x="0" y="0"/>
+            <a:ext cx="12191695" cy="6858000"/>
+          </a:xfrm>
+          <a:prstGeom prst="rect">
+            <a:avLst/>
+          </a:prstGeom>
+        </p:spPr>
+      </p:pic>
+      <p:pic>
+        <p:nvPicPr>
+          <p:cNvPr id="3" name="Picture 2" descr="iitgn_logo.png"/>
+          <p:cNvPicPr>
+            <a:picLocks noChangeAspect="1"/>
+          </p:cNvPicPr>
+          <p:nvPr/>
+        </p:nvPicPr>
+        <p:blipFill>
+          <a:blip r:embed="rId3"/>
+          <a:stretch>
+            <a:fillRect/>
+          </a:stretch>
+        </p:blipFill>
+        <p:spPr>
+          <a:xfrm>
+            <a:off x="530352" y="201168"/>
+            <a:ext cx="420624" cy="420624"/>
+          </a:xfrm>
+          <a:prstGeom prst="rect">
+            <a:avLst/>
+          </a:prstGeom>
+        </p:spPr>
+      </p:pic>
+      <p:sp>
+        <p:nvSpPr>
+          <p:cNvPr id="4" name="TextBox 3"/>
+          <p:cNvSpPr txBox="1"/>
+          <p:nvPr/>
+        </p:nvSpPr>
+        <p:spPr>
+          <a:xfrm>
+            <a:off x="1042416" y="228600"/>
+            <a:ext cx="5120640" cy="185166"/>
+          </a:xfrm>
+          <a:prstGeom prst="rect">
+            <a:avLst/>
+          </a:prstGeom>
+          <a:noFill/>
+        </p:spPr>
+        <p:txBody>
+          <a:bodyPr wrap="square" anchor="t" lIns="0" rIns="0" tIns="0" bIns="0">
+            <a:spAutoFit/>
+          </a:bodyPr>
+          <a:lstStyle/>
+          <a:p>
+            <a:pPr algn="l"/>
+            <a:r>
+              <a:rPr sz="900" b="1" i="0">
+                <a:solidFill>
+                  <a:srgbClr val="1A0F5C"/>
+                </a:solidFill>
+                <a:latin typeface="Calibri"/>
+              </a:rPr>
+              <a:t>Indian Institute of Technology Gandhinagar</a:t>
+            </a:r>
+          </a:p>
+        </p:txBody>
+      </p:sp>
+      <p:sp>
+        <p:nvSpPr>
+          <p:cNvPr id="5" name="TextBox 4"/>
+          <p:cNvSpPr txBox="1"/>
+          <p:nvPr/>
+        </p:nvSpPr>
+        <p:spPr>
+          <a:xfrm>
+            <a:off x="1042416" y="420623"/>
+            <a:ext cx="5852160" cy="127381"/>
+          </a:xfrm>
+          <a:prstGeom prst="rect">
+            <a:avLst/>
+          </a:prstGeom>
+          <a:noFill/>
+        </p:spPr>
+        <p:txBody>
+          <a:bodyPr wrap="square" anchor="t" lIns="0" rIns="0" tIns="0" bIns="0">
+            <a:spAutoFit/>
+          </a:bodyPr>
+          <a:lstStyle/>
+          <a:p>
+            <a:pPr algn="l"/>
+            <a:r>
+              <a:rPr sz="550" b="1" i="0" spc="300">
+                <a:solidFill>
+                  <a:srgbClr val="6B6690"/>
+                </a:solidFill>
+                <a:latin typeface="Calibri"/>
+              </a:rPr>
+              <a:t>ADMINISTERED THROUGH THE COMPETENCY ADVANCEMENT ACADEMY</a:t>
+            </a:r>
+          </a:p>
+        </p:txBody>
+      </p:sp>
+      <p:sp>
+        <p:nvSpPr>
+          <p:cNvPr id="6" name="TextBox 5"/>
+          <p:cNvSpPr txBox="1"/>
+          <p:nvPr/>
+        </p:nvSpPr>
+        <p:spPr>
+          <a:xfrm>
+            <a:off x="5992063" y="310896"/>
+            <a:ext cx="5669280" cy="127381"/>
+          </a:xfrm>
+          <a:prstGeom prst="rect">
+            <a:avLst/>
+          </a:prstGeom>
+          <a:noFill/>
+        </p:spPr>
+        <p:txBody>
+          <a:bodyPr wrap="square" anchor="t" lIns="0" rIns="0" tIns="0" bIns="0">
+            <a:spAutoFit/>
+          </a:bodyPr>
+          <a:lstStyle/>
+          <a:p>
+            <a:pPr algn="r"/>
+            <a:r>
+              <a:rPr sz="550" b="1" i="0" spc="300">
+                <a:solidFill>
+                  <a:srgbClr val="6B6690"/>
+                </a:solidFill>
+                <a:latin typeface="Calibri"/>
+              </a:rPr>
+              <a:t>WEEK 4  ·  FRIDAY  ·  FLIPKART, LUCKNOW  ·  ILLUSTRATIVE CASE</a:t>
+            </a:r>
+          </a:p>
+        </p:txBody>
+      </p:sp>
+      <p:sp>
+        <p:nvSpPr>
+          <p:cNvPr id="7" name="TextBox 6"/>
+          <p:cNvSpPr txBox="1"/>
+          <p:nvPr/>
+        </p:nvSpPr>
+        <p:spPr>
+          <a:xfrm>
+            <a:off x="530352" y="676656"/>
+            <a:ext cx="11130991" cy="512064"/>
+          </a:xfrm>
+          <a:prstGeom prst="rect">
+            <a:avLst/>
+          </a:prstGeom>
+          <a:noFill/>
+        </p:spPr>
+        <p:txBody>
+          <a:bodyPr wrap="square" anchor="b" lIns="0" rIns="0" tIns="0" bIns="0">
+            <a:spAutoFit/>
+          </a:bodyPr>
+          <a:lstStyle/>
+          <a:p>
+            <a:pPr algn="l"/>
+            <a:r>
+              <a:rPr sz="2600" b="0" i="0">
+                <a:solidFill>
+                  <a:srgbClr val="1A0F5C"/>
+                </a:solidFill>
+                <a:latin typeface="Georgia"/>
+              </a:rPr>
+              <a:t>Two-wheelers a year: about 2.2 crore, checked</a:t>
+            </a:r>
+          </a:p>
+        </p:txBody>
+      </p:sp>
+      <p:sp>
+        <p:nvSpPr>
+          <p:cNvPr id="8" name="TextBox 7"/>
+          <p:cNvSpPr txBox="1"/>
+          <p:nvPr/>
+        </p:nvSpPr>
+        <p:spPr>
+          <a:xfrm>
+            <a:off x="530352" y="1243584"/>
+            <a:ext cx="11130991" cy="234696"/>
+          </a:xfrm>
+          <a:prstGeom prst="rect">
+            <a:avLst/>
+          </a:prstGeom>
+          <a:noFill/>
+        </p:spPr>
+        <p:txBody>
+          <a:bodyPr wrap="square" anchor="t" lIns="0" rIns="0" tIns="0" bIns="0">
+            <a:spAutoFit/>
+          </a:bodyPr>
+          <a:lstStyle/>
+          <a:p>
+            <a:pPr algn="l"/>
+            <a:r>
+              <a:rPr sz="1200" b="0" i="0">
+                <a:solidFill>
+                  <a:srgbClr val="6B6690"/>
+                </a:solidFill>
+                <a:latin typeface="Calibri"/>
+              </a:rPr>
+              <a:t>How do you size a number from nothing, and check it against something known?</a:t>
+            </a:r>
+          </a:p>
+        </p:txBody>
+      </p:sp>
+      <p:pic>
+        <p:nvPicPr>
+          <p:cNvPr id="9" name="mermaid diagram" descr="629daa93d3849711.png"/>
+          <p:cNvPicPr>
+            <a:picLocks noChangeAspect="1"/>
+          </p:cNvPicPr>
+          <p:nvPr/>
+        </p:nvPicPr>
+        <p:blipFill>
+          <a:blip r:embed="rId5"/>
+          <a:stretch>
+            <a:fillRect/>
+          </a:stretch>
+        </p:blipFill>
+        <p:spPr>
+          <a:xfrm>
+            <a:off x="530352" y="1874794"/>
+            <a:ext cx="11130991" cy="2378416"/>
+          </a:xfrm>
+          <a:prstGeom prst="rect">
+            <a:avLst/>
+          </a:prstGeom>
+        </p:spPr>
+      </p:pic>
+      <p:sp>
+        <p:nvSpPr>
+          <p:cNvPr id="10" name="Rounded Rectangle 9"/>
+          <p:cNvSpPr/>
+          <p:nvPr/>
+        </p:nvSpPr>
+        <p:spPr>
+          <a:xfrm>
+            <a:off x="530352" y="4399514"/>
+            <a:ext cx="11130991" cy="1607820"/>
+          </a:xfrm>
+          <a:prstGeom prst="roundRect">
+            <a:avLst>
+              <a:gd name="adj" fmla="val 8000"/>
+            </a:avLst>
+          </a:prstGeom>
+          <a:solidFill>
+            <a:srgbClr val="F7F5FD"/>
+          </a:solidFill>
+          <a:ln w="9525">
+            <a:solidFill>
+              <a:srgbClr val="E4E1F1"/>
+            </a:solidFill>
+          </a:ln>
+          <a:effectLst/>
+        </p:spPr>
+        <p:style>
+          <a:lnRef idx="1">
+            <a:schemeClr val="accent1"/>
+          </a:lnRef>
+          <a:fillRef idx="3">
+            <a:schemeClr val="accent1"/>
+          </a:fillRef>
+          <a:effectRef idx="2">
+            <a:schemeClr val="accent1"/>
+          </a:effectRef>
+          <a:fontRef idx="minor">
+            <a:schemeClr val="lt1"/>
+          </a:fontRef>
+        </p:style>
+        <p:txBody>
+          <a:bodyPr rtlCol="0" anchor="ctr" wrap="square"/>
+          <a:lstStyle/>
+          <a:p>
+            <a:pPr algn="ctr"/>
+          </a:p>
+        </p:txBody>
+      </p:sp>
+      <p:sp>
+        <p:nvSpPr>
+          <p:cNvPr id="11" name="Rounded Rectangle 10"/>
+          <p:cNvSpPr/>
+          <p:nvPr/>
+        </p:nvSpPr>
+        <p:spPr>
+          <a:xfrm>
+            <a:off x="676656" y="4527530"/>
+            <a:ext cx="45720" cy="1351788"/>
+          </a:xfrm>
+          <a:prstGeom prst="roundRect">
+            <a:avLst>
+              <a:gd name="adj" fmla="val 50000"/>
+            </a:avLst>
+          </a:prstGeom>
+          <a:solidFill>
+            <a:srgbClr val="5B3FD6"/>
+          </a:solidFill>
+          <a:ln>
+            <a:noFill/>
+          </a:ln>
+          <a:effectLst/>
+        </p:spPr>
+        <p:style>
+          <a:lnRef idx="1">
+            <a:schemeClr val="accent1"/>
+          </a:lnRef>
+          <a:fillRef idx="3">
+            <a:schemeClr val="accent1"/>
+          </a:fillRef>
+          <a:effectRef idx="2">
+            <a:schemeClr val="accent1"/>
+          </a:effectRef>
+          <a:fontRef idx="minor">
+            <a:schemeClr val="lt1"/>
+          </a:fontRef>
+        </p:style>
+        <p:txBody>
+          <a:bodyPr rtlCol="0" anchor="ctr" wrap="square"/>
+          <a:lstStyle/>
+          <a:p>
+            <a:pPr algn="ctr"/>
+          </a:p>
+        </p:txBody>
+      </p:sp>
+      <p:sp>
+        <p:nvSpPr>
+          <p:cNvPr id="12" name="TextBox 11"/>
+          <p:cNvSpPr txBox="1"/>
+          <p:nvPr/>
+        </p:nvSpPr>
+        <p:spPr>
+          <a:xfrm>
+            <a:off x="877824" y="4518386"/>
+            <a:ext cx="10564063" cy="1424940"/>
+          </a:xfrm>
+          <a:prstGeom prst="rect">
+            <a:avLst/>
+          </a:prstGeom>
+          <a:noFill/>
+        </p:spPr>
+        <p:txBody>
+          <a:bodyPr wrap="square" anchor="ctr" lIns="0" rIns="0" tIns="0" bIns="0">
+            <a:spAutoFit/>
+          </a:bodyPr>
+          <a:lstStyle/>
+          <a:p>
+            <a:r>
+              <a:rPr sz="1500" b="1">
+                <a:solidFill>
+                  <a:srgbClr val="5B3FD6"/>
+                </a:solidFill>
+                <a:latin typeface="Calibri"/>
+              </a:rPr>
+              <a:t>The catch. </a:t>
+            </a:r>
+            <a:r>
+              <a:rPr sz="1500" b="0" i="0">
+                <a:solidFill>
+                  <a:srgbClr val="1A1440"/>
+                </a:solidFill>
+                <a:latin typeface="Calibri"/>
+              </a:rPr>
+              <a:t>October 2025's two-wheeler retail registrations alone were 31.5 lakh (FADA, the Federation of Automobile Dealers Associations), after a September whose first 21 days were almost quiet ahead of the GST cut; times twelve that is about 3.78 crore, 74 percent above the year: never annualise a peak month. SIAM, the Society of Indian Automobile Manufacturers, counts makers' sales to dealers: 2.17 crore in FY 2025-26 (both releases checked 12 October 2026).</a:t>
+            </a:r>
+          </a:p>
+        </p:txBody>
+      </p:sp>
+      <p:sp>
+        <p:nvSpPr>
+          <p:cNvPr id="13" name="TextBox 12"/>
+          <p:cNvSpPr txBox="1"/>
+          <p:nvPr/>
+        </p:nvSpPr>
+        <p:spPr>
+          <a:xfrm>
+            <a:off x="530352" y="6437376"/>
+            <a:ext cx="9667951" cy="160401"/>
+          </a:xfrm>
+          <a:prstGeom prst="rect">
+            <a:avLst/>
+          </a:prstGeom>
+          <a:noFill/>
+        </p:spPr>
+        <p:txBody>
+          <a:bodyPr wrap="square" anchor="t" lIns="0" rIns="0" tIns="0" bIns="0">
+            <a:spAutoFit/>
+          </a:bodyPr>
+          <a:lstStyle/>
+          <a:p>
+            <a:pPr algn="l"/>
+            <a:r>
+              <a:rPr sz="750" b="0" i="0">
+                <a:solidFill>
+                  <a:srgbClr val="6B6690"/>
+                </a:solidFill>
+                <a:latin typeface="Calibri"/>
+              </a:rPr>
+              <a:t>Week 4 Day 5: how much is coming, and how wrong could we be</a:t>
+            </a:r>
+          </a:p>
+        </p:txBody>
+      </p:sp>
+      <p:sp>
+        <p:nvSpPr>
+          <p:cNvPr id="14" name="TextBox 13"/>
+          <p:cNvSpPr txBox="1"/>
+          <p:nvPr/>
+        </p:nvSpPr>
+        <p:spPr>
+          <a:xfrm>
+            <a:off x="10198303" y="6437376"/>
+            <a:ext cx="1463040" cy="160401"/>
+          </a:xfrm>
+          <a:prstGeom prst="rect">
+            <a:avLst/>
+          </a:prstGeom>
+          <a:noFill/>
+        </p:spPr>
+        <p:txBody>
+          <a:bodyPr wrap="square" anchor="t" lIns="0" rIns="0" tIns="0" bIns="0">
+            <a:spAutoFit/>
+          </a:bodyPr>
+          <a:lstStyle/>
+          <a:p>
+            <a:pPr algn="r"/>
+            <a:r>
+              <a:rPr sz="750" b="0" i="0">
+                <a:solidFill>
+                  <a:srgbClr val="6B6690"/>
+                </a:solidFill>
+                <a:latin typeface="Calibri"/>
+              </a:rPr>
+              <a:t>S9  ·  12 / 15</a:t>
+            </a:r>
+          </a:p>
+        </p:txBody>
+      </p:sp>
+    </p:spTree>
+  </p:cSld>
+  <p:clrMapOvr>
+    <a:masterClrMapping/>
+  </p:clrMapOvr>
+</p:sld>
+</file>
+
+<file path=ppt/slides/slide13.xml><?xml version="1.0" encoding="utf-8"?>
 <p:sld xmlns:a="http://schemas.openxmlformats.org/drawingml/2006/main" xmlns:p="http://schemas.openxmlformats.org/presentationml/2006/main" xmlns:r="http://schemas.openxmlformats.org/officeDocument/2006/relationships">
   <p:cSld>
     <p:spTree>
@@ -5973,7 +8031,7 @@
                 </a:solidFill>
                 <a:latin typeface="Calibri"/>
               </a:rPr>
-              <a:t>S10  ·  10 / 12</a:t>
+              <a:t>S10  ·  13 / 15</a:t>
             </a:r>
           </a:p>
         </p:txBody>
@@ -5986,7 +8044,7 @@
 </p:sld>
 </file>
 
-<file path=ppt/slides/slide11.xml><?xml version="1.0" encoding="utf-8"?>
+<file path=ppt/slides/slide14.xml><?xml version="1.0" encoding="utf-8"?>
 <p:sld xmlns:a="http://schemas.openxmlformats.org/drawingml/2006/main" xmlns:p="http://schemas.openxmlformats.org/presentationml/2006/main" xmlns:r="http://schemas.openxmlformats.org/officeDocument/2006/relationships">
   <p:cSld>
     <p:spTree>
@@ -6724,7 +8782,7 @@
                 </a:solidFill>
                 <a:latin typeface="Calibri"/>
               </a:rPr>
-              <a:t>S11  ·  11 / 12</a:t>
+              <a:t>S11  ·  14 / 15</a:t>
             </a:r>
           </a:p>
         </p:txBody>
@@ -6737,7 +8795,7 @@
 </p:sld>
 </file>
 
-<file path=ppt/slides/slide12.xml><?xml version="1.0" encoding="utf-8"?>
+<file path=ppt/slides/slide15.xml><?xml version="1.0" encoding="utf-8"?>
 <p:sld xmlns:a="http://schemas.openxmlformats.org/drawingml/2006/main" xmlns:p="http://schemas.openxmlformats.org/presentationml/2006/main" xmlns:r="http://schemas.openxmlformats.org/officeDocument/2006/relationships">
   <p:cSld>
     <p:spTree>
@@ -7770,7 +9828,7 @@
                 </a:solidFill>
                 <a:latin typeface="Calibri"/>
               </a:rPr>
-              <a:t>S12  ·  12 / 12</a:t>
+              <a:t>S12  ·  15 / 15</a:t>
             </a:r>
           </a:p>
         </p:txBody>
@@ -7976,6 +10034,1128 @@
                 </a:solidFill>
                 <a:latin typeface="Georgia"/>
               </a:rPr>
+              <a:t>One board for the day, region one: the past's shape</a:t>
+            </a:r>
+          </a:p>
+        </p:txBody>
+      </p:sp>
+      <p:sp>
+        <p:nvSpPr>
+          <p:cNvPr id="8" name="TextBox 7"/>
+          <p:cNvSpPr txBox="1"/>
+          <p:nvPr/>
+        </p:nvSpPr>
+        <p:spPr>
+          <a:xfrm>
+            <a:off x="530352" y="1243584"/>
+            <a:ext cx="11130991" cy="234696"/>
+          </a:xfrm>
+          <a:prstGeom prst="rect">
+            <a:avLst/>
+          </a:prstGeom>
+          <a:noFill/>
+        </p:spPr>
+        <p:txBody>
+          <a:bodyPr wrap="square" anchor="t" lIns="0" rIns="0" tIns="0" bIns="0">
+            <a:spAutoFit/>
+          </a:bodyPr>
+          <a:lstStyle/>
+          <a:p>
+            <a:pPr algn="l"/>
+            <a:r>
+              <a:rPr sz="1200" b="0" i="0">
+                <a:solidFill>
+                  <a:srgbClr val="6B6690"/>
+                </a:solidFill>
+                <a:latin typeface="Calibri"/>
+              </a:rPr>
+              <a:t>Which forecast earns the plan's trust? The board fills one region per chapter.</a:t>
+            </a:r>
+          </a:p>
+        </p:txBody>
+      </p:sp>
+      <p:pic>
+        <p:nvPicPr>
+          <p:cNvPr id="9" name="mermaid diagram" descr="237cc437ae3e0d52.png"/>
+          <p:cNvPicPr>
+            <a:picLocks noChangeAspect="1"/>
+          </p:cNvPicPr>
+          <p:nvPr/>
+        </p:nvPicPr>
+        <p:blipFill>
+          <a:blip r:embed="rId5"/>
+          <a:stretch>
+            <a:fillRect/>
+          </a:stretch>
+        </p:blipFill>
+        <p:spPr>
+          <a:xfrm>
+            <a:off x="2065054" y="1682496"/>
+            <a:ext cx="1716920" cy="4517136"/>
+          </a:xfrm>
+          <a:prstGeom prst="rect">
+            <a:avLst/>
+          </a:prstGeom>
+        </p:spPr>
+      </p:pic>
+      <p:sp>
+        <p:nvSpPr>
+          <p:cNvPr id="10" name="TextBox 9"/>
+          <p:cNvSpPr txBox="1"/>
+          <p:nvPr/>
+        </p:nvSpPr>
+        <p:spPr>
+          <a:xfrm>
+            <a:off x="5761917" y="1956816"/>
+            <a:ext cx="5899425" cy="1048512"/>
+          </a:xfrm>
+          <a:prstGeom prst="rect">
+            <a:avLst/>
+          </a:prstGeom>
+          <a:noFill/>
+        </p:spPr>
+        <p:txBody>
+          <a:bodyPr wrap="square" anchor="t" lIns="0" rIns="0" tIns="0" bIns="0">
+            <a:spAutoFit/>
+          </a:bodyPr>
+          <a:lstStyle/>
+          <a:p>
+            <a:pPr>
+              <a:spcAft>
+                <a:spcPts val="800"/>
+              </a:spcAft>
+            </a:pPr>
+            <a:r>
+              <a:rPr sz="1600" b="0" i="0">
+                <a:solidFill>
+                  <a:srgbClr val="1A1440"/>
+                </a:solidFill>
+                <a:latin typeface="Calibri"/>
+              </a:rPr>
+              <a:t>Chapter 1 filled this region: both years peak two weeks before Diwali's week, so a copy counts weeks from the festival.</a:t>
+            </a:r>
+          </a:p>
+        </p:txBody>
+      </p:sp>
+      <p:sp>
+        <p:nvSpPr>
+          <p:cNvPr id="11" name="TextBox 10"/>
+          <p:cNvSpPr txBox="1"/>
+          <p:nvPr/>
+        </p:nvSpPr>
+        <p:spPr>
+          <a:xfrm>
+            <a:off x="530352" y="6437376"/>
+            <a:ext cx="9667951" cy="160401"/>
+          </a:xfrm>
+          <a:prstGeom prst="rect">
+            <a:avLst/>
+          </a:prstGeom>
+          <a:noFill/>
+        </p:spPr>
+        <p:txBody>
+          <a:bodyPr wrap="square" anchor="t" lIns="0" rIns="0" tIns="0" bIns="0">
+            <a:spAutoFit/>
+          </a:bodyPr>
+          <a:lstStyle/>
+          <a:p>
+            <a:pPr algn="l"/>
+            <a:r>
+              <a:rPr sz="750" b="0" i="0">
+                <a:solidFill>
+                  <a:srgbClr val="6B6690"/>
+                </a:solidFill>
+                <a:latin typeface="Calibri"/>
+              </a:rPr>
+              <a:t>Week 4 Day 5: how much is coming, and how wrong could we be</a:t>
+            </a:r>
+          </a:p>
+        </p:txBody>
+      </p:sp>
+      <p:sp>
+        <p:nvSpPr>
+          <p:cNvPr id="12" name="TextBox 11"/>
+          <p:cNvSpPr txBox="1"/>
+          <p:nvPr/>
+        </p:nvSpPr>
+        <p:spPr>
+          <a:xfrm>
+            <a:off x="10198303" y="6437376"/>
+            <a:ext cx="1463040" cy="160401"/>
+          </a:xfrm>
+          <a:prstGeom prst="rect">
+            <a:avLst/>
+          </a:prstGeom>
+          <a:noFill/>
+        </p:spPr>
+        <p:txBody>
+          <a:bodyPr wrap="square" anchor="t" lIns="0" rIns="0" tIns="0" bIns="0">
+            <a:spAutoFit/>
+          </a:bodyPr>
+          <a:lstStyle/>
+          <a:p>
+            <a:pPr algn="r"/>
+            <a:r>
+              <a:rPr sz="750" b="0" i="0">
+                <a:solidFill>
+                  <a:srgbClr val="6B6690"/>
+                </a:solidFill>
+                <a:latin typeface="Calibri"/>
+              </a:rPr>
+              <a:t>S1a  ·  2 / 15</a:t>
+            </a:r>
+          </a:p>
+        </p:txBody>
+      </p:sp>
+    </p:spTree>
+  </p:cSld>
+  <p:clrMapOvr>
+    <a:masterClrMapping/>
+  </p:clrMapOvr>
+</p:sld>
+</file>
+
+<file path=ppt/slides/slide3.xml><?xml version="1.0" encoding="utf-8"?>
+<p:sld xmlns:a="http://schemas.openxmlformats.org/drawingml/2006/main" xmlns:p="http://schemas.openxmlformats.org/presentationml/2006/main" xmlns:r="http://schemas.openxmlformats.org/officeDocument/2006/relationships">
+  <p:cSld>
+    <p:spTree>
+      <p:nvGrpSpPr>
+        <p:cNvPr id="1" name=""/>
+        <p:cNvGrpSpPr/>
+        <p:nvPr/>
+      </p:nvGrpSpPr>
+      <p:grpSpPr/>
+      <p:pic>
+        <p:nvPicPr>
+          <p:cNvPr id="2" name="Picture 1" descr="bg_light.jpg"/>
+          <p:cNvPicPr>
+            <a:picLocks noChangeAspect="1"/>
+          </p:cNvPicPr>
+          <p:nvPr/>
+        </p:nvPicPr>
+        <p:blipFill>
+          <a:blip r:embed="rId2"/>
+          <a:stretch>
+            <a:fillRect/>
+          </a:stretch>
+        </p:blipFill>
+        <p:spPr>
+          <a:xfrm>
+            <a:off x="0" y="0"/>
+            <a:ext cx="12191695" cy="6858000"/>
+          </a:xfrm>
+          <a:prstGeom prst="rect">
+            <a:avLst/>
+          </a:prstGeom>
+        </p:spPr>
+      </p:pic>
+      <p:pic>
+        <p:nvPicPr>
+          <p:cNvPr id="3" name="Picture 2" descr="iitgn_logo.png"/>
+          <p:cNvPicPr>
+            <a:picLocks noChangeAspect="1"/>
+          </p:cNvPicPr>
+          <p:nvPr/>
+        </p:nvPicPr>
+        <p:blipFill>
+          <a:blip r:embed="rId3"/>
+          <a:stretch>
+            <a:fillRect/>
+          </a:stretch>
+        </p:blipFill>
+        <p:spPr>
+          <a:xfrm>
+            <a:off x="530352" y="201168"/>
+            <a:ext cx="420624" cy="420624"/>
+          </a:xfrm>
+          <a:prstGeom prst="rect">
+            <a:avLst/>
+          </a:prstGeom>
+        </p:spPr>
+      </p:pic>
+      <p:sp>
+        <p:nvSpPr>
+          <p:cNvPr id="4" name="TextBox 3"/>
+          <p:cNvSpPr txBox="1"/>
+          <p:nvPr/>
+        </p:nvSpPr>
+        <p:spPr>
+          <a:xfrm>
+            <a:off x="1042416" y="228600"/>
+            <a:ext cx="5120640" cy="185166"/>
+          </a:xfrm>
+          <a:prstGeom prst="rect">
+            <a:avLst/>
+          </a:prstGeom>
+          <a:noFill/>
+        </p:spPr>
+        <p:txBody>
+          <a:bodyPr wrap="square" anchor="t" lIns="0" rIns="0" tIns="0" bIns="0">
+            <a:spAutoFit/>
+          </a:bodyPr>
+          <a:lstStyle/>
+          <a:p>
+            <a:pPr algn="l"/>
+            <a:r>
+              <a:rPr sz="900" b="1" i="0">
+                <a:solidFill>
+                  <a:srgbClr val="1A0F5C"/>
+                </a:solidFill>
+                <a:latin typeface="Calibri"/>
+              </a:rPr>
+              <a:t>Indian Institute of Technology Gandhinagar</a:t>
+            </a:r>
+          </a:p>
+        </p:txBody>
+      </p:sp>
+      <p:sp>
+        <p:nvSpPr>
+          <p:cNvPr id="5" name="TextBox 4"/>
+          <p:cNvSpPr txBox="1"/>
+          <p:nvPr/>
+        </p:nvSpPr>
+        <p:spPr>
+          <a:xfrm>
+            <a:off x="1042416" y="420623"/>
+            <a:ext cx="5852160" cy="127381"/>
+          </a:xfrm>
+          <a:prstGeom prst="rect">
+            <a:avLst/>
+          </a:prstGeom>
+          <a:noFill/>
+        </p:spPr>
+        <p:txBody>
+          <a:bodyPr wrap="square" anchor="t" lIns="0" rIns="0" tIns="0" bIns="0">
+            <a:spAutoFit/>
+          </a:bodyPr>
+          <a:lstStyle/>
+          <a:p>
+            <a:pPr algn="l"/>
+            <a:r>
+              <a:rPr sz="550" b="1" i="0" spc="300">
+                <a:solidFill>
+                  <a:srgbClr val="6B6690"/>
+                </a:solidFill>
+                <a:latin typeface="Calibri"/>
+              </a:rPr>
+              <a:t>ADMINISTERED THROUGH THE COMPETENCY ADVANCEMENT ACADEMY</a:t>
+            </a:r>
+          </a:p>
+        </p:txBody>
+      </p:sp>
+      <p:sp>
+        <p:nvSpPr>
+          <p:cNvPr id="6" name="TextBox 5"/>
+          <p:cNvSpPr txBox="1"/>
+          <p:nvPr/>
+        </p:nvSpPr>
+        <p:spPr>
+          <a:xfrm>
+            <a:off x="5992063" y="310896"/>
+            <a:ext cx="5669280" cy="127381"/>
+          </a:xfrm>
+          <a:prstGeom prst="rect">
+            <a:avLst/>
+          </a:prstGeom>
+          <a:noFill/>
+        </p:spPr>
+        <p:txBody>
+          <a:bodyPr wrap="square" anchor="t" lIns="0" rIns="0" tIns="0" bIns="0">
+            <a:spAutoFit/>
+          </a:bodyPr>
+          <a:lstStyle/>
+          <a:p>
+            <a:pPr algn="r"/>
+            <a:r>
+              <a:rPr sz="550" b="1" i="0" spc="300">
+                <a:solidFill>
+                  <a:srgbClr val="6B6690"/>
+                </a:solidFill>
+                <a:latin typeface="Calibri"/>
+              </a:rPr>
+              <a:t>WEEK 4  ·  FRIDAY  ·  FLIPKART, LUCKNOW  ·  ILLUSTRATIVE CASE</a:t>
+            </a:r>
+          </a:p>
+        </p:txBody>
+      </p:sp>
+      <p:sp>
+        <p:nvSpPr>
+          <p:cNvPr id="7" name="TextBox 6"/>
+          <p:cNvSpPr txBox="1"/>
+          <p:nvPr/>
+        </p:nvSpPr>
+        <p:spPr>
+          <a:xfrm>
+            <a:off x="530352" y="676656"/>
+            <a:ext cx="11130991" cy="512064"/>
+          </a:xfrm>
+          <a:prstGeom prst="rect">
+            <a:avLst/>
+          </a:prstGeom>
+          <a:noFill/>
+        </p:spPr>
+        <p:txBody>
+          <a:bodyPr wrap="square" anchor="b" lIns="0" rIns="0" tIns="0" bIns="0">
+            <a:spAutoFit/>
+          </a:bodyPr>
+          <a:lstStyle/>
+          <a:p>
+            <a:pPr algn="l"/>
+            <a:r>
+              <a:rPr sz="2600" b="0" i="0">
+                <a:solidFill>
+                  <a:srgbClr val="1A0F5C"/>
+                </a:solidFill>
+                <a:latin typeface="Georgia"/>
+              </a:rPr>
+              <a:t>Region two: the copy any forecast must beat</a:t>
+            </a:r>
+          </a:p>
+        </p:txBody>
+      </p:sp>
+      <p:sp>
+        <p:nvSpPr>
+          <p:cNvPr id="8" name="TextBox 7"/>
+          <p:cNvSpPr txBox="1"/>
+          <p:nvPr/>
+        </p:nvSpPr>
+        <p:spPr>
+          <a:xfrm>
+            <a:off x="530352" y="1243584"/>
+            <a:ext cx="11130991" cy="234696"/>
+          </a:xfrm>
+          <a:prstGeom prst="rect">
+            <a:avLst/>
+          </a:prstGeom>
+          <a:noFill/>
+        </p:spPr>
+        <p:txBody>
+          <a:bodyPr wrap="square" anchor="t" lIns="0" rIns="0" tIns="0" bIns="0">
+            <a:spAutoFit/>
+          </a:bodyPr>
+          <a:lstStyle/>
+          <a:p>
+            <a:pPr algn="l"/>
+            <a:r>
+              <a:rPr sz="1200" b="0" i="0">
+                <a:solidFill>
+                  <a:srgbClr val="6B6690"/>
+                </a:solidFill>
+                <a:latin typeface="Calibri"/>
+              </a:rPr>
+              <a:t>What must a forecast beat before it books a shift?</a:t>
+            </a:r>
+          </a:p>
+        </p:txBody>
+      </p:sp>
+      <p:pic>
+        <p:nvPicPr>
+          <p:cNvPr id="9" name="mermaid diagram" descr="9effdfacb80c6c2f.png"/>
+          <p:cNvPicPr>
+            <a:picLocks noChangeAspect="1"/>
+          </p:cNvPicPr>
+          <p:nvPr/>
+        </p:nvPicPr>
+        <p:blipFill>
+          <a:blip r:embed="rId5"/>
+          <a:stretch>
+            <a:fillRect/>
+          </a:stretch>
+        </p:blipFill>
+        <p:spPr>
+          <a:xfrm>
+            <a:off x="1152089" y="1682496"/>
+            <a:ext cx="3542851" cy="4517136"/>
+          </a:xfrm>
+          <a:prstGeom prst="rect">
+            <a:avLst/>
+          </a:prstGeom>
+        </p:spPr>
+      </p:pic>
+      <p:sp>
+        <p:nvSpPr>
+          <p:cNvPr id="10" name="TextBox 9"/>
+          <p:cNvSpPr txBox="1"/>
+          <p:nvPr/>
+        </p:nvSpPr>
+        <p:spPr>
+          <a:xfrm>
+            <a:off x="5761917" y="1956816"/>
+            <a:ext cx="5899425" cy="772160"/>
+          </a:xfrm>
+          <a:prstGeom prst="rect">
+            <a:avLst/>
+          </a:prstGeom>
+          <a:noFill/>
+        </p:spPr>
+        <p:txBody>
+          <a:bodyPr wrap="square" anchor="t" lIns="0" rIns="0" tIns="0" bIns="0">
+            <a:spAutoFit/>
+          </a:bodyPr>
+          <a:lstStyle/>
+          <a:p>
+            <a:pPr>
+              <a:spcAft>
+                <a:spcPts val="800"/>
+              </a:spcAft>
+            </a:pPr>
+            <a:r>
+              <a:rPr sz="1600" b="0" i="0">
+                <a:solidFill>
+                  <a:srgbClr val="1A1440"/>
+                </a:solidFill>
+                <a:latin typeface="Calibri"/>
+              </a:rPr>
+              <a:t>Chapter 2 filled this one: a forecast earns trust only on weeks it never saw, against a copy of last year.</a:t>
+            </a:r>
+          </a:p>
+        </p:txBody>
+      </p:sp>
+      <p:sp>
+        <p:nvSpPr>
+          <p:cNvPr id="11" name="TextBox 10"/>
+          <p:cNvSpPr txBox="1"/>
+          <p:nvPr/>
+        </p:nvSpPr>
+        <p:spPr>
+          <a:xfrm>
+            <a:off x="530352" y="6437376"/>
+            <a:ext cx="9667951" cy="160401"/>
+          </a:xfrm>
+          <a:prstGeom prst="rect">
+            <a:avLst/>
+          </a:prstGeom>
+          <a:noFill/>
+        </p:spPr>
+        <p:txBody>
+          <a:bodyPr wrap="square" anchor="t" lIns="0" rIns="0" tIns="0" bIns="0">
+            <a:spAutoFit/>
+          </a:bodyPr>
+          <a:lstStyle/>
+          <a:p>
+            <a:pPr algn="l"/>
+            <a:r>
+              <a:rPr sz="750" b="0" i="0">
+                <a:solidFill>
+                  <a:srgbClr val="6B6690"/>
+                </a:solidFill>
+                <a:latin typeface="Calibri"/>
+              </a:rPr>
+              <a:t>Week 4 Day 5: how much is coming, and how wrong could we be</a:t>
+            </a:r>
+          </a:p>
+        </p:txBody>
+      </p:sp>
+      <p:sp>
+        <p:nvSpPr>
+          <p:cNvPr id="12" name="TextBox 11"/>
+          <p:cNvSpPr txBox="1"/>
+          <p:nvPr/>
+        </p:nvSpPr>
+        <p:spPr>
+          <a:xfrm>
+            <a:off x="10198303" y="6437376"/>
+            <a:ext cx="1463040" cy="160401"/>
+          </a:xfrm>
+          <a:prstGeom prst="rect">
+            <a:avLst/>
+          </a:prstGeom>
+          <a:noFill/>
+        </p:spPr>
+        <p:txBody>
+          <a:bodyPr wrap="square" anchor="t" lIns="0" rIns="0" tIns="0" bIns="0">
+            <a:spAutoFit/>
+          </a:bodyPr>
+          <a:lstStyle/>
+          <a:p>
+            <a:pPr algn="r"/>
+            <a:r>
+              <a:rPr sz="750" b="0" i="0">
+                <a:solidFill>
+                  <a:srgbClr val="6B6690"/>
+                </a:solidFill>
+                <a:latin typeface="Calibri"/>
+              </a:rPr>
+              <a:t>S1b  ·  3 / 15</a:t>
+            </a:r>
+          </a:p>
+        </p:txBody>
+      </p:sp>
+    </p:spTree>
+  </p:cSld>
+  <p:clrMapOvr>
+    <a:masterClrMapping/>
+  </p:clrMapOvr>
+</p:sld>
+</file>
+
+<file path=ppt/slides/slide4.xml><?xml version="1.0" encoding="utf-8"?>
+<p:sld xmlns:a="http://schemas.openxmlformats.org/drawingml/2006/main" xmlns:p="http://schemas.openxmlformats.org/presentationml/2006/main" xmlns:r="http://schemas.openxmlformats.org/officeDocument/2006/relationships">
+  <p:cSld>
+    <p:spTree>
+      <p:nvGrpSpPr>
+        <p:cNvPr id="1" name=""/>
+        <p:cNvGrpSpPr/>
+        <p:nvPr/>
+      </p:nvGrpSpPr>
+      <p:grpSpPr/>
+      <p:pic>
+        <p:nvPicPr>
+          <p:cNvPr id="2" name="Picture 1" descr="bg_light.jpg"/>
+          <p:cNvPicPr>
+            <a:picLocks noChangeAspect="1"/>
+          </p:cNvPicPr>
+          <p:nvPr/>
+        </p:nvPicPr>
+        <p:blipFill>
+          <a:blip r:embed="rId2"/>
+          <a:stretch>
+            <a:fillRect/>
+          </a:stretch>
+        </p:blipFill>
+        <p:spPr>
+          <a:xfrm>
+            <a:off x="0" y="0"/>
+            <a:ext cx="12191695" cy="6858000"/>
+          </a:xfrm>
+          <a:prstGeom prst="rect">
+            <a:avLst/>
+          </a:prstGeom>
+        </p:spPr>
+      </p:pic>
+      <p:pic>
+        <p:nvPicPr>
+          <p:cNvPr id="3" name="Picture 2" descr="iitgn_logo.png"/>
+          <p:cNvPicPr>
+            <a:picLocks noChangeAspect="1"/>
+          </p:cNvPicPr>
+          <p:nvPr/>
+        </p:nvPicPr>
+        <p:blipFill>
+          <a:blip r:embed="rId3"/>
+          <a:stretch>
+            <a:fillRect/>
+          </a:stretch>
+        </p:blipFill>
+        <p:spPr>
+          <a:xfrm>
+            <a:off x="530352" y="201168"/>
+            <a:ext cx="420624" cy="420624"/>
+          </a:xfrm>
+          <a:prstGeom prst="rect">
+            <a:avLst/>
+          </a:prstGeom>
+        </p:spPr>
+      </p:pic>
+      <p:sp>
+        <p:nvSpPr>
+          <p:cNvPr id="4" name="TextBox 3"/>
+          <p:cNvSpPr txBox="1"/>
+          <p:nvPr/>
+        </p:nvSpPr>
+        <p:spPr>
+          <a:xfrm>
+            <a:off x="1042416" y="228600"/>
+            <a:ext cx="5120640" cy="185166"/>
+          </a:xfrm>
+          <a:prstGeom prst="rect">
+            <a:avLst/>
+          </a:prstGeom>
+          <a:noFill/>
+        </p:spPr>
+        <p:txBody>
+          <a:bodyPr wrap="square" anchor="t" lIns="0" rIns="0" tIns="0" bIns="0">
+            <a:spAutoFit/>
+          </a:bodyPr>
+          <a:lstStyle/>
+          <a:p>
+            <a:pPr algn="l"/>
+            <a:r>
+              <a:rPr sz="900" b="1" i="0">
+                <a:solidFill>
+                  <a:srgbClr val="1A0F5C"/>
+                </a:solidFill>
+                <a:latin typeface="Calibri"/>
+              </a:rPr>
+              <a:t>Indian Institute of Technology Gandhinagar</a:t>
+            </a:r>
+          </a:p>
+        </p:txBody>
+      </p:sp>
+      <p:sp>
+        <p:nvSpPr>
+          <p:cNvPr id="5" name="TextBox 4"/>
+          <p:cNvSpPr txBox="1"/>
+          <p:nvPr/>
+        </p:nvSpPr>
+        <p:spPr>
+          <a:xfrm>
+            <a:off x="1042416" y="420623"/>
+            <a:ext cx="5852160" cy="127381"/>
+          </a:xfrm>
+          <a:prstGeom prst="rect">
+            <a:avLst/>
+          </a:prstGeom>
+          <a:noFill/>
+        </p:spPr>
+        <p:txBody>
+          <a:bodyPr wrap="square" anchor="t" lIns="0" rIns="0" tIns="0" bIns="0">
+            <a:spAutoFit/>
+          </a:bodyPr>
+          <a:lstStyle/>
+          <a:p>
+            <a:pPr algn="l"/>
+            <a:r>
+              <a:rPr sz="550" b="1" i="0" spc="300">
+                <a:solidFill>
+                  <a:srgbClr val="6B6690"/>
+                </a:solidFill>
+                <a:latin typeface="Calibri"/>
+              </a:rPr>
+              <a:t>ADMINISTERED THROUGH THE COMPETENCY ADVANCEMENT ACADEMY</a:t>
+            </a:r>
+          </a:p>
+        </p:txBody>
+      </p:sp>
+      <p:sp>
+        <p:nvSpPr>
+          <p:cNvPr id="6" name="TextBox 5"/>
+          <p:cNvSpPr txBox="1"/>
+          <p:nvPr/>
+        </p:nvSpPr>
+        <p:spPr>
+          <a:xfrm>
+            <a:off x="5992063" y="310896"/>
+            <a:ext cx="5669280" cy="127381"/>
+          </a:xfrm>
+          <a:prstGeom prst="rect">
+            <a:avLst/>
+          </a:prstGeom>
+          <a:noFill/>
+        </p:spPr>
+        <p:txBody>
+          <a:bodyPr wrap="square" anchor="t" lIns="0" rIns="0" tIns="0" bIns="0">
+            <a:spAutoFit/>
+          </a:bodyPr>
+          <a:lstStyle/>
+          <a:p>
+            <a:pPr algn="r"/>
+            <a:r>
+              <a:rPr sz="550" b="1" i="0" spc="300">
+                <a:solidFill>
+                  <a:srgbClr val="6B6690"/>
+                </a:solidFill>
+                <a:latin typeface="Calibri"/>
+              </a:rPr>
+              <a:t>WEEK 4  ·  FRIDAY  ·  FLIPKART, LUCKNOW  ·  ILLUSTRATIVE CASE</a:t>
+            </a:r>
+          </a:p>
+        </p:txBody>
+      </p:sp>
+      <p:sp>
+        <p:nvSpPr>
+          <p:cNvPr id="7" name="TextBox 6"/>
+          <p:cNvSpPr txBox="1"/>
+          <p:nvPr/>
+        </p:nvSpPr>
+        <p:spPr>
+          <a:xfrm>
+            <a:off x="530352" y="676656"/>
+            <a:ext cx="11130991" cy="512064"/>
+          </a:xfrm>
+          <a:prstGeom prst="rect">
+            <a:avLst/>
+          </a:prstGeom>
+          <a:noFill/>
+        </p:spPr>
+        <p:txBody>
+          <a:bodyPr wrap="square" anchor="b" lIns="0" rIns="0" tIns="0" bIns="0">
+            <a:spAutoFit/>
+          </a:bodyPr>
+          <a:lstStyle/>
+          <a:p>
+            <a:pPr algn="l"/>
+            <a:r>
+              <a:rPr sz="2600" b="0" i="0">
+                <a:solidFill>
+                  <a:srgbClr val="1A0F5C"/>
+                </a:solidFill>
+                <a:latin typeface="Georgia"/>
+              </a:rPr>
+              <a:t>Region three: how wrong, and in which direction</a:t>
+            </a:r>
+          </a:p>
+        </p:txBody>
+      </p:sp>
+      <p:sp>
+        <p:nvSpPr>
+          <p:cNvPr id="8" name="TextBox 7"/>
+          <p:cNvSpPr txBox="1"/>
+          <p:nvPr/>
+        </p:nvSpPr>
+        <p:spPr>
+          <a:xfrm>
+            <a:off x="530352" y="1243584"/>
+            <a:ext cx="11130991" cy="234696"/>
+          </a:xfrm>
+          <a:prstGeom prst="rect">
+            <a:avLst/>
+          </a:prstGeom>
+          <a:noFill/>
+        </p:spPr>
+        <p:txBody>
+          <a:bodyPr wrap="square" anchor="t" lIns="0" rIns="0" tIns="0" bIns="0">
+            <a:spAutoFit/>
+          </a:bodyPr>
+          <a:lstStyle/>
+          <a:p>
+            <a:pPr algn="l"/>
+            <a:r>
+              <a:rPr sz="1200" b="0" i="0">
+                <a:solidFill>
+                  <a:srgbClr val="6B6690"/>
+                </a:solidFill>
+                <a:latin typeface="Calibri"/>
+              </a:rPr>
+              <a:t>How wrong could the plan be, and which way costs more?</a:t>
+            </a:r>
+          </a:p>
+        </p:txBody>
+      </p:sp>
+      <p:pic>
+        <p:nvPicPr>
+          <p:cNvPr id="9" name="mermaid diagram" descr="6f5eb04a19ef72fd.png"/>
+          <p:cNvPicPr>
+            <a:picLocks noChangeAspect="1"/>
+          </p:cNvPicPr>
+          <p:nvPr/>
+        </p:nvPicPr>
+        <p:blipFill>
+          <a:blip r:embed="rId5"/>
+          <a:stretch>
+            <a:fillRect/>
+          </a:stretch>
+        </p:blipFill>
+        <p:spPr>
+          <a:xfrm>
+            <a:off x="530352" y="1951096"/>
+            <a:ext cx="4786326" cy="3979934"/>
+          </a:xfrm>
+          <a:prstGeom prst="rect">
+            <a:avLst/>
+          </a:prstGeom>
+        </p:spPr>
+      </p:pic>
+      <p:sp>
+        <p:nvSpPr>
+          <p:cNvPr id="10" name="TextBox 9"/>
+          <p:cNvSpPr txBox="1"/>
+          <p:nvPr/>
+        </p:nvSpPr>
+        <p:spPr>
+          <a:xfrm>
+            <a:off x="5761917" y="1956816"/>
+            <a:ext cx="5899425" cy="1048512"/>
+          </a:xfrm>
+          <a:prstGeom prst="rect">
+            <a:avLst/>
+          </a:prstGeom>
+          <a:noFill/>
+        </p:spPr>
+        <p:txBody>
+          <a:bodyPr wrap="square" anchor="t" lIns="0" rIns="0" tIns="0" bIns="0">
+            <a:spAutoFit/>
+          </a:bodyPr>
+          <a:lstStyle/>
+          <a:p>
+            <a:pPr>
+              <a:spcAft>
+                <a:spcPts val="800"/>
+              </a:spcAft>
+            </a:pPr>
+            <a:r>
+              <a:rPr sz="1600" b="0" i="0">
+                <a:solidFill>
+                  <a:srgbClr val="1A1440"/>
+                </a:solidFill>
+                <a:latin typeface="Calibri"/>
+              </a:rPr>
+              <a:t>Chapter 3 filled the last: a late shipment costs 4.6 times a spare one, so the plan sits 2.6 percent above the forecast.</a:t>
+            </a:r>
+          </a:p>
+        </p:txBody>
+      </p:sp>
+      <p:sp>
+        <p:nvSpPr>
+          <p:cNvPr id="11" name="TextBox 10"/>
+          <p:cNvSpPr txBox="1"/>
+          <p:nvPr/>
+        </p:nvSpPr>
+        <p:spPr>
+          <a:xfrm>
+            <a:off x="530352" y="6437376"/>
+            <a:ext cx="9667951" cy="160401"/>
+          </a:xfrm>
+          <a:prstGeom prst="rect">
+            <a:avLst/>
+          </a:prstGeom>
+          <a:noFill/>
+        </p:spPr>
+        <p:txBody>
+          <a:bodyPr wrap="square" anchor="t" lIns="0" rIns="0" tIns="0" bIns="0">
+            <a:spAutoFit/>
+          </a:bodyPr>
+          <a:lstStyle/>
+          <a:p>
+            <a:pPr algn="l"/>
+            <a:r>
+              <a:rPr sz="750" b="0" i="0">
+                <a:solidFill>
+                  <a:srgbClr val="6B6690"/>
+                </a:solidFill>
+                <a:latin typeface="Calibri"/>
+              </a:rPr>
+              <a:t>Week 4 Day 5: how much is coming, and how wrong could we be</a:t>
+            </a:r>
+          </a:p>
+        </p:txBody>
+      </p:sp>
+      <p:sp>
+        <p:nvSpPr>
+          <p:cNvPr id="12" name="TextBox 11"/>
+          <p:cNvSpPr txBox="1"/>
+          <p:nvPr/>
+        </p:nvSpPr>
+        <p:spPr>
+          <a:xfrm>
+            <a:off x="10198303" y="6437376"/>
+            <a:ext cx="1463040" cy="160401"/>
+          </a:xfrm>
+          <a:prstGeom prst="rect">
+            <a:avLst/>
+          </a:prstGeom>
+          <a:noFill/>
+        </p:spPr>
+        <p:txBody>
+          <a:bodyPr wrap="square" anchor="t" lIns="0" rIns="0" tIns="0" bIns="0">
+            <a:spAutoFit/>
+          </a:bodyPr>
+          <a:lstStyle/>
+          <a:p>
+            <a:pPr algn="r"/>
+            <a:r>
+              <a:rPr sz="750" b="0" i="0">
+                <a:solidFill>
+                  <a:srgbClr val="6B6690"/>
+                </a:solidFill>
+                <a:latin typeface="Calibri"/>
+              </a:rPr>
+              <a:t>S1c  ·  4 / 15</a:t>
+            </a:r>
+          </a:p>
+        </p:txBody>
+      </p:sp>
+    </p:spTree>
+  </p:cSld>
+  <p:clrMapOvr>
+    <a:masterClrMapping/>
+  </p:clrMapOvr>
+</p:sld>
+</file>
+
+<file path=ppt/slides/slide5.xml><?xml version="1.0" encoding="utf-8"?>
+<p:sld xmlns:a="http://schemas.openxmlformats.org/drawingml/2006/main" xmlns:p="http://schemas.openxmlformats.org/presentationml/2006/main" xmlns:r="http://schemas.openxmlformats.org/officeDocument/2006/relationships">
+  <p:cSld>
+    <p:spTree>
+      <p:nvGrpSpPr>
+        <p:cNvPr id="1" name=""/>
+        <p:cNvGrpSpPr/>
+        <p:nvPr/>
+      </p:nvGrpSpPr>
+      <p:grpSpPr/>
+      <p:pic>
+        <p:nvPicPr>
+          <p:cNvPr id="2" name="Picture 1" descr="bg_light.jpg"/>
+          <p:cNvPicPr>
+            <a:picLocks noChangeAspect="1"/>
+          </p:cNvPicPr>
+          <p:nvPr/>
+        </p:nvPicPr>
+        <p:blipFill>
+          <a:blip r:embed="rId2"/>
+          <a:stretch>
+            <a:fillRect/>
+          </a:stretch>
+        </p:blipFill>
+        <p:spPr>
+          <a:xfrm>
+            <a:off x="0" y="0"/>
+            <a:ext cx="12191695" cy="6858000"/>
+          </a:xfrm>
+          <a:prstGeom prst="rect">
+            <a:avLst/>
+          </a:prstGeom>
+        </p:spPr>
+      </p:pic>
+      <p:pic>
+        <p:nvPicPr>
+          <p:cNvPr id="3" name="Picture 2" descr="iitgn_logo.png"/>
+          <p:cNvPicPr>
+            <a:picLocks noChangeAspect="1"/>
+          </p:cNvPicPr>
+          <p:nvPr/>
+        </p:nvPicPr>
+        <p:blipFill>
+          <a:blip r:embed="rId3"/>
+          <a:stretch>
+            <a:fillRect/>
+          </a:stretch>
+        </p:blipFill>
+        <p:spPr>
+          <a:xfrm>
+            <a:off x="530352" y="201168"/>
+            <a:ext cx="420624" cy="420624"/>
+          </a:xfrm>
+          <a:prstGeom prst="rect">
+            <a:avLst/>
+          </a:prstGeom>
+        </p:spPr>
+      </p:pic>
+      <p:sp>
+        <p:nvSpPr>
+          <p:cNvPr id="4" name="TextBox 3"/>
+          <p:cNvSpPr txBox="1"/>
+          <p:nvPr/>
+        </p:nvSpPr>
+        <p:spPr>
+          <a:xfrm>
+            <a:off x="1042416" y="228600"/>
+            <a:ext cx="5120640" cy="185166"/>
+          </a:xfrm>
+          <a:prstGeom prst="rect">
+            <a:avLst/>
+          </a:prstGeom>
+          <a:noFill/>
+        </p:spPr>
+        <p:txBody>
+          <a:bodyPr wrap="square" anchor="t" lIns="0" rIns="0" tIns="0" bIns="0">
+            <a:spAutoFit/>
+          </a:bodyPr>
+          <a:lstStyle/>
+          <a:p>
+            <a:pPr algn="l"/>
+            <a:r>
+              <a:rPr sz="900" b="1" i="0">
+                <a:solidFill>
+                  <a:srgbClr val="1A0F5C"/>
+                </a:solidFill>
+                <a:latin typeface="Calibri"/>
+              </a:rPr>
+              <a:t>Indian Institute of Technology Gandhinagar</a:t>
+            </a:r>
+          </a:p>
+        </p:txBody>
+      </p:sp>
+      <p:sp>
+        <p:nvSpPr>
+          <p:cNvPr id="5" name="TextBox 4"/>
+          <p:cNvSpPr txBox="1"/>
+          <p:nvPr/>
+        </p:nvSpPr>
+        <p:spPr>
+          <a:xfrm>
+            <a:off x="1042416" y="420623"/>
+            <a:ext cx="5852160" cy="127381"/>
+          </a:xfrm>
+          <a:prstGeom prst="rect">
+            <a:avLst/>
+          </a:prstGeom>
+          <a:noFill/>
+        </p:spPr>
+        <p:txBody>
+          <a:bodyPr wrap="square" anchor="t" lIns="0" rIns="0" tIns="0" bIns="0">
+            <a:spAutoFit/>
+          </a:bodyPr>
+          <a:lstStyle/>
+          <a:p>
+            <a:pPr algn="l"/>
+            <a:r>
+              <a:rPr sz="550" b="1" i="0" spc="300">
+                <a:solidFill>
+                  <a:srgbClr val="6B6690"/>
+                </a:solidFill>
+                <a:latin typeface="Calibri"/>
+              </a:rPr>
+              <a:t>ADMINISTERED THROUGH THE COMPETENCY ADVANCEMENT ACADEMY</a:t>
+            </a:r>
+          </a:p>
+        </p:txBody>
+      </p:sp>
+      <p:sp>
+        <p:nvSpPr>
+          <p:cNvPr id="6" name="TextBox 5"/>
+          <p:cNvSpPr txBox="1"/>
+          <p:nvPr/>
+        </p:nvSpPr>
+        <p:spPr>
+          <a:xfrm>
+            <a:off x="5992063" y="310896"/>
+            <a:ext cx="5669280" cy="127381"/>
+          </a:xfrm>
+          <a:prstGeom prst="rect">
+            <a:avLst/>
+          </a:prstGeom>
+          <a:noFill/>
+        </p:spPr>
+        <p:txBody>
+          <a:bodyPr wrap="square" anchor="t" lIns="0" rIns="0" tIns="0" bIns="0">
+            <a:spAutoFit/>
+          </a:bodyPr>
+          <a:lstStyle/>
+          <a:p>
+            <a:pPr algn="r"/>
+            <a:r>
+              <a:rPr sz="550" b="1" i="0" spc="300">
+                <a:solidFill>
+                  <a:srgbClr val="6B6690"/>
+                </a:solidFill>
+                <a:latin typeface="Calibri"/>
+              </a:rPr>
+              <a:t>WEEK 4  ·  FRIDAY  ·  FLIPKART, LUCKNOW  ·  ILLUSTRATIVE CASE</a:t>
+            </a:r>
+          </a:p>
+        </p:txBody>
+      </p:sp>
+      <p:sp>
+        <p:nvSpPr>
+          <p:cNvPr id="7" name="TextBox 6"/>
+          <p:cNvSpPr txBox="1"/>
+          <p:nvPr/>
+        </p:nvSpPr>
+        <p:spPr>
+          <a:xfrm>
+            <a:off x="530352" y="676656"/>
+            <a:ext cx="11130991" cy="512064"/>
+          </a:xfrm>
+          <a:prstGeom prst="rect">
+            <a:avLst/>
+          </a:prstGeom>
+          <a:noFill/>
+        </p:spPr>
+        <p:txBody>
+          <a:bodyPr wrap="square" anchor="b" lIns="0" rIns="0" tIns="0" bIns="0">
+            <a:spAutoFit/>
+          </a:bodyPr>
+          <a:lstStyle/>
+          <a:p>
+            <a:pPr algn="l"/>
+            <a:r>
+              <a:rPr sz="2600" b="0" i="0">
+                <a:solidFill>
+                  <a:srgbClr val="1A0F5C"/>
+                </a:solidFill>
+                <a:latin typeface="Georgia"/>
+              </a:rPr>
               <a:t>The staffing note: five lines, one page</a:t>
             </a:r>
           </a:p>
@@ -9261,7 +12441,7 @@
                 </a:solidFill>
                 <a:latin typeface="Calibri"/>
               </a:rPr>
-              <a:t>S2  ·  2 / 12</a:t>
+              <a:t>S2  ·  5 / 15</a:t>
             </a:r>
           </a:p>
         </p:txBody>
@@ -9274,7 +12454,7 @@
 </p:sld>
 </file>
 
-<file path=ppt/slides/slide3.xml><?xml version="1.0" encoding="utf-8"?>
+<file path=ppt/slides/slide6.xml><?xml version="1.0" encoding="utf-8"?>
 <p:sld xmlns:a="http://schemas.openxmlformats.org/drawingml/2006/main" xmlns:p="http://schemas.openxmlformats.org/presentationml/2006/main" xmlns:r="http://schemas.openxmlformats.org/officeDocument/2006/relationships">
   <p:cSld>
     <p:spTree>
@@ -9782,7 +12962,7 @@
                 </a:solidFill>
                 <a:latin typeface="Calibri"/>
               </a:rPr>
-              <a:t>S3  ·  3 / 12</a:t>
+              <a:t>S3  ·  6 / 15</a:t>
             </a:r>
           </a:p>
         </p:txBody>
@@ -9795,7 +12975,7 @@
 </p:sld>
 </file>
 
-<file path=ppt/slides/slide4.xml><?xml version="1.0" encoding="utf-8"?>
+<file path=ppt/slides/slide7.xml><?xml version="1.0" encoding="utf-8"?>
 <p:sld xmlns:a="http://schemas.openxmlformats.org/drawingml/2006/main" xmlns:p="http://schemas.openxmlformats.org/presentationml/2006/main" xmlns:r="http://schemas.openxmlformats.org/officeDocument/2006/relationships">
   <p:cSld>
     <p:spTree>
@@ -10547,7 +13727,7 @@
                 </a:solidFill>
                 <a:latin typeface="Calibri"/>
               </a:rPr>
-              <a:t>S4  ·  4 / 12</a:t>
+              <a:t>S4  ·  7 / 15</a:t>
             </a:r>
           </a:p>
         </p:txBody>
@@ -10560,7 +13740,7 @@
 </p:sld>
 </file>
 
-<file path=ppt/slides/slide5.xml><?xml version="1.0" encoding="utf-8"?>
+<file path=ppt/slides/slide8.xml><?xml version="1.0" encoding="utf-8"?>
 <p:sld xmlns:a="http://schemas.openxmlformats.org/drawingml/2006/main" xmlns:p="http://schemas.openxmlformats.org/presentationml/2006/main" xmlns:r="http://schemas.openxmlformats.org/officeDocument/2006/relationships">
   <p:cSld>
     <p:spTree>
@@ -10951,7 +14131,7 @@
                 </a:solidFill>
                 <a:latin typeface="Calibri"/>
               </a:rPr>
-              <a:t>S5  ·  5 / 12</a:t>
+              <a:t>S5  ·  8 / 15</a:t>
             </a:r>
           </a:p>
         </p:txBody>
@@ -10964,7 +14144,7 @@
 </p:sld>
 </file>
 
-<file path=ppt/slides/slide6.xml><?xml version="1.0" encoding="utf-8"?>
+<file path=ppt/slides/slide9.xml><?xml version="1.0" encoding="utf-8"?>
 <p:sld xmlns:a="http://schemas.openxmlformats.org/drawingml/2006/main" xmlns:p="http://schemas.openxmlformats.org/presentationml/2006/main" xmlns:r="http://schemas.openxmlformats.org/officeDocument/2006/relationships">
   <p:cSld>
     <p:spTree>
@@ -11564,1832 +14744,7 @@
                 </a:solidFill>
                 <a:latin typeface="Calibri"/>
               </a:rPr>
-              <a:t>S6  ·  6 / 12</a:t>
-            </a:r>
-          </a:p>
-        </p:txBody>
-      </p:sp>
-    </p:spTree>
-  </p:cSld>
-  <p:clrMapOvr>
-    <a:masterClrMapping/>
-  </p:clrMapOvr>
-</p:sld>
-</file>
-
-<file path=ppt/slides/slide7.xml><?xml version="1.0" encoding="utf-8"?>
-<p:sld xmlns:a="http://schemas.openxmlformats.org/drawingml/2006/main" xmlns:p="http://schemas.openxmlformats.org/presentationml/2006/main" xmlns:r="http://schemas.openxmlformats.org/officeDocument/2006/relationships">
-  <p:cSld>
-    <p:spTree>
-      <p:nvGrpSpPr>
-        <p:cNvPr id="1" name=""/>
-        <p:cNvGrpSpPr/>
-        <p:nvPr/>
-      </p:nvGrpSpPr>
-      <p:grpSpPr/>
-      <p:pic>
-        <p:nvPicPr>
-          <p:cNvPr id="2" name="Picture 1" descr="bg_light.jpg"/>
-          <p:cNvPicPr>
-            <a:picLocks noChangeAspect="1"/>
-          </p:cNvPicPr>
-          <p:nvPr/>
-        </p:nvPicPr>
-        <p:blipFill>
-          <a:blip r:embed="rId2"/>
-          <a:stretch>
-            <a:fillRect/>
-          </a:stretch>
-        </p:blipFill>
-        <p:spPr>
-          <a:xfrm>
-            <a:off x="0" y="0"/>
-            <a:ext cx="12191695" cy="6858000"/>
-          </a:xfrm>
-          <a:prstGeom prst="rect">
-            <a:avLst/>
-          </a:prstGeom>
-        </p:spPr>
-      </p:pic>
-      <p:pic>
-        <p:nvPicPr>
-          <p:cNvPr id="3" name="Picture 2" descr="iitgn_logo.png"/>
-          <p:cNvPicPr>
-            <a:picLocks noChangeAspect="1"/>
-          </p:cNvPicPr>
-          <p:nvPr/>
-        </p:nvPicPr>
-        <p:blipFill>
-          <a:blip r:embed="rId3"/>
-          <a:stretch>
-            <a:fillRect/>
-          </a:stretch>
-        </p:blipFill>
-        <p:spPr>
-          <a:xfrm>
-            <a:off x="530352" y="201168"/>
-            <a:ext cx="420624" cy="420624"/>
-          </a:xfrm>
-          <a:prstGeom prst="rect">
-            <a:avLst/>
-          </a:prstGeom>
-        </p:spPr>
-      </p:pic>
-      <p:sp>
-        <p:nvSpPr>
-          <p:cNvPr id="4" name="TextBox 3"/>
-          <p:cNvSpPr txBox="1"/>
-          <p:nvPr/>
-        </p:nvSpPr>
-        <p:spPr>
-          <a:xfrm>
-            <a:off x="1042416" y="228600"/>
-            <a:ext cx="5120640" cy="185166"/>
-          </a:xfrm>
-          <a:prstGeom prst="rect">
-            <a:avLst/>
-          </a:prstGeom>
-          <a:noFill/>
-        </p:spPr>
-        <p:txBody>
-          <a:bodyPr wrap="square" anchor="t" lIns="0" rIns="0" tIns="0" bIns="0">
-            <a:spAutoFit/>
-          </a:bodyPr>
-          <a:lstStyle/>
-          <a:p>
-            <a:pPr algn="l"/>
-            <a:r>
-              <a:rPr sz="900" b="1" i="0">
-                <a:solidFill>
-                  <a:srgbClr val="1A0F5C"/>
-                </a:solidFill>
-                <a:latin typeface="Calibri"/>
-              </a:rPr>
-              <a:t>Indian Institute of Technology Gandhinagar</a:t>
-            </a:r>
-          </a:p>
-        </p:txBody>
-      </p:sp>
-      <p:sp>
-        <p:nvSpPr>
-          <p:cNvPr id="5" name="TextBox 4"/>
-          <p:cNvSpPr txBox="1"/>
-          <p:nvPr/>
-        </p:nvSpPr>
-        <p:spPr>
-          <a:xfrm>
-            <a:off x="1042416" y="420623"/>
-            <a:ext cx="5852160" cy="127381"/>
-          </a:xfrm>
-          <a:prstGeom prst="rect">
-            <a:avLst/>
-          </a:prstGeom>
-          <a:noFill/>
-        </p:spPr>
-        <p:txBody>
-          <a:bodyPr wrap="square" anchor="t" lIns="0" rIns="0" tIns="0" bIns="0">
-            <a:spAutoFit/>
-          </a:bodyPr>
-          <a:lstStyle/>
-          <a:p>
-            <a:pPr algn="l"/>
-            <a:r>
-              <a:rPr sz="550" b="1" i="0" spc="300">
-                <a:solidFill>
-                  <a:srgbClr val="6B6690"/>
-                </a:solidFill>
-                <a:latin typeface="Calibri"/>
-              </a:rPr>
-              <a:t>ADMINISTERED THROUGH THE COMPETENCY ADVANCEMENT ACADEMY</a:t>
-            </a:r>
-          </a:p>
-        </p:txBody>
-      </p:sp>
-      <p:sp>
-        <p:nvSpPr>
-          <p:cNvPr id="6" name="TextBox 5"/>
-          <p:cNvSpPr txBox="1"/>
-          <p:nvPr/>
-        </p:nvSpPr>
-        <p:spPr>
-          <a:xfrm>
-            <a:off x="5992063" y="310896"/>
-            <a:ext cx="5669280" cy="127381"/>
-          </a:xfrm>
-          <a:prstGeom prst="rect">
-            <a:avLst/>
-          </a:prstGeom>
-          <a:noFill/>
-        </p:spPr>
-        <p:txBody>
-          <a:bodyPr wrap="square" anchor="t" lIns="0" rIns="0" tIns="0" bIns="0">
-            <a:spAutoFit/>
-          </a:bodyPr>
-          <a:lstStyle/>
-          <a:p>
-            <a:pPr algn="r"/>
-            <a:r>
-              <a:rPr sz="550" b="1" i="0" spc="300">
-                <a:solidFill>
-                  <a:srgbClr val="6B6690"/>
-                </a:solidFill>
-                <a:latin typeface="Calibri"/>
-              </a:rPr>
-              <a:t>WEEK 4  ·  FRIDAY  ·  FLIPKART, LUCKNOW  ·  ILLUSTRATIVE CASE</a:t>
-            </a:r>
-          </a:p>
-        </p:txBody>
-      </p:sp>
-      <p:sp>
-        <p:nvSpPr>
-          <p:cNvPr id="7" name="TextBox 6"/>
-          <p:cNvSpPr txBox="1"/>
-          <p:nvPr/>
-        </p:nvSpPr>
-        <p:spPr>
-          <a:xfrm>
-            <a:off x="530352" y="676656"/>
-            <a:ext cx="11130991" cy="512064"/>
-          </a:xfrm>
-          <a:prstGeom prst="rect">
-            <a:avLst/>
-          </a:prstGeom>
-          <a:noFill/>
-        </p:spPr>
-        <p:txBody>
-          <a:bodyPr wrap="square" anchor="b" lIns="0" rIns="0" tIns="0" bIns="0">
-            <a:spAutoFit/>
-          </a:bodyPr>
-          <a:lstStyle/>
-          <a:p>
-            <a:pPr algn="l"/>
-            <a:r>
-              <a:rPr sz="2600" b="0" i="0">
-                <a:solidFill>
-                  <a:srgbClr val="1A0F5C"/>
-                </a:solidFill>
-                <a:latin typeface="Georgia"/>
-              </a:rPr>
-              <a:t>Three follow-ups that change the question</a:t>
-            </a:r>
-          </a:p>
-        </p:txBody>
-      </p:sp>
-      <p:sp>
-        <p:nvSpPr>
-          <p:cNvPr id="8" name="TextBox 7"/>
-          <p:cNvSpPr txBox="1"/>
-          <p:nvPr/>
-        </p:nvSpPr>
-        <p:spPr>
-          <a:xfrm>
-            <a:off x="530352" y="1243584"/>
-            <a:ext cx="11130991" cy="234696"/>
-          </a:xfrm>
-          <a:prstGeom prst="rect">
-            <a:avLst/>
-          </a:prstGeom>
-          <a:noFill/>
-        </p:spPr>
-        <p:txBody>
-          <a:bodyPr wrap="square" anchor="t" lIns="0" rIns="0" tIns="0" bIns="0">
-            <a:spAutoFit/>
-          </a:bodyPr>
-          <a:lstStyle/>
-          <a:p>
-            <a:pPr algn="l"/>
-            <a:r>
-              <a:rPr sz="1200" b="0" i="0">
-                <a:solidFill>
-                  <a:srgbClr val="6B6690"/>
-                </a:solidFill>
-                <a:latin typeface="Calibri"/>
-              </a:rPr>
-              <a:t>What does the interviewer ask next, and what does a strong candidate say?</a:t>
-            </a:r>
-          </a:p>
-        </p:txBody>
-      </p:sp>
-      <p:sp>
-        <p:nvSpPr>
-          <p:cNvPr id="9" name="Rectangle 8"/>
-          <p:cNvSpPr/>
-          <p:nvPr/>
-        </p:nvSpPr>
-        <p:spPr>
-          <a:xfrm>
-            <a:off x="2324557" y="2523744"/>
-            <a:ext cx="7542580" cy="18288"/>
-          </a:xfrm>
-          <a:prstGeom prst="rect">
-            <a:avLst/>
-          </a:prstGeom>
-          <a:solidFill>
-            <a:srgbClr val="CFC9EE"/>
-          </a:solidFill>
-          <a:ln>
-            <a:noFill/>
-          </a:ln>
-          <a:effectLst/>
-        </p:spPr>
-        <p:style>
-          <a:lnRef idx="1">
-            <a:schemeClr val="accent1"/>
-          </a:lnRef>
-          <a:fillRef idx="3">
-            <a:schemeClr val="accent1"/>
-          </a:fillRef>
-          <a:effectRef idx="2">
-            <a:schemeClr val="accent1"/>
-          </a:effectRef>
-          <a:fontRef idx="minor">
-            <a:schemeClr val="lt1"/>
-          </a:fontRef>
-        </p:style>
-        <p:txBody>
-          <a:bodyPr rtlCol="0" anchor="ctr" wrap="square"/>
-          <a:lstStyle/>
-          <a:p>
-            <a:pPr algn="ctr"/>
-          </a:p>
-        </p:txBody>
-      </p:sp>
-      <p:sp>
-        <p:nvSpPr>
-          <p:cNvPr id="10" name="TextBox 9"/>
-          <p:cNvSpPr txBox="1"/>
-          <p:nvPr/>
-        </p:nvSpPr>
-        <p:spPr>
-          <a:xfrm>
-            <a:off x="530352" y="1956816"/>
-            <a:ext cx="3588410" cy="168656"/>
-          </a:xfrm>
-          <a:prstGeom prst="rect">
-            <a:avLst/>
-          </a:prstGeom>
-          <a:noFill/>
-        </p:spPr>
-        <p:txBody>
-          <a:bodyPr wrap="square" anchor="t" lIns="0" rIns="0" tIns="0" bIns="0">
-            <a:spAutoFit/>
-          </a:bodyPr>
-          <a:lstStyle/>
-          <a:p>
-            <a:pPr algn="ctr"/>
-            <a:r>
-              <a:rPr sz="800" b="1" i="0" spc="250">
-                <a:solidFill>
-                  <a:srgbClr val="5B3FD6"/>
-                </a:solidFill>
-                <a:latin typeface="Calibri"/>
-              </a:rPr>
-              <a:t>FOLLOW-UP 1</a:t>
-            </a:r>
-          </a:p>
-        </p:txBody>
-      </p:sp>
-      <p:sp>
-        <p:nvSpPr>
-          <p:cNvPr id="11" name="Oval 10"/>
-          <p:cNvSpPr/>
-          <p:nvPr/>
-        </p:nvSpPr>
-        <p:spPr>
-          <a:xfrm>
-            <a:off x="2223973" y="2432304"/>
-            <a:ext cx="201168" cy="201168"/>
-          </a:xfrm>
-          <a:prstGeom prst="ellipse">
-            <a:avLst/>
-          </a:prstGeom>
-          <a:solidFill>
-            <a:srgbClr val="5B3FD6"/>
-          </a:solidFill>
-          <a:ln>
-            <a:noFill/>
-          </a:ln>
-          <a:effectLst/>
-        </p:spPr>
-        <p:style>
-          <a:lnRef idx="1">
-            <a:schemeClr val="accent1"/>
-          </a:lnRef>
-          <a:fillRef idx="3">
-            <a:schemeClr val="accent1"/>
-          </a:fillRef>
-          <a:effectRef idx="2">
-            <a:schemeClr val="accent1"/>
-          </a:effectRef>
-          <a:fontRef idx="minor">
-            <a:schemeClr val="lt1"/>
-          </a:fontRef>
-        </p:style>
-        <p:txBody>
-          <a:bodyPr rtlCol="0" anchor="ctr" wrap="square"/>
-          <a:lstStyle/>
-          <a:p>
-            <a:pPr algn="ctr"/>
-          </a:p>
-        </p:txBody>
-      </p:sp>
-      <p:sp>
-        <p:nvSpPr>
-          <p:cNvPr id="12" name="Rounded Rectangle 11"/>
-          <p:cNvSpPr/>
-          <p:nvPr/>
-        </p:nvSpPr>
-        <p:spPr>
-          <a:xfrm>
-            <a:off x="530352" y="2843784"/>
-            <a:ext cx="3588410" cy="1422400"/>
-          </a:xfrm>
-          <a:prstGeom prst="roundRect">
-            <a:avLst>
-              <a:gd name="adj" fmla="val 5000"/>
-            </a:avLst>
-          </a:prstGeom>
-          <a:solidFill>
-            <a:srgbClr val="FFFFFF"/>
-          </a:solidFill>
-          <a:ln w="9525">
-            <a:solidFill>
-              <a:srgbClr val="E4E1F1"/>
-            </a:solidFill>
-          </a:ln>
-          <a:effectLst>
-            <a:outerShdw blurRad="76200" dist="19050" dir="5400000" algn="bl" rotWithShape="0">
-              <a:srgbClr val="1A0F5C">
-                <a:alpha val="12000"/>
-              </a:srgbClr>
-            </a:outerShdw>
-          </a:effectLst>
-        </p:spPr>
-        <p:style>
-          <a:lnRef idx="1">
-            <a:schemeClr val="accent1"/>
-          </a:lnRef>
-          <a:fillRef idx="3">
-            <a:schemeClr val="accent1"/>
-          </a:fillRef>
-          <a:effectRef idx="2">
-            <a:schemeClr val="accent1"/>
-          </a:effectRef>
-          <a:fontRef idx="minor">
-            <a:schemeClr val="lt1"/>
-          </a:fontRef>
-        </p:style>
-        <p:txBody>
-          <a:bodyPr rtlCol="0" anchor="ctr" wrap="square"/>
-          <a:lstStyle/>
-          <a:p>
-            <a:pPr algn="ctr"/>
-          </a:p>
-        </p:txBody>
-      </p:sp>
-      <p:sp>
-        <p:nvSpPr>
-          <p:cNvPr id="13" name="TextBox 12"/>
-          <p:cNvSpPr txBox="1"/>
-          <p:nvPr/>
-        </p:nvSpPr>
-        <p:spPr>
-          <a:xfrm>
-            <a:off x="694944" y="2990088"/>
-            <a:ext cx="3259226" cy="251205"/>
-          </a:xfrm>
-          <a:prstGeom prst="rect">
-            <a:avLst/>
-          </a:prstGeom>
-          <a:noFill/>
-        </p:spPr>
-        <p:txBody>
-          <a:bodyPr wrap="square" anchor="t" lIns="0" rIns="0" tIns="0" bIns="0">
-            <a:spAutoFit/>
-          </a:bodyPr>
-          <a:lstStyle/>
-          <a:p>
-            <a:pPr algn="l"/>
-            <a:r>
-              <a:rPr sz="1300" b="1" i="0">
-                <a:solidFill>
-                  <a:srgbClr val="1A0F5C"/>
-                </a:solidFill>
-                <a:latin typeface="Calibri"/>
-              </a:rPr>
-              <a:t>MAE or MAPE, and when?</a:t>
-            </a:r>
-          </a:p>
-        </p:txBody>
-      </p:sp>
-      <p:sp>
-        <p:nvSpPr>
-          <p:cNvPr id="14" name="TextBox 13"/>
-          <p:cNvSpPr txBox="1"/>
-          <p:nvPr/>
-        </p:nvSpPr>
-        <p:spPr>
-          <a:xfrm>
-            <a:off x="694944" y="3277870"/>
-            <a:ext cx="3259226" cy="531876"/>
-          </a:xfrm>
-          <a:prstGeom prst="rect">
-            <a:avLst/>
-          </a:prstGeom>
-          <a:noFill/>
-        </p:spPr>
-        <p:txBody>
-          <a:bodyPr wrap="square" anchor="t" lIns="0" rIns="0" tIns="0" bIns="0">
-            <a:spAutoFit/>
-          </a:bodyPr>
-          <a:lstStyle/>
-          <a:p>
-            <a:pPr algn="l"/>
-            <a:r>
-              <a:rPr sz="1000" b="0" i="0">
-                <a:solidFill>
-                  <a:srgbClr val="6B6690"/>
-                </a:solidFill>
-                <a:latin typeface="Calibri"/>
-              </a:rPr>
-              <a:t>Shipments when the cost is per shipment; MASE or WAPE across centres, since MAPE explodes near zero and punishes forecasts that land high.</a:t>
-            </a:r>
-          </a:p>
-        </p:txBody>
-      </p:sp>
-      <p:sp>
-        <p:nvSpPr>
-          <p:cNvPr id="15" name="TextBox 14"/>
-          <p:cNvSpPr txBox="1"/>
-          <p:nvPr/>
-        </p:nvSpPr>
-        <p:spPr>
-          <a:xfrm>
-            <a:off x="4301642" y="1956816"/>
-            <a:ext cx="3588410" cy="168656"/>
-          </a:xfrm>
-          <a:prstGeom prst="rect">
-            <a:avLst/>
-          </a:prstGeom>
-          <a:noFill/>
-        </p:spPr>
-        <p:txBody>
-          <a:bodyPr wrap="square" anchor="t" lIns="0" rIns="0" tIns="0" bIns="0">
-            <a:spAutoFit/>
-          </a:bodyPr>
-          <a:lstStyle/>
-          <a:p>
-            <a:pPr algn="ctr"/>
-            <a:r>
-              <a:rPr sz="800" b="1" i="0" spc="250">
-                <a:solidFill>
-                  <a:srgbClr val="5B3FD6"/>
-                </a:solidFill>
-                <a:latin typeface="Calibri"/>
-              </a:rPr>
-              <a:t>FOLLOW-UP 2</a:t>
-            </a:r>
-          </a:p>
-        </p:txBody>
-      </p:sp>
-      <p:sp>
-        <p:nvSpPr>
-          <p:cNvPr id="16" name="Oval 15"/>
-          <p:cNvSpPr/>
-          <p:nvPr/>
-        </p:nvSpPr>
-        <p:spPr>
-          <a:xfrm>
-            <a:off x="5995263" y="2432304"/>
-            <a:ext cx="201168" cy="201168"/>
-          </a:xfrm>
-          <a:prstGeom prst="ellipse">
-            <a:avLst/>
-          </a:prstGeom>
-          <a:solidFill>
-            <a:srgbClr val="5B3FD6"/>
-          </a:solidFill>
-          <a:ln>
-            <a:noFill/>
-          </a:ln>
-          <a:effectLst/>
-        </p:spPr>
-        <p:style>
-          <a:lnRef idx="1">
-            <a:schemeClr val="accent1"/>
-          </a:lnRef>
-          <a:fillRef idx="3">
-            <a:schemeClr val="accent1"/>
-          </a:fillRef>
-          <a:effectRef idx="2">
-            <a:schemeClr val="accent1"/>
-          </a:effectRef>
-          <a:fontRef idx="minor">
-            <a:schemeClr val="lt1"/>
-          </a:fontRef>
-        </p:style>
-        <p:txBody>
-          <a:bodyPr rtlCol="0" anchor="ctr" wrap="square"/>
-          <a:lstStyle/>
-          <a:p>
-            <a:pPr algn="ctr"/>
-          </a:p>
-        </p:txBody>
-      </p:sp>
-      <p:sp>
-        <p:nvSpPr>
-          <p:cNvPr id="17" name="Rounded Rectangle 16"/>
-          <p:cNvSpPr/>
-          <p:nvPr/>
-        </p:nvSpPr>
-        <p:spPr>
-          <a:xfrm>
-            <a:off x="4301642" y="2843784"/>
-            <a:ext cx="3588410" cy="1422400"/>
-          </a:xfrm>
-          <a:prstGeom prst="roundRect">
-            <a:avLst>
-              <a:gd name="adj" fmla="val 5000"/>
-            </a:avLst>
-          </a:prstGeom>
-          <a:solidFill>
-            <a:srgbClr val="FFFFFF"/>
-          </a:solidFill>
-          <a:ln w="9525">
-            <a:solidFill>
-              <a:srgbClr val="E4E1F1"/>
-            </a:solidFill>
-          </a:ln>
-          <a:effectLst>
-            <a:outerShdw blurRad="76200" dist="19050" dir="5400000" algn="bl" rotWithShape="0">
-              <a:srgbClr val="1A0F5C">
-                <a:alpha val="12000"/>
-              </a:srgbClr>
-            </a:outerShdw>
-          </a:effectLst>
-        </p:spPr>
-        <p:style>
-          <a:lnRef idx="1">
-            <a:schemeClr val="accent1"/>
-          </a:lnRef>
-          <a:fillRef idx="3">
-            <a:schemeClr val="accent1"/>
-          </a:fillRef>
-          <a:effectRef idx="2">
-            <a:schemeClr val="accent1"/>
-          </a:effectRef>
-          <a:fontRef idx="minor">
-            <a:schemeClr val="lt1"/>
-          </a:fontRef>
-        </p:style>
-        <p:txBody>
-          <a:bodyPr rtlCol="0" anchor="ctr" wrap="square"/>
-          <a:lstStyle/>
-          <a:p>
-            <a:pPr algn="ctr"/>
-          </a:p>
-        </p:txBody>
-      </p:sp>
-      <p:sp>
-        <p:nvSpPr>
-          <p:cNvPr id="18" name="TextBox 17"/>
-          <p:cNvSpPr txBox="1"/>
-          <p:nvPr/>
-        </p:nvSpPr>
-        <p:spPr>
-          <a:xfrm>
-            <a:off x="4466234" y="2990088"/>
-            <a:ext cx="3259226" cy="465836"/>
-          </a:xfrm>
-          <a:prstGeom prst="rect">
-            <a:avLst/>
-          </a:prstGeom>
-          <a:noFill/>
-        </p:spPr>
-        <p:txBody>
-          <a:bodyPr wrap="square" anchor="t" lIns="0" rIns="0" tIns="0" bIns="0">
-            <a:spAutoFit/>
-          </a:bodyPr>
-          <a:lstStyle/>
-          <a:p>
-            <a:pPr algn="l"/>
-            <a:r>
-              <a:rPr sz="1300" b="1" i="0">
-                <a:solidFill>
-                  <a:srgbClr val="1A0F5C"/>
-                </a:solidFill>
-                <a:latin typeface="Calibri"/>
-              </a:rPr>
-              <a:t>The festival moves three weeks: what breaks?</a:t>
-            </a:r>
-          </a:p>
-        </p:txBody>
-      </p:sp>
-      <p:sp>
-        <p:nvSpPr>
-          <p:cNvPr id="19" name="TextBox 18"/>
-          <p:cNvSpPr txBox="1"/>
-          <p:nvPr/>
-        </p:nvSpPr>
-        <p:spPr>
-          <a:xfrm>
-            <a:off x="4466234" y="3492500"/>
-            <a:ext cx="3259226" cy="531876"/>
-          </a:xfrm>
-          <a:prstGeom prst="rect">
-            <a:avLst/>
-          </a:prstGeom>
-          <a:noFill/>
-        </p:spPr>
-        <p:txBody>
-          <a:bodyPr wrap="square" anchor="t" lIns="0" rIns="0" tIns="0" bIns="0">
-            <a:spAutoFit/>
-          </a:bodyPr>
-          <a:lstStyle/>
-          <a:p>
-            <a:pPr algn="l"/>
-            <a:r>
-              <a:rPr sz="1000" b="0" i="0">
-                <a:solidFill>
-                  <a:srgbClr val="6B6690"/>
-                </a:solidFill>
-                <a:latin typeface="Calibri"/>
-              </a:rPr>
-              <a:t>Every calendar copy, the seasonal naive and finance's rule; the festival-aligned copy moves with it.</a:t>
-            </a:r>
-          </a:p>
-        </p:txBody>
-      </p:sp>
-      <p:sp>
-        <p:nvSpPr>
-          <p:cNvPr id="20" name="TextBox 19"/>
-          <p:cNvSpPr txBox="1"/>
-          <p:nvPr/>
-        </p:nvSpPr>
-        <p:spPr>
-          <a:xfrm>
-            <a:off x="8072932" y="1956816"/>
-            <a:ext cx="3588410" cy="168656"/>
-          </a:xfrm>
-          <a:prstGeom prst="rect">
-            <a:avLst/>
-          </a:prstGeom>
-          <a:noFill/>
-        </p:spPr>
-        <p:txBody>
-          <a:bodyPr wrap="square" anchor="t" lIns="0" rIns="0" tIns="0" bIns="0">
-            <a:spAutoFit/>
-          </a:bodyPr>
-          <a:lstStyle/>
-          <a:p>
-            <a:pPr algn="ctr"/>
-            <a:r>
-              <a:rPr sz="800" b="1" i="0" spc="250">
-                <a:solidFill>
-                  <a:srgbClr val="5B3FD6"/>
-                </a:solidFill>
-                <a:latin typeface="Calibri"/>
-              </a:rPr>
-              <a:t>FOLLOW-UP 3</a:t>
-            </a:r>
-          </a:p>
-        </p:txBody>
-      </p:sp>
-      <p:sp>
-        <p:nvSpPr>
-          <p:cNvPr id="21" name="Oval 20"/>
-          <p:cNvSpPr/>
-          <p:nvPr/>
-        </p:nvSpPr>
-        <p:spPr>
-          <a:xfrm>
-            <a:off x="9766554" y="2432304"/>
-            <a:ext cx="201168" cy="201168"/>
-          </a:xfrm>
-          <a:prstGeom prst="ellipse">
-            <a:avLst/>
-          </a:prstGeom>
-          <a:solidFill>
-            <a:srgbClr val="D9A7FF"/>
-          </a:solidFill>
-          <a:ln>
-            <a:noFill/>
-          </a:ln>
-          <a:effectLst/>
-        </p:spPr>
-        <p:style>
-          <a:lnRef idx="1">
-            <a:schemeClr val="accent1"/>
-          </a:lnRef>
-          <a:fillRef idx="3">
-            <a:schemeClr val="accent1"/>
-          </a:fillRef>
-          <a:effectRef idx="2">
-            <a:schemeClr val="accent1"/>
-          </a:effectRef>
-          <a:fontRef idx="minor">
-            <a:schemeClr val="lt1"/>
-          </a:fontRef>
-        </p:style>
-        <p:txBody>
-          <a:bodyPr rtlCol="0" anchor="ctr" wrap="square"/>
-          <a:lstStyle/>
-          <a:p>
-            <a:pPr algn="ctr"/>
-          </a:p>
-        </p:txBody>
-      </p:sp>
-      <p:sp>
-        <p:nvSpPr>
-          <p:cNvPr id="22" name="Rounded Rectangle 21"/>
-          <p:cNvSpPr/>
-          <p:nvPr/>
-        </p:nvSpPr>
-        <p:spPr>
-          <a:xfrm>
-            <a:off x="8072932" y="2843784"/>
-            <a:ext cx="3588410" cy="1422400"/>
-          </a:xfrm>
-          <a:prstGeom prst="roundRect">
-            <a:avLst>
-              <a:gd name="adj" fmla="val 5000"/>
-            </a:avLst>
-          </a:prstGeom>
-          <a:gradFill rotWithShape="1">
-            <a:gsLst>
-              <a:gs pos="0">
-                <a:srgbClr val="2C1A86"/>
-              </a:gs>
-              <a:gs pos="100000">
-                <a:srgbClr val="1A0F5C"/>
-              </a:gs>
-            </a:gsLst>
-            <a:lin scaled="0" ang="16200000"/>
-          </a:gradFill>
-          <a:ln>
-            <a:noFill/>
-          </a:ln>
-          <a:effectLst>
-            <a:outerShdw blurRad="76200" dist="19050" dir="5400000" algn="bl" rotWithShape="0">
-              <a:srgbClr val="1A0F5C">
-                <a:alpha val="12000"/>
-              </a:srgbClr>
-            </a:outerShdw>
-          </a:effectLst>
-        </p:spPr>
-        <p:style>
-          <a:lnRef idx="1">
-            <a:schemeClr val="accent1"/>
-          </a:lnRef>
-          <a:fillRef idx="3">
-            <a:schemeClr val="accent1"/>
-          </a:fillRef>
-          <a:effectRef idx="2">
-            <a:schemeClr val="accent1"/>
-          </a:effectRef>
-          <a:fontRef idx="minor">
-            <a:schemeClr val="lt1"/>
-          </a:fontRef>
-        </p:style>
-        <p:txBody>
-          <a:bodyPr rtlCol="0" anchor="ctr" wrap="square"/>
-          <a:lstStyle/>
-          <a:p>
-            <a:pPr algn="ctr"/>
-          </a:p>
-        </p:txBody>
-      </p:sp>
-      <p:sp>
-        <p:nvSpPr>
-          <p:cNvPr id="23" name="TextBox 22"/>
-          <p:cNvSpPr txBox="1"/>
-          <p:nvPr/>
-        </p:nvSpPr>
-        <p:spPr>
-          <a:xfrm>
-            <a:off x="8237524" y="2990088"/>
-            <a:ext cx="3259226" cy="251205"/>
-          </a:xfrm>
-          <a:prstGeom prst="rect">
-            <a:avLst/>
-          </a:prstGeom>
-          <a:noFill/>
-        </p:spPr>
-        <p:txBody>
-          <a:bodyPr wrap="square" anchor="t" lIns="0" rIns="0" tIns="0" bIns="0">
-            <a:spAutoFit/>
-          </a:bodyPr>
-          <a:lstStyle/>
-          <a:p>
-            <a:pPr algn="l"/>
-            <a:r>
-              <a:rPr sz="1300" b="1" i="0">
-                <a:solidFill>
-                  <a:srgbClr val="FFFFFF"/>
-                </a:solidFill>
-                <a:latin typeface="Calibri"/>
-              </a:rPr>
-              <a:t>What did a forecast cost Zillow?</a:t>
-            </a:r>
-          </a:p>
-        </p:txBody>
-      </p:sp>
-      <p:sp>
-        <p:nvSpPr>
-          <p:cNvPr id="24" name="TextBox 23"/>
-          <p:cNvSpPr txBox="1"/>
-          <p:nvPr/>
-        </p:nvSpPr>
-        <p:spPr>
-          <a:xfrm>
-            <a:off x="8237524" y="3277870"/>
-            <a:ext cx="3259226" cy="696976"/>
-          </a:xfrm>
-          <a:prstGeom prst="rect">
-            <a:avLst/>
-          </a:prstGeom>
-          <a:noFill/>
-        </p:spPr>
-        <p:txBody>
-          <a:bodyPr wrap="square" anchor="t" lIns="0" rIns="0" tIns="0" bIns="0">
-            <a:spAutoFit/>
-          </a:bodyPr>
-          <a:lstStyle/>
-          <a:p>
-            <a:pPr algn="l"/>
-            <a:r>
-              <a:rPr sz="1000" b="0" i="0">
-                <a:solidFill>
-                  <a:srgbClr val="CFC9EE"/>
-                </a:solidFill>
-                <a:latin typeface="Calibri"/>
-              </a:rPr>
-              <a:t>Its margin guardrail was 2 percentage points either side of breakeven; price forecasts six months out missed by more, the margin swung about 12, and Zillow wrote down about USD 304 million.</a:t>
-            </a:r>
-          </a:p>
-        </p:txBody>
-      </p:sp>
-      <p:sp>
-        <p:nvSpPr>
-          <p:cNvPr id="25" name="TextBox 24"/>
-          <p:cNvSpPr txBox="1"/>
-          <p:nvPr/>
-        </p:nvSpPr>
-        <p:spPr>
-          <a:xfrm>
-            <a:off x="530352" y="6437376"/>
-            <a:ext cx="9667951" cy="160401"/>
-          </a:xfrm>
-          <a:prstGeom prst="rect">
-            <a:avLst/>
-          </a:prstGeom>
-          <a:noFill/>
-        </p:spPr>
-        <p:txBody>
-          <a:bodyPr wrap="square" anchor="t" lIns="0" rIns="0" tIns="0" bIns="0">
-            <a:spAutoFit/>
-          </a:bodyPr>
-          <a:lstStyle/>
-          <a:p>
-            <a:pPr algn="l"/>
-            <a:r>
-              <a:rPr sz="750" b="0" i="0">
-                <a:solidFill>
-                  <a:srgbClr val="6B6690"/>
-                </a:solidFill>
-                <a:latin typeface="Calibri"/>
-              </a:rPr>
-              <a:t>Week 4 Day 5: how much is coming, and how wrong could we be</a:t>
-            </a:r>
-          </a:p>
-        </p:txBody>
-      </p:sp>
-      <p:sp>
-        <p:nvSpPr>
-          <p:cNvPr id="26" name="TextBox 25"/>
-          <p:cNvSpPr txBox="1"/>
-          <p:nvPr/>
-        </p:nvSpPr>
-        <p:spPr>
-          <a:xfrm>
-            <a:off x="10198303" y="6437376"/>
-            <a:ext cx="1463040" cy="160401"/>
-          </a:xfrm>
-          <a:prstGeom prst="rect">
-            <a:avLst/>
-          </a:prstGeom>
-          <a:noFill/>
-        </p:spPr>
-        <p:txBody>
-          <a:bodyPr wrap="square" anchor="t" lIns="0" rIns="0" tIns="0" bIns="0">
-            <a:spAutoFit/>
-          </a:bodyPr>
-          <a:lstStyle/>
-          <a:p>
-            <a:pPr algn="r"/>
-            <a:r>
-              <a:rPr sz="750" b="0" i="0">
-                <a:solidFill>
-                  <a:srgbClr val="6B6690"/>
-                </a:solidFill>
-                <a:latin typeface="Calibri"/>
-              </a:rPr>
-              <a:t>S7  ·  7 / 12</a:t>
-            </a:r>
-          </a:p>
-        </p:txBody>
-      </p:sp>
-    </p:spTree>
-  </p:cSld>
-  <p:clrMapOvr>
-    <a:masterClrMapping/>
-  </p:clrMapOvr>
-</p:sld>
-</file>
-
-<file path=ppt/slides/slide8.xml><?xml version="1.0" encoding="utf-8"?>
-<p:sld xmlns:a="http://schemas.openxmlformats.org/drawingml/2006/main" xmlns:p="http://schemas.openxmlformats.org/presentationml/2006/main" xmlns:r="http://schemas.openxmlformats.org/officeDocument/2006/relationships">
-  <p:cSld>
-    <p:spTree>
-      <p:nvGrpSpPr>
-        <p:cNvPr id="1" name=""/>
-        <p:cNvGrpSpPr/>
-        <p:nvPr/>
-      </p:nvGrpSpPr>
-      <p:grpSpPr/>
-      <p:pic>
-        <p:nvPicPr>
-          <p:cNvPr id="2" name="Picture 1" descr="bg_light.jpg"/>
-          <p:cNvPicPr>
-            <a:picLocks noChangeAspect="1"/>
-          </p:cNvPicPr>
-          <p:nvPr/>
-        </p:nvPicPr>
-        <p:blipFill>
-          <a:blip r:embed="rId2"/>
-          <a:stretch>
-            <a:fillRect/>
-          </a:stretch>
-        </p:blipFill>
-        <p:spPr>
-          <a:xfrm>
-            <a:off x="0" y="0"/>
-            <a:ext cx="12191695" cy="6858000"/>
-          </a:xfrm>
-          <a:prstGeom prst="rect">
-            <a:avLst/>
-          </a:prstGeom>
-        </p:spPr>
-      </p:pic>
-      <p:pic>
-        <p:nvPicPr>
-          <p:cNvPr id="3" name="Picture 2" descr="iitgn_logo.png"/>
-          <p:cNvPicPr>
-            <a:picLocks noChangeAspect="1"/>
-          </p:cNvPicPr>
-          <p:nvPr/>
-        </p:nvPicPr>
-        <p:blipFill>
-          <a:blip r:embed="rId3"/>
-          <a:stretch>
-            <a:fillRect/>
-          </a:stretch>
-        </p:blipFill>
-        <p:spPr>
-          <a:xfrm>
-            <a:off x="530352" y="201168"/>
-            <a:ext cx="420624" cy="420624"/>
-          </a:xfrm>
-          <a:prstGeom prst="rect">
-            <a:avLst/>
-          </a:prstGeom>
-        </p:spPr>
-      </p:pic>
-      <p:sp>
-        <p:nvSpPr>
-          <p:cNvPr id="4" name="TextBox 3"/>
-          <p:cNvSpPr txBox="1"/>
-          <p:nvPr/>
-        </p:nvSpPr>
-        <p:spPr>
-          <a:xfrm>
-            <a:off x="1042416" y="228600"/>
-            <a:ext cx="5120640" cy="185166"/>
-          </a:xfrm>
-          <a:prstGeom prst="rect">
-            <a:avLst/>
-          </a:prstGeom>
-          <a:noFill/>
-        </p:spPr>
-        <p:txBody>
-          <a:bodyPr wrap="square" anchor="t" lIns="0" rIns="0" tIns="0" bIns="0">
-            <a:spAutoFit/>
-          </a:bodyPr>
-          <a:lstStyle/>
-          <a:p>
-            <a:pPr algn="l"/>
-            <a:r>
-              <a:rPr sz="900" b="1" i="0">
-                <a:solidFill>
-                  <a:srgbClr val="1A0F5C"/>
-                </a:solidFill>
-                <a:latin typeface="Calibri"/>
-              </a:rPr>
-              <a:t>Indian Institute of Technology Gandhinagar</a:t>
-            </a:r>
-          </a:p>
-        </p:txBody>
-      </p:sp>
-      <p:sp>
-        <p:nvSpPr>
-          <p:cNvPr id="5" name="TextBox 4"/>
-          <p:cNvSpPr txBox="1"/>
-          <p:nvPr/>
-        </p:nvSpPr>
-        <p:spPr>
-          <a:xfrm>
-            <a:off x="1042416" y="420623"/>
-            <a:ext cx="5852160" cy="127381"/>
-          </a:xfrm>
-          <a:prstGeom prst="rect">
-            <a:avLst/>
-          </a:prstGeom>
-          <a:noFill/>
-        </p:spPr>
-        <p:txBody>
-          <a:bodyPr wrap="square" anchor="t" lIns="0" rIns="0" tIns="0" bIns="0">
-            <a:spAutoFit/>
-          </a:bodyPr>
-          <a:lstStyle/>
-          <a:p>
-            <a:pPr algn="l"/>
-            <a:r>
-              <a:rPr sz="550" b="1" i="0" spc="300">
-                <a:solidFill>
-                  <a:srgbClr val="6B6690"/>
-                </a:solidFill>
-                <a:latin typeface="Calibri"/>
-              </a:rPr>
-              <a:t>ADMINISTERED THROUGH THE COMPETENCY ADVANCEMENT ACADEMY</a:t>
-            </a:r>
-          </a:p>
-        </p:txBody>
-      </p:sp>
-      <p:sp>
-        <p:nvSpPr>
-          <p:cNvPr id="6" name="TextBox 5"/>
-          <p:cNvSpPr txBox="1"/>
-          <p:nvPr/>
-        </p:nvSpPr>
-        <p:spPr>
-          <a:xfrm>
-            <a:off x="5992063" y="310896"/>
-            <a:ext cx="5669280" cy="127381"/>
-          </a:xfrm>
-          <a:prstGeom prst="rect">
-            <a:avLst/>
-          </a:prstGeom>
-          <a:noFill/>
-        </p:spPr>
-        <p:txBody>
-          <a:bodyPr wrap="square" anchor="t" lIns="0" rIns="0" tIns="0" bIns="0">
-            <a:spAutoFit/>
-          </a:bodyPr>
-          <a:lstStyle/>
-          <a:p>
-            <a:pPr algn="r"/>
-            <a:r>
-              <a:rPr sz="550" b="1" i="0" spc="300">
-                <a:solidFill>
-                  <a:srgbClr val="6B6690"/>
-                </a:solidFill>
-                <a:latin typeface="Calibri"/>
-              </a:rPr>
-              <a:t>WEEK 4  ·  FRIDAY  ·  FLIPKART, LUCKNOW  ·  ILLUSTRATIVE CASE</a:t>
-            </a:r>
-          </a:p>
-        </p:txBody>
-      </p:sp>
-      <p:sp>
-        <p:nvSpPr>
-          <p:cNvPr id="7" name="TextBox 6"/>
-          <p:cNvSpPr txBox="1"/>
-          <p:nvPr/>
-        </p:nvSpPr>
-        <p:spPr>
-          <a:xfrm>
-            <a:off x="530352" y="676656"/>
-            <a:ext cx="11130991" cy="512064"/>
-          </a:xfrm>
-          <a:prstGeom prst="rect">
-            <a:avLst/>
-          </a:prstGeom>
-          <a:noFill/>
-        </p:spPr>
-        <p:txBody>
-          <a:bodyPr wrap="square" anchor="b" lIns="0" rIns="0" tIns="0" bIns="0">
-            <a:spAutoFit/>
-          </a:bodyPr>
-          <a:lstStyle/>
-          <a:p>
-            <a:pPr algn="l"/>
-            <a:r>
-              <a:rPr sz="2600" b="0" i="0">
-                <a:solidFill>
-                  <a:srgbClr val="1A0F5C"/>
-                </a:solidFill>
-                <a:latin typeface="Georgia"/>
-              </a:rPr>
-              <a:t>AI variant: inference capacity for a launch</a:t>
-            </a:r>
-          </a:p>
-        </p:txBody>
-      </p:sp>
-      <p:sp>
-        <p:nvSpPr>
-          <p:cNvPr id="8" name="TextBox 7"/>
-          <p:cNvSpPr txBox="1"/>
-          <p:nvPr/>
-        </p:nvSpPr>
-        <p:spPr>
-          <a:xfrm>
-            <a:off x="530352" y="1243584"/>
-            <a:ext cx="11130991" cy="234696"/>
-          </a:xfrm>
-          <a:prstGeom prst="rect">
-            <a:avLst/>
-          </a:prstGeom>
-          <a:noFill/>
-        </p:spPr>
-        <p:txBody>
-          <a:bodyPr wrap="square" anchor="t" lIns="0" rIns="0" tIns="0" bIns="0">
-            <a:spAutoFit/>
-          </a:bodyPr>
-          <a:lstStyle/>
-          <a:p>
-            <a:pPr algn="l"/>
-            <a:r>
-              <a:rPr sz="1200" b="0" i="0">
-                <a:solidFill>
-                  <a:srgbClr val="6B6690"/>
-                </a:solidFill>
-                <a:latin typeface="Calibri"/>
-              </a:rPr>
-              <a:t>How would the same method size servers for an AI product launch?</a:t>
-            </a:r>
-          </a:p>
-        </p:txBody>
-      </p:sp>
-      <p:pic>
-        <p:nvPicPr>
-          <p:cNvPr id="9" name="mermaid diagram" descr="a1326bd9825a5eed.png"/>
-          <p:cNvPicPr>
-            <a:picLocks noChangeAspect="1"/>
-          </p:cNvPicPr>
-          <p:nvPr/>
-        </p:nvPicPr>
-        <p:blipFill>
-          <a:blip r:embed="rId5"/>
-          <a:stretch>
-            <a:fillRect/>
-          </a:stretch>
-        </p:blipFill>
-        <p:spPr>
-          <a:xfrm>
-            <a:off x="780897" y="1956816"/>
-            <a:ext cx="10629900" cy="2100262"/>
-          </a:xfrm>
-          <a:prstGeom prst="rect">
-            <a:avLst/>
-          </a:prstGeom>
-        </p:spPr>
-      </p:pic>
-      <p:sp>
-        <p:nvSpPr>
-          <p:cNvPr id="10" name="TextBox 9"/>
-          <p:cNvSpPr txBox="1"/>
-          <p:nvPr/>
-        </p:nvSpPr>
-        <p:spPr>
-          <a:xfrm>
-            <a:off x="530352" y="4203382"/>
-            <a:ext cx="11130991" cy="1601216"/>
-          </a:xfrm>
-          <a:prstGeom prst="rect">
-            <a:avLst/>
-          </a:prstGeom>
-          <a:noFill/>
-        </p:spPr>
-        <p:txBody>
-          <a:bodyPr wrap="square" anchor="t" lIns="0" rIns="0" tIns="0" bIns="0">
-            <a:spAutoFit/>
-          </a:bodyPr>
-          <a:lstStyle/>
-          <a:p>
-            <a:pPr>
-              <a:spcAft>
-                <a:spcPts val="800"/>
-              </a:spcAft>
-            </a:pPr>
-            <a:r>
-              <a:rPr sz="1600" b="1" i="0">
-                <a:solidFill>
-                  <a:srgbClr val="1A1440"/>
-                </a:solidFill>
-                <a:latin typeface="Calibri"/>
-              </a:rPr>
-              <a:t>Inference</a:t>
-            </a:r>
-            <a:r>
-              <a:rPr sz="1600" b="0" i="0">
-                <a:solidFill>
-                  <a:srgbClr val="1A1440"/>
-                </a:solidFill>
-                <a:latin typeface="Calibri"/>
-              </a:rPr>
-              <a:t> is the computing a model does each time it answers a user. Size the peak in tokens a second from the ground up, check it against earlier launches lined up by days from launch with the weekday kept, and set capacity to the latency target with headroom; the two costs decide how much to book ahead, and on-demand capacity, rate limits and a waitlist cover the rest. Written for the programme; it quotes no company's figures.</a:t>
-            </a:r>
-          </a:p>
-        </p:txBody>
-      </p:sp>
-      <p:sp>
-        <p:nvSpPr>
-          <p:cNvPr id="11" name="TextBox 10"/>
-          <p:cNvSpPr txBox="1"/>
-          <p:nvPr/>
-        </p:nvSpPr>
-        <p:spPr>
-          <a:xfrm>
-            <a:off x="530352" y="6437376"/>
-            <a:ext cx="9667951" cy="160401"/>
-          </a:xfrm>
-          <a:prstGeom prst="rect">
-            <a:avLst/>
-          </a:prstGeom>
-          <a:noFill/>
-        </p:spPr>
-        <p:txBody>
-          <a:bodyPr wrap="square" anchor="t" lIns="0" rIns="0" tIns="0" bIns="0">
-            <a:spAutoFit/>
-          </a:bodyPr>
-          <a:lstStyle/>
-          <a:p>
-            <a:pPr algn="l"/>
-            <a:r>
-              <a:rPr sz="750" b="0" i="0">
-                <a:solidFill>
-                  <a:srgbClr val="6B6690"/>
-                </a:solidFill>
-                <a:latin typeface="Calibri"/>
-              </a:rPr>
-              <a:t>Week 4 Day 5: how much is coming, and how wrong could we be</a:t>
-            </a:r>
-          </a:p>
-        </p:txBody>
-      </p:sp>
-      <p:sp>
-        <p:nvSpPr>
-          <p:cNvPr id="12" name="TextBox 11"/>
-          <p:cNvSpPr txBox="1"/>
-          <p:nvPr/>
-        </p:nvSpPr>
-        <p:spPr>
-          <a:xfrm>
-            <a:off x="10198303" y="6437376"/>
-            <a:ext cx="1463040" cy="160401"/>
-          </a:xfrm>
-          <a:prstGeom prst="rect">
-            <a:avLst/>
-          </a:prstGeom>
-          <a:noFill/>
-        </p:spPr>
-        <p:txBody>
-          <a:bodyPr wrap="square" anchor="t" lIns="0" rIns="0" tIns="0" bIns="0">
-            <a:spAutoFit/>
-          </a:bodyPr>
-          <a:lstStyle/>
-          <a:p>
-            <a:pPr algn="r"/>
-            <a:r>
-              <a:rPr sz="750" b="0" i="0">
-                <a:solidFill>
-                  <a:srgbClr val="6B6690"/>
-                </a:solidFill>
-                <a:latin typeface="Calibri"/>
-              </a:rPr>
-              <a:t>S8  ·  8 / 12</a:t>
-            </a:r>
-          </a:p>
-        </p:txBody>
-      </p:sp>
-    </p:spTree>
-  </p:cSld>
-  <p:clrMapOvr>
-    <a:masterClrMapping/>
-  </p:clrMapOvr>
-</p:sld>
-</file>
-
-<file path=ppt/slides/slide9.xml><?xml version="1.0" encoding="utf-8"?>
-<p:sld xmlns:a="http://schemas.openxmlformats.org/drawingml/2006/main" xmlns:p="http://schemas.openxmlformats.org/presentationml/2006/main" xmlns:r="http://schemas.openxmlformats.org/officeDocument/2006/relationships">
-  <p:cSld>
-    <p:spTree>
-      <p:nvGrpSpPr>
-        <p:cNvPr id="1" name=""/>
-        <p:cNvGrpSpPr/>
-        <p:nvPr/>
-      </p:nvGrpSpPr>
-      <p:grpSpPr/>
-      <p:pic>
-        <p:nvPicPr>
-          <p:cNvPr id="2" name="Picture 1" descr="bg_light.jpg"/>
-          <p:cNvPicPr>
-            <a:picLocks noChangeAspect="1"/>
-          </p:cNvPicPr>
-          <p:nvPr/>
-        </p:nvPicPr>
-        <p:blipFill>
-          <a:blip r:embed="rId2"/>
-          <a:stretch>
-            <a:fillRect/>
-          </a:stretch>
-        </p:blipFill>
-        <p:spPr>
-          <a:xfrm>
-            <a:off x="0" y="0"/>
-            <a:ext cx="12191695" cy="6858000"/>
-          </a:xfrm>
-          <a:prstGeom prst="rect">
-            <a:avLst/>
-          </a:prstGeom>
-        </p:spPr>
-      </p:pic>
-      <p:pic>
-        <p:nvPicPr>
-          <p:cNvPr id="3" name="Picture 2" descr="iitgn_logo.png"/>
-          <p:cNvPicPr>
-            <a:picLocks noChangeAspect="1"/>
-          </p:cNvPicPr>
-          <p:nvPr/>
-        </p:nvPicPr>
-        <p:blipFill>
-          <a:blip r:embed="rId3"/>
-          <a:stretch>
-            <a:fillRect/>
-          </a:stretch>
-        </p:blipFill>
-        <p:spPr>
-          <a:xfrm>
-            <a:off x="530352" y="201168"/>
-            <a:ext cx="420624" cy="420624"/>
-          </a:xfrm>
-          <a:prstGeom prst="rect">
-            <a:avLst/>
-          </a:prstGeom>
-        </p:spPr>
-      </p:pic>
-      <p:sp>
-        <p:nvSpPr>
-          <p:cNvPr id="4" name="TextBox 3"/>
-          <p:cNvSpPr txBox="1"/>
-          <p:nvPr/>
-        </p:nvSpPr>
-        <p:spPr>
-          <a:xfrm>
-            <a:off x="1042416" y="228600"/>
-            <a:ext cx="5120640" cy="185166"/>
-          </a:xfrm>
-          <a:prstGeom prst="rect">
-            <a:avLst/>
-          </a:prstGeom>
-          <a:noFill/>
-        </p:spPr>
-        <p:txBody>
-          <a:bodyPr wrap="square" anchor="t" lIns="0" rIns="0" tIns="0" bIns="0">
-            <a:spAutoFit/>
-          </a:bodyPr>
-          <a:lstStyle/>
-          <a:p>
-            <a:pPr algn="l"/>
-            <a:r>
-              <a:rPr sz="900" b="1" i="0">
-                <a:solidFill>
-                  <a:srgbClr val="1A0F5C"/>
-                </a:solidFill>
-                <a:latin typeface="Calibri"/>
-              </a:rPr>
-              <a:t>Indian Institute of Technology Gandhinagar</a:t>
-            </a:r>
-          </a:p>
-        </p:txBody>
-      </p:sp>
-      <p:sp>
-        <p:nvSpPr>
-          <p:cNvPr id="5" name="TextBox 4"/>
-          <p:cNvSpPr txBox="1"/>
-          <p:nvPr/>
-        </p:nvSpPr>
-        <p:spPr>
-          <a:xfrm>
-            <a:off x="1042416" y="420623"/>
-            <a:ext cx="5852160" cy="127381"/>
-          </a:xfrm>
-          <a:prstGeom prst="rect">
-            <a:avLst/>
-          </a:prstGeom>
-          <a:noFill/>
-        </p:spPr>
-        <p:txBody>
-          <a:bodyPr wrap="square" anchor="t" lIns="0" rIns="0" tIns="0" bIns="0">
-            <a:spAutoFit/>
-          </a:bodyPr>
-          <a:lstStyle/>
-          <a:p>
-            <a:pPr algn="l"/>
-            <a:r>
-              <a:rPr sz="550" b="1" i="0" spc="300">
-                <a:solidFill>
-                  <a:srgbClr val="6B6690"/>
-                </a:solidFill>
-                <a:latin typeface="Calibri"/>
-              </a:rPr>
-              <a:t>ADMINISTERED THROUGH THE COMPETENCY ADVANCEMENT ACADEMY</a:t>
-            </a:r>
-          </a:p>
-        </p:txBody>
-      </p:sp>
-      <p:sp>
-        <p:nvSpPr>
-          <p:cNvPr id="6" name="TextBox 5"/>
-          <p:cNvSpPr txBox="1"/>
-          <p:nvPr/>
-        </p:nvSpPr>
-        <p:spPr>
-          <a:xfrm>
-            <a:off x="5992063" y="310896"/>
-            <a:ext cx="5669280" cy="127381"/>
-          </a:xfrm>
-          <a:prstGeom prst="rect">
-            <a:avLst/>
-          </a:prstGeom>
-          <a:noFill/>
-        </p:spPr>
-        <p:txBody>
-          <a:bodyPr wrap="square" anchor="t" lIns="0" rIns="0" tIns="0" bIns="0">
-            <a:spAutoFit/>
-          </a:bodyPr>
-          <a:lstStyle/>
-          <a:p>
-            <a:pPr algn="r"/>
-            <a:r>
-              <a:rPr sz="550" b="1" i="0" spc="300">
-                <a:solidFill>
-                  <a:srgbClr val="6B6690"/>
-                </a:solidFill>
-                <a:latin typeface="Calibri"/>
-              </a:rPr>
-              <a:t>WEEK 4  ·  FRIDAY  ·  FLIPKART, LUCKNOW  ·  ILLUSTRATIVE CASE</a:t>
-            </a:r>
-          </a:p>
-        </p:txBody>
-      </p:sp>
-      <p:sp>
-        <p:nvSpPr>
-          <p:cNvPr id="7" name="TextBox 6"/>
-          <p:cNvSpPr txBox="1"/>
-          <p:nvPr/>
-        </p:nvSpPr>
-        <p:spPr>
-          <a:xfrm>
-            <a:off x="530352" y="676656"/>
-            <a:ext cx="11130991" cy="512064"/>
-          </a:xfrm>
-          <a:prstGeom prst="rect">
-            <a:avLst/>
-          </a:prstGeom>
-          <a:noFill/>
-        </p:spPr>
-        <p:txBody>
-          <a:bodyPr wrap="square" anchor="b" lIns="0" rIns="0" tIns="0" bIns="0">
-            <a:spAutoFit/>
-          </a:bodyPr>
-          <a:lstStyle/>
-          <a:p>
-            <a:pPr algn="l"/>
-            <a:r>
-              <a:rPr sz="2600" b="0" i="0">
-                <a:solidFill>
-                  <a:srgbClr val="1A0F5C"/>
-                </a:solidFill>
-                <a:latin typeface="Georgia"/>
-              </a:rPr>
-              <a:t>Two-wheelers a year: about 2.2 crore, checked</a:t>
-            </a:r>
-          </a:p>
-        </p:txBody>
-      </p:sp>
-      <p:sp>
-        <p:nvSpPr>
-          <p:cNvPr id="8" name="TextBox 7"/>
-          <p:cNvSpPr txBox="1"/>
-          <p:nvPr/>
-        </p:nvSpPr>
-        <p:spPr>
-          <a:xfrm>
-            <a:off x="530352" y="1243584"/>
-            <a:ext cx="11130991" cy="234696"/>
-          </a:xfrm>
-          <a:prstGeom prst="rect">
-            <a:avLst/>
-          </a:prstGeom>
-          <a:noFill/>
-        </p:spPr>
-        <p:txBody>
-          <a:bodyPr wrap="square" anchor="t" lIns="0" rIns="0" tIns="0" bIns="0">
-            <a:spAutoFit/>
-          </a:bodyPr>
-          <a:lstStyle/>
-          <a:p>
-            <a:pPr algn="l"/>
-            <a:r>
-              <a:rPr sz="1200" b="0" i="0">
-                <a:solidFill>
-                  <a:srgbClr val="6B6690"/>
-                </a:solidFill>
-                <a:latin typeface="Calibri"/>
-              </a:rPr>
-              <a:t>How do you size a number from nothing, and check it against something known?</a:t>
-            </a:r>
-          </a:p>
-        </p:txBody>
-      </p:sp>
-      <p:pic>
-        <p:nvPicPr>
-          <p:cNvPr id="9" name="mermaid diagram" descr="629daa93d3849711.png"/>
-          <p:cNvPicPr>
-            <a:picLocks noChangeAspect="1"/>
-          </p:cNvPicPr>
-          <p:nvPr/>
-        </p:nvPicPr>
-        <p:blipFill>
-          <a:blip r:embed="rId5"/>
-          <a:stretch>
-            <a:fillRect/>
-          </a:stretch>
-        </p:blipFill>
-        <p:spPr>
-          <a:xfrm>
-            <a:off x="530352" y="1874794"/>
-            <a:ext cx="11130991" cy="2378416"/>
-          </a:xfrm>
-          <a:prstGeom prst="rect">
-            <a:avLst/>
-          </a:prstGeom>
-        </p:spPr>
-      </p:pic>
-      <p:sp>
-        <p:nvSpPr>
-          <p:cNvPr id="10" name="Rounded Rectangle 9"/>
-          <p:cNvSpPr/>
-          <p:nvPr/>
-        </p:nvSpPr>
-        <p:spPr>
-          <a:xfrm>
-            <a:off x="530352" y="4399514"/>
-            <a:ext cx="11130991" cy="1607820"/>
-          </a:xfrm>
-          <a:prstGeom prst="roundRect">
-            <a:avLst>
-              <a:gd name="adj" fmla="val 8000"/>
-            </a:avLst>
-          </a:prstGeom>
-          <a:solidFill>
-            <a:srgbClr val="F7F5FD"/>
-          </a:solidFill>
-          <a:ln w="9525">
-            <a:solidFill>
-              <a:srgbClr val="E4E1F1"/>
-            </a:solidFill>
-          </a:ln>
-          <a:effectLst/>
-        </p:spPr>
-        <p:style>
-          <a:lnRef idx="1">
-            <a:schemeClr val="accent1"/>
-          </a:lnRef>
-          <a:fillRef idx="3">
-            <a:schemeClr val="accent1"/>
-          </a:fillRef>
-          <a:effectRef idx="2">
-            <a:schemeClr val="accent1"/>
-          </a:effectRef>
-          <a:fontRef idx="minor">
-            <a:schemeClr val="lt1"/>
-          </a:fontRef>
-        </p:style>
-        <p:txBody>
-          <a:bodyPr rtlCol="0" anchor="ctr" wrap="square"/>
-          <a:lstStyle/>
-          <a:p>
-            <a:pPr algn="ctr"/>
-          </a:p>
-        </p:txBody>
-      </p:sp>
-      <p:sp>
-        <p:nvSpPr>
-          <p:cNvPr id="11" name="Rounded Rectangle 10"/>
-          <p:cNvSpPr/>
-          <p:nvPr/>
-        </p:nvSpPr>
-        <p:spPr>
-          <a:xfrm>
-            <a:off x="676656" y="4527530"/>
-            <a:ext cx="45720" cy="1351788"/>
-          </a:xfrm>
-          <a:prstGeom prst="roundRect">
-            <a:avLst>
-              <a:gd name="adj" fmla="val 50000"/>
-            </a:avLst>
-          </a:prstGeom>
-          <a:solidFill>
-            <a:srgbClr val="5B3FD6"/>
-          </a:solidFill>
-          <a:ln>
-            <a:noFill/>
-          </a:ln>
-          <a:effectLst/>
-        </p:spPr>
-        <p:style>
-          <a:lnRef idx="1">
-            <a:schemeClr val="accent1"/>
-          </a:lnRef>
-          <a:fillRef idx="3">
-            <a:schemeClr val="accent1"/>
-          </a:fillRef>
-          <a:effectRef idx="2">
-            <a:schemeClr val="accent1"/>
-          </a:effectRef>
-          <a:fontRef idx="minor">
-            <a:schemeClr val="lt1"/>
-          </a:fontRef>
-        </p:style>
-        <p:txBody>
-          <a:bodyPr rtlCol="0" anchor="ctr" wrap="square"/>
-          <a:lstStyle/>
-          <a:p>
-            <a:pPr algn="ctr"/>
-          </a:p>
-        </p:txBody>
-      </p:sp>
-      <p:sp>
-        <p:nvSpPr>
-          <p:cNvPr id="12" name="TextBox 11"/>
-          <p:cNvSpPr txBox="1"/>
-          <p:nvPr/>
-        </p:nvSpPr>
-        <p:spPr>
-          <a:xfrm>
-            <a:off x="877824" y="4518386"/>
-            <a:ext cx="10564063" cy="1424940"/>
-          </a:xfrm>
-          <a:prstGeom prst="rect">
-            <a:avLst/>
-          </a:prstGeom>
-          <a:noFill/>
-        </p:spPr>
-        <p:txBody>
-          <a:bodyPr wrap="square" anchor="ctr" lIns="0" rIns="0" tIns="0" bIns="0">
-            <a:spAutoFit/>
-          </a:bodyPr>
-          <a:lstStyle/>
-          <a:p>
-            <a:r>
-              <a:rPr sz="1500" b="1">
-                <a:solidFill>
-                  <a:srgbClr val="5B3FD6"/>
-                </a:solidFill>
-                <a:latin typeface="Calibri"/>
-              </a:rPr>
-              <a:t>The catch. </a:t>
-            </a:r>
-            <a:r>
-              <a:rPr sz="1500" b="0" i="0">
-                <a:solidFill>
-                  <a:srgbClr val="1A1440"/>
-                </a:solidFill>
-                <a:latin typeface="Calibri"/>
-              </a:rPr>
-              <a:t>October 2025's two-wheeler retail registrations alone were 31.5 lakh (FADA, the Federation of Automobile Dealers Associations), after a September whose first 21 days were almost quiet ahead of the GST cut; times twelve that is about 3.78 crore, 74 percent above the year: never annualise a peak month. SIAM, the Society of Indian Automobile Manufacturers, counts makers' sales to dealers: 2.17 crore in FY 2025-26 (both releases checked 12 October 2026).</a:t>
-            </a:r>
-          </a:p>
-        </p:txBody>
-      </p:sp>
-      <p:sp>
-        <p:nvSpPr>
-          <p:cNvPr id="13" name="TextBox 12"/>
-          <p:cNvSpPr txBox="1"/>
-          <p:nvPr/>
-        </p:nvSpPr>
-        <p:spPr>
-          <a:xfrm>
-            <a:off x="530352" y="6437376"/>
-            <a:ext cx="9667951" cy="160401"/>
-          </a:xfrm>
-          <a:prstGeom prst="rect">
-            <a:avLst/>
-          </a:prstGeom>
-          <a:noFill/>
-        </p:spPr>
-        <p:txBody>
-          <a:bodyPr wrap="square" anchor="t" lIns="0" rIns="0" tIns="0" bIns="0">
-            <a:spAutoFit/>
-          </a:bodyPr>
-          <a:lstStyle/>
-          <a:p>
-            <a:pPr algn="l"/>
-            <a:r>
-              <a:rPr sz="750" b="0" i="0">
-                <a:solidFill>
-                  <a:srgbClr val="6B6690"/>
-                </a:solidFill>
-                <a:latin typeface="Calibri"/>
-              </a:rPr>
-              <a:t>Week 4 Day 5: how much is coming, and how wrong could we be</a:t>
-            </a:r>
-          </a:p>
-        </p:txBody>
-      </p:sp>
-      <p:sp>
-        <p:nvSpPr>
-          <p:cNvPr id="14" name="TextBox 13"/>
-          <p:cNvSpPr txBox="1"/>
-          <p:nvPr/>
-        </p:nvSpPr>
-        <p:spPr>
-          <a:xfrm>
-            <a:off x="10198303" y="6437376"/>
-            <a:ext cx="1463040" cy="160401"/>
-          </a:xfrm>
-          <a:prstGeom prst="rect">
-            <a:avLst/>
-          </a:prstGeom>
-          <a:noFill/>
-        </p:spPr>
-        <p:txBody>
-          <a:bodyPr wrap="square" anchor="t" lIns="0" rIns="0" tIns="0" bIns="0">
-            <a:spAutoFit/>
-          </a:bodyPr>
-          <a:lstStyle/>
-          <a:p>
-            <a:pPr algn="r"/>
-            <a:r>
-              <a:rPr sz="750" b="0" i="0">
-                <a:solidFill>
-                  <a:srgbClr val="6B6690"/>
-                </a:solidFill>
-                <a:latin typeface="Calibri"/>
-              </a:rPr>
-              <a:t>S9  ·  9 / 12</a:t>
+              <a:t>S6  ·  9 / 15</a:t>
             </a:r>
           </a:p>
         </p:txBody>

--- a/content/W04/D5/slides/C2_W04_D05_half2_STUDENT.pptx
+++ b/content/W04/D5/slides/C2_W04_D05_half2_STUDENT.pptx
@@ -631,7 +631,12 @@
           </a:p>
           <a:p>
             <a:r>
-              <a:t>margin; the forecast's error was wider than the band. Two more follow-ups sit in the transcripts:</a:t>
+              <a:t>margin, which suggests the forecast's error was wider than the band; and a forecast used to bid wins</a:t>
+            </a:r>
+          </a:p>
+          <a:p>
+            <a:r>
+              <a:t>where it guesses high, so the homes bought carried its errors one way. Two more follow-ups sit in the transcripts:</a:t>
             </a:r>
           </a:p>
           <a:p>
@@ -711,27 +716,32 @@
           <a:lstStyle/>
           <a:p>
             <a:r>
-              <a:t>LIVE, 3 minutes. Ask the room which cost is the Rs 25 and which the Rs 5.42 here: a timeout and an</a:t>
-            </a:r>
-          </a:p>
-          <a:p>
-            <a:r>
-              <a:t>idle GPU hour. Ask what the forecast can be tested on if the feature has never launched: nothing,</a:t>
-            </a:r>
-          </a:p>
-          <a:p>
-            <a:r>
-              <a:t>so say it is untested and keep capacity that can stretch. The worked sizing (2 lakh users, 10</a:t>
-            </a:r>
-          </a:p>
-          <a:p>
-            <a:r>
-              <a:t>percent in the peak minute, 1,500 tokens, all invented, about 5 lakh tokens a second) is in the</a:t>
-            </a:r>
-          </a:p>
-          <a:p>
-            <a:r>
-              <a:t>transcripts. Transition: the guesstimate.</a:t>
+              <a:t>LIVE, 3 minutes. Ask the room which cost is the Rs 25 and which the Rs 5.42 here: a timed-out</a:t>
+            </a:r>
+          </a:p>
+          <a:p>
+            <a:r>
+              <a:t>request, and the idle capacity one request would have used; both are per unit of demand, as the</a:t>
+            </a:r>
+          </a:p>
+          <a:p>
+            <a:r>
+              <a:t>packer costs are per shipment. Ask what the forecast can be tested on if the feature has never launched: nothing,</a:t>
+            </a:r>
+          </a:p>
+          <a:p>
+            <a:r>
+              <a:t>so say it is untested and keep capacity that can stretch. The worked sizing (2 lakh users, 1</a:t>
+            </a:r>
+          </a:p>
+          <a:p>
+            <a:r>
+              <a:t>percent in the peak minute, 1,000 prompt and 500 answer tokens, all invented, about 330 requests open</a:t>
+            </a:r>
+          </a:p>
+          <a:p>
+            <a:r>
+              <a:t>at once) is in the transcripts. Transition: the guesstimate.</a:t>
             </a:r>
           </a:p>
         </p:txBody>
@@ -806,7 +816,17 @@
           </a:p>
           <a:p>
             <a:r>
-              <a:t>structure and the sanity check, never the final number. Transition: the handoff.</a:t>
+              <a:t>structure and the sanity check, never the final number. SIAM's release:</a:t>
+            </a:r>
+          </a:p>
+          <a:p>
+            <a:r>
+              <a:t>https://www.siam.in/news-&amp;-updates/press-releases/x/605 (checked 12 October 2026). Transition: the</a:t>
+            </a:r>
+          </a:p>
+          <a:p>
+            <a:r>
+              <a:t>handoff.</a:t>
             </a:r>
           </a:p>
         </p:txBody>
@@ -5834,7 +5854,7 @@
         <p:spPr>
           <a:xfrm>
             <a:off x="530352" y="2843784"/>
-            <a:ext cx="3588410" cy="1422400"/>
+            <a:ext cx="3588410" cy="1595120"/>
           </a:xfrm>
           <a:prstGeom prst="roundRect">
             <a:avLst>
@@ -5944,7 +5964,7 @@
                 </a:solidFill>
                 <a:latin typeface="Calibri"/>
               </a:rPr>
-              <a:t>Shipments when the cost is per shipment; MASE or WAPE across centres, since MAPE explodes near zero and punishes forecasts that land high.</a:t>
+              <a:t>Shipments when the cost is per shipment; MASE or WAPE across centres. MAPE explodes near zero, and here it ranks the rules as MAE does.</a:t>
             </a:r>
           </a:p>
         </p:txBody>
@@ -6037,7 +6057,7 @@
         <p:spPr>
           <a:xfrm>
             <a:off x="4301642" y="2843784"/>
-            <a:ext cx="3588410" cy="1422400"/>
+            <a:ext cx="3588410" cy="1595120"/>
           </a:xfrm>
           <a:prstGeom prst="roundRect">
             <a:avLst>
@@ -6240,7 +6260,7 @@
         <p:spPr>
           <a:xfrm>
             <a:off x="8072932" y="2843784"/>
-            <a:ext cx="3588410" cy="1422400"/>
+            <a:ext cx="3588410" cy="1595120"/>
           </a:xfrm>
           <a:prstGeom prst="roundRect">
             <a:avLst>
@@ -6335,7 +6355,7 @@
         <p:spPr>
           <a:xfrm>
             <a:off x="8237524" y="3277870"/>
-            <a:ext cx="3259226" cy="696976"/>
+            <a:ext cx="3259226" cy="862076"/>
           </a:xfrm>
           <a:prstGeom prst="rect">
             <a:avLst/>
@@ -6356,7 +6376,7 @@
                 </a:solidFill>
                 <a:latin typeface="Calibri"/>
               </a:rPr>
-              <a:t>Its margin guardrail was 2 percentage points either side of breakeven; price forecasts six months out missed by more, the margin swung about 12, and Zillow wrote down about USD 304 million.</a:t>
+              <a:t>Its margin guardrail was 2 percentage points either side of breakeven; price forecasts three to six months out missed by more, the margin swung about 12 percentage points, and Zillow wrote down about USD 304 million.</a:t>
             </a:r>
           </a:p>
         </p:txBody>
@@ -6674,7 +6694,7 @@
       </p:sp>
       <p:pic>
         <p:nvPicPr>
-          <p:cNvPr id="9" name="mermaid diagram" descr="a1326bd9825a5eed.png"/>
+          <p:cNvPr id="9" name="mermaid diagram" descr="5d9713e6e3aac475.png"/>
           <p:cNvPicPr>
             <a:picLocks noChangeAspect="1"/>
           </p:cNvPicPr>
@@ -6739,7 +6759,7 @@
                 </a:solidFill>
                 <a:latin typeface="Calibri"/>
               </a:rPr>
-              <a:t> is the computing a model does each time it answers a user. Size the peak in tokens a second from the ground up, check it against earlier launches lined up by days from launch with the weekday kept, and set capacity to the latency target with headroom; the two costs decide how much to book ahead, and on-demand capacity, rate limits and a waitlist cover the rest. Written for the programme; it quotes no company's figures.</a:t>
+              <a:t> is the computing a model does each time it answers a user. Size the peak from the ground up as requests open at once, with prompt and answer tokens kept apart; check it against earlier launches lined up by days from launch with the weekday kept; set capacity to the latency target with headroom. The two costs, per request, decide how much to book ahead, and a staged rollout, on-demand capacity, rate limits and a waitlist cover the rest. Written for the programme; it quotes no company's figures.</a:t>
             </a:r>
           </a:p>
         </p:txBody>
@@ -7202,7 +7222,7 @@
                 </a:solidFill>
                 <a:latin typeface="Calibri"/>
               </a:rPr>
-              <a:t>The catch. </a:t>
+              <a:t>The range and the catch. </a:t>
             </a:r>
             <a:r>
               <a:rPr sz="1500" b="0" i="0">
@@ -7211,7 +7231,7 @@
                 </a:solidFill>
                 <a:latin typeface="Calibri"/>
               </a:rPr>
-              <a:t>October 2025's two-wheeler retail registrations alone were 31.5 lakh (FADA, the Federation of Automobile Dealers Associations), after a September whose first 21 days were almost quiet ahead of the GST cut; times twelve that is about 3.78 crore, 74 percent above the year: never annualise a peak month. SIAM, the Society of Indian Automobile Manufacturers, counts makers' sales to dealers: 2.17 crore in FY 2025-26 (both releases checked 12 October 2026).</a:t>
+              <a:t>The replacement years alone swing the answer from about 1.7 to 2.9 crore. October 2025's retail registrations were 31.5 lakh (FADA, the Federation of Automobile Dealers Associations), after a quiet September; times twelve that is about 3.78 crore, 74 percent above SIAM's year, a month of registrations set against a year of dealer sales: never annualise a peak month (both releases checked 12 October 2026).</a:t>
             </a:r>
           </a:p>
         </p:txBody>
@@ -13430,7 +13450,7 @@
                 </a:solidFill>
                 <a:latin typeface="Calibri"/>
               </a:rPr>
-              <a:t>True: the two years grew 4.0 percent. Not true for the weeks: copied by calendar it puts the peak on 5 October, before the plan's first week, and sits 308,048 shipments short.</a:t>
+              <a:t>True: the training weeks grew 4.0 percent. Not true for the weeks: copied by calendar it puts the peak on 5 October, before the plan's first week, and sits 308,048 shipments short.</a:t>
             </a:r>
           </a:p>
         </p:txBody>

--- a/content/W04/D5/slides/C2_W04_D05_half2_STUDENT.pptx
+++ b/content/W04/D5/slides/C2_W04_D05_half2_STUDENT.pptx
@@ -716,17 +716,17 @@
           <a:lstStyle/>
           <a:p>
             <a:r>
-              <a:t>LIVE, 3 minutes. Ask the room which cost is the Rs 25 and which the Rs 5.42 here: a timed-out</a:t>
-            </a:r>
-          </a:p>
-          <a:p>
-            <a:r>
-              <a:t>request, and the idle capacity one request would have used; both are per unit of demand, as the</a:t>
-            </a:r>
-          </a:p>
-          <a:p>
-            <a:r>
-              <a:t>packer costs are per shipment. Ask what the forecast can be tested on if the feature has never launched: nothing,</a:t>
+              <a:t>LIVE, 3 minutes. Ask the room which cost is the Rs 25 and which the Rs 5.42 here: the timeouts a</a:t>
+            </a:r>
+          </a:p>
+          <a:p>
+            <a:r>
+              <a:t>GPU would prevent, and its rent for the whole booking; both are set per machine, as the packer costs</a:t>
+            </a:r>
+          </a:p>
+          <a:p>
+            <a:r>
+              <a:t>are set per shipment of a booked shift. Ask what the forecast can be tested on if the feature has never launched: nothing,</a:t>
             </a:r>
           </a:p>
           <a:p>
@@ -5139,7 +5139,7 @@
                 </a:solidFill>
                 <a:latin typeface="Calibri"/>
               </a:rPr>
-              <a:t>SHIPMENTS A WEEK, THE ERROR BAR</a:t>
+              <a:t>SHIPMENTS A WEEK, THE TYPICAL MISS</a:t>
             </a:r>
           </a:p>
         </p:txBody>
@@ -5854,7 +5854,7 @@
         <p:spPr>
           <a:xfrm>
             <a:off x="530352" y="2843784"/>
-            <a:ext cx="3588410" cy="1595120"/>
+            <a:ext cx="3588410" cy="1767840"/>
           </a:xfrm>
           <a:prstGeom prst="roundRect">
             <a:avLst>
@@ -6057,7 +6057,7 @@
         <p:spPr>
           <a:xfrm>
             <a:off x="4301642" y="2843784"/>
-            <a:ext cx="3588410" cy="1595120"/>
+            <a:ext cx="3588410" cy="1767840"/>
           </a:xfrm>
           <a:prstGeom prst="roundRect">
             <a:avLst>
@@ -6132,7 +6132,7 @@
                 </a:solidFill>
                 <a:latin typeface="Calibri"/>
               </a:rPr>
-              <a:t>The festival moves three weeks: what breaks?</a:t>
+              <a:t>Suppose the festival moves three weeks: what breaks?</a:t>
             </a:r>
           </a:p>
         </p:txBody>
@@ -6260,7 +6260,7 @@
         <p:spPr>
           <a:xfrm>
             <a:off x="8072932" y="2843784"/>
-            <a:ext cx="3588410" cy="1595120"/>
+            <a:ext cx="3588410" cy="1767840"/>
           </a:xfrm>
           <a:prstGeom prst="roundRect">
             <a:avLst>
@@ -6355,7 +6355,7 @@
         <p:spPr>
           <a:xfrm>
             <a:off x="8237524" y="3277870"/>
-            <a:ext cx="3259226" cy="862076"/>
+            <a:ext cx="3259226" cy="1027176"/>
           </a:xfrm>
           <a:prstGeom prst="rect">
             <a:avLst/>
@@ -6376,7 +6376,7 @@
                 </a:solidFill>
                 <a:latin typeface="Calibri"/>
               </a:rPr>
-              <a:t>Its margin guardrail was 2 percentage points either side of breakeven; price forecasts three to six months out missed by more, the margin swung about 12 percentage points, and Zillow wrote down about USD 304 million.</a:t>
+              <a:t>Its margin guardrail was 2 percentage points either side of breakeven; price forecasts three to six months out missed both ways by more than Zillow had modelled, the margin swung about 12 percentage points, and Zillow wrote down about USD 304 million.</a:t>
             </a:r>
           </a:p>
         </p:txBody>
@@ -6759,7 +6759,7 @@
                 </a:solidFill>
                 <a:latin typeface="Calibri"/>
               </a:rPr>
-              <a:t> is the computing a model does each time it answers a user. Size the peak from the ground up as requests open at once, with prompt and answer tokens kept apart; check it against earlier launches lined up by days from launch with the weekday kept; set capacity to the latency target with headroom. The two costs, per request, decide how much to book ahead, and a staged rollout, on-demand capacity, rate limits and a waitlist cover the rest. Written for the programme; it quotes no company's figures.</a:t>
+              <a:t> is the computing a model does each time it answers a user. Size the peak from the ground up as requests open at once, with prompt and answer tokens kept apart; check it against earlier launches lined up by days from launch with the weekday kept; set capacity to the latency target with headroom. The two costs, per machine over the booking, decide how much to book ahead, and a staged rollout, on-demand capacity, rate limits and a waitlist cover the rest. Written for the programme; it quotes no company's figures.</a:t>
             </a:r>
           </a:p>
         </p:txBody>
@@ -7971,7 +7971,7 @@
                           </a:solidFill>
                           <a:latin typeface="Calibri"/>
                         </a:rPr>
-                        <a:t>These thirteen have already picked the rule and set the cushion, so a new model is fairest judged on weeks no choice has used, such as a rolling origin through 2025's festival.</a:t>
+                        <a:t>The thirteen the handoff line names; since they also picked the rule and set the cushion, a new model that beats the baseline there is checked again on a rolling origin through 2025's festival.</a:t>
                       </a:r>
                     </a:p>
                   </a:txBody>

--- a/content/W04/D5/slides/C2_W04_D05_half2_STUDENT.pptx
+++ b/content/W04/D5/slides/C2_W04_D05_half2_STUDENT.pptx
@@ -1299,7 +1299,12 @@
           </a:p>
           <a:p>
             <a:r>
-              <a:t>transcripts: the cushion read from the scored weeks, and the overtime that may cap the peak.</a:t>
+              <a:t>transcripts: the cushion read from the scored weeks, beyond the row, and the overtime that may cap</a:t>
+            </a:r>
+          </a:p>
+          <a:p>
+            <a:r>
+              <a:t>the peak.</a:t>
             </a:r>
           </a:p>
           <a:p>
@@ -2389,7 +2394,7 @@
           </a:p>
           <a:p>
             <a:r>
-              <a:t>subtopics; the fallback deck's part 4 and notebook 07's depth section carry it, so park any "how far</a:t>
+              <a:t>subtopics; the fallback deck's part 3 and notebook 07's depth section carry it, so park any "how far</a:t>
             </a:r>
           </a:p>
           <a:p>

--- a/content/W04/D5/slides/C2_W04_D05_half2_STUDENT.pptx
+++ b/content/W04/D5/slides/C2_W04_D05_half2_STUDENT.pptx
@@ -544,7 +544,7 @@
           </a:p>
           <a:p>
             <a:r>
-              <a:t>fallback hour. Transition: chapter 7.</a:t>
+              <a:t>fallback session. Transition: chapter 7.</a:t>
             </a:r>
           </a:p>
         </p:txBody>
@@ -849,7 +849,7 @@
           <a:lstStyle/>
           <a:p>
             <a:r>
-              <a:t>LIVE, 10 minutes, unguided, in groups of about four: the groups decide the lettered items now and</a:t>
+              <a:t>LIVE, 8 minutes, unguided, in groups of about four: the groups decide the lettered items now and</a:t>
             </a:r>
           </a:p>
           <a:p>
@@ -1019,12 +1019,22 @@
           <a:lstStyle/>
           <a:p>
             <a:r>
-              <a:t>LIVE, 2 minutes. Concede the true half first, then answer from the evidence, then say what would</a:t>
-            </a:r>
-          </a:p>
-          <a:p>
-            <a:r>
-              <a:t>change your mind: a vendor forecast scored on 2025's festival from data to September 2025.</a:t>
+              <a:t>LIVE, 4 minutes: the role cards' one exchange each. The trainer, as finance, says card 1's opening</a:t>
+            </a:r>
+          </a:p>
+          <a:p>
+            <a:r>
+              <a:t>line and one group answers; the TA, as the vendor's sponsor, says card 2's and another group</a:t>
+            </a:r>
+          </a:p>
+          <a:p>
+            <a:r>
+              <a:t>answers. Each answer concedes the true half first, then answers from the evidence, then says what</a:t>
+            </a:r>
+          </a:p>
+          <a:p>
+            <a:r>
+              <a:t>would change its mind: a vendor forecast scored on 2025's festival from data to September 2025.</a:t>
             </a:r>
           </a:p>
           <a:p>
@@ -1644,7 +1654,7 @@
           </a:p>
           <a:p>
             <a:r>
-              <a:t>session defines them properly, and this table only says what each one is for.</a:t>
+              <a:t>session (tentative) defines them properly, and this table only says what each one is for.</a:t>
             </a:r>
           </a:p>
           <a:p>
@@ -1804,7 +1814,7 @@
           <a:lstStyle/>
           <a:p>
             <a:r>
-              <a:t>LIVE, 2 minutes. The three cards are the cheat sheet's crux lines, word for word. Transition: the</a:t>
+              <a:t>LIVE, 2 minutes. The three cards restate the cheat sheet's crux lines. Transition: the</a:t>
             </a:r>
           </a:p>
           <a:p>
@@ -2119,7 +2129,22 @@
           </a:p>
           <a:p>
             <a:r>
-              <a:t>placement and leaves the size of the festive error open. The vendor has no festive forecast to</a:t>
+              <a:t>placement and leaves the size of the festive error open. Quote 10,575, the number a planner in</a:t>
+            </a:r>
+          </a:p>
+          <a:p>
+            <a:r>
+              <a:t>September 2025 could have had; 4,034 borrows growth from 2026. This course also set the stretch</a:t>
+            </a:r>
+          </a:p>
+          <a:p>
+            <a:r>
+              <a:t>around Diwali to cover both festivals' busy weeks, so even this test has seen the shape it tests;</a:t>
+            </a:r>
+          </a:p>
+          <a:p>
+            <a:r>
+              <a:t>the next festival is the clean one. The vendor has no festive forecast to</a:t>
             </a:r>
           </a:p>
           <a:p>
@@ -2304,17 +2329,37 @@
           </a:p>
           <a:p>
             <a:r>
-              <a:t>how shifts become people depends on the roster, which the ticket does not give. The error bar is</a:t>
-            </a:r>
-          </a:p>
-          <a:p>
-            <a:r>
-              <a:t>chapter 3's MAE in the business's unit, then priced each way. Transition: is a better forecast</a:t>
-            </a:r>
-          </a:p>
-          <a:p>
-            <a:r>
-              <a:t>worth having?</a:t>
+              <a:t>how shifts become people depends on the roster, which the ticket does not give. The typical miss is</a:t>
+            </a:r>
+          </a:p>
+          <a:p>
+            <a:r>
+              <a:t>chapter 3's MAE in the business's unit, priced each way: 6,615 x Rs 650 / 120 is about Rs 35,800,</a:t>
+            </a:r>
+          </a:p>
+          <a:p>
+            <a:r>
+              <a:t>worked from the shift's Rs 650 before it rounds to Rs 5.42. The range is how far the hidden weeks ran,</a:t>
+            </a:r>
+          </a:p>
+          <a:p>
+            <a:r>
+              <a:t>applied to the peak week. Booked at the forecast, the range's ends cost about Rs 1.4 lakh of idle</a:t>
+            </a:r>
+          </a:p>
+          <a:p>
+            <a:r>
+              <a:t>shifts or Rs 8.4 lakh of late shipments that week. If a learner asks where a margin would go: above</a:t>
+            </a:r>
+          </a:p>
+          <a:p>
+            <a:r>
+              <a:t>the forecast, since short is the dear side; how far is the plan quantile, beyond the row.</a:t>
+            </a:r>
+          </a:p>
+          <a:p>
+            <a:r>
+              <a:t>Transition: is a better forecast worth having?</a:t>
             </a:r>
           </a:p>
         </p:txBody>
@@ -2389,17 +2434,22 @@
           </a:p>
           <a:p>
             <a:r>
-              <a:t>models against the house bot's 9,831. The plan quantile is the spine's addition beyond the row's five</a:t>
-            </a:r>
-          </a:p>
-          <a:p>
-            <a:r>
-              <a:t>subtopics; the fallback deck's part 3 and notebook 07's depth section carry it, so park any "how far</a:t>
-            </a:r>
-          </a:p>
-          <a:p>
-            <a:r>
-              <a:t>above?" question there by name. Transition: what the other forecasts would cost.</a:t>
+              <a:t>models against festival-aligned's 6,615. The plan quantile goes beyond the row's five subtopics; the</a:t>
+            </a:r>
+          </a:p>
+          <a:p>
+            <a:r>
+              <a:t>fallback deck's part 3 and notebook 07's depth section carry it, so answer "how far above?" with</a:t>
+            </a:r>
+          </a:p>
+          <a:p>
+            <a:r>
+              <a:t>"above, since short is the dear side", and park the size there by name. Transition: what the other</a:t>
+            </a:r>
+          </a:p>
+          <a:p>
+            <a:r>
+              <a:t>forecasts would cost.</a:t>
             </a:r>
           </a:p>
         </p:txBody>
@@ -5630,7 +5680,7 @@
       </p:sp>
       <p:pic>
         <p:nvPicPr>
-          <p:cNvPr id="9" name="mermaid diagram" descr="038fe560c643df95.png"/>
+          <p:cNvPr id="9" name="mermaid diagram" descr="5c073e9d1079458a.png"/>
           <p:cNvPicPr>
             <a:picLocks noChangeAspect="1"/>
           </p:cNvPicPr>
@@ -6838,7 +6888,7 @@
         </p:nvGraphicFramePr>
         <p:xfrm>
           <a:off x="530352" y="1956816"/>
-          <a:ext cx="11130991" cy="2688336"/>
+          <a:ext cx="11130991" cy="3299968"/>
         </p:xfrm>
         <a:graphic>
           <a:graphicData uri="http://schemas.openxmlformats.org/drawingml/2006/table">
@@ -6977,13 +7027,59 @@
                           </a:solidFill>
                           <a:latin typeface="Calibri"/>
                         </a:rPr>
-                        <a:t>The 2025 festival's 4,034 a week; a rolling origin through that festival would settle it</a:t>
+                        <a:t>The 2025 festival's 10,575 a week, with no growth; a rolling origin through the next festival would settle it</a:t>
                       </a:r>
                     </a:p>
                   </a:txBody>
                   <a:tcPr marL="101600" marR="101600" marT="38100" marB="38100" anchor="ctr">
                     <a:solidFill>
                       <a:srgbClr val="F4F2FA"/>
+                    </a:solidFill>
+                  </a:tcPr>
+                </a:tc>
+              </a:tr>
+              <a:tr h="611632">
+                <a:tc>
+                  <a:txBody>
+                    <a:bodyPr/>
+                    <a:lstStyle/>
+                    <a:p>
+                      <a:r>
+                        <a:rPr sz="1400" b="0" i="0">
+                          <a:solidFill>
+                            <a:srgbClr val="1A1440"/>
+                          </a:solidFill>
+                          <a:latin typeface="Calibri"/>
+                        </a:rPr>
+                        <a:t>This course chose the stretch around Diwali</a:t>
+                      </a:r>
+                    </a:p>
+                  </a:txBody>
+                  <a:tcPr marL="101600" marR="101600" marT="38100" marB="38100" anchor="ctr">
+                    <a:solidFill>
+                      <a:srgbClr val="FFFFFF"/>
+                    </a:solidFill>
+                  </a:tcPr>
+                </a:tc>
+                <a:tc>
+                  <a:txBody>
+                    <a:bodyPr/>
+                    <a:lstStyle/>
+                    <a:p>
+                      <a:r>
+                        <a:rPr sz="1400" b="0" i="0">
+                          <a:solidFill>
+                            <a:srgbClr val="1A1440"/>
+                          </a:solidFill>
+                          <a:latin typeface="Calibri"/>
+                        </a:rPr>
+                        <a:t>It covers both festivals' busy weeks, so the 2025 back-test has seen the shape it tests; the next festival is the clean test</a:t>
+                      </a:r>
+                    </a:p>
+                  </a:txBody>
+                  <a:tcPr marL="101600" marR="101600" marT="38100" marB="38100" anchor="ctr">
+                    <a:solidFill>
+                      <a:srgbClr val="FFFFFF"/>
                     </a:solidFill>
                   </a:tcPr>
                 </a:tc>
@@ -7007,7 +7103,7 @@
                   </a:txBody>
                   <a:tcPr marL="101600" marR="101600" marT="38100" marB="38100" anchor="ctr">
                     <a:solidFill>
-                      <a:srgbClr val="FFFFFF"/>
+                      <a:srgbClr val="F4F2FA"/>
                     </a:solidFill>
                   </a:tcPr>
                 </a:tc>
@@ -7029,7 +7125,7 @@
                   </a:txBody>
                   <a:tcPr marL="101600" marR="101600" marT="38100" marB="38100" anchor="ctr">
                     <a:solidFill>
-                      <a:srgbClr val="FFFFFF"/>
+                      <a:srgbClr val="F4F2FA"/>
                     </a:solidFill>
                   </a:tcPr>
                 </a:tc>
@@ -7815,7 +7911,7 @@
         <p:spPr>
           <a:xfrm>
             <a:off x="530352" y="1956816"/>
-            <a:ext cx="2079894" cy="2765552"/>
+            <a:ext cx="2079894" cy="2575560"/>
           </a:xfrm>
           <a:prstGeom prst="roundRect">
             <a:avLst>
@@ -8042,7 +8138,7 @@
         <p:spPr>
           <a:xfrm>
             <a:off x="2793126" y="1956816"/>
-            <a:ext cx="2079894" cy="2765552"/>
+            <a:ext cx="2079894" cy="2575560"/>
           </a:xfrm>
           <a:prstGeom prst="roundRect">
             <a:avLst>
@@ -8269,7 +8365,7 @@
         <p:spPr>
           <a:xfrm>
             <a:off x="5055900" y="1956816"/>
-            <a:ext cx="2079894" cy="2765552"/>
+            <a:ext cx="2079894" cy="2575560"/>
           </a:xfrm>
           <a:prstGeom prst="roundRect">
             <a:avLst>
@@ -8461,7 +8557,7 @@
         <p:spPr>
           <a:xfrm>
             <a:off x="5257068" y="3534664"/>
-            <a:ext cx="1677558" cy="944626"/>
+            <a:ext cx="1677558" cy="763016"/>
           </a:xfrm>
           <a:prstGeom prst="rect">
             <a:avLst/>
@@ -8482,7 +8578,7 @@
                 </a:solidFill>
                 <a:latin typeface="Calibri"/>
               </a:rPr>
-              <a:t>The miss a week in shipments, its cost if high and if low, and the rule's record on 2025's festival.</a:t>
+              <a:t>The typical miss, its cost high and low, the peak week's range, and 2025's honest record.</a:t>
             </a:r>
           </a:p>
         </p:txBody>
@@ -8496,7 +8592,7 @@
         <p:spPr>
           <a:xfrm>
             <a:off x="7318674" y="1956816"/>
-            <a:ext cx="2079894" cy="2765552"/>
+            <a:ext cx="2079894" cy="2575560"/>
           </a:xfrm>
           <a:prstGeom prst="roundRect">
             <a:avLst>
@@ -8723,7 +8819,7 @@
         <p:spPr>
           <a:xfrm>
             <a:off x="9581448" y="1956816"/>
-            <a:ext cx="2079894" cy="2765552"/>
+            <a:ext cx="2079894" cy="2575560"/>
           </a:xfrm>
           <a:prstGeom prst="roundRect">
             <a:avLst>
@@ -8955,7 +9051,7 @@
         </p:nvSpPr>
         <p:spPr>
           <a:xfrm>
-            <a:off x="530352" y="4905248"/>
+            <a:off x="530352" y="4715256"/>
             <a:ext cx="11130991" cy="772160"/>
           </a:xfrm>
           <a:prstGeom prst="rect">
@@ -11123,7 +11219,7 @@
                 </a:solidFill>
                 <a:latin typeface="Georgia"/>
               </a:rPr>
-              <a:t>"How do you evaluate a forecast?" Two answers</a:t>
+              <a:t>[S] "How do you evaluate a forecast?" Two answers</a:t>
             </a:r>
           </a:p>
         </p:txBody>
@@ -11228,7 +11324,7 @@
         </p:nvGraphicFramePr>
         <p:xfrm>
           <a:off x="530352" y="1956816"/>
-          <a:ext cx="11130991" cy="2944368"/>
+          <a:ext cx="11130991" cy="3186176"/>
         </p:xfrm>
         <a:graphic>
           <a:graphicData uri="http://schemas.openxmlformats.org/drawingml/2006/table">
@@ -11332,7 +11428,7 @@
                   </a:tcPr>
                 </a:tc>
               </a:tr>
-              <a:tr h="369824">
+              <a:tr h="611632">
                 <a:tc>
                   <a:txBody>
                     <a:bodyPr/>
@@ -11367,7 +11463,7 @@
                           </a:solidFill>
                           <a:latin typeface="Calibri"/>
                         </a:rPr>
-                        <a:t>Scores only weeks after the origin, then rolls the origin</a:t>
+                        <a:t>Scores only weeks after the origin, then moves the origin on and scores again</a:t>
                       </a:r>
                     </a:p>
                   </a:txBody>
@@ -12062,7 +12158,7 @@
         <p:spPr>
           <a:xfrm>
             <a:off x="530352" y="2843784"/>
-            <a:ext cx="3588410" cy="1767840"/>
+            <a:ext cx="3588410" cy="1940560"/>
           </a:xfrm>
           <a:prstGeom prst="roundRect">
             <a:avLst>
@@ -12151,7 +12247,7 @@
         <p:spPr>
           <a:xfrm>
             <a:off x="694944" y="3277870"/>
-            <a:ext cx="3259226" cy="531876"/>
+            <a:ext cx="3259226" cy="862076"/>
           </a:xfrm>
           <a:prstGeom prst="rect">
             <a:avLst/>
@@ -12172,7 +12268,7 @@
                 </a:solidFill>
                 <a:latin typeface="Calibri"/>
               </a:rPr>
-              <a:t>Shipments when the cost is per shipment; MASE or WAPE across centres. MAPE explodes near zero, and here it ranks the rules as MAE does.</a:t>
+              <a:t>Shipments when the cost is per shipment. Across centres, MASE, the misses over a naive copy's, or WAPE, total misses over total shipped. MAPE explodes near zero and pulls forecasts low; here it ranks the rules as MAE does, 3.05 to 6.82 percent.</a:t>
             </a:r>
           </a:p>
         </p:txBody>
@@ -12265,7 +12361,7 @@
         <p:spPr>
           <a:xfrm>
             <a:off x="4301642" y="2843784"/>
-            <a:ext cx="3588410" cy="1767840"/>
+            <a:ext cx="3588410" cy="1940560"/>
           </a:xfrm>
           <a:prstGeom prst="roundRect">
             <a:avLst>
@@ -12468,7 +12564,7 @@
         <p:spPr>
           <a:xfrm>
             <a:off x="8072932" y="2843784"/>
-            <a:ext cx="3588410" cy="1767840"/>
+            <a:ext cx="3588410" cy="1940560"/>
           </a:xfrm>
           <a:prstGeom prst="roundRect">
             <a:avLst>
@@ -12563,7 +12659,7 @@
         <p:spPr>
           <a:xfrm>
             <a:off x="8237524" y="3277870"/>
-            <a:ext cx="3259226" cy="1027176"/>
+            <a:ext cx="3259226" cy="1192276"/>
           </a:xfrm>
           <a:prstGeom prst="rect">
             <a:avLst/>
@@ -12584,7 +12680,7 @@
                 </a:solidFill>
                 <a:latin typeface="Calibri"/>
               </a:rPr>
-              <a:t>Its margin guardrail was 2 percentage points either side of breakeven; price forecasts three to six months out missed both ways by more than Zillow had modelled, the margin swung about 12 percentage points, and Zillow wrote down about USD 304 million.</a:t>
+              <a:t>Its margin guardrail was 2 percentage points either side of breakeven; price forecasts three to six months out missed both ways by more than Zillow had modelled, the margin swung about 12 percentage points, and Zillow wrote down, that is, cut the book value of its homes by, about USD 304 million.</a:t>
             </a:r>
           </a:p>
         </p:txBody>
@@ -13015,7 +13111,7 @@
         </p:blipFill>
         <p:spPr>
           <a:xfrm>
-            <a:off x="780897" y="1956816"/>
+            <a:off x="780897" y="1761648"/>
             <a:ext cx="10629900" cy="2100262"/>
           </a:xfrm>
           <a:prstGeom prst="rect">
@@ -13031,8 +13127,8 @@
         </p:nvSpPr>
         <p:spPr>
           <a:xfrm>
-            <a:off x="530352" y="4203382"/>
-            <a:ext cx="11130991" cy="1601216"/>
+            <a:off x="530352" y="4005072"/>
+            <a:ext cx="11130991" cy="2194559"/>
           </a:xfrm>
           <a:prstGeom prst="rect">
             <a:avLst/>
@@ -13045,11 +13141,6 @@
           </a:bodyPr>
           <a:lstStyle/>
           <a:p>
-            <a:pPr>
-              <a:spcAft>
-                <a:spcPts val="800"/>
-              </a:spcAft>
-            </a:pPr>
             <a:r>
               <a:rPr sz="1600" b="1" i="0">
                 <a:solidFill>
@@ -13066,7 +13157,97 @@
                 </a:solidFill>
                 <a:latin typeface="Calibri"/>
               </a:rPr>
-              <a:t> is the computing a model does each time it answers a user. Size the peak from the ground up as requests open at once, with prompt and answer tokens kept apart; check it against earlier launches lined up by days from launch with the weekday kept; set capacity to the latency target with headroom. The two costs, per machine over the booking, decide how much to book ahead, and a staged rollout, on-demand capacity, rate limits and a waitlist cover the rest. Written for the programme; it quotes no company's figures.</a:t>
+              <a:t> is the computing a model does each time it answers a user; a </a:t>
+            </a:r>
+            <a:r>
+              <a:rPr sz="1600" b="1" i="0">
+                <a:solidFill>
+                  <a:srgbClr val="1A1440"/>
+                </a:solidFill>
+                <a:latin typeface="Calibri"/>
+              </a:rPr>
+              <a:t>token</a:t>
+            </a:r>
+            <a:r>
+              <a:rPr sz="1600" b="0" i="0">
+                <a:solidFill>
+                  <a:srgbClr val="1A1440"/>
+                </a:solidFill>
+                <a:latin typeface="Calibri"/>
+              </a:rPr>
+              <a:t> is a piece of a word the model reads or writes; </a:t>
+            </a:r>
+            <a:r>
+              <a:rPr sz="1600" b="1" i="0">
+                <a:solidFill>
+                  <a:srgbClr val="1A1440"/>
+                </a:solidFill>
+                <a:latin typeface="Calibri"/>
+              </a:rPr>
+              <a:t>latency</a:t>
+            </a:r>
+            <a:r>
+              <a:rPr sz="1600" b="0" i="0">
+                <a:solidFill>
+                  <a:srgbClr val="1A1440"/>
+                </a:solidFill>
+                <a:latin typeface="Calibri"/>
+              </a:rPr>
+              <a:t> is the wait for an answer; </a:t>
+            </a:r>
+            <a:r>
+              <a:rPr sz="1600" b="1" i="0">
+                <a:solidFill>
+                  <a:srgbClr val="1A1440"/>
+                </a:solidFill>
+                <a:latin typeface="Calibri"/>
+              </a:rPr>
+              <a:t>headroom</a:t>
+            </a:r>
+            <a:r>
+              <a:rPr sz="1600" b="0" i="0">
+                <a:solidFill>
+                  <a:srgbClr val="1A1440"/>
+                </a:solidFill>
+                <a:latin typeface="Calibri"/>
+              </a:rPr>
+              <a:t> is capacity kept spare above the forecast; a </a:t>
+            </a:r>
+            <a:r>
+              <a:rPr sz="1600" b="1" i="0">
+                <a:solidFill>
+                  <a:srgbClr val="1A1440"/>
+                </a:solidFill>
+                <a:latin typeface="Calibri"/>
+              </a:rPr>
+              <a:t>GPU</a:t>
+            </a:r>
+            <a:r>
+              <a:rPr sz="1600" b="0" i="0">
+                <a:solidFill>
+                  <a:srgbClr val="1A1440"/>
+                </a:solidFill>
+                <a:latin typeface="Calibri"/>
+              </a:rPr>
+              <a:t> is the chip that runs the model; </a:t>
+            </a:r>
+            <a:r>
+              <a:rPr sz="1600" b="1" i="0">
+                <a:solidFill>
+                  <a:srgbClr val="1A1440"/>
+                </a:solidFill>
+                <a:latin typeface="Calibri"/>
+              </a:rPr>
+              <a:t>rate limits</a:t>
+            </a:r>
+            <a:r>
+              <a:rPr sz="1600" b="0" i="0">
+                <a:solidFill>
+                  <a:srgbClr val="1A1440"/>
+                </a:solidFill>
+                <a:latin typeface="Calibri"/>
+              </a:rPr>
+              <a:t> cap how many requests a user may send. Size the peak from the ground up as requests open at once, with prompt and answer tokens kept apart; check it against earlier launches lined up by days from launch with the weekday kept; set capacity to the latency target with headroom. The two costs, per machine over the booking, decide how much to book ahead, and a staged rollout, on-demand capacity, rate limits and a waitlist cover the rest. Written for the programme; it quotes no company's figures.</a:t>
             </a:r>
           </a:p>
         </p:txBody>
@@ -13581,7 +13762,7 @@
                 </a:solidFill>
                 <a:latin typeface="Calibri"/>
               </a:rPr>
-              <a:t>Week 4, Day 5. Forecasting basics: the plan, its error bar and the note</a:t>
+              <a:t>Week 4, Day 5. Forecasting basics: what does the plan book, and how wrong could it be?</a:t>
             </a:r>
           </a:p>
         </p:txBody>
@@ -14073,7 +14254,7 @@
                 </a:solidFill>
                 <a:latin typeface="Calibri"/>
               </a:rPr>
-              <a:t>The replacement years alone swing the answer from about 1.7 to 2.9 crore. October 2025's retail registrations were 31.5 lakh (FADA, the Federation of Automobile Dealers Associations), after a quiet September; times twelve that is about 3.78 crore, 74 percent above SIAM's year, a month of registrations set against a year of dealer sales: never annualise a peak month (both releases checked 12 October 2026).</a:t>
+              <a:t>Replacement every 6 to 10 years, the assumed range, alone swings the answer from about 1.7 to 2.9 crore. October 2025's retail registrations were 31.5 lakh (FADA, the Federation of Automobile Dealers Associations), after a quiet September; times twelve that is about 3.78 crore, 74 percent above SIAM's year, a month of registrations set against a year of dealer sales: never annualise a peak month (both releases checked 12 October 2026).</a:t>
             </a:r>
           </a:p>
         </p:txBody>
@@ -14428,7 +14609,7 @@
                 </a:solidFill>
                 <a:latin typeface="Calibri"/>
               </a:rPr>
-              <a:t>What does the IITGN faculty session W4-4 pick up from here? It is tentative, and the fallback hour runs if it cannot.</a:t>
+              <a:t>What does the IITGN faculty session W4-4 pick up from here? It is tentative, and the fallback session runs if it cannot.</a:t>
             </a:r>
           </a:p>
         </p:txBody>
@@ -14441,7 +14622,7 @@
         </p:nvSpPr>
         <p:spPr>
           <a:xfrm>
-            <a:off x="530352" y="1954530"/>
+            <a:off x="530352" y="1850898"/>
             <a:ext cx="11130991" cy="967740"/>
           </a:xfrm>
           <a:prstGeom prst="roundRect">
@@ -14489,7 +14670,7 @@
         </p:nvSpPr>
         <p:spPr>
           <a:xfrm>
-            <a:off x="676656" y="2082546"/>
+            <a:off x="676656" y="1978914"/>
             <a:ext cx="45720" cy="711708"/>
           </a:xfrm>
           <a:prstGeom prst="roundRect">
@@ -14535,7 +14716,7 @@
         </p:nvSpPr>
         <p:spPr>
           <a:xfrm>
-            <a:off x="877824" y="2073402"/>
+            <a:off x="877824" y="1969770"/>
             <a:ext cx="10564063" cy="784860"/>
           </a:xfrm>
           <a:prstGeom prst="rect">
@@ -14579,8 +14760,8 @@
           <p:nvPr/>
         </p:nvGraphicFramePr>
         <p:xfrm>
-          <a:off x="530352" y="3086862"/>
-          <a:ext cx="11130991" cy="2840736"/>
+          <a:off x="530352" y="2983230"/>
+          <a:ext cx="11130991" cy="3048000"/>
         </p:xfrm>
         <a:graphic>
           <a:graphicData uri="http://schemas.openxmlformats.org/drawingml/2006/table">
@@ -14822,7 +15003,7 @@
                   </a:tcPr>
                 </a:tc>
               </a:tr>
-              <a:tr h="542544">
+              <a:tr h="749808">
                 <a:tc>
                   <a:txBody>
                     <a:bodyPr/>
@@ -14857,7 +15038,7 @@
                           </a:solidFill>
                           <a:latin typeface="Calibri"/>
                         </a:rPr>
-                        <a:t>The thirteen the handoff line names; since they also picked the rule, a new model that beats the baseline there is checked again on a rolling origin through 2025's festival.</a:t>
+                        <a:t>The thirteen the handoff line names; since they also picked the rule, a new model that beats the baseline there is checked again from many origins in turn, a rolling origin, through 2025's festival.</a:t>
                       </a:r>
                     </a:p>
                   </a:txBody>
@@ -16704,7 +16885,7 @@
                 </a:solidFill>
                 <a:latin typeface="Calibri"/>
               </a:rPr>
-              <a:t>A late shipment costs 4.6 times a spare one, so the error bar of 6,615 a week reads Rs 1.65 lakh short or Rs 35,800 over.</a:t>
+              <a:t>A late shipment costs 4.6 times a spare one, so a typical miss of 6,615 a week costs Rs 1.65 lakh short or Rs 35,800 over.</a:t>
             </a:r>
           </a:p>
         </p:txBody>
@@ -18425,7 +18606,7 @@
         <p:spPr>
           <a:xfrm>
             <a:off x="9746040" y="5600445"/>
-            <a:ext cx="1750710" cy="201676"/>
+            <a:ext cx="1750710" cy="366776"/>
           </a:xfrm>
           <a:prstGeom prst="rect">
             <a:avLst/>
@@ -18446,7 +18627,7 @@
                 </a:solidFill>
                 <a:latin typeface="Calibri"/>
               </a:rPr>
-              <a:t>Only if it moves a shift.</a:t>
+              <a:t>Only if it pays for itself.</a:t>
             </a:r>
           </a:p>
         </p:txBody>
@@ -20085,8 +20266,8 @@
         </p:blipFill>
         <p:spPr>
           <a:xfrm>
-            <a:off x="2138421" y="1664208"/>
-            <a:ext cx="7914852" cy="3077464"/>
+            <a:off x="1960735" y="1664208"/>
+            <a:ext cx="8270224" cy="3215639"/>
           </a:xfrm>
           <a:prstGeom prst="rect">
             <a:avLst/>
@@ -20101,7 +20282,7 @@
         </p:nvSpPr>
         <p:spPr>
           <a:xfrm>
-            <a:off x="530352" y="4778248"/>
+            <a:off x="530352" y="4916423"/>
             <a:ext cx="11130991" cy="316992"/>
           </a:xfrm>
           <a:prstGeom prst="rect">
@@ -20136,8 +20317,8 @@
         </p:nvSpPr>
         <p:spPr>
           <a:xfrm>
-            <a:off x="530352" y="5104384"/>
-            <a:ext cx="11130991" cy="1095247"/>
+            <a:off x="530352" y="5242560"/>
+            <a:ext cx="11130991" cy="957072"/>
           </a:xfrm>
           <a:prstGeom prst="rect">
             <a:avLst/>
@@ -20151,13 +20332,13 @@
           <a:lstStyle/>
           <a:p>
             <a:r>
-              <a:rPr sz="1400" b="0" i="0">
+              <a:rPr sz="1200" b="0" i="0">
                 <a:solidFill>
                   <a:srgbClr val="1A1440"/>
                 </a:solidFill>
                 <a:latin typeface="Calibri"/>
               </a:rPr>
-              <a:t>The house bot, finance's rule and the vendor all book their biggest week on 5 October (418,200, 434,928 and 497,900), because each copies 2025's calendar weeks. Festival-aligned books it on 19 October at 434,928, two weeks before Diwali's week of 2 November: finance's number, in the right week. Inside the window, which starts on 12 October, the calendar copies book the most for 12 October and far too little for 19 and 26 October.</a:t>
+              <a:t>The house bot, finance's rule and the vendor all book their biggest week on 5 October (418,200, 434,928 and 497,900), because each copies 2025's calendar weeks. Festival-aligned books it on 19 October at 434,928, two weeks before Diwali's week of 2 November: finance's number, in the right week. Inside the window, which starts on 12 October, the calendar copies book the most for 12 October and far too little for 19 and 26 October. The stall's calendar copy (invented) put Diwali's dip a week late in chapter 2 the same way.</a:t>
             </a:r>
           </a:p>
         </p:txBody>
@@ -20533,8 +20714,8 @@
         </p:blipFill>
         <p:spPr>
           <a:xfrm>
-            <a:off x="2316106" y="1664208"/>
-            <a:ext cx="7559481" cy="2939288"/>
+            <a:off x="1960735" y="1664208"/>
+            <a:ext cx="8270224" cy="3215639"/>
           </a:xfrm>
           <a:prstGeom prst="rect">
             <a:avLst/>
@@ -20549,7 +20730,7 @@
         </p:nvSpPr>
         <p:spPr>
           <a:xfrm>
-            <a:off x="530352" y="4640072"/>
+            <a:off x="530352" y="4916423"/>
             <a:ext cx="11130991" cy="316992"/>
           </a:xfrm>
           <a:prstGeom prst="rect">
@@ -20584,8 +20765,8 @@
         </p:nvSpPr>
         <p:spPr>
           <a:xfrm>
-            <a:off x="530352" y="4966208"/>
-            <a:ext cx="11130991" cy="1233424"/>
+            <a:off x="530352" y="5242560"/>
+            <a:ext cx="11130991" cy="957072"/>
           </a:xfrm>
           <a:prstGeom prst="rect">
             <a:avLst/>
@@ -20599,7 +20780,7 @@
           <a:lstStyle/>
           <a:p>
             <a:r>
-              <a:rPr sz="1600" b="0" i="0">
+              <a:rPr sz="1200" b="0" i="0">
                 <a:solidFill>
                   <a:srgbClr val="1A1440"/>
                 </a:solidFill>
@@ -20608,7 +20789,7 @@
               <a:t>A </a:t>
             </a:r>
             <a:r>
-              <a:rPr sz="1600" b="1" i="0">
+              <a:rPr sz="1200" b="1" i="0">
                 <a:solidFill>
                   <a:srgbClr val="1A1440"/>
                 </a:solidFill>
@@ -20617,13 +20798,13 @@
               <a:t>back-test</a:t>
             </a:r>
             <a:r>
-              <a:rPr sz="1600" b="0" i="0">
+              <a:rPr sz="1200" b="0" i="0">
                 <a:solidFill>
                   <a:srgbClr val="1A1440"/>
                 </a:solidFill>
                 <a:latin typeface="Calibri"/>
               </a:rPr>
-              <a:t> forecasts an earlier stretch as if the later weeks were unknown: chapter 3's hold-out, placed so that it holds a festival. Over 29 September to 17 November 2025 the house bot missed by 58,250 a week: Rs 79.8 lakh, Rs 69.6 lakh of it late shipments where the rush came before the copy expected it. Festival-aligned missed by 4,034 a week; without the 4 percent, measured only later, it missed by 10,575.</a:t>
+              <a:t> forecasts an earlier stretch as if the later weeks were unknown: chapter 3's hold-out, placed so that it holds a festival. Over 29 September to 17 November 2025 the house bot missed by 58,250 a week: Rs 79.8 lakh, Rs 69.6 lakh of it late shipments where the rush came before the copy expected it. Festival-aligned, with no growth added, since September 2025 held no year of twins to measure growth on, missed by 10,575 a week and put the peak in the right week; with the 4 percent measured later it would have missed by 4,034.</a:t>
             </a:r>
           </a:p>
         </p:txBody>
@@ -20943,7 +21124,7 @@
                 </a:solidFill>
                 <a:latin typeface="Georgia"/>
               </a:rPr>
-              <a:t>Plus 22 and plus 4 measure different windows</a:t>
+              <a:t>Plus 22 and plus 4, read against two windows</a:t>
             </a:r>
           </a:p>
         </p:txBody>
@@ -22626,7 +22807,7 @@
                 </a:solidFill>
                 <a:latin typeface="Calibri"/>
               </a:rPr>
-              <a:t>The forecast missed by 6,615 shipments a week on the hidden weeks, about 55 shifts: about Rs 35,800 of idle shifts when it runs that far high and Rs 1.65 lakh of late shipments when that far low, and on 2025's festival it missed by 4,034 a week.</a:t>
+              <a:t>A typical miss of 6,615 shipments a week on the hidden weeks, about 55 shifts: about Rs 35,800 of idle shifts if it runs that far high, Rs 1.65 lakh of late shipments if that far low. The range: the hidden weeks ran from 5.9 percent below the forecast to 7.8 percent above, so the week of 19 October could need 3,413 to 3,906 shifts against 3,625 booked.</a:t>
             </a:r>
           </a:p>
         </p:txBody>
@@ -22946,7 +23127,7 @@
                 </a:solidFill>
                 <a:latin typeface="Georgia"/>
               </a:rPr>
-              <a:t>Good enough: a better forecast must move a shift</a:t>
+              <a:t>Good enough: a better forecast must pay for itself</a:t>
             </a:r>
           </a:p>
         </p:txBody>
@@ -22981,7 +23162,7 @@
                 </a:solidFill>
                 <a:latin typeface="Calibri"/>
               </a:rPr>
-              <a:t>Would a forecast better than festival-aligned book different shifts?</a:t>
+              <a:t>Would a forecast better than festival-aligned change the plan by more than it costs?</a:t>
             </a:r>
           </a:p>
         </p:txBody>
@@ -22995,7 +23176,7 @@
         <p:spPr>
           <a:xfrm>
             <a:off x="530352" y="1956816"/>
-            <a:ext cx="3527450" cy="698500"/>
+            <a:ext cx="3527450" cy="444500"/>
           </a:xfrm>
           <a:prstGeom prst="rect">
             <a:avLst/>
@@ -23010,7 +23191,7 @@
           <a:p>
             <a:pPr algn="l"/>
             <a:r>
-              <a:rPr sz="4400" b="0" i="0">
+              <a:rPr sz="2800" b="0" i="0">
                 <a:solidFill>
                   <a:srgbClr val="5B3FD6"/>
                 </a:solidFill>
@@ -23029,7 +23210,7 @@
         </p:nvSpPr>
         <p:spPr>
           <a:xfrm>
-            <a:off x="530352" y="2691892"/>
+            <a:off x="530352" y="2437892"/>
             <a:ext cx="3527450" cy="168656"/>
           </a:xfrm>
           <a:prstGeom prst="rect">
@@ -23064,7 +23245,7 @@
         </p:nvSpPr>
         <p:spPr>
           <a:xfrm>
-            <a:off x="530352" y="2893060"/>
+            <a:off x="530352" y="2639060"/>
             <a:ext cx="3527450" cy="350266"/>
           </a:xfrm>
           <a:prstGeom prst="rect">
@@ -23144,7 +23325,7 @@
         <p:spPr>
           <a:xfrm>
             <a:off x="4332122" y="1956816"/>
-            <a:ext cx="3527450" cy="698500"/>
+            <a:ext cx="3527450" cy="444500"/>
           </a:xfrm>
           <a:prstGeom prst="rect">
             <a:avLst/>
@@ -23159,7 +23340,7 @@
           <a:p>
             <a:pPr algn="l"/>
             <a:r>
-              <a:rPr sz="4400" b="0" i="0">
+              <a:rPr sz="2800" b="0" i="0">
                 <a:solidFill>
                   <a:srgbClr val="5B3FD6"/>
                 </a:solidFill>
@@ -23178,7 +23359,7 @@
         </p:nvSpPr>
         <p:spPr>
           <a:xfrm>
-            <a:off x="4332122" y="2691892"/>
+            <a:off x="4332122" y="2437892"/>
             <a:ext cx="3527450" cy="168656"/>
           </a:xfrm>
           <a:prstGeom prst="rect">
@@ -23213,7 +23394,7 @@
         </p:nvSpPr>
         <p:spPr>
           <a:xfrm>
-            <a:off x="4332122" y="2893060"/>
+            <a:off x="4332122" y="2639060"/>
             <a:ext cx="3527450" cy="193421"/>
           </a:xfrm>
           <a:prstGeom prst="rect">
@@ -23293,7 +23474,7 @@
         <p:spPr>
           <a:xfrm>
             <a:off x="8133892" y="1956816"/>
-            <a:ext cx="3527450" cy="698500"/>
+            <a:ext cx="3527450" cy="444500"/>
           </a:xfrm>
           <a:prstGeom prst="rect">
             <a:avLst/>
@@ -23308,13 +23489,13 @@
           <a:p>
             <a:pPr algn="l"/>
             <a:r>
-              <a:rPr sz="4400" b="0" i="0">
+              <a:rPr sz="2800" b="0" i="0">
                 <a:solidFill>
                   <a:srgbClr val="5B3FD6"/>
                 </a:solidFill>
                 <a:latin typeface="Georgia"/>
               </a:rPr>
-              <a:t>1 shift</a:t>
+              <a:t>Rs 542 to 2,500</a:t>
             </a:r>
           </a:p>
         </p:txBody>
@@ -23327,7 +23508,7 @@
         </p:nvSpPr>
         <p:spPr>
           <a:xfrm>
-            <a:off x="8133892" y="2691892"/>
+            <a:off x="8133892" y="2437892"/>
             <a:ext cx="3527450" cy="168656"/>
           </a:xfrm>
           <a:prstGeom prst="rect">
@@ -23349,7 +23530,7 @@
                 </a:solidFill>
                 <a:latin typeface="Calibri"/>
               </a:rPr>
-              <a:t>AT MOST, FOR A RULE 100 BETTER</a:t>
+              <a:t>A WEEK, FOR A RULE 100 BETTER</a:t>
             </a:r>
           </a:p>
         </p:txBody>
@@ -23362,7 +23543,7 @@
         </p:nvSpPr>
         <p:spPr>
           <a:xfrm>
-            <a:off x="8133892" y="2893060"/>
+            <a:off x="8133892" y="2639060"/>
             <a:ext cx="3527450" cy="350266"/>
           </a:xfrm>
           <a:prstGeom prst="rect">
@@ -23384,7 +23565,7 @@
                 </a:solidFill>
                 <a:latin typeface="Calibri"/>
               </a:rPr>
-              <a:t>it moves one shift in 7 of the 8 weeks, against 1,635 to 3,625 booked</a:t>
+              <a:t>100 shipments spare at Rs 5.42, or late at Rs 25: Rs 4,300 to Rs 20,000 over the eight weeks</a:t>
             </a:r>
           </a:p>
         </p:txBody>
@@ -23442,7 +23623,7 @@
         <p:spPr>
           <a:xfrm>
             <a:off x="530352" y="3419856"/>
-            <a:ext cx="11130991" cy="1324864"/>
+            <a:ext cx="11130991" cy="2153920"/>
           </a:xfrm>
           <a:prstGeom prst="rect">
             <a:avLst/>
@@ -23467,7 +23648,7 @@
                 </a:solidFill>
                 <a:latin typeface="Calibri"/>
               </a:rPr>
-              <a:t>Chapter 4's call at Flipkart's scale: the decision unit is a shift of 120 shipments, so festival-aligned is good enough, and the next model must earn its place by more than a shift a week. A late shipment costs 4.6 times a spare one, so any margin the planner adds goes above the forecast; how far is the plan quantile, which goes beyond today's curriculum row and runs in the fallback hour.</a:t>
+              <a:t>Chapter 4's call at Flipkart's scale. A shift is 120 shipments, small beside a typical miss of 6,615, so any better forecast changes some shifts, and good enough becomes a question in rupees. Festival-aligned's leads over the bot and the vendor are worth real money every week; a rule whose MAE is 100 lower earns a place only if it costs less than Rs 542 to Rs 2,500 a week to build and run, and wins on a test that did not choose it. A late shipment costs 4.6 times a spare one, so any margin goes above the forecast; how far is the plan quantile, beyond the row, that is, beyond today's five topics, taught in the fallback session.</a:t>
             </a:r>
           </a:p>
         </p:txBody>

--- a/content/W04/D5/slides/C2_W04_D05_half2_STUDENT.pptx
+++ b/content/W04/D5/slides/C2_W04_D05_half2_STUDENT.pptx
@@ -1964,7 +1964,17 @@
           </a:p>
           <a:p>
             <a:r>
-              <a:t>in, and the group that notices wins the plan. Vote, argue, vote again. Explorer: scene F3.</a:t>
+              <a:t>in, and the group that notices wins the plan. Vote, argue, vote again. Explorer: scene F3 on the</a:t>
+            </a:r>
+          </a:p>
+          <a:p>
+            <a:r>
+              <a:t>case set, after the second vote; its letters and key are this slide's, so read the room's letter</a:t>
+            </a:r>
+          </a:p>
+          <a:p>
+            <a:r>
+              <a:t>into it.</a:t>
             </a:r>
           </a:p>
           <a:p>
